--- a/deck/Nyambung-Pitch-Deck.pptx
+++ b/deck/Nyambung-Pitch-Deck.pptx
@@ -33801,7 +33801,7 @@
                 <a:ea typeface="Calibri" pitchFamily="34" charset="-122"/>
                 <a:cs typeface="Calibri" pitchFamily="34" charset="-120"/>
               </a:rPr>
-              <a:t>Patenaude, McNaughton &amp; Liang (2024), Journal of Special Education Technology 40(1) · PERUBAHAN.md entri 22 dan 23 · server/app/routes/scene_ai.py. Ilustrasi mengikuti layar aplikasi.</a:t>
+              <a:t>Patenaude, McNaughton &amp; Liang (2024), Journal of Special Education Technology 40(1) · PERUBAHAN.md entri 22, 23, 26, 27 · server/app/routes/scene_ai.py. Ilustrasi mengikuti layar aplikasi.</a:t>
             </a:r>
             <a:endParaRPr lang="en-US" sz="850" dirty="0"/>
           </a:p>
@@ -33934,11 +33934,11 @@
         <p:spPr>
           <a:xfrm>
             <a:off x="722376" y="2340864"/>
-            <a:ext cx="2167128" cy="2011680"/>
+            <a:ext cx="2167128" cy="2331720"/>
           </a:xfrm>
           <a:prstGeom prst="roundRect">
             <a:avLst>
-              <a:gd name="adj" fmla="val 3636"/>
+              <a:gd name="adj" fmla="val 3376"/>
             </a:avLst>
           </a:prstGeom>
           <a:solidFill>
@@ -34240,12 +34240,102 @@
         </p:nvSpPr>
         <p:spPr>
           <a:xfrm>
-            <a:off x="722376" y="4462272"/>
-            <a:ext cx="691896" cy="512064"/>
+            <a:off x="722376" y="4782312"/>
+            <a:ext cx="691896" cy="658368"/>
           </a:xfrm>
           <a:prstGeom prst="roundRect">
             <a:avLst>
-              <a:gd name="adj" fmla="val 10714"/>
+              <a:gd name="adj" fmla="val 8333"/>
+            </a:avLst>
+          </a:prstGeom>
+          <a:solidFill>
+            <a:srgbClr val="E8F6F5"/>
+          </a:solidFill>
+          <a:ln w="12700">
+            <a:solidFill>
+              <a:srgbClr val="C7C7D2"/>
+            </a:solidFill>
+            <a:prstDash val="solid"/>
+          </a:ln>
+        </p:spPr>
+      </p:sp>
+      <p:pic>
+        <p:nvPicPr>
+          <p:cNvPr id="26" name="Image 1" descr="C:\Users\mikae\OneDrive\Documents\Lomba\IFEST\Nyambung\assets\symbols\png\lagi.png">    </p:cNvPr>
+          <p:cNvPicPr>
+            <a:picLocks noChangeAspect="1"/>
+          </p:cNvPicPr>
+          <p:nvPr/>
+        </p:nvPicPr>
+        <p:blipFill>
+          <a:blip r:embed="rId2"/>
+          <a:stretch>
+            <a:fillRect/>
+          </a:stretch>
+        </p:blipFill>
+        <p:spPr>
+          <a:xfrm>
+            <a:off x="883981" y="4834981"/>
+            <a:ext cx="368686" cy="368686"/>
+          </a:xfrm>
+          <a:prstGeom prst="rect">
+            <a:avLst/>
+          </a:prstGeom>
+        </p:spPr>
+      </p:pic>
+      <p:sp>
+        <p:nvSpPr>
+          <p:cNvPr id="27" name="Text 22"/>
+          <p:cNvSpPr/>
+          <p:nvPr/>
+        </p:nvSpPr>
+        <p:spPr>
+          <a:xfrm>
+            <a:off x="722376" y="5216835"/>
+            <a:ext cx="691896" cy="197510"/>
+          </a:xfrm>
+          <a:prstGeom prst="rect">
+            <a:avLst/>
+          </a:prstGeom>
+          <a:noFill/>
+          <a:ln/>
+        </p:spPr>
+        <p:txBody>
+          <a:bodyPr wrap="square" lIns="0" tIns="0" rIns="0" bIns="0" rtlCol="0" anchor="ctr"/>
+          <a:lstStyle/>
+          <a:p>
+            <a:pPr algn="ctr" indent="0" marL="0">
+              <a:buNone/>
+            </a:pPr>
+            <a:r>
+              <a:rPr lang="en-US" sz="750" b="1" dirty="0">
+                <a:solidFill>
+                  <a:srgbClr val="172C2A"/>
+                </a:solidFill>
+                <a:latin typeface="Calibri" pitchFamily="34" charset="0"/>
+                <a:ea typeface="Calibri" pitchFamily="34" charset="-122"/>
+                <a:cs typeface="Calibri" pitchFamily="34" charset="-120"/>
+              </a:rPr>
+              <a:t>LAGI</a:t>
+            </a:r>
+            <a:endParaRPr lang="en-US" sz="750" dirty="0"/>
+          </a:p>
+        </p:txBody>
+      </p:sp>
+      <p:sp>
+        <p:nvSpPr>
+          <p:cNvPr id="28" name="Shape 23"/>
+          <p:cNvSpPr/>
+          <p:nvPr/>
+        </p:nvSpPr>
+        <p:spPr>
+          <a:xfrm>
+            <a:off x="1459992" y="4782312"/>
+            <a:ext cx="691896" cy="658368"/>
+          </a:xfrm>
+          <a:prstGeom prst="roundRect">
+            <a:avLst>
+              <a:gd name="adj" fmla="val 8333"/>
             </a:avLst>
           </a:prstGeom>
           <a:solidFill>
@@ -34261,22 +34351,22 @@
       </p:sp>
       <p:pic>
         <p:nvPicPr>
-          <p:cNvPr id="26" name="Image 1" descr="C:\Users\mikae\OneDrive\Documents\Lomba\IFEST\Nyambung\assets\symbols\png\mau.png">    </p:cNvPr>
+          <p:cNvPr id="29" name="Image 2" descr="C:\Users\mikae\OneDrive\Documents\Lomba\IFEST\Nyambung\assets\symbols\png\makan.png">    </p:cNvPr>
           <p:cNvPicPr>
             <a:picLocks noChangeAspect="1"/>
           </p:cNvPicPr>
           <p:nvPr/>
         </p:nvPicPr>
         <p:blipFill>
-          <a:blip r:embed="rId2"/>
+          <a:blip r:embed="rId3"/>
           <a:stretch>
             <a:fillRect/>
           </a:stretch>
         </p:blipFill>
         <p:spPr>
           <a:xfrm>
-            <a:off x="924946" y="4503237"/>
-            <a:ext cx="286756" cy="286756"/>
+            <a:off x="1621597" y="4834981"/>
+            <a:ext cx="368686" cy="368686"/>
           </a:xfrm>
           <a:prstGeom prst="rect">
             <a:avLst/>
@@ -34285,14 +34375,14 @@
       </p:pic>
       <p:sp>
         <p:nvSpPr>
-          <p:cNvPr id="27" name="Text 22"/>
-          <p:cNvSpPr/>
-          <p:nvPr/>
-        </p:nvSpPr>
-        <p:spPr>
-          <a:xfrm>
-            <a:off x="722376" y="4800234"/>
-            <a:ext cx="691896" cy="153619"/>
+          <p:cNvPr id="30" name="Text 24"/>
+          <p:cNvSpPr/>
+          <p:nvPr/>
+        </p:nvSpPr>
+        <p:spPr>
+          <a:xfrm>
+            <a:off x="1459992" y="5216835"/>
+            <a:ext cx="691896" cy="197510"/>
           </a:xfrm>
           <a:prstGeom prst="rect">
             <a:avLst/>
@@ -34316,7 +34406,7 @@
                 <a:ea typeface="Calibri" pitchFamily="34" charset="-122"/>
                 <a:cs typeface="Calibri" pitchFamily="34" charset="-120"/>
               </a:rPr>
-              <a:t>MAU</a:t>
+              <a:t>MAKAN</a:t>
             </a:r>
             <a:endParaRPr lang="en-US" sz="750" dirty="0"/>
           </a:p>
@@ -34324,18 +34414,18 @@
       </p:sp>
       <p:sp>
         <p:nvSpPr>
-          <p:cNvPr id="28" name="Shape 23"/>
-          <p:cNvSpPr/>
-          <p:nvPr/>
-        </p:nvSpPr>
-        <p:spPr>
-          <a:xfrm>
-            <a:off x="1459992" y="4462272"/>
-            <a:ext cx="691896" cy="512064"/>
+          <p:cNvPr id="31" name="Shape 25"/>
+          <p:cNvSpPr/>
+          <p:nvPr/>
+        </p:nvSpPr>
+        <p:spPr>
+          <a:xfrm>
+            <a:off x="2197608" y="4782312"/>
+            <a:ext cx="691896" cy="658368"/>
           </a:xfrm>
           <a:prstGeom prst="roundRect">
             <a:avLst>
-              <a:gd name="adj" fmla="val 10714"/>
+              <a:gd name="adj" fmla="val 8333"/>
             </a:avLst>
           </a:prstGeom>
           <a:solidFill>
@@ -34351,97 +34441,7 @@
       </p:sp>
       <p:pic>
         <p:nvPicPr>
-          <p:cNvPr id="29" name="Image 2" descr="C:\Users\mikae\OneDrive\Documents\Lomba\IFEST\Nyambung\assets\symbols\custom\berhenti.png">    </p:cNvPr>
-          <p:cNvPicPr>
-            <a:picLocks noChangeAspect="1"/>
-          </p:cNvPicPr>
-          <p:nvPr/>
-        </p:nvPicPr>
-        <p:blipFill>
-          <a:blip r:embed="rId3"/>
-          <a:stretch>
-            <a:fillRect/>
-          </a:stretch>
-        </p:blipFill>
-        <p:spPr>
-          <a:xfrm>
-            <a:off x="1662562" y="4503237"/>
-            <a:ext cx="286756" cy="286756"/>
-          </a:xfrm>
-          <a:prstGeom prst="rect">
-            <a:avLst/>
-          </a:prstGeom>
-        </p:spPr>
-      </p:pic>
-      <p:sp>
-        <p:nvSpPr>
-          <p:cNvPr id="30" name="Text 24"/>
-          <p:cNvSpPr/>
-          <p:nvPr/>
-        </p:nvSpPr>
-        <p:spPr>
-          <a:xfrm>
-            <a:off x="1459992" y="4800234"/>
-            <a:ext cx="691896" cy="153619"/>
-          </a:xfrm>
-          <a:prstGeom prst="rect">
-            <a:avLst/>
-          </a:prstGeom>
-          <a:noFill/>
-          <a:ln/>
-        </p:spPr>
-        <p:txBody>
-          <a:bodyPr wrap="square" lIns="0" tIns="0" rIns="0" bIns="0" rtlCol="0" anchor="ctr"/>
-          <a:lstStyle/>
-          <a:p>
-            <a:pPr algn="ctr" indent="0" marL="0">
-              <a:buNone/>
-            </a:pPr>
-            <a:r>
-              <a:rPr lang="en-US" sz="750" b="1" dirty="0">
-                <a:solidFill>
-                  <a:srgbClr val="2A7445"/>
-                </a:solidFill>
-                <a:latin typeface="Calibri" pitchFamily="34" charset="0"/>
-                <a:ea typeface="Calibri" pitchFamily="34" charset="-122"/>
-                <a:cs typeface="Calibri" pitchFamily="34" charset="-120"/>
-              </a:rPr>
-              <a:t>BERHENTI</a:t>
-            </a:r>
-            <a:endParaRPr lang="en-US" sz="750" dirty="0"/>
-          </a:p>
-        </p:txBody>
-      </p:sp>
-      <p:sp>
-        <p:nvSpPr>
-          <p:cNvPr id="31" name="Shape 25"/>
-          <p:cNvSpPr/>
-          <p:nvPr/>
-        </p:nvSpPr>
-        <p:spPr>
-          <a:xfrm>
-            <a:off x="2197608" y="4462272"/>
-            <a:ext cx="691896" cy="512064"/>
-          </a:xfrm>
-          <a:prstGeom prst="roundRect">
-            <a:avLst>
-              <a:gd name="adj" fmla="val 10714"/>
-            </a:avLst>
-          </a:prstGeom>
-          <a:solidFill>
-            <a:srgbClr val="E1F4E7"/>
-          </a:solidFill>
-          <a:ln w="12700">
-            <a:solidFill>
-              <a:srgbClr val="6FC08F"/>
-            </a:solidFill>
-            <a:prstDash val="solid"/>
-          </a:ln>
-        </p:spPr>
-      </p:sp>
-      <p:pic>
-        <p:nvPicPr>
-          <p:cNvPr id="32" name="Image 3" descr="C:\Users\mikae\OneDrive\Documents\Lomba\IFEST\Nyambung\assets\symbols\png\bantu.png">    </p:cNvPr>
+          <p:cNvPr id="32" name="Image 3" descr="C:\Users\mikae\OneDrive\Documents\Lomba\IFEST\Nyambung\assets\symbols\png\minum.png">    </p:cNvPr>
           <p:cNvPicPr>
             <a:picLocks noChangeAspect="1"/>
           </p:cNvPicPr>
@@ -34455,8 +34455,8 @@
         </p:blipFill>
         <p:spPr>
           <a:xfrm>
-            <a:off x="2400178" y="4503237"/>
-            <a:ext cx="286756" cy="286756"/>
+            <a:off x="2359213" y="4834981"/>
+            <a:ext cx="368686" cy="368686"/>
           </a:xfrm>
           <a:prstGeom prst="rect">
             <a:avLst/>
@@ -34471,8 +34471,8 @@
         </p:nvSpPr>
         <p:spPr>
           <a:xfrm>
-            <a:off x="2197608" y="4800234"/>
-            <a:ext cx="691896" cy="153619"/>
+            <a:off x="2197608" y="5216835"/>
+            <a:ext cx="691896" cy="197510"/>
           </a:xfrm>
           <a:prstGeom prst="rect">
             <a:avLst/>
@@ -34496,7 +34496,7 @@
                 <a:ea typeface="Calibri" pitchFamily="34" charset="-122"/>
                 <a:cs typeface="Calibri" pitchFamily="34" charset="-120"/>
               </a:rPr>
-              <a:t>BANTU</a:t>
+              <a:t>MINUM</a:t>
             </a:r>
             <a:endParaRPr lang="en-US" sz="750" dirty="0"/>
           </a:p>
@@ -34504,65 +34504,14 @@
       </p:sp>
       <p:sp>
         <p:nvSpPr>
-          <p:cNvPr id="34" name="Shape 27"/>
-          <p:cNvSpPr/>
-          <p:nvPr/>
-        </p:nvSpPr>
-        <p:spPr>
-          <a:xfrm>
-            <a:off x="722376" y="5020056"/>
-            <a:ext cx="691896" cy="512064"/>
-          </a:xfrm>
-          <a:prstGeom prst="roundRect">
-            <a:avLst>
-              <a:gd name="adj" fmla="val 10714"/>
-            </a:avLst>
-          </a:prstGeom>
-          <a:solidFill>
-            <a:srgbClr val="E8F6F5"/>
-          </a:solidFill>
-          <a:ln w="12700">
-            <a:solidFill>
-              <a:srgbClr val="C7C7D2"/>
-            </a:solidFill>
-            <a:prstDash val="solid"/>
-          </a:ln>
-        </p:spPr>
-      </p:sp>
-      <p:pic>
-        <p:nvPicPr>
-          <p:cNvPr id="35" name="Image 4" descr="C:\Users\mikae\OneDrive\Documents\Lomba\IFEST\Nyambung\assets\symbols\png\tidak.png">    </p:cNvPr>
-          <p:cNvPicPr>
-            <a:picLocks noChangeAspect="1"/>
-          </p:cNvPicPr>
-          <p:nvPr/>
-        </p:nvPicPr>
-        <p:blipFill>
-          <a:blip r:embed="rId5"/>
-          <a:stretch>
-            <a:fillRect/>
-          </a:stretch>
-        </p:blipFill>
-        <p:spPr>
-          <a:xfrm>
-            <a:off x="924946" y="5061021"/>
-            <a:ext cx="286756" cy="286756"/>
-          </a:xfrm>
-          <a:prstGeom prst="rect">
-            <a:avLst/>
-          </a:prstGeom>
-        </p:spPr>
-      </p:pic>
-      <p:sp>
-        <p:nvSpPr>
-          <p:cNvPr id="36" name="Text 28"/>
-          <p:cNvSpPr/>
-          <p:nvPr/>
-        </p:nvSpPr>
-        <p:spPr>
-          <a:xfrm>
-            <a:off x="722376" y="5358018"/>
-            <a:ext cx="691896" cy="153619"/>
+          <p:cNvPr id="34" name="Text 27"/>
+          <p:cNvSpPr/>
+          <p:nvPr/>
+        </p:nvSpPr>
+        <p:spPr>
+          <a:xfrm>
+            <a:off x="722376" y="5513832"/>
+            <a:ext cx="2167128" cy="182880"/>
           </a:xfrm>
           <a:prstGeom prst="rect">
             <a:avLst/>
@@ -34578,225 +34527,6 @@
               <a:buNone/>
             </a:pPr>
             <a:r>
-              <a:rPr lang="en-US" sz="750" b="1" dirty="0">
-                <a:solidFill>
-                  <a:srgbClr val="172C2A"/>
-                </a:solidFill>
-                <a:latin typeface="Calibri" pitchFamily="34" charset="0"/>
-                <a:ea typeface="Calibri" pitchFamily="34" charset="-122"/>
-                <a:cs typeface="Calibri" pitchFamily="34" charset="-120"/>
-              </a:rPr>
-              <a:t>TIDAK</a:t>
-            </a:r>
-            <a:endParaRPr lang="en-US" sz="750" dirty="0"/>
-          </a:p>
-        </p:txBody>
-      </p:sp>
-      <p:sp>
-        <p:nvSpPr>
-          <p:cNvPr id="37" name="Shape 29"/>
-          <p:cNvSpPr/>
-          <p:nvPr/>
-        </p:nvSpPr>
-        <p:spPr>
-          <a:xfrm>
-            <a:off x="1459992" y="5020056"/>
-            <a:ext cx="691896" cy="512064"/>
-          </a:xfrm>
-          <a:prstGeom prst="roundRect">
-            <a:avLst>
-              <a:gd name="adj" fmla="val 10714"/>
-            </a:avLst>
-          </a:prstGeom>
-          <a:solidFill>
-            <a:srgbClr val="E8F6F5"/>
-          </a:solidFill>
-          <a:ln w="12700">
-            <a:solidFill>
-              <a:srgbClr val="C7C7D2"/>
-            </a:solidFill>
-            <a:prstDash val="solid"/>
-          </a:ln>
-        </p:spPr>
-      </p:sp>
-      <p:pic>
-        <p:nvPicPr>
-          <p:cNvPr id="38" name="Image 5" descr="C:\Users\mikae\OneDrive\Documents\Lomba\IFEST\Nyambung\assets\symbols\png\selesai.png">    </p:cNvPr>
-          <p:cNvPicPr>
-            <a:picLocks noChangeAspect="1"/>
-          </p:cNvPicPr>
-          <p:nvPr/>
-        </p:nvPicPr>
-        <p:blipFill>
-          <a:blip r:embed="rId6"/>
-          <a:stretch>
-            <a:fillRect/>
-          </a:stretch>
-        </p:blipFill>
-        <p:spPr>
-          <a:xfrm>
-            <a:off x="1662562" y="5061021"/>
-            <a:ext cx="286756" cy="286756"/>
-          </a:xfrm>
-          <a:prstGeom prst="rect">
-            <a:avLst/>
-          </a:prstGeom>
-        </p:spPr>
-      </p:pic>
-      <p:sp>
-        <p:nvSpPr>
-          <p:cNvPr id="39" name="Text 30"/>
-          <p:cNvSpPr/>
-          <p:nvPr/>
-        </p:nvSpPr>
-        <p:spPr>
-          <a:xfrm>
-            <a:off x="1459992" y="5358018"/>
-            <a:ext cx="691896" cy="153619"/>
-          </a:xfrm>
-          <a:prstGeom prst="rect">
-            <a:avLst/>
-          </a:prstGeom>
-          <a:noFill/>
-          <a:ln/>
-        </p:spPr>
-        <p:txBody>
-          <a:bodyPr wrap="square" lIns="0" tIns="0" rIns="0" bIns="0" rtlCol="0" anchor="ctr"/>
-          <a:lstStyle/>
-          <a:p>
-            <a:pPr algn="ctr" indent="0" marL="0">
-              <a:buNone/>
-            </a:pPr>
-            <a:r>
-              <a:rPr lang="en-US" sz="750" b="1" dirty="0">
-                <a:solidFill>
-                  <a:srgbClr val="172C2A"/>
-                </a:solidFill>
-                <a:latin typeface="Calibri" pitchFamily="34" charset="0"/>
-                <a:ea typeface="Calibri" pitchFamily="34" charset="-122"/>
-                <a:cs typeface="Calibri" pitchFamily="34" charset="-120"/>
-              </a:rPr>
-              <a:t>SELESAI</a:t>
-            </a:r>
-            <a:endParaRPr lang="en-US" sz="750" dirty="0"/>
-          </a:p>
-        </p:txBody>
-      </p:sp>
-      <p:sp>
-        <p:nvSpPr>
-          <p:cNvPr id="40" name="Shape 31"/>
-          <p:cNvSpPr/>
-          <p:nvPr/>
-        </p:nvSpPr>
-        <p:spPr>
-          <a:xfrm>
-            <a:off x="2197608" y="5020056"/>
-            <a:ext cx="691896" cy="512064"/>
-          </a:xfrm>
-          <a:prstGeom prst="roundRect">
-            <a:avLst>
-              <a:gd name="adj" fmla="val 10714"/>
-            </a:avLst>
-          </a:prstGeom>
-          <a:solidFill>
-            <a:srgbClr val="DEF3FC"/>
-          </a:solidFill>
-          <a:ln w="12700">
-            <a:solidFill>
-              <a:srgbClr val="6FC3EA"/>
-            </a:solidFill>
-            <a:prstDash val="solid"/>
-          </a:ln>
-        </p:spPr>
-      </p:sp>
-      <p:pic>
-        <p:nvPicPr>
-          <p:cNvPr id="41" name="Image 6" descr="C:\Users\mikae\OneDrive\Documents\Lomba\IFEST\Nyambung\assets\symbols\png\sakit.png">    </p:cNvPr>
-          <p:cNvPicPr>
-            <a:picLocks noChangeAspect="1"/>
-          </p:cNvPicPr>
-          <p:nvPr/>
-        </p:nvPicPr>
-        <p:blipFill>
-          <a:blip r:embed="rId7"/>
-          <a:stretch>
-            <a:fillRect/>
-          </a:stretch>
-        </p:blipFill>
-        <p:spPr>
-          <a:xfrm>
-            <a:off x="2400178" y="5061021"/>
-            <a:ext cx="286756" cy="286756"/>
-          </a:xfrm>
-          <a:prstGeom prst="rect">
-            <a:avLst/>
-          </a:prstGeom>
-        </p:spPr>
-      </p:pic>
-      <p:sp>
-        <p:nvSpPr>
-          <p:cNvPr id="42" name="Text 32"/>
-          <p:cNvSpPr/>
-          <p:nvPr/>
-        </p:nvSpPr>
-        <p:spPr>
-          <a:xfrm>
-            <a:off x="2197608" y="5358018"/>
-            <a:ext cx="691896" cy="153619"/>
-          </a:xfrm>
-          <a:prstGeom prst="rect">
-            <a:avLst/>
-          </a:prstGeom>
-          <a:noFill/>
-          <a:ln/>
-        </p:spPr>
-        <p:txBody>
-          <a:bodyPr wrap="square" lIns="0" tIns="0" rIns="0" bIns="0" rtlCol="0" anchor="ctr"/>
-          <a:lstStyle/>
-          <a:p>
-            <a:pPr algn="ctr" indent="0" marL="0">
-              <a:buNone/>
-            </a:pPr>
-            <a:r>
-              <a:rPr lang="en-US" sz="750" b="1" dirty="0">
-                <a:solidFill>
-                  <a:srgbClr val="1D6F94"/>
-                </a:solidFill>
-                <a:latin typeface="Calibri" pitchFamily="34" charset="0"/>
-                <a:ea typeface="Calibri" pitchFamily="34" charset="-122"/>
-                <a:cs typeface="Calibri" pitchFamily="34" charset="-120"/>
-              </a:rPr>
-              <a:t>SAKIT</a:t>
-            </a:r>
-            <a:endParaRPr lang="en-US" sz="750" dirty="0"/>
-          </a:p>
-        </p:txBody>
-      </p:sp>
-      <p:sp>
-        <p:nvSpPr>
-          <p:cNvPr id="43" name="Text 33"/>
-          <p:cNvSpPr/>
-          <p:nvPr/>
-        </p:nvSpPr>
-        <p:spPr>
-          <a:xfrm>
-            <a:off x="722376" y="5596128"/>
-            <a:ext cx="2167128" cy="182880"/>
-          </a:xfrm>
-          <a:prstGeom prst="rect">
-            <a:avLst/>
-          </a:prstGeom>
-          <a:noFill/>
-          <a:ln/>
-        </p:spPr>
-        <p:txBody>
-          <a:bodyPr wrap="square" lIns="0" tIns="0" rIns="0" bIns="0" rtlCol="0" anchor="ctr"/>
-          <a:lstStyle/>
-          <a:p>
-            <a:pPr algn="ctr" indent="0" marL="0">
-              <a:buNone/>
-            </a:pPr>
-            <a:r>
               <a:rPr lang="en-US" sz="700" dirty="0">
                 <a:solidFill>
                   <a:srgbClr val="52706D"/>
@@ -34805,7 +34535,7 @@
                 <a:ea typeface="Calibri" pitchFamily="34" charset="-122"/>
                 <a:cs typeface="Calibri" pitchFamily="34" charset="-120"/>
               </a:rPr>
-              <a:t>Enam kata inti tetap di posisi yang sama</a:t>
+              <a:t>Kata area dalam grid tetap; kata inti tetap di tab INTI</a:t>
             </a:r>
             <a:endParaRPr lang="en-US" sz="700" dirty="0"/>
           </a:p>
@@ -34813,7 +34543,7 @@
       </p:sp>
       <p:sp>
         <p:nvSpPr>
-          <p:cNvPr id="44" name="Text 34"/>
+          <p:cNvPr id="35" name="Text 28"/>
           <p:cNvSpPr/>
           <p:nvPr/>
         </p:nvSpPr>
@@ -34902,7 +34632,7 @@
       </p:sp>
       <p:sp>
         <p:nvSpPr>
-          <p:cNvPr id="45" name="Shape 35"/>
+          <p:cNvPr id="36" name="Shape 29"/>
           <p:cNvSpPr/>
           <p:nvPr/>
         </p:nvSpPr>
@@ -34929,7 +34659,7 @@
       </p:sp>
       <p:sp>
         <p:nvSpPr>
-          <p:cNvPr id="46" name="Shape 36"/>
+          <p:cNvPr id="37" name="Shape 30"/>
           <p:cNvSpPr/>
           <p:nvPr/>
         </p:nvSpPr>
@@ -34954,14 +34684,14 @@
       </p:sp>
       <p:pic>
         <p:nvPicPr>
-          <p:cNvPr id="47" name="Image 7" descr="preencoded.png">    </p:cNvPr>
+          <p:cNvPr id="38" name="Image 4" descr="preencoded.png">    </p:cNvPr>
           <p:cNvPicPr>
             <a:picLocks noChangeAspect="1"/>
           </p:cNvPicPr>
           <p:nvPr/>
         </p:nvPicPr>
         <p:blipFill>
-          <a:blip r:embed="rId8"/>
+          <a:blip r:embed="rId5"/>
           <a:stretch>
             <a:fillRect/>
           </a:stretch>
@@ -34978,7 +34708,7 @@
       </p:pic>
       <p:sp>
         <p:nvSpPr>
-          <p:cNvPr id="48" name="Text 37"/>
+          <p:cNvPr id="39" name="Text 31"/>
           <p:cNvSpPr/>
           <p:nvPr/>
         </p:nvSpPr>
@@ -35017,7 +34747,7 @@
       </p:sp>
       <p:sp>
         <p:nvSpPr>
-          <p:cNvPr id="49" name="Text 38"/>
+          <p:cNvPr id="40" name="Text 32"/>
           <p:cNvSpPr/>
           <p:nvPr/>
         </p:nvSpPr>
@@ -35056,7 +34786,7 @@
       </p:sp>
       <p:sp>
         <p:nvSpPr>
-          <p:cNvPr id="50" name="Text 39"/>
+          <p:cNvPr id="41" name="Text 33"/>
           <p:cNvSpPr/>
           <p:nvPr/>
         </p:nvSpPr>
@@ -35095,7 +34825,7 @@
       </p:sp>
       <p:sp>
         <p:nvSpPr>
-          <p:cNvPr id="51" name="Shape 40"/>
+          <p:cNvPr id="42" name="Shape 34"/>
           <p:cNvSpPr/>
           <p:nvPr/>
         </p:nvSpPr>
@@ -35122,7 +34852,7 @@
       </p:sp>
       <p:sp>
         <p:nvSpPr>
-          <p:cNvPr id="52" name="Shape 41"/>
+          <p:cNvPr id="43" name="Shape 35"/>
           <p:cNvSpPr/>
           <p:nvPr/>
         </p:nvSpPr>
@@ -35147,14 +34877,14 @@
       </p:sp>
       <p:pic>
         <p:nvPicPr>
-          <p:cNvPr id="53" name="Image 8" descr="preencoded.png">    </p:cNvPr>
+          <p:cNvPr id="44" name="Image 5" descr="preencoded.png">    </p:cNvPr>
           <p:cNvPicPr>
             <a:picLocks noChangeAspect="1"/>
           </p:cNvPicPr>
           <p:nvPr/>
         </p:nvPicPr>
         <p:blipFill>
-          <a:blip r:embed="rId9"/>
+          <a:blip r:embed="rId6"/>
           <a:stretch>
             <a:fillRect/>
           </a:stretch>
@@ -35171,7 +34901,7 @@
       </p:pic>
       <p:sp>
         <p:nvSpPr>
-          <p:cNvPr id="54" name="Text 42"/>
+          <p:cNvPr id="45" name="Text 36"/>
           <p:cNvSpPr/>
           <p:nvPr/>
         </p:nvSpPr>
@@ -35210,7 +34940,7 @@
       </p:sp>
       <p:sp>
         <p:nvSpPr>
-          <p:cNvPr id="55" name="Text 43"/>
+          <p:cNvPr id="46" name="Text 37"/>
           <p:cNvSpPr/>
           <p:nvPr/>
         </p:nvSpPr>
@@ -35249,7 +34979,7 @@
       </p:sp>
       <p:sp>
         <p:nvSpPr>
-          <p:cNvPr id="56" name="Text 44"/>
+          <p:cNvPr id="47" name="Text 38"/>
           <p:cNvSpPr/>
           <p:nvPr/>
         </p:nvSpPr>
@@ -35288,7 +35018,7 @@
       </p:sp>
       <p:sp>
         <p:nvSpPr>
-          <p:cNvPr id="57" name="Shape 45"/>
+          <p:cNvPr id="48" name="Shape 39"/>
           <p:cNvSpPr/>
           <p:nvPr/>
         </p:nvSpPr>
@@ -35315,7 +35045,7 @@
       </p:sp>
       <p:sp>
         <p:nvSpPr>
-          <p:cNvPr id="58" name="Shape 46"/>
+          <p:cNvPr id="49" name="Shape 40"/>
           <p:cNvSpPr/>
           <p:nvPr/>
         </p:nvSpPr>
@@ -35340,14 +35070,14 @@
       </p:sp>
       <p:pic>
         <p:nvPicPr>
-          <p:cNvPr id="59" name="Image 9" descr="preencoded.png">    </p:cNvPr>
+          <p:cNvPr id="50" name="Image 6" descr="preencoded.png">    </p:cNvPr>
           <p:cNvPicPr>
             <a:picLocks noChangeAspect="1"/>
           </p:cNvPicPr>
           <p:nvPr/>
         </p:nvPicPr>
         <p:blipFill>
-          <a:blip r:embed="rId10"/>
+          <a:blip r:embed="rId7"/>
           <a:stretch>
             <a:fillRect/>
           </a:stretch>
@@ -35364,7 +35094,7 @@
       </p:pic>
       <p:sp>
         <p:nvSpPr>
-          <p:cNvPr id="60" name="Text 47"/>
+          <p:cNvPr id="51" name="Text 41"/>
           <p:cNvSpPr/>
           <p:nvPr/>
         </p:nvSpPr>
@@ -35403,7 +35133,7 @@
       </p:sp>
       <p:sp>
         <p:nvSpPr>
-          <p:cNvPr id="61" name="Text 48"/>
+          <p:cNvPr id="52" name="Text 42"/>
           <p:cNvSpPr/>
           <p:nvPr/>
         </p:nvSpPr>
@@ -35442,7 +35172,7 @@
       </p:sp>
       <p:sp>
         <p:nvSpPr>
-          <p:cNvPr id="62" name="Text 49"/>
+          <p:cNvPr id="53" name="Text 43"/>
           <p:cNvSpPr/>
           <p:nvPr/>
         </p:nvSpPr>
@@ -35481,7 +35211,7 @@
       </p:sp>
       <p:sp>
         <p:nvSpPr>
-          <p:cNvPr id="63" name="Shape 50"/>
+          <p:cNvPr id="54" name="Shape 44"/>
           <p:cNvSpPr/>
           <p:nvPr/>
         </p:nvSpPr>
@@ -35508,7 +35238,7 @@
       </p:sp>
       <p:sp>
         <p:nvSpPr>
-          <p:cNvPr id="64" name="Shape 51"/>
+          <p:cNvPr id="55" name="Shape 45"/>
           <p:cNvSpPr/>
           <p:nvPr/>
         </p:nvSpPr>
@@ -35533,14 +35263,14 @@
       </p:sp>
       <p:pic>
         <p:nvPicPr>
-          <p:cNvPr id="65" name="Image 10" descr="preencoded.png">    </p:cNvPr>
+          <p:cNvPr id="56" name="Image 7" descr="preencoded.png">    </p:cNvPr>
           <p:cNvPicPr>
             <a:picLocks noChangeAspect="1"/>
           </p:cNvPicPr>
           <p:nvPr/>
         </p:nvPicPr>
         <p:blipFill>
-          <a:blip r:embed="rId11"/>
+          <a:blip r:embed="rId8"/>
           <a:stretch>
             <a:fillRect/>
           </a:stretch>
@@ -35557,7 +35287,7 @@
       </p:pic>
       <p:sp>
         <p:nvSpPr>
-          <p:cNvPr id="66" name="Text 52"/>
+          <p:cNvPr id="57" name="Text 46"/>
           <p:cNvSpPr/>
           <p:nvPr/>
         </p:nvSpPr>
@@ -35596,7 +35326,7 @@
       </p:sp>
       <p:sp>
         <p:nvSpPr>
-          <p:cNvPr id="67" name="Text 53"/>
+          <p:cNvPr id="58" name="Text 47"/>
           <p:cNvSpPr/>
           <p:nvPr/>
         </p:nvSpPr>
@@ -35627,7 +35357,7 @@
                 <a:ea typeface="Calibri" pitchFamily="34" charset="-122"/>
                 <a:cs typeface="Calibri" pitchFamily="34" charset="-120"/>
               </a:rPr>
-              <a:t>Keluarga memperbaiki; papan tersimpan dan dipakai luring.</a:t>
+              <a:t>Keluarga memperbaiki; benda tanpa kata dibuatkan kartu baru bersuara.</a:t>
             </a:r>
             <a:endParaRPr lang="en-US" sz="950" dirty="0"/>
           </a:p>
@@ -35635,7 +35365,7 @@
       </p:sp>
       <p:sp>
         <p:nvSpPr>
-          <p:cNvPr id="68" name="Shape 54"/>
+          <p:cNvPr id="59" name="Shape 48"/>
           <p:cNvSpPr/>
           <p:nvPr/>
         </p:nvSpPr>
@@ -35662,7 +35392,7 @@
       </p:sp>
       <p:sp>
         <p:nvSpPr>
-          <p:cNvPr id="69" name="Text 55"/>
+          <p:cNvPr id="60" name="Text 49"/>
           <p:cNvSpPr/>
           <p:nvPr/>
         </p:nvSpPr>
@@ -35701,7 +35431,7 @@
       </p:sp>
       <p:sp>
         <p:nvSpPr>
-          <p:cNvPr id="70" name="Text 56"/>
+          <p:cNvPr id="61" name="Text 50"/>
           <p:cNvSpPr/>
           <p:nvPr/>
         </p:nvSpPr>
@@ -35799,7 +35529,7 @@
                 <a:ea typeface="Calibri" pitchFamily="34" charset="-122"/>
                 <a:cs typeface="Calibri" pitchFamily="34" charset="-120"/>
               </a:rPr>
-              <a:t>Pemetaan kata yang belum cocok tidak bisa disimpan sebelum diperbaiki</a:t>
+              <a:t>Benda yang belum ada di kosakata dibuatkan kartu kata baru bersuara; bisa dihapus di Kelola kosakata</a:t>
             </a:r>
             <a:endParaRPr lang="en-US" sz="950" dirty="0"/>
           </a:p>
@@ -35828,7 +35558,7 @@
       </p:sp>
       <p:sp>
         <p:nvSpPr>
-          <p:cNvPr id="71" name="Shape 57"/>
+          <p:cNvPr id="62" name="Shape 51"/>
           <p:cNvSpPr/>
           <p:nvPr/>
         </p:nvSpPr>
@@ -35855,7 +35585,7 @@
       </p:sp>
       <p:sp>
         <p:nvSpPr>
-          <p:cNvPr id="72" name="Text 58"/>
+          <p:cNvPr id="63" name="Text 52"/>
           <p:cNvSpPr/>
           <p:nvPr/>
         </p:nvSpPr>
@@ -35894,7 +35624,7 @@
       </p:sp>
       <p:sp>
         <p:nvSpPr>
-          <p:cNvPr id="73" name="Text 59"/>
+          <p:cNvPr id="64" name="Text 53"/>
           <p:cNvSpPr/>
           <p:nvPr/>
         </p:nvSpPr>
@@ -35950,7 +35680,7 @@
                 <a:ea typeface="Calibri" pitchFamily="34" charset="-122"/>
                 <a:cs typeface="Calibri" pitchFamily="34" charset="-120"/>
               </a:rPr>
-              <a:t>Akurasi draf AI belum diukur</a:t>
+              <a:t>Akurasi draf AI belum diukur; kartu kata baru belum bergambar</a:t>
             </a:r>
             <a:endParaRPr lang="en-US" sz="950" dirty="0"/>
           </a:p>

--- a/deck/Nyambung-Pitch-Deck.pptx
+++ b/deck/Nyambung-Pitch-Deck.pptx
@@ -24,9 +24,10 @@
     <p:sldId id="272" r:id="rId18"/>
     <p:sldId id="273" r:id="rId19"/>
     <p:sldId id="274" r:id="rId20"/>
+    <p:sldId id="275" r:id="rId21"/>
   </p:sldIdLst>
   <p:notesMasterIdLst>
-    <p:notesMasterId r:id="rId21"/>
+    <p:notesMasterId r:id="rId22"/>
   </p:notesMasterIdLst>
   <p:sldSz cx="12192000" cy="6858000"/>
   <p:notesSz cx="6858000" cy="12192000"/>
@@ -884,10 +885,9 @@
           <a:p>
             <a:r>
               <a:rPr lang="en-US" dirty="0"/>
-              <a:t>3:40–4:05 (25 dtk)
+              <a:t>3:40–3:55 (15 dtk)
 Apakah layak? Ini sudah berjalan, dibangun dalam 24 jam, dengan 113 tes otomatis lulus.
-Model bisnisnya: keluarga gratis selamanya, karena suara anak tidak boleh dikunci langganan. Biaya per keluarga untuk fitur inti hampir nol, karena semuanya berjalan di HP.
-Yang membayar adalah terapis dan institusi, yang mendapat dasbor dan data rumah. Kami mulai dengan pilot enam pekan bersama satu terapis wicara, lalu tumbuh lewat terapis: setiap kode undangan adalah satu keluarga baru.
+Kami mulai dengan pilot enam pekan bersama satu terapis wicara, lalu tumbuh lewat terapis: setiap kode undangan adalah satu keluarga baru.
 Batasannya kami tulis terbuka: belum HTTPS, dan [belum diuji di HP fisik 2 GB — perbarui bila sudah].</a:t>
             </a:r>
             <a:endParaRPr lang="en-US" dirty="0"/>
@@ -976,10 +976,10 @@
           <a:p>
             <a:r>
               <a:rPr lang="en-US" dirty="0"/>
-              <a:t>4:05–4:27 (22 dtk)
-Dampaknya kami ukur dengan jujur. Masalah intinya alat ditinggalkan, jadi metrik utama pilot adalah retensi hari ke-14, minimal 60 persen, didukung hari misi terlaksana, usulan yang dijawab keluarga, dan waktu tinjauan terapis yang diukur otomatis.
-Jumlah kata adalah pola pemakaian, bukan nilai kemampuan anak.
-Kalau tinjauan cukup lima menit per anak, satu jam terapis bisa memantau dua belas keluarga. Itu asumsi, dan pilot yang akan mengujinya.</a:t>
+              <a:t>3:55–4:15 (20 dtk)
+Siapa yang membayar? Bukan keluarga. Suara anak tidak boleh dikunci langganan, jadi papan, suara, dan misi harian gratis selamanya. Karena semuanya jalan di HP, biaya tambahan per keluarga hampir nol.
+Yang membayar adalah terapis dan institusi, karena merekalah yang mendapat dasbor dan data rumah. Satu terapis dengan dua puluh keluarga menelan biaya sekitar tujuh puluh sampai seratus tiga puluh lima ribu rupiah per bulan, masih tertutup oleh hipotesis harga kami.
+Pemerintah dan CSR menjadi jalur skala setelah pilot membuktikan retensi.</a:t>
             </a:r>
             <a:endParaRPr lang="en-US" dirty="0"/>
           </a:p>
@@ -1067,10 +1067,10 @@
           <a:p>
             <a:r>
               <a:rPr lang="en-US" dirty="0"/>
-              <a:t>4:27–4:40 (13 dtk) — tahan 2 detik di akhir.
-Ethan punya suara karena orang di sekitarnya belajar menjawab. Nyambung ingin hal yang sama terjadi di setiap rumah di Indonesia.
-Karena hubungan antarmanusia tidak dimulai saat seseorang bisa bicara. Hubungan dimulai saat ia bisa dipahami.
-Anak. Keluarga. Terapis. Nyambung.</a:t>
+              <a:t>4:15–4:37 (22 dtk)
+Dampaknya kami ukur dengan jujur. Masalah intinya alat ditinggalkan, jadi metrik utama pilot adalah retensi hari ke-14, minimal 60 persen, didukung hari misi terlaksana, usulan yang dijawab keluarga, dan waktu tinjauan terapis yang diukur otomatis.
+Jumlah kata adalah pola pemakaian, bukan nilai kemampuan anak.
+Kalau tinjauan cukup lima menit per anak, satu jam terapis bisa memantau dua belas keluarga. Itu asumsi, dan pilot yang akan mengujinya.</a:t>
             </a:r>
             <a:endParaRPr lang="en-US" dirty="0"/>
           </a:p>
@@ -1158,9 +1158,10 @@
           <a:p>
             <a:r>
               <a:rPr lang="en-US" dirty="0"/>
-              <a:t>Lampiran untuk Q&amp;A (disebut satu kalimat di slide validasi).
-Semua aset punya asal yang jelas: simbol dari Mulberry Symbols karya Steve Lee, berlisensi CC BY-SA 4.0, kata tanpa padanan digambar tim dengan gaya yang sama, dan semua berkas tercatat lengkap dengan hash-nya.
-Q&amp;A: Mulberry dirancang untuk pengguna dewasa; kecocokannya untuk anak Indonesia diuji di pilot. Simbol tim belum diuji pada anak.</a:t>
+              <a:t>4:37–4:50 (13 dtk) — tahan 2 detik di akhir.
+Ethan punya suara karena orang di sekitarnya belajar menjawab. Nyambung ingin hal yang sama terjadi di setiap rumah di Indonesia.
+Karena hubungan antarmanusia tidak dimulai saat seseorang bisa bicara. Hubungan dimulai saat ia bisa dipahami.
+Anak. Keluarga. Terapis. Nyambung.</a:t>
             </a:r>
             <a:endParaRPr lang="en-US" dirty="0"/>
           </a:p>
@@ -1248,7 +1249,9 @@
           <a:p>
             <a:r>
               <a:rPr lang="en-US" dirty="0"/>
-              <a:t>Untuk Q&amp;A: "Kenapa kata-kata ini?" 9 dari 12 kata ada di Banajee atau Project Core, 7 di keduanya. Tiga pengecualian (SAKIT, MAKAN, MINUM) beralasan tertulis. Tidak ada kata benda di halaman inti; IBU/AYAH ada di halaman ORANG.</a:t>
+              <a:t>Lampiran untuk Q&amp;A (disebut satu kalimat di slide validasi).
+Semua aset punya asal yang jelas: simbol dari Mulberry Symbols karya Steve Lee, berlisensi CC BY-SA 4.0, kata tanpa padanan digambar tim dengan gaya yang sama, dan semua berkas tercatat lengkap dengan hash-nya.
+Q&amp;A: Mulberry dirancang untuk pengguna dewasa; kecocokannya untuk anak Indonesia diuji di pilot. Simbol tim belum diuji pada anak.</a:t>
             </a:r>
             <a:endParaRPr lang="en-US" dirty="0"/>
           </a:p>
@@ -1336,7 +1339,7 @@
           <a:p>
             <a:r>
               <a:rPr lang="en-US" dirty="0"/>
-              <a:t>Metrik juri menilai kejujuran terhadap batasan sistem. Yang belum ada, sebut belum ada.</a:t>
+              <a:t>Untuk Q&amp;A: "Kenapa kata-kata ini?" 9 dari 12 kata ada di Banajee atau Project Core, 7 di keduanya. Tiga pengecualian (SAKIT, MAKAN, MINUM) beralasan tertulis. Tidak ada kata benda di halaman inti; IBU/AYAH ada di halaman ORANG.</a:t>
             </a:r>
             <a:endParaRPr lang="en-US" dirty="0"/>
           </a:p>
@@ -1424,7 +1427,7 @@
           <a:p>
             <a:r>
               <a:rPr lang="en-US" dirty="0"/>
-              <a:t>Metrik 1 menilai justifikasi perubahan di PERUBAHAN.md. Tunjukkan bahwa perubahan dicatat saat itu juga, termasuk yang ditunda lalu akhirnya dibangun.</a:t>
+              <a:t>Metrik juri menilai kejujuran terhadap batasan sistem. Yang belum ada, sebut belum ada.</a:t>
             </a:r>
             <a:endParaRPr lang="en-US" dirty="0"/>
           </a:p>
@@ -1540,6 +1543,94 @@
             <a:fld id="{F7021451-1387-4CA6-816F-3879F97B5CBC}" type="slidenum">
               <a:rPr lang="en-US"/>
               <a:t>2</a:t>
+            </a:fld>
+            <a:endParaRPr lang="en-US"/>
+          </a:p>
+        </p:txBody>
+      </p:sp>
+    </p:spTree>
+    <p:extLst>
+      <p:ext uri="{BB962C8B-B14F-4D97-AF65-F5344CB8AC3E}">
+        <p14:creationId xmlns:p14="http://schemas.microsoft.com/office/powerpoint/2010/main" val="1024086991"/>
+      </p:ext>
+    </p:extLst>
+  </p:cSld>
+  <p:clrMapOvr>
+    <a:masterClrMapping/>
+  </p:clrMapOvr>
+</p:notes>
+</file>
+
+<file path=ppt/notesSlides/notesSlide20.xml><?xml version="1.0" encoding="utf-8"?>
+<p:notes xmlns:a="http://schemas.openxmlformats.org/drawingml/2006/main" xmlns:r="http://schemas.openxmlformats.org/officeDocument/2006/relationships" xmlns:p="http://schemas.openxmlformats.org/presentationml/2006/main">
+  <p:cSld>
+    <p:spTree>
+      <p:nvGrpSpPr>
+        <p:cNvPr id="1" name=""/>
+        <p:cNvGrpSpPr/>
+        <p:nvPr/>
+      </p:nvGrpSpPr>
+      <p:grpSpPr>
+        <a:xfrm>
+          <a:off x="0" y="0"/>
+          <a:ext cx="0" cy="0"/>
+          <a:chOff x="0" y="0"/>
+          <a:chExt cx="0" cy="0"/>
+        </a:xfrm>
+      </p:grpSpPr>
+      <p:sp>
+        <p:nvSpPr>
+          <p:cNvPr id="2" name="Slide Image Placeholder 1"/>
+          <p:cNvSpPr>
+            <a:spLocks noGrp="1" noRot="1" noChangeAspect="1"/>
+          </p:cNvSpPr>
+          <p:nvPr>
+            <p:ph type="sldImg"/>
+          </p:nvPr>
+        </p:nvSpPr>
+        <p:spPr/>
+      </p:sp>
+      <p:sp>
+        <p:nvSpPr>
+          <p:cNvPr id="3" name="Notes Placeholder 2"/>
+          <p:cNvSpPr>
+            <a:spLocks noGrp="1"/>
+          </p:cNvSpPr>
+          <p:nvPr>
+            <p:ph type="body" idx="1"/>
+          </p:nvPr>
+        </p:nvSpPr>
+        <p:spPr/>
+        <p:txBody>
+          <a:bodyPr/>
+          <a:lstStyle/>
+          <a:p>
+            <a:r>
+              <a:rPr lang="en-US" dirty="0"/>
+              <a:t>Metrik 1 menilai justifikasi perubahan di PERUBAHAN.md. Tunjukkan bahwa perubahan dicatat saat itu juga, termasuk yang ditunda lalu akhirnya dibangun.</a:t>
+            </a:r>
+            <a:endParaRPr lang="en-US" dirty="0"/>
+          </a:p>
+        </p:txBody>
+      </p:sp>
+      <p:sp>
+        <p:nvSpPr>
+          <p:cNvPr id="4" name="Slide Number Placeholder 3"/>
+          <p:cNvSpPr>
+            <a:spLocks noGrp="1"/>
+          </p:cNvSpPr>
+          <p:nvPr>
+            <p:ph type="sldNum" sz="quarter" idx="10"/>
+          </p:nvPr>
+        </p:nvSpPr>
+        <p:spPr/>
+        <p:txBody>
+          <a:bodyPr/>
+          <a:lstStyle/>
+          <a:p>
+            <a:fld id="{F7021451-1387-4CA6-816F-3879F97B5CBC}" type="slidenum">
+              <a:rPr lang="en-US"/>
+              <a:t>20</a:t>
             </a:fld>
             <a:endParaRPr lang="en-US"/>
           </a:p>
@@ -9928,7 +10019,7 @@
                 <a:ea typeface="Calibri" pitchFamily="34" charset="-122"/>
                 <a:cs typeface="Calibri" pitchFamily="34" charset="-120"/>
               </a:rPr>
-              <a:t>DAMPAK DAN METRIK KEBERHASILAN</a:t>
+              <a:t>NILAI BISNIS · B2I DENGAN POLA B2B2C</a:t>
             </a:r>
             <a:endParaRPr lang="en-US" sz="1100" dirty="0"/>
           </a:p>
@@ -9970,7 +10061,7 @@
                 <a:ea typeface="Trebuchet MS" pitchFamily="34" charset="-122"/>
                 <a:cs typeface="Trebuchet MS" pitchFamily="34" charset="-120"/>
               </a:rPr>
-              <a:t>Dampak diukur dari kebiasaan yang bertahan, bukan dari klaim kemampuan anak</a:t>
+              <a:t>Keluarga gratis. Institusi yang membayar.</a:t>
             </a:r>
             <a:endParaRPr lang="en-US" sz="2500" dirty="0"/>
           </a:p>
@@ -10111,6 +10202,53 @@
             </a:avLst>
           </a:prstGeom>
           <a:solidFill>
+            <a:srgbClr val="098277"/>
+          </a:solidFill>
+          <a:ln w="9525">
+            <a:solidFill>
+              <a:srgbClr val="098277"/>
+            </a:solidFill>
+          </a:ln>
+        </p:spPr>
+        <p:txBody>
+          <a:bodyPr wrap="square" lIns="0" tIns="0" rIns="0" bIns="0" rtlCol="0" anchor="ctr"/>
+          <a:lstStyle/>
+          <a:p>
+            <a:pPr algn="ctr" indent="0" marL="0">
+              <a:buNone/>
+            </a:pPr>
+            <a:r>
+              <a:rPr lang="en-US" sz="950" b="1" dirty="0">
+                <a:solidFill>
+                  <a:srgbClr val="FFFFFF"/>
+                </a:solidFill>
+                <a:latin typeface="Calibri" pitchFamily="34" charset="0"/>
+                <a:ea typeface="Calibri" pitchFamily="34" charset="-122"/>
+                <a:cs typeface="Calibri" pitchFamily="34" charset="-120"/>
+              </a:rPr>
+              <a:t>Kelayakan</a:t>
+            </a:r>
+            <a:endParaRPr lang="en-US" sz="950" dirty="0"/>
+          </a:p>
+        </p:txBody>
+      </p:sp>
+      <p:sp>
+        <p:nvSpPr>
+          <p:cNvPr id="8" name="Text 5"/>
+          <p:cNvSpPr/>
+          <p:nvPr/>
+        </p:nvSpPr>
+        <p:spPr>
+          <a:xfrm>
+            <a:off x="3520440" y="6382512"/>
+            <a:ext cx="795528" cy="256032"/>
+          </a:xfrm>
+          <a:prstGeom prst="roundRect">
+            <a:avLst>
+              <a:gd name="adj" fmla="val 46429"/>
+            </a:avLst>
+          </a:prstGeom>
+          <a:solidFill>
             <a:srgbClr val="F1FAFA"/>
           </a:solidFill>
           <a:ln w="9525">
@@ -10135,7 +10273,7 @@
                 <a:ea typeface="Calibri" pitchFamily="34" charset="-122"/>
                 <a:cs typeface="Calibri" pitchFamily="34" charset="-120"/>
               </a:rPr>
-              <a:t>Kelayakan</a:t>
+              <a:t>Dampak</a:t>
             </a:r>
             <a:endParaRPr lang="en-US" sz="950" dirty="0"/>
           </a:p>
@@ -10143,143 +10281,96 @@
       </p:sp>
       <p:sp>
         <p:nvSpPr>
-          <p:cNvPr id="8" name="Text 5"/>
-          <p:cNvSpPr/>
-          <p:nvPr/>
-        </p:nvSpPr>
-        <p:spPr>
-          <a:xfrm>
-            <a:off x="3520440" y="6382512"/>
-            <a:ext cx="795528" cy="256032"/>
+          <p:cNvPr id="9" name="Text 6"/>
+          <p:cNvSpPr/>
+          <p:nvPr/>
+        </p:nvSpPr>
+        <p:spPr>
+          <a:xfrm>
+            <a:off x="11185855" y="6382512"/>
+            <a:ext cx="457200" cy="256032"/>
+          </a:xfrm>
+          <a:prstGeom prst="rect">
+            <a:avLst/>
+          </a:prstGeom>
+          <a:noFill/>
+          <a:ln/>
+        </p:spPr>
+        <p:txBody>
+          <a:bodyPr wrap="square" lIns="0" tIns="0" rIns="0" bIns="0" rtlCol="0" anchor="ctr"/>
+          <a:lstStyle/>
+          <a:p>
+            <a:pPr algn="r" indent="0" marL="0">
+              <a:buNone/>
+            </a:pPr>
+            <a:r>
+              <a:rPr lang="en-US" sz="1000" dirty="0">
+                <a:solidFill>
+                  <a:srgbClr val="52706D"/>
+                </a:solidFill>
+                <a:latin typeface="Calibri" pitchFamily="34" charset="0"/>
+                <a:ea typeface="Calibri" pitchFamily="34" charset="-122"/>
+                <a:cs typeface="Calibri" pitchFamily="34" charset="-120"/>
+              </a:rPr>
+              <a:t>14</a:t>
+            </a:r>
+            <a:endParaRPr lang="en-US" sz="1000" dirty="0"/>
+          </a:p>
+        </p:txBody>
+      </p:sp>
+      <p:sp>
+        <p:nvSpPr>
+          <p:cNvPr id="10" name="Text 7"/>
+          <p:cNvSpPr/>
+          <p:nvPr/>
+        </p:nvSpPr>
+        <p:spPr>
+          <a:xfrm>
+            <a:off x="548640" y="6035040"/>
+            <a:ext cx="11094415" cy="274320"/>
+          </a:xfrm>
+          <a:prstGeom prst="rect">
+            <a:avLst/>
+          </a:prstGeom>
+          <a:noFill/>
+          <a:ln/>
+        </p:spPr>
+        <p:txBody>
+          <a:bodyPr wrap="square" lIns="0" tIns="0" rIns="0" bIns="0" rtlCol="0" anchor="b"/>
+          <a:lstStyle/>
+          <a:p>
+            <a:pPr indent="0" marL="0">
+              <a:buNone/>
+            </a:pPr>
+            <a:r>
+              <a:rPr lang="en-US" sz="850" i="1" dirty="0">
+                <a:solidFill>
+                  <a:srgbClr val="52706D"/>
+                </a:solidFill>
+                <a:latin typeface="Calibri" pitchFamily="34" charset="0"/>
+                <a:ea typeface="Calibri" pitchFamily="34" charset="-122"/>
+                <a:cs typeface="Calibri" pitchFamily="34" charset="-120"/>
+              </a:rPr>
+              <a:t>deck/model-bisnis.md · harga ElevenLabs dan OpenAI dicek 18 Sep 2026 · kurs Rp16.500/US$ dan PPN ±11% (asumsi) · *harga jual dan biaya klon sementara: hipotesis tim (D), divalidasi di pilot.</a:t>
+            </a:r>
+            <a:endParaRPr lang="en-US" sz="850" dirty="0"/>
+          </a:p>
+        </p:txBody>
+      </p:sp>
+      <p:sp>
+        <p:nvSpPr>
+          <p:cNvPr id="12" name="Shape 8"/>
+          <p:cNvSpPr/>
+          <p:nvPr/>
+        </p:nvSpPr>
+        <p:spPr>
+          <a:xfrm>
+            <a:off x="548640" y="1481328"/>
+            <a:ext cx="3564026" cy="1389888"/>
           </a:xfrm>
           <a:prstGeom prst="roundRect">
             <a:avLst>
-              <a:gd name="adj" fmla="val 46429"/>
-            </a:avLst>
-          </a:prstGeom>
-          <a:solidFill>
-            <a:srgbClr val="098277"/>
-          </a:solidFill>
-          <a:ln w="9525">
-            <a:solidFill>
-              <a:srgbClr val="098277"/>
-            </a:solidFill>
-          </a:ln>
-        </p:spPr>
-        <p:txBody>
-          <a:bodyPr wrap="square" lIns="0" tIns="0" rIns="0" bIns="0" rtlCol="0" anchor="ctr"/>
-          <a:lstStyle/>
-          <a:p>
-            <a:pPr algn="ctr" indent="0" marL="0">
-              <a:buNone/>
-            </a:pPr>
-            <a:r>
-              <a:rPr lang="en-US" sz="950" b="1" dirty="0">
-                <a:solidFill>
-                  <a:srgbClr val="FFFFFF"/>
-                </a:solidFill>
-                <a:latin typeface="Calibri" pitchFamily="34" charset="0"/>
-                <a:ea typeface="Calibri" pitchFamily="34" charset="-122"/>
-                <a:cs typeface="Calibri" pitchFamily="34" charset="-120"/>
-              </a:rPr>
-              <a:t>Dampak</a:t>
-            </a:r>
-            <a:endParaRPr lang="en-US" sz="950" dirty="0"/>
-          </a:p>
-        </p:txBody>
-      </p:sp>
-      <p:sp>
-        <p:nvSpPr>
-          <p:cNvPr id="9" name="Text 6"/>
-          <p:cNvSpPr/>
-          <p:nvPr/>
-        </p:nvSpPr>
-        <p:spPr>
-          <a:xfrm>
-            <a:off x="11185855" y="6382512"/>
-            <a:ext cx="457200" cy="256032"/>
-          </a:xfrm>
-          <a:prstGeom prst="rect">
-            <a:avLst/>
-          </a:prstGeom>
-          <a:noFill/>
-          <a:ln/>
-        </p:spPr>
-        <p:txBody>
-          <a:bodyPr wrap="square" lIns="0" tIns="0" rIns="0" bIns="0" rtlCol="0" anchor="ctr"/>
-          <a:lstStyle/>
-          <a:p>
-            <a:pPr algn="r" indent="0" marL="0">
-              <a:buNone/>
-            </a:pPr>
-            <a:r>
-              <a:rPr lang="en-US" sz="1000" dirty="0">
-                <a:solidFill>
-                  <a:srgbClr val="52706D"/>
-                </a:solidFill>
-                <a:latin typeface="Calibri" pitchFamily="34" charset="0"/>
-                <a:ea typeface="Calibri" pitchFamily="34" charset="-122"/>
-                <a:cs typeface="Calibri" pitchFamily="34" charset="-120"/>
-              </a:rPr>
-              <a:t>14</a:t>
-            </a:r>
-            <a:endParaRPr lang="en-US" sz="1000" dirty="0"/>
-          </a:p>
-        </p:txBody>
-      </p:sp>
-      <p:sp>
-        <p:nvSpPr>
-          <p:cNvPr id="10" name="Text 7"/>
-          <p:cNvSpPr/>
-          <p:nvPr/>
-        </p:nvSpPr>
-        <p:spPr>
-          <a:xfrm>
-            <a:off x="548640" y="6035040"/>
-            <a:ext cx="11094415" cy="274320"/>
-          </a:xfrm>
-          <a:prstGeom prst="rect">
-            <a:avLst/>
-          </a:prstGeom>
-          <a:noFill/>
-          <a:ln/>
-        </p:spPr>
-        <p:txBody>
-          <a:bodyPr wrap="square" lIns="0" tIns="0" rIns="0" bIns="0" rtlCol="0" anchor="b"/>
-          <a:lstStyle/>
-          <a:p>
-            <a:pPr indent="0" marL="0">
-              <a:buNone/>
-            </a:pPr>
-            <a:r>
-              <a:rPr lang="en-US" sz="850" i="1" dirty="0">
-                <a:solidFill>
-                  <a:srgbClr val="52706D"/>
-                </a:solidFill>
-                <a:latin typeface="Calibri" pitchFamily="34" charset="0"/>
-                <a:ea typeface="Calibri" pitchFamily="34" charset="-122"/>
-                <a:cs typeface="Calibri" pitchFamily="34" charset="-120"/>
-              </a:rPr>
-              <a:t>Metrik utama pilot: 03-basis-ilmiah §6, berangkat dari Phillips &amp; Zhao (1993). Sasaran tinjauan &lt; 5 menit per anak adalah sasaran rancangan dasbor; model kapasitas adalah asumsi yang diuji di pilot.</a:t>
-            </a:r>
-            <a:endParaRPr lang="en-US" sz="850" dirty="0"/>
-          </a:p>
-        </p:txBody>
-      </p:sp>
-      <p:sp>
-        <p:nvSpPr>
-          <p:cNvPr id="12" name="Shape 8"/>
-          <p:cNvSpPr/>
-          <p:nvPr/>
-        </p:nvSpPr>
-        <p:spPr>
-          <a:xfrm>
-            <a:off x="548640" y="1783080"/>
-            <a:ext cx="4206240" cy="1078992"/>
-          </a:xfrm>
-          <a:prstGeom prst="roundRect">
-            <a:avLst>
-              <a:gd name="adj" fmla="val 10169"/>
+              <a:gd name="adj" fmla="val 7895"/>
             </a:avLst>
           </a:prstGeom>
           <a:solidFill>
@@ -10301,8 +10392,201 @@
         </p:nvSpPr>
         <p:spPr>
           <a:xfrm>
-            <a:off x="731520" y="2020824"/>
-            <a:ext cx="603504" cy="603504"/>
+            <a:off x="731520" y="1645920"/>
+            <a:ext cx="512064" cy="512064"/>
+          </a:xfrm>
+          <a:prstGeom prst="ellipse">
+            <a:avLst/>
+          </a:prstGeom>
+          <a:solidFill>
+            <a:srgbClr val="D34349"/>
+          </a:solidFill>
+          <a:ln w="12700">
+            <a:solidFill>
+              <a:srgbClr val="D34349"/>
+            </a:solidFill>
+            <a:prstDash val="solid"/>
+          </a:ln>
+        </p:spPr>
+      </p:sp>
+      <p:pic>
+        <p:nvPicPr>
+          <p:cNvPr id="14" name="Image 1" descr="preencoded.png">    </p:cNvPr>
+          <p:cNvPicPr>
+            <a:picLocks noChangeAspect="1"/>
+          </p:cNvPicPr>
+          <p:nvPr/>
+        </p:nvPicPr>
+        <p:blipFill>
+          <a:blip r:embed="rId2"/>
+          <a:stretch>
+            <a:fillRect/>
+          </a:stretch>
+        </p:blipFill>
+        <p:spPr>
+          <a:xfrm>
+            <a:off x="854415" y="1768815"/>
+            <a:ext cx="266273" cy="266273"/>
+          </a:xfrm>
+          <a:prstGeom prst="rect">
+            <a:avLst/>
+          </a:prstGeom>
+        </p:spPr>
+      </p:pic>
+      <p:sp>
+        <p:nvSpPr>
+          <p:cNvPr id="15" name="Text 10"/>
+          <p:cNvSpPr/>
+          <p:nvPr/>
+        </p:nvSpPr>
+        <p:spPr>
+          <a:xfrm>
+            <a:off x="1371600" y="1609344"/>
+            <a:ext cx="2603906" cy="219456"/>
+          </a:xfrm>
+          <a:prstGeom prst="rect">
+            <a:avLst/>
+          </a:prstGeom>
+          <a:noFill/>
+          <a:ln/>
+        </p:spPr>
+        <p:txBody>
+          <a:bodyPr wrap="square" lIns="0" tIns="0" rIns="0" bIns="0" rtlCol="0" anchor="ctr"/>
+          <a:lstStyle/>
+          <a:p>
+            <a:pPr indent="0" marL="0">
+              <a:buNone/>
+            </a:pPr>
+            <a:r>
+              <a:rPr lang="en-US" sz="850" b="1" spc="100" kern="0" dirty="0">
+                <a:solidFill>
+                  <a:srgbClr val="D34349"/>
+                </a:solidFill>
+                <a:latin typeface="Calibri" pitchFamily="34" charset="0"/>
+                <a:ea typeface="Calibri" pitchFamily="34" charset="-122"/>
+                <a:cs typeface="Calibri" pitchFamily="34" charset="-120"/>
+              </a:rPr>
+              <a:t>KELUARGA · PENGGUNA</a:t>
+            </a:r>
+            <a:endParaRPr lang="en-US" sz="850" dirty="0"/>
+          </a:p>
+        </p:txBody>
+      </p:sp>
+      <p:sp>
+        <p:nvSpPr>
+          <p:cNvPr id="16" name="Text 11"/>
+          <p:cNvSpPr/>
+          <p:nvPr/>
+        </p:nvSpPr>
+        <p:spPr>
+          <a:xfrm>
+            <a:off x="1371600" y="1810512"/>
+            <a:ext cx="2603906" cy="384048"/>
+          </a:xfrm>
+          <a:prstGeom prst="rect">
+            <a:avLst/>
+          </a:prstGeom>
+          <a:noFill/>
+          <a:ln/>
+        </p:spPr>
+        <p:txBody>
+          <a:bodyPr wrap="square" lIns="0" tIns="0" rIns="0" bIns="0" rtlCol="0" anchor="ctr"/>
+          <a:lstStyle/>
+          <a:p>
+            <a:pPr indent="0" marL="0">
+              <a:buNone/>
+            </a:pPr>
+            <a:r>
+              <a:rPr lang="en-US" sz="1900" b="1" dirty="0">
+                <a:solidFill>
+                  <a:srgbClr val="172C2A"/>
+                </a:solidFill>
+                <a:latin typeface="Trebuchet MS" pitchFamily="34" charset="0"/>
+                <a:ea typeface="Trebuchet MS" pitchFamily="34" charset="-122"/>
+                <a:cs typeface="Trebuchet MS" pitchFamily="34" charset="-120"/>
+              </a:rPr>
+              <a:t>Gratis selamanya</a:t>
+            </a:r>
+            <a:endParaRPr lang="en-US" sz="1900" dirty="0"/>
+          </a:p>
+        </p:txBody>
+      </p:sp>
+      <p:sp>
+        <p:nvSpPr>
+          <p:cNvPr id="17" name="Text 12"/>
+          <p:cNvSpPr/>
+          <p:nvPr/>
+        </p:nvSpPr>
+        <p:spPr>
+          <a:xfrm>
+            <a:off x="731520" y="2249424"/>
+            <a:ext cx="3198266" cy="566928"/>
+          </a:xfrm>
+          <a:prstGeom prst="rect">
+            <a:avLst/>
+          </a:prstGeom>
+          <a:noFill/>
+          <a:ln/>
+        </p:spPr>
+        <p:txBody>
+          <a:bodyPr wrap="square" lIns="0" tIns="0" rIns="0" bIns="0" rtlCol="0" anchor="t"/>
+          <a:lstStyle/>
+          <a:p>
+            <a:pPr indent="0" marL="0">
+              <a:buNone/>
+            </a:pPr>
+            <a:r>
+              <a:rPr lang="en-US" sz="1000" dirty="0">
+                <a:solidFill>
+                  <a:srgbClr val="172C2A"/>
+                </a:solidFill>
+                <a:latin typeface="Calibri" pitchFamily="34" charset="0"/>
+                <a:ea typeface="Calibri" pitchFamily="34" charset="-122"/>
+                <a:cs typeface="Calibri" pitchFamily="34" charset="-120"/>
+              </a:rPr>
+              <a:t>Papan, suara, misi harian, sinkron. Suara anak tidak pernah dikunci di balik langganan.</a:t>
+            </a:r>
+            <a:endParaRPr lang="en-US" sz="1000" dirty="0"/>
+          </a:p>
+        </p:txBody>
+      </p:sp>
+      <p:sp>
+        <p:nvSpPr>
+          <p:cNvPr id="18" name="Shape 13"/>
+          <p:cNvSpPr/>
+          <p:nvPr/>
+        </p:nvSpPr>
+        <p:spPr>
+          <a:xfrm>
+            <a:off x="4313834" y="1481328"/>
+            <a:ext cx="3564026" cy="1389888"/>
+          </a:xfrm>
+          <a:prstGeom prst="roundRect">
+            <a:avLst>
+              <a:gd name="adj" fmla="val 7895"/>
+            </a:avLst>
+          </a:prstGeom>
+          <a:solidFill>
+            <a:srgbClr val="FFFFFF"/>
+          </a:solidFill>
+          <a:ln w="9525">
+            <a:solidFill>
+              <a:srgbClr val="DCEEEC"/>
+            </a:solidFill>
+            <a:prstDash val="solid"/>
+          </a:ln>
+        </p:spPr>
+      </p:sp>
+      <p:sp>
+        <p:nvSpPr>
+          <p:cNvPr id="19" name="Shape 14"/>
+          <p:cNvSpPr/>
+          <p:nvPr/>
+        </p:nvSpPr>
+        <p:spPr>
+          <a:xfrm>
+            <a:off x="4496714" y="1645920"/>
+            <a:ext cx="512064" cy="512064"/>
           </a:xfrm>
           <a:prstGeom prst="ellipse">
             <a:avLst/>
@@ -10320,22 +10604,22 @@
       </p:sp>
       <p:pic>
         <p:nvPicPr>
-          <p:cNvPr id="14" name="Image 1" descr="preencoded.png">    </p:cNvPr>
+          <p:cNvPr id="20" name="Image 2" descr="preencoded.png">    </p:cNvPr>
           <p:cNvPicPr>
             <a:picLocks noChangeAspect="1"/>
           </p:cNvPicPr>
           <p:nvPr/>
         </p:nvPicPr>
         <p:blipFill>
-          <a:blip r:embed="rId2"/>
+          <a:blip r:embed="rId3"/>
           <a:stretch>
             <a:fillRect/>
           </a:stretch>
         </p:blipFill>
         <p:spPr>
           <a:xfrm>
-            <a:off x="876361" y="2165665"/>
-            <a:ext cx="313822" cy="313822"/>
+            <a:off x="4619610" y="1768815"/>
+            <a:ext cx="266273" cy="266273"/>
           </a:xfrm>
           <a:prstGeom prst="rect">
             <a:avLst/>
@@ -10344,14 +10628,14 @@
       </p:pic>
       <p:sp>
         <p:nvSpPr>
-          <p:cNvPr id="15" name="Text 10"/>
-          <p:cNvSpPr/>
-          <p:nvPr/>
-        </p:nvSpPr>
-        <p:spPr>
-          <a:xfrm>
-            <a:off x="1481328" y="1856232"/>
-            <a:ext cx="3108960" cy="932688"/>
+          <p:cNvPr id="21" name="Text 15"/>
+          <p:cNvSpPr/>
+          <p:nvPr/>
+        </p:nvSpPr>
+        <p:spPr>
+          <a:xfrm>
+            <a:off x="5136794" y="1609344"/>
+            <a:ext cx="2603906" cy="219456"/>
           </a:xfrm>
           <a:prstGeom prst="rect">
             <a:avLst/>
@@ -10367,7 +10651,46 @@
               <a:buNone/>
             </a:pPr>
             <a:r>
-              <a:rPr lang="en-US" sz="1450" b="1" dirty="0">
+              <a:rPr lang="en-US" sz="850" b="1" spc="100" kern="0" dirty="0">
+                <a:solidFill>
+                  <a:srgbClr val="098277"/>
+                </a:solidFill>
+                <a:latin typeface="Calibri" pitchFamily="34" charset="0"/>
+                <a:ea typeface="Calibri" pitchFamily="34" charset="-122"/>
+                <a:cs typeface="Calibri" pitchFamily="34" charset="-120"/>
+              </a:rPr>
+              <a:t>TERAPIS &amp; INSTITUSI · PEMBAYAR</a:t>
+            </a:r>
+            <a:endParaRPr lang="en-US" sz="850" dirty="0"/>
+          </a:p>
+        </p:txBody>
+      </p:sp>
+      <p:sp>
+        <p:nvSpPr>
+          <p:cNvPr id="22" name="Text 16"/>
+          <p:cNvSpPr/>
+          <p:nvPr/>
+        </p:nvSpPr>
+        <p:spPr>
+          <a:xfrm>
+            <a:off x="5136794" y="1810512"/>
+            <a:ext cx="2603906" cy="384048"/>
+          </a:xfrm>
+          <a:prstGeom prst="rect">
+            <a:avLst/>
+          </a:prstGeom>
+          <a:noFill/>
+          <a:ln/>
+        </p:spPr>
+        <p:txBody>
+          <a:bodyPr wrap="square" lIns="0" tIns="0" rIns="0" bIns="0" rtlCol="0" anchor="ctr"/>
+          <a:lstStyle/>
+          <a:p>
+            <a:pPr indent="0" marL="0">
+              <a:buNone/>
+            </a:pPr>
+            <a:r>
+              <a:rPr lang="en-US" sz="1900" b="1" dirty="0">
                 <a:solidFill>
                   <a:srgbClr val="172C2A"/>
                 </a:solidFill>
@@ -10375,16 +10698,38 @@
                 <a:ea typeface="Trebuchet MS" pitchFamily="34" charset="-122"/>
                 <a:cs typeface="Trebuchet MS" pitchFamily="34" charset="-120"/>
               </a:rPr>
-              <a:t>Anak</a:t>
-            </a:r>
-            <a:endParaRPr lang="en-US" sz="1450" dirty="0"/>
-          </a:p>
+              <a:t>Rp150–250 rb*</a:t>
+            </a:r>
+            <a:endParaRPr lang="en-US" sz="1900" dirty="0"/>
+          </a:p>
+        </p:txBody>
+      </p:sp>
+      <p:sp>
+        <p:nvSpPr>
+          <p:cNvPr id="23" name="Text 17"/>
+          <p:cNvSpPr/>
+          <p:nvPr/>
+        </p:nvSpPr>
+        <p:spPr>
+          <a:xfrm>
+            <a:off x="4496714" y="2249424"/>
+            <a:ext cx="3198266" cy="566928"/>
+          </a:xfrm>
+          <a:prstGeom prst="rect">
+            <a:avLst/>
+          </a:prstGeom>
+          <a:noFill/>
+          <a:ln/>
+        </p:spPr>
+        <p:txBody>
+          <a:bodyPr wrap="square" lIns="0" tIns="0" rIns="0" bIns="0" rtlCol="0" anchor="t"/>
+          <a:lstStyle/>
           <a:p>
             <a:pPr indent="0" marL="0">
               <a:buNone/>
             </a:pPr>
             <a:r>
-              <a:rPr lang="en-US" sz="1150" dirty="0">
+              <a:rPr lang="en-US" sz="1000" dirty="0">
                 <a:solidFill>
                   <a:srgbClr val="172C2A"/>
                 </a:solidFill>
@@ -10392,26 +10737,26 @@
                 <a:ea typeface="Calibri" pitchFamily="34" charset="-122"/>
                 <a:cs typeface="Calibri" pitchFamily="34" charset="-120"/>
               </a:rPr>
-              <a:t>Punya suara yang sama di rumah dan di mana saja, tanpa sinyal.</a:t>
-            </a:r>
-            <a:endParaRPr lang="en-US" sz="1450" dirty="0"/>
-          </a:p>
-        </p:txBody>
-      </p:sp>
-      <p:sp>
-        <p:nvSpPr>
-          <p:cNvPr id="16" name="Shape 11"/>
-          <p:cNvSpPr/>
-          <p:nvPr/>
-        </p:nvSpPr>
-        <p:spPr>
-          <a:xfrm>
-            <a:off x="548640" y="2990088"/>
-            <a:ext cx="4206240" cy="1078992"/>
+              <a:t>per terapis per bulan: dasbor pantau, data rumah, usulan, catatan sesi. Add-on suara &amp; foto AI.</a:t>
+            </a:r>
+            <a:endParaRPr lang="en-US" sz="1000" dirty="0"/>
+          </a:p>
+        </p:txBody>
+      </p:sp>
+      <p:sp>
+        <p:nvSpPr>
+          <p:cNvPr id="24" name="Shape 18"/>
+          <p:cNvSpPr/>
+          <p:nvPr/>
+        </p:nvSpPr>
+        <p:spPr>
+          <a:xfrm>
+            <a:off x="8079029" y="1481328"/>
+            <a:ext cx="3564026" cy="1389888"/>
           </a:xfrm>
           <a:prstGeom prst="roundRect">
             <a:avLst>
-              <a:gd name="adj" fmla="val 10169"/>
+              <a:gd name="adj" fmla="val 7895"/>
             </a:avLst>
           </a:prstGeom>
           <a:solidFill>
@@ -10427,6 +10772,2080 @@
       </p:sp>
       <p:sp>
         <p:nvSpPr>
+          <p:cNvPr id="25" name="Shape 19"/>
+          <p:cNvSpPr/>
+          <p:nvPr/>
+        </p:nvSpPr>
+        <p:spPr>
+          <a:xfrm>
+            <a:off x="8261909" y="1645920"/>
+            <a:ext cx="512064" cy="512064"/>
+          </a:xfrm>
+          <a:prstGeom prst="ellipse">
+            <a:avLst/>
+          </a:prstGeom>
+          <a:solidFill>
+            <a:srgbClr val="5B57A8"/>
+          </a:solidFill>
+          <a:ln w="12700">
+            <a:solidFill>
+              <a:srgbClr val="5B57A8"/>
+            </a:solidFill>
+            <a:prstDash val="solid"/>
+          </a:ln>
+        </p:spPr>
+      </p:sp>
+      <p:pic>
+        <p:nvPicPr>
+          <p:cNvPr id="26" name="Image 3" descr="preencoded.png">    </p:cNvPr>
+          <p:cNvPicPr>
+            <a:picLocks noChangeAspect="1"/>
+          </p:cNvPicPr>
+          <p:nvPr/>
+        </p:nvPicPr>
+        <p:blipFill>
+          <a:blip r:embed="rId4"/>
+          <a:stretch>
+            <a:fillRect/>
+          </a:stretch>
+        </p:blipFill>
+        <p:spPr>
+          <a:xfrm>
+            <a:off x="8384804" y="1768815"/>
+            <a:ext cx="266273" cy="266273"/>
+          </a:xfrm>
+          <a:prstGeom prst="rect">
+            <a:avLst/>
+          </a:prstGeom>
+        </p:spPr>
+      </p:pic>
+      <p:sp>
+        <p:nvSpPr>
+          <p:cNvPr id="27" name="Text 20"/>
+          <p:cNvSpPr/>
+          <p:nvPr/>
+        </p:nvSpPr>
+        <p:spPr>
+          <a:xfrm>
+            <a:off x="8901989" y="1609344"/>
+            <a:ext cx="2603906" cy="219456"/>
+          </a:xfrm>
+          <a:prstGeom prst="rect">
+            <a:avLst/>
+          </a:prstGeom>
+          <a:noFill/>
+          <a:ln/>
+        </p:spPr>
+        <p:txBody>
+          <a:bodyPr wrap="square" lIns="0" tIns="0" rIns="0" bIns="0" rtlCol="0" anchor="ctr"/>
+          <a:lstStyle/>
+          <a:p>
+            <a:pPr indent="0" marL="0">
+              <a:buNone/>
+            </a:pPr>
+            <a:r>
+              <a:rPr lang="en-US" sz="850" b="1" spc="100" kern="0" dirty="0">
+                <a:solidFill>
+                  <a:srgbClr val="5B57A8"/>
+                </a:solidFill>
+                <a:latin typeface="Calibri" pitchFamily="34" charset="0"/>
+                <a:ea typeface="Calibri" pitchFamily="34" charset="-122"/>
+                <a:cs typeface="Calibri" pitchFamily="34" charset="-120"/>
+              </a:rPr>
+              <a:t>PEMERINTAH &amp; CSR · SKALA</a:t>
+            </a:r>
+            <a:endParaRPr lang="en-US" sz="850" dirty="0"/>
+          </a:p>
+        </p:txBody>
+      </p:sp>
+      <p:sp>
+        <p:nvSpPr>
+          <p:cNvPr id="28" name="Text 21"/>
+          <p:cNvSpPr/>
+          <p:nvPr/>
+        </p:nvSpPr>
+        <p:spPr>
+          <a:xfrm>
+            <a:off x="8901989" y="1810512"/>
+            <a:ext cx="2603906" cy="384048"/>
+          </a:xfrm>
+          <a:prstGeom prst="rect">
+            <a:avLst/>
+          </a:prstGeom>
+          <a:noFill/>
+          <a:ln/>
+        </p:spPr>
+        <p:txBody>
+          <a:bodyPr wrap="square" lIns="0" tIns="0" rIns="0" bIns="0" rtlCol="0" anchor="ctr"/>
+          <a:lstStyle/>
+          <a:p>
+            <a:pPr indent="0" marL="0">
+              <a:buNone/>
+            </a:pPr>
+            <a:r>
+              <a:rPr lang="en-US" sz="1900" b="1" dirty="0">
+                <a:solidFill>
+                  <a:srgbClr val="172C2A"/>
+                </a:solidFill>
+                <a:latin typeface="Trebuchet MS" pitchFamily="34" charset="0"/>
+                <a:ea typeface="Trebuchet MS" pitchFamily="34" charset="-122"/>
+                <a:cs typeface="Trebuchet MS" pitchFamily="34" charset="-120"/>
+              </a:rPr>
+              <a:t>Tahap 3</a:t>
+            </a:r>
+            <a:endParaRPr lang="en-US" sz="1900" dirty="0"/>
+          </a:p>
+        </p:txBody>
+      </p:sp>
+      <p:sp>
+        <p:nvSpPr>
+          <p:cNvPr id="29" name="Text 22"/>
+          <p:cNvSpPr/>
+          <p:nvPr/>
+        </p:nvSpPr>
+        <p:spPr>
+          <a:xfrm>
+            <a:off x="8261909" y="2249424"/>
+            <a:ext cx="3198266" cy="566928"/>
+          </a:xfrm>
+          <a:prstGeom prst="rect">
+            <a:avLst/>
+          </a:prstGeom>
+          <a:noFill/>
+          <a:ln/>
+        </p:spPr>
+        <p:txBody>
+          <a:bodyPr wrap="square" lIns="0" tIns="0" rIns="0" bIns="0" rtlCol="0" anchor="t"/>
+          <a:lstStyle/>
+          <a:p>
+            <a:pPr indent="0" marL="0">
+              <a:buNone/>
+            </a:pPr>
+            <a:r>
+              <a:rPr lang="en-US" sz="1000" dirty="0">
+                <a:solidFill>
+                  <a:srgbClr val="172C2A"/>
+                </a:solidFill>
+                <a:latin typeface="Calibri" pitchFamily="34" charset="0"/>
+                <a:ea typeface="Calibri" pitchFamily="34" charset="-122"/>
+                <a:cs typeface="Calibri" pitchFamily="34" charset="-120"/>
+              </a:rPr>
+              <a:t>Klinik → SLB dan yayasan → pemda dan CSR, setelah pilot membuktikan retensi.</a:t>
+            </a:r>
+            <a:endParaRPr lang="en-US" sz="1000" dirty="0"/>
+          </a:p>
+        </p:txBody>
+      </p:sp>
+      <p:sp>
+        <p:nvSpPr>
+          <p:cNvPr id="30" name="Shape 23"/>
+          <p:cNvSpPr/>
+          <p:nvPr/>
+        </p:nvSpPr>
+        <p:spPr>
+          <a:xfrm>
+            <a:off x="548640" y="3017520"/>
+            <a:ext cx="3246120" cy="2331720"/>
+          </a:xfrm>
+          <a:prstGeom prst="roundRect">
+            <a:avLst>
+              <a:gd name="adj" fmla="val 4706"/>
+            </a:avLst>
+          </a:prstGeom>
+          <a:solidFill>
+            <a:srgbClr val="FFFFFF"/>
+          </a:solidFill>
+          <a:ln w="9525">
+            <a:solidFill>
+              <a:srgbClr val="DCEEEC"/>
+            </a:solidFill>
+            <a:prstDash val="solid"/>
+          </a:ln>
+        </p:spPr>
+      </p:sp>
+      <p:sp>
+        <p:nvSpPr>
+          <p:cNvPr id="31" name="Text 24"/>
+          <p:cNvSpPr/>
+          <p:nvPr/>
+        </p:nvSpPr>
+        <p:spPr>
+          <a:xfrm>
+            <a:off x="731520" y="3127248"/>
+            <a:ext cx="2880360" cy="219456"/>
+          </a:xfrm>
+          <a:prstGeom prst="rect">
+            <a:avLst/>
+          </a:prstGeom>
+          <a:noFill/>
+          <a:ln/>
+        </p:spPr>
+        <p:txBody>
+          <a:bodyPr wrap="square" lIns="0" tIns="0" rIns="0" bIns="0" rtlCol="0" anchor="ctr"/>
+          <a:lstStyle/>
+          <a:p>
+            <a:pPr indent="0" marL="0">
+              <a:buNone/>
+            </a:pPr>
+            <a:r>
+              <a:rPr lang="en-US" sz="900" b="1" spc="100" kern="0" dirty="0">
+                <a:solidFill>
+                  <a:srgbClr val="026E65"/>
+                </a:solidFill>
+                <a:latin typeface="Calibri" pitchFamily="34" charset="0"/>
+                <a:ea typeface="Calibri" pitchFamily="34" charset="-122"/>
+                <a:cs typeface="Calibri" pitchFamily="34" charset="-120"/>
+              </a:rPr>
+              <a:t>KENAPA BUKAN B2C ATAU B2G DULU</a:t>
+            </a:r>
+            <a:endParaRPr lang="en-US" sz="900" dirty="0"/>
+          </a:p>
+        </p:txBody>
+      </p:sp>
+      <p:sp>
+        <p:nvSpPr>
+          <p:cNvPr id="32" name="Text 25"/>
+          <p:cNvSpPr/>
+          <p:nvPr/>
+        </p:nvSpPr>
+        <p:spPr>
+          <a:xfrm>
+            <a:off x="731520" y="3401568"/>
+            <a:ext cx="2898648" cy="1874520"/>
+          </a:xfrm>
+          <a:prstGeom prst="rect">
+            <a:avLst/>
+          </a:prstGeom>
+          <a:noFill/>
+          <a:ln/>
+        </p:spPr>
+        <p:txBody>
+          <a:bodyPr wrap="square" lIns="0" tIns="0" rIns="0" bIns="0" rtlCol="0" anchor="t"/>
+          <a:lstStyle/>
+          <a:p>
+            <a:pPr indent="0" marL="0">
+              <a:spcAft>
+                <a:spcPts val="500"/>
+              </a:spcAft>
+              <a:buNone/>
+            </a:pPr>
+            <a:r>
+              <a:rPr lang="en-US" sz="950" b="1" dirty="0">
+                <a:solidFill>
+                  <a:srgbClr val="172C2A"/>
+                </a:solidFill>
+                <a:latin typeface="Calibri" pitchFamily="34" charset="0"/>
+                <a:ea typeface="Calibri" pitchFamily="34" charset="-122"/>
+                <a:cs typeface="Calibri" pitchFamily="34" charset="-120"/>
+              </a:rPr>
+              <a:t>Etika AAC: </a:t>
+            </a:r>
+            <a:pPr indent="0" marL="0">
+              <a:spcAft>
+                <a:spcPts val="500"/>
+              </a:spcAft>
+              <a:buNone/>
+            </a:pPr>
+            <a:r>
+              <a:rPr lang="en-US" sz="950" dirty="0">
+                <a:solidFill>
+                  <a:srgbClr val="172C2A"/>
+                </a:solidFill>
+                <a:latin typeface="Calibri" pitchFamily="34" charset="0"/>
+                <a:ea typeface="Calibri" pitchFamily="34" charset="-122"/>
+                <a:cs typeface="Calibri" pitchFamily="34" charset="-120"/>
+              </a:rPr>
+              <a:t>kalau langganan habis, anak kehilangan suaranya.</a:t>
+            </a:r>
+            <a:endParaRPr lang="en-US" sz="950" dirty="0"/>
+          </a:p>
+          <a:p>
+            <a:pPr indent="0" marL="0">
+              <a:spcAft>
+                <a:spcPts val="500"/>
+              </a:spcAft>
+              <a:buNone/>
+            </a:pPr>
+            <a:r>
+              <a:rPr lang="en-US" sz="950" b="1" dirty="0">
+                <a:solidFill>
+                  <a:srgbClr val="172C2A"/>
+                </a:solidFill>
+                <a:latin typeface="Calibri" pitchFamily="34" charset="0"/>
+                <a:ea typeface="Calibri" pitchFamily="34" charset="-122"/>
+                <a:cs typeface="Calibri" pitchFamily="34" charset="-120"/>
+              </a:rPr>
+              <a:t>Harga menambah alasan berhenti: </a:t>
+            </a:r>
+            <a:pPr indent="0" marL="0">
+              <a:spcAft>
+                <a:spcPts val="500"/>
+              </a:spcAft>
+              <a:buNone/>
+            </a:pPr>
+            <a:r>
+              <a:rPr lang="en-US" sz="950" dirty="0">
+                <a:solidFill>
+                  <a:srgbClr val="172C2A"/>
+                </a:solidFill>
+                <a:latin typeface="Calibri" pitchFamily="34" charset="0"/>
+                <a:ea typeface="Calibri" pitchFamily="34" charset="-122"/>
+                <a:cs typeface="Calibri" pitchFamily="34" charset="-120"/>
+              </a:rPr>
+              <a:t>29,3% alat bantu sudah ditinggalkan (Phillips &amp; Zhao 1993).</a:t>
+            </a:r>
+            <a:endParaRPr lang="en-US" sz="950" dirty="0"/>
+          </a:p>
+          <a:p>
+            <a:pPr indent="0" marL="0">
+              <a:spcAft>
+                <a:spcPts val="500"/>
+              </a:spcAft>
+              <a:buNone/>
+            </a:pPr>
+            <a:r>
+              <a:rPr lang="en-US" sz="950" b="1" dirty="0">
+                <a:solidFill>
+                  <a:srgbClr val="172C2A"/>
+                </a:solidFill>
+                <a:latin typeface="Calibri" pitchFamily="34" charset="0"/>
+                <a:ea typeface="Calibri" pitchFamily="34" charset="-122"/>
+                <a:cs typeface="Calibri" pitchFamily="34" charset="-120"/>
+              </a:rPr>
+              <a:t>Yang mendapat nilai, dia yang membayar: </a:t>
+            </a:r>
+            <a:pPr indent="0" marL="0">
+              <a:spcAft>
+                <a:spcPts val="500"/>
+              </a:spcAft>
+              <a:buNone/>
+            </a:pPr>
+            <a:r>
+              <a:rPr lang="en-US" sz="950" dirty="0">
+                <a:solidFill>
+                  <a:srgbClr val="172C2A"/>
+                </a:solidFill>
+                <a:latin typeface="Calibri" pitchFamily="34" charset="0"/>
+                <a:ea typeface="Calibri" pitchFamily="34" charset="-122"/>
+                <a:cs typeface="Calibri" pitchFamily="34" charset="-120"/>
+              </a:rPr>
+              <a:t>terapis menerima data rumah dan triase.</a:t>
+            </a:r>
+            <a:endParaRPr lang="en-US" sz="950" dirty="0"/>
+          </a:p>
+          <a:p>
+            <a:pPr indent="0" marL="0">
+              <a:spcAft>
+                <a:spcPts val="500"/>
+              </a:spcAft>
+              <a:buNone/>
+            </a:pPr>
+            <a:r>
+              <a:rPr lang="en-US" sz="950" b="1" dirty="0">
+                <a:solidFill>
+                  <a:srgbClr val="172C2A"/>
+                </a:solidFill>
+                <a:latin typeface="Calibri" pitchFamily="34" charset="0"/>
+                <a:ea typeface="Calibri" pitchFamily="34" charset="-122"/>
+                <a:cs typeface="Calibri" pitchFamily="34" charset="-120"/>
+              </a:rPr>
+              <a:t>B2G tahap 3: </a:t>
+            </a:r>
+            <a:pPr indent="0" marL="0">
+              <a:spcAft>
+                <a:spcPts val="500"/>
+              </a:spcAft>
+              <a:buNone/>
+            </a:pPr>
+            <a:r>
+              <a:rPr lang="en-US" sz="950" dirty="0">
+                <a:solidFill>
+                  <a:srgbClr val="172C2A"/>
+                </a:solidFill>
+                <a:latin typeface="Calibri" pitchFamily="34" charset="0"/>
+                <a:ea typeface="Calibri" pitchFamily="34" charset="-122"/>
+                <a:cs typeface="Calibri" pitchFamily="34" charset="-120"/>
+              </a:rPr>
+              <a:t>butuh bukti pilot, HTTPS, dan enkripsi.</a:t>
+            </a:r>
+            <a:endParaRPr lang="en-US" sz="950" dirty="0"/>
+          </a:p>
+        </p:txBody>
+      </p:sp>
+      <p:graphicFrame>
+        <p:nvGraphicFramePr>
+          <p:cNvPr id="15" name="Table 0"/>
+          <p:cNvGraphicFramePr>
+            <a:graphicFrameLocks noGrp="1"/>
+          </p:cNvGraphicFramePr>
+          <p:nvPr>
+            <p:extLst>
+              <p:ext uri="{D42A27DB-BD31-4B8C-83A1-F6EECF244321}">
+                <p14:modId xmlns:p14="http://schemas.microsoft.com/office/powerpoint/2010/main" val="1579011935"/>
+              </p:ext>
+            </p:extLst>
+          </p:nvPr>
+        </p:nvGraphicFramePr>
+        <p:xfrm>
+          <a:off x="3995928" y="3017520"/>
+          <a:ext cx="4206240" cy="914400"/>
+        </p:xfrm>
+        <a:graphic>
+          <a:graphicData uri="http://schemas.openxmlformats.org/drawingml/2006/table">
+            <a:tbl>
+              <a:tblPr/>
+              <a:tblGrid>
+                <a:gridCol w="3108960"/>
+                <a:gridCol w="1097280"/>
+              </a:tblGrid>
+              <a:tr h="310896">
+                <a:tc>
+                  <a:txBody>
+                    <a:bodyPr/>
+                    <a:lstStyle/>
+                    <a:p>
+                      <a:pPr algn="l" indent="0" marL="0">
+                        <a:buNone/>
+                      </a:pPr>
+                      <a:r>
+                        <a:rPr lang="en-US" sz="950" b="1" dirty="0">
+                          <a:solidFill>
+                            <a:srgbClr val="52706D"/>
+                          </a:solidFill>
+                          <a:latin typeface="Calibri" pitchFamily="34" charset="0"/>
+                          <a:ea typeface="Calibri" pitchFamily="34" charset="-122"/>
+                          <a:cs typeface="Calibri" pitchFamily="34" charset="-120"/>
+                        </a:rPr>
+                        <a:t>Biaya per keluarga / bulan</a:t>
+                      </a:r>
+                      <a:endParaRPr lang="en-US" sz="950" dirty="0">
+                        <a:latin typeface="Calibri" charset="0"/>
+                        <a:ea typeface="Calibri" charset="0"/>
+                        <a:cs typeface="Calibri" charset="0"/>
+                      </a:endParaRPr>
+                    </a:p>
+                  </a:txBody>
+                  <a:tcPr marL="54864" marR="54864" marT="54864" marB="54864" anchor="ctr">
+                    <a:lnL w="9525" cap="flat" cmpd="sng" algn="ctr">
+                      <a:solidFill>
+                        <a:srgbClr val="DCEEEC"/>
+                      </a:solidFill>
+                      <a:prstDash val="solid"/>
+                      <a:round/>
+                      <a:headEnd type="none" w="med" len="med"/>
+                      <a:tailEnd type="none" w="med" len="med"/>
+                    </a:lnL>
+                    <a:lnR w="9525" cap="flat" cmpd="sng" algn="ctr">
+                      <a:solidFill>
+                        <a:srgbClr val="DCEEEC"/>
+                      </a:solidFill>
+                      <a:prstDash val="solid"/>
+                      <a:round/>
+                      <a:headEnd type="none" w="med" len="med"/>
+                      <a:tailEnd type="none" w="med" len="med"/>
+                    </a:lnR>
+                    <a:lnT w="9525" cap="flat" cmpd="sng" algn="ctr">
+                      <a:solidFill>
+                        <a:srgbClr val="DCEEEC"/>
+                      </a:solidFill>
+                      <a:prstDash val="solid"/>
+                      <a:round/>
+                      <a:headEnd type="none" w="med" len="med"/>
+                      <a:tailEnd type="none" w="med" len="med"/>
+                    </a:lnT>
+                    <a:lnB w="9525" cap="flat" cmpd="sng" algn="ctr">
+                      <a:solidFill>
+                        <a:srgbClr val="DCEEEC"/>
+                      </a:solidFill>
+                      <a:prstDash val="solid"/>
+                      <a:round/>
+                      <a:headEnd type="none" w="med" len="med"/>
+                      <a:tailEnd type="none" w="med" len="med"/>
+                    </a:lnB>
+                    <a:solidFill>
+                      <a:srgbClr val="E8F6F5"/>
+                    </a:solidFill>
+                  </a:tcPr>
+                </a:tc>
+                <a:tc>
+                  <a:txBody>
+                    <a:bodyPr/>
+                    <a:lstStyle/>
+                    <a:p>
+                      <a:pPr algn="r" indent="0" marL="0">
+                        <a:buNone/>
+                      </a:pPr>
+                      <a:r>
+                        <a:rPr lang="en-US" sz="950" b="1" dirty="0">
+                          <a:solidFill>
+                            <a:srgbClr val="52706D"/>
+                          </a:solidFill>
+                          <a:latin typeface="Calibri" pitchFamily="34" charset="0"/>
+                          <a:ea typeface="Calibri" pitchFamily="34" charset="-122"/>
+                          <a:cs typeface="Calibri" pitchFamily="34" charset="-120"/>
+                        </a:rPr>
+                        <a:t>Perkiraan</a:t>
+                      </a:r>
+                      <a:endParaRPr lang="en-US" sz="950" dirty="0">
+                        <a:latin typeface="Calibri" charset="0"/>
+                        <a:ea typeface="Calibri" charset="0"/>
+                        <a:cs typeface="Calibri" charset="0"/>
+                      </a:endParaRPr>
+                    </a:p>
+                  </a:txBody>
+                  <a:tcPr marL="54864" marR="54864" marT="54864" marB="54864" anchor="ctr">
+                    <a:lnL w="9525" cap="flat" cmpd="sng" algn="ctr">
+                      <a:solidFill>
+                        <a:srgbClr val="DCEEEC"/>
+                      </a:solidFill>
+                      <a:prstDash val="solid"/>
+                      <a:round/>
+                      <a:headEnd type="none" w="med" len="med"/>
+                      <a:tailEnd type="none" w="med" len="med"/>
+                    </a:lnL>
+                    <a:lnR w="9525" cap="flat" cmpd="sng" algn="ctr">
+                      <a:solidFill>
+                        <a:srgbClr val="DCEEEC"/>
+                      </a:solidFill>
+                      <a:prstDash val="solid"/>
+                      <a:round/>
+                      <a:headEnd type="none" w="med" len="med"/>
+                      <a:tailEnd type="none" w="med" len="med"/>
+                    </a:lnR>
+                    <a:lnT w="9525" cap="flat" cmpd="sng" algn="ctr">
+                      <a:solidFill>
+                        <a:srgbClr val="DCEEEC"/>
+                      </a:solidFill>
+                      <a:prstDash val="solid"/>
+                      <a:round/>
+                      <a:headEnd type="none" w="med" len="med"/>
+                      <a:tailEnd type="none" w="med" len="med"/>
+                    </a:lnT>
+                    <a:lnB w="9525" cap="flat" cmpd="sng" algn="ctr">
+                      <a:solidFill>
+                        <a:srgbClr val="DCEEEC"/>
+                      </a:solidFill>
+                      <a:prstDash val="solid"/>
+                      <a:round/>
+                      <a:headEnd type="none" w="med" len="med"/>
+                      <a:tailEnd type="none" w="med" len="med"/>
+                    </a:lnB>
+                    <a:solidFill>
+                      <a:srgbClr val="E8F6F5"/>
+                    </a:solidFill>
+                  </a:tcPr>
+                </a:tc>
+              </a:tr>
+              <a:tr h="457200">
+                <a:tc>
+                  <a:txBody>
+                    <a:bodyPr/>
+                    <a:lstStyle/>
+                    <a:p>
+                      <a:pPr indent="0" marL="0">
+                        <a:buNone/>
+                      </a:pPr>
+                      <a:r>
+                        <a:rPr lang="en-US" sz="950" dirty="0">
+                          <a:solidFill>
+                            <a:srgbClr val="172C2A"/>
+                          </a:solidFill>
+                          <a:latin typeface="Calibri" pitchFamily="34" charset="0"/>
+                          <a:ea typeface="Calibri" pitchFamily="34" charset="-122"/>
+                          <a:cs typeface="Calibri" pitchFamily="34" charset="-120"/>
+                        </a:rPr>
+                        <a:t>Papan + suara 120 kata (sekali &lt; US$0,20, luring)</a:t>
+                      </a:r>
+                      <a:endParaRPr lang="en-US" sz="950" dirty="0">
+                        <a:latin typeface="Calibri" charset="0"/>
+                        <a:ea typeface="Calibri" charset="0"/>
+                        <a:cs typeface="Calibri" charset="0"/>
+                      </a:endParaRPr>
+                    </a:p>
+                  </a:txBody>
+                  <a:tcPr marL="54864" marR="54864" marT="54864" marB="54864" anchor="ctr">
+                    <a:lnL w="9525" cap="flat" cmpd="sng" algn="ctr">
+                      <a:solidFill>
+                        <a:srgbClr val="DCEEEC"/>
+                      </a:solidFill>
+                      <a:prstDash val="solid"/>
+                      <a:round/>
+                      <a:headEnd type="none" w="med" len="med"/>
+                      <a:tailEnd type="none" w="med" len="med"/>
+                    </a:lnL>
+                    <a:lnR w="9525" cap="flat" cmpd="sng" algn="ctr">
+                      <a:solidFill>
+                        <a:srgbClr val="DCEEEC"/>
+                      </a:solidFill>
+                      <a:prstDash val="solid"/>
+                      <a:round/>
+                      <a:headEnd type="none" w="med" len="med"/>
+                      <a:tailEnd type="none" w="med" len="med"/>
+                    </a:lnR>
+                    <a:lnT w="9525" cap="flat" cmpd="sng" algn="ctr">
+                      <a:solidFill>
+                        <a:srgbClr val="DCEEEC"/>
+                      </a:solidFill>
+                      <a:prstDash val="solid"/>
+                      <a:round/>
+                      <a:headEnd type="none" w="med" len="med"/>
+                      <a:tailEnd type="none" w="med" len="med"/>
+                    </a:lnT>
+                    <a:lnB w="9525" cap="flat" cmpd="sng" algn="ctr">
+                      <a:solidFill>
+                        <a:srgbClr val="DCEEEC"/>
+                      </a:solidFill>
+                      <a:prstDash val="solid"/>
+                      <a:round/>
+                      <a:headEnd type="none" w="med" len="med"/>
+                      <a:tailEnd type="none" w="med" len="med"/>
+                    </a:lnB>
+                    <a:solidFill>
+                      <a:srgbClr val="FFFFFF"/>
+                    </a:solidFill>
+                  </a:tcPr>
+                </a:tc>
+                <a:tc>
+                  <a:txBody>
+                    <a:bodyPr/>
+                    <a:lstStyle/>
+                    <a:p>
+                      <a:pPr algn="r" indent="0" marL="0">
+                        <a:buNone/>
+                      </a:pPr>
+                      <a:r>
+                        <a:rPr lang="en-US" sz="950" b="1" dirty="0">
+                          <a:solidFill>
+                            <a:srgbClr val="026E65"/>
+                          </a:solidFill>
+                          <a:latin typeface="Calibri" pitchFamily="34" charset="0"/>
+                          <a:ea typeface="Calibri" pitchFamily="34" charset="-122"/>
+                          <a:cs typeface="Calibri" pitchFamily="34" charset="-120"/>
+                        </a:rPr>
+                        <a:t>≈ Rp0</a:t>
+                      </a:r>
+                      <a:endParaRPr lang="en-US" sz="950" dirty="0">
+                        <a:latin typeface="Calibri" charset="0"/>
+                        <a:ea typeface="Calibri" charset="0"/>
+                        <a:cs typeface="Calibri" charset="0"/>
+                      </a:endParaRPr>
+                    </a:p>
+                  </a:txBody>
+                  <a:tcPr marL="54864" marR="54864" marT="54864" marB="54864" anchor="ctr">
+                    <a:lnL w="9525" cap="flat" cmpd="sng" algn="ctr">
+                      <a:solidFill>
+                        <a:srgbClr val="DCEEEC"/>
+                      </a:solidFill>
+                      <a:prstDash val="solid"/>
+                      <a:round/>
+                      <a:headEnd type="none" w="med" len="med"/>
+                      <a:tailEnd type="none" w="med" len="med"/>
+                    </a:lnL>
+                    <a:lnR w="9525" cap="flat" cmpd="sng" algn="ctr">
+                      <a:solidFill>
+                        <a:srgbClr val="DCEEEC"/>
+                      </a:solidFill>
+                      <a:prstDash val="solid"/>
+                      <a:round/>
+                      <a:headEnd type="none" w="med" len="med"/>
+                      <a:tailEnd type="none" w="med" len="med"/>
+                    </a:lnR>
+                    <a:lnT w="9525" cap="flat" cmpd="sng" algn="ctr">
+                      <a:solidFill>
+                        <a:srgbClr val="DCEEEC"/>
+                      </a:solidFill>
+                      <a:prstDash val="solid"/>
+                      <a:round/>
+                      <a:headEnd type="none" w="med" len="med"/>
+                      <a:tailEnd type="none" w="med" len="med"/>
+                    </a:lnT>
+                    <a:lnB w="9525" cap="flat" cmpd="sng" algn="ctr">
+                      <a:solidFill>
+                        <a:srgbClr val="DCEEEC"/>
+                      </a:solidFill>
+                      <a:prstDash val="solid"/>
+                      <a:round/>
+                      <a:headEnd type="none" w="med" len="med"/>
+                      <a:tailEnd type="none" w="med" len="med"/>
+                    </a:lnB>
+                    <a:solidFill>
+                      <a:srgbClr val="FFFFFF"/>
+                    </a:solidFill>
+                  </a:tcPr>
+                </a:tc>
+              </a:tr>
+              <a:tr h="457200">
+                <a:tc>
+                  <a:txBody>
+                    <a:bodyPr/>
+                    <a:lstStyle/>
+                    <a:p>
+                      <a:pPr indent="0" marL="0">
+                        <a:buNone/>
+                      </a:pPr>
+                      <a:r>
+                        <a:rPr lang="en-US" sz="950" dirty="0">
+                          <a:solidFill>
+                            <a:srgbClr val="172C2A"/>
+                          </a:solidFill>
+                          <a:latin typeface="Calibri" pitchFamily="34" charset="0"/>
+                          <a:ea typeface="Calibri" pitchFamily="34" charset="-122"/>
+                          <a:cs typeface="Calibri" pitchFamily="34" charset="-120"/>
+                        </a:rPr>
+                        <a:t>Frasa bersuara OpenAI (± 30 frasa)</a:t>
+                      </a:r>
+                      <a:endParaRPr lang="en-US" sz="950" dirty="0">
+                        <a:latin typeface="Calibri" charset="0"/>
+                        <a:ea typeface="Calibri" charset="0"/>
+                        <a:cs typeface="Calibri" charset="0"/>
+                      </a:endParaRPr>
+                    </a:p>
+                  </a:txBody>
+                  <a:tcPr marL="54864" marR="54864" marT="54864" marB="54864" anchor="ctr">
+                    <a:lnL w="9525" cap="flat" cmpd="sng" algn="ctr">
+                      <a:solidFill>
+                        <a:srgbClr val="DCEEEC"/>
+                      </a:solidFill>
+                      <a:prstDash val="solid"/>
+                      <a:round/>
+                      <a:headEnd type="none" w="med" len="med"/>
+                      <a:tailEnd type="none" w="med" len="med"/>
+                    </a:lnL>
+                    <a:lnR w="9525" cap="flat" cmpd="sng" algn="ctr">
+                      <a:solidFill>
+                        <a:srgbClr val="DCEEEC"/>
+                      </a:solidFill>
+                      <a:prstDash val="solid"/>
+                      <a:round/>
+                      <a:headEnd type="none" w="med" len="med"/>
+                      <a:tailEnd type="none" w="med" len="med"/>
+                    </a:lnR>
+                    <a:lnT w="9525" cap="flat" cmpd="sng" algn="ctr">
+                      <a:solidFill>
+                        <a:srgbClr val="DCEEEC"/>
+                      </a:solidFill>
+                      <a:prstDash val="solid"/>
+                      <a:round/>
+                      <a:headEnd type="none" w="med" len="med"/>
+                      <a:tailEnd type="none" w="med" len="med"/>
+                    </a:lnT>
+                    <a:lnB w="9525" cap="flat" cmpd="sng" algn="ctr">
+                      <a:solidFill>
+                        <a:srgbClr val="DCEEEC"/>
+                      </a:solidFill>
+                      <a:prstDash val="solid"/>
+                      <a:round/>
+                      <a:headEnd type="none" w="med" len="med"/>
+                      <a:tailEnd type="none" w="med" len="med"/>
+                    </a:lnB>
+                    <a:solidFill>
+                      <a:srgbClr val="FFFFFF"/>
+                    </a:solidFill>
+                  </a:tcPr>
+                </a:tc>
+                <a:tc>
+                  <a:txBody>
+                    <a:bodyPr/>
+                    <a:lstStyle/>
+                    <a:p>
+                      <a:pPr algn="r" indent="0" marL="0">
+                        <a:buNone/>
+                      </a:pPr>
+                      <a:r>
+                        <a:rPr lang="en-US" sz="950" b="1" dirty="0">
+                          <a:solidFill>
+                            <a:srgbClr val="026E65"/>
+                          </a:solidFill>
+                          <a:latin typeface="Calibri" pitchFamily="34" charset="0"/>
+                          <a:ea typeface="Calibri" pitchFamily="34" charset="-122"/>
+                          <a:cs typeface="Calibri" pitchFamily="34" charset="-120"/>
+                        </a:rPr>
+                        <a:t>&lt; Rp500</a:t>
+                      </a:r>
+                      <a:endParaRPr lang="en-US" sz="950" dirty="0">
+                        <a:latin typeface="Calibri" charset="0"/>
+                        <a:ea typeface="Calibri" charset="0"/>
+                        <a:cs typeface="Calibri" charset="0"/>
+                      </a:endParaRPr>
+                    </a:p>
+                  </a:txBody>
+                  <a:tcPr marL="54864" marR="54864" marT="54864" marB="54864" anchor="ctr">
+                    <a:lnL w="9525" cap="flat" cmpd="sng" algn="ctr">
+                      <a:solidFill>
+                        <a:srgbClr val="DCEEEC"/>
+                      </a:solidFill>
+                      <a:prstDash val="solid"/>
+                      <a:round/>
+                      <a:headEnd type="none" w="med" len="med"/>
+                      <a:tailEnd type="none" w="med" len="med"/>
+                    </a:lnL>
+                    <a:lnR w="9525" cap="flat" cmpd="sng" algn="ctr">
+                      <a:solidFill>
+                        <a:srgbClr val="DCEEEC"/>
+                      </a:solidFill>
+                      <a:prstDash val="solid"/>
+                      <a:round/>
+                      <a:headEnd type="none" w="med" len="med"/>
+                      <a:tailEnd type="none" w="med" len="med"/>
+                    </a:lnR>
+                    <a:lnT w="9525" cap="flat" cmpd="sng" algn="ctr">
+                      <a:solidFill>
+                        <a:srgbClr val="DCEEEC"/>
+                      </a:solidFill>
+                      <a:prstDash val="solid"/>
+                      <a:round/>
+                      <a:headEnd type="none" w="med" len="med"/>
+                      <a:tailEnd type="none" w="med" len="med"/>
+                    </a:lnT>
+                    <a:lnB w="9525" cap="flat" cmpd="sng" algn="ctr">
+                      <a:solidFill>
+                        <a:srgbClr val="DCEEEC"/>
+                      </a:solidFill>
+                      <a:prstDash val="solid"/>
+                      <a:round/>
+                      <a:headEnd type="none" w="med" len="med"/>
+                      <a:tailEnd type="none" w="med" len="med"/>
+                    </a:lnB>
+                    <a:solidFill>
+                      <a:srgbClr val="FFFFFF"/>
+                    </a:solidFill>
+                  </a:tcPr>
+                </a:tc>
+              </a:tr>
+              <a:tr h="530352">
+                <a:tc>
+                  <a:txBody>
+                    <a:bodyPr/>
+                    <a:lstStyle/>
+                    <a:p>
+                      <a:pPr indent="0" marL="0">
+                        <a:buNone/>
+                      </a:pPr>
+                      <a:r>
+                        <a:rPr lang="en-US" sz="950" dirty="0">
+                          <a:solidFill>
+                            <a:srgbClr val="172C2A"/>
+                          </a:solidFill>
+                          <a:latin typeface="Calibri" pitchFamily="34" charset="0"/>
+                          <a:ea typeface="Calibri" pitchFamily="34" charset="-122"/>
+                          <a:cs typeface="Calibri" pitchFamily="34" charset="-120"/>
+                        </a:rPr>
+                        <a:t>Klon suara, cara server sekarang (klon permanen; slot yang cepat habis)</a:t>
+                      </a:r>
+                      <a:endParaRPr lang="en-US" sz="950" dirty="0">
+                        <a:latin typeface="Calibri" charset="0"/>
+                        <a:ea typeface="Calibri" charset="0"/>
+                        <a:cs typeface="Calibri" charset="0"/>
+                      </a:endParaRPr>
+                    </a:p>
+                  </a:txBody>
+                  <a:tcPr marL="54864" marR="54864" marT="54864" marB="54864" anchor="ctr">
+                    <a:lnL w="9525" cap="flat" cmpd="sng" algn="ctr">
+                      <a:solidFill>
+                        <a:srgbClr val="DCEEEC"/>
+                      </a:solidFill>
+                      <a:prstDash val="solid"/>
+                      <a:round/>
+                      <a:headEnd type="none" w="med" len="med"/>
+                      <a:tailEnd type="none" w="med" len="med"/>
+                    </a:lnL>
+                    <a:lnR w="9525" cap="flat" cmpd="sng" algn="ctr">
+                      <a:solidFill>
+                        <a:srgbClr val="DCEEEC"/>
+                      </a:solidFill>
+                      <a:prstDash val="solid"/>
+                      <a:round/>
+                      <a:headEnd type="none" w="med" len="med"/>
+                      <a:tailEnd type="none" w="med" len="med"/>
+                    </a:lnR>
+                    <a:lnT w="9525" cap="flat" cmpd="sng" algn="ctr">
+                      <a:solidFill>
+                        <a:srgbClr val="DCEEEC"/>
+                      </a:solidFill>
+                      <a:prstDash val="solid"/>
+                      <a:round/>
+                      <a:headEnd type="none" w="med" len="med"/>
+                      <a:tailEnd type="none" w="med" len="med"/>
+                    </a:lnT>
+                    <a:lnB w="9525" cap="flat" cmpd="sng" algn="ctr">
+                      <a:solidFill>
+                        <a:srgbClr val="DCEEEC"/>
+                      </a:solidFill>
+                      <a:prstDash val="solid"/>
+                      <a:round/>
+                      <a:headEnd type="none" w="med" len="med"/>
+                      <a:tailEnd type="none" w="med" len="med"/>
+                    </a:lnB>
+                    <a:solidFill>
+                      <a:srgbClr val="FFFFFF"/>
+                    </a:solidFill>
+                  </a:tcPr>
+                </a:tc>
+                <a:tc>
+                  <a:txBody>
+                    <a:bodyPr/>
+                    <a:lstStyle/>
+                    <a:p>
+                      <a:pPr algn="r" indent="0" marL="0">
+                        <a:buNone/>
+                      </a:pPr>
+                      <a:r>
+                        <a:rPr lang="en-US" sz="950" b="1" dirty="0">
+                          <a:solidFill>
+                            <a:srgbClr val="C23D42"/>
+                          </a:solidFill>
+                          <a:latin typeface="Calibri" pitchFamily="34" charset="0"/>
+                          <a:ea typeface="Calibri" pitchFamily="34" charset="-122"/>
+                          <a:cs typeface="Calibri" pitchFamily="34" charset="-120"/>
+                        </a:rPr>
+                        <a:t>± Rp7–11 rb</a:t>
+                      </a:r>
+                      <a:endParaRPr lang="en-US" sz="950" dirty="0">
+                        <a:latin typeface="Calibri" charset="0"/>
+                        <a:ea typeface="Calibri" charset="0"/>
+                        <a:cs typeface="Calibri" charset="0"/>
+                      </a:endParaRPr>
+                    </a:p>
+                  </a:txBody>
+                  <a:tcPr marL="54864" marR="54864" marT="54864" marB="54864" anchor="ctr">
+                    <a:lnL w="9525" cap="flat" cmpd="sng" algn="ctr">
+                      <a:solidFill>
+                        <a:srgbClr val="DCEEEC"/>
+                      </a:solidFill>
+                      <a:prstDash val="solid"/>
+                      <a:round/>
+                      <a:headEnd type="none" w="med" len="med"/>
+                      <a:tailEnd type="none" w="med" len="med"/>
+                    </a:lnL>
+                    <a:lnR w="9525" cap="flat" cmpd="sng" algn="ctr">
+                      <a:solidFill>
+                        <a:srgbClr val="DCEEEC"/>
+                      </a:solidFill>
+                      <a:prstDash val="solid"/>
+                      <a:round/>
+                      <a:headEnd type="none" w="med" len="med"/>
+                      <a:tailEnd type="none" w="med" len="med"/>
+                    </a:lnR>
+                    <a:lnT w="9525" cap="flat" cmpd="sng" algn="ctr">
+                      <a:solidFill>
+                        <a:srgbClr val="DCEEEC"/>
+                      </a:solidFill>
+                      <a:prstDash val="solid"/>
+                      <a:round/>
+                      <a:headEnd type="none" w="med" len="med"/>
+                      <a:tailEnd type="none" w="med" len="med"/>
+                    </a:lnT>
+                    <a:lnB w="9525" cap="flat" cmpd="sng" algn="ctr">
+                      <a:solidFill>
+                        <a:srgbClr val="DCEEEC"/>
+                      </a:solidFill>
+                      <a:prstDash val="solid"/>
+                      <a:round/>
+                      <a:headEnd type="none" w="med" len="med"/>
+                      <a:tailEnd type="none" w="med" len="med"/>
+                    </a:lnB>
+                    <a:solidFill>
+                      <a:srgbClr val="FFFFFF"/>
+                    </a:solidFill>
+                  </a:tcPr>
+                </a:tc>
+              </a:tr>
+              <a:tr h="530352">
+                <a:tc>
+                  <a:txBody>
+                    <a:bodyPr/>
+                    <a:lstStyle/>
+                    <a:p>
+                      <a:pPr indent="0" marL="0">
+                        <a:buNone/>
+                      </a:pPr>
+                      <a:r>
+                        <a:rPr lang="en-US" sz="950" dirty="0">
+                          <a:solidFill>
+                            <a:srgbClr val="172C2A"/>
+                          </a:solidFill>
+                          <a:latin typeface="Calibri" pitchFamily="34" charset="0"/>
+                          <a:ea typeface="Calibri" pitchFamily="34" charset="-122"/>
+                          <a:cs typeface="Calibri" pitchFamily="34" charset="-120"/>
+                        </a:rPr>
+                        <a:t>Klon sementara: buat → frasa → hapus (belum dibangun, syarat sebelum dijual)</a:t>
+                      </a:r>
+                      <a:endParaRPr lang="en-US" sz="950" dirty="0">
+                        <a:latin typeface="Calibri" charset="0"/>
+                        <a:ea typeface="Calibri" charset="0"/>
+                        <a:cs typeface="Calibri" charset="0"/>
+                      </a:endParaRPr>
+                    </a:p>
+                  </a:txBody>
+                  <a:tcPr marL="54864" marR="54864" marT="54864" marB="54864" anchor="ctr">
+                    <a:lnL w="9525" cap="flat" cmpd="sng" algn="ctr">
+                      <a:solidFill>
+                        <a:srgbClr val="DCEEEC"/>
+                      </a:solidFill>
+                      <a:prstDash val="solid"/>
+                      <a:round/>
+                      <a:headEnd type="none" w="med" len="med"/>
+                      <a:tailEnd type="none" w="med" len="med"/>
+                    </a:lnL>
+                    <a:lnR w="9525" cap="flat" cmpd="sng" algn="ctr">
+                      <a:solidFill>
+                        <a:srgbClr val="DCEEEC"/>
+                      </a:solidFill>
+                      <a:prstDash val="solid"/>
+                      <a:round/>
+                      <a:headEnd type="none" w="med" len="med"/>
+                      <a:tailEnd type="none" w="med" len="med"/>
+                    </a:lnR>
+                    <a:lnT w="9525" cap="flat" cmpd="sng" algn="ctr">
+                      <a:solidFill>
+                        <a:srgbClr val="DCEEEC"/>
+                      </a:solidFill>
+                      <a:prstDash val="solid"/>
+                      <a:round/>
+                      <a:headEnd type="none" w="med" len="med"/>
+                      <a:tailEnd type="none" w="med" len="med"/>
+                    </a:lnT>
+                    <a:lnB w="9525" cap="flat" cmpd="sng" algn="ctr">
+                      <a:solidFill>
+                        <a:srgbClr val="DCEEEC"/>
+                      </a:solidFill>
+                      <a:prstDash val="solid"/>
+                      <a:round/>
+                      <a:headEnd type="none" w="med" len="med"/>
+                      <a:tailEnd type="none" w="med" len="med"/>
+                    </a:lnB>
+                    <a:solidFill>
+                      <a:srgbClr val="FFFFFF"/>
+                    </a:solidFill>
+                  </a:tcPr>
+                </a:tc>
+                <a:tc>
+                  <a:txBody>
+                    <a:bodyPr/>
+                    <a:lstStyle/>
+                    <a:p>
+                      <a:pPr algn="r" indent="0" marL="0">
+                        <a:buNone/>
+                      </a:pPr>
+                      <a:r>
+                        <a:rPr lang="en-US" sz="950" b="1" dirty="0">
+                          <a:solidFill>
+                            <a:srgbClr val="026E65"/>
+                          </a:solidFill>
+                          <a:latin typeface="Calibri" pitchFamily="34" charset="0"/>
+                          <a:ea typeface="Calibri" pitchFamily="34" charset="-122"/>
+                          <a:cs typeface="Calibri" pitchFamily="34" charset="-120"/>
+                        </a:rPr>
+                        <a:t>± Rp2–4 rb*</a:t>
+                      </a:r>
+                      <a:endParaRPr lang="en-US" sz="950" dirty="0">
+                        <a:latin typeface="Calibri" charset="0"/>
+                        <a:ea typeface="Calibri" charset="0"/>
+                        <a:cs typeface="Calibri" charset="0"/>
+                      </a:endParaRPr>
+                    </a:p>
+                  </a:txBody>
+                  <a:tcPr marL="54864" marR="54864" marT="54864" marB="54864" anchor="ctr">
+                    <a:lnL w="9525" cap="flat" cmpd="sng" algn="ctr">
+                      <a:solidFill>
+                        <a:srgbClr val="DCEEEC"/>
+                      </a:solidFill>
+                      <a:prstDash val="solid"/>
+                      <a:round/>
+                      <a:headEnd type="none" w="med" len="med"/>
+                      <a:tailEnd type="none" w="med" len="med"/>
+                    </a:lnL>
+                    <a:lnR w="9525" cap="flat" cmpd="sng" algn="ctr">
+                      <a:solidFill>
+                        <a:srgbClr val="DCEEEC"/>
+                      </a:solidFill>
+                      <a:prstDash val="solid"/>
+                      <a:round/>
+                      <a:headEnd type="none" w="med" len="med"/>
+                      <a:tailEnd type="none" w="med" len="med"/>
+                    </a:lnR>
+                    <a:lnT w="9525" cap="flat" cmpd="sng" algn="ctr">
+                      <a:solidFill>
+                        <a:srgbClr val="DCEEEC"/>
+                      </a:solidFill>
+                      <a:prstDash val="solid"/>
+                      <a:round/>
+                      <a:headEnd type="none" w="med" len="med"/>
+                      <a:tailEnd type="none" w="med" len="med"/>
+                    </a:lnT>
+                    <a:lnB w="9525" cap="flat" cmpd="sng" algn="ctr">
+                      <a:solidFill>
+                        <a:srgbClr val="DCEEEC"/>
+                      </a:solidFill>
+                      <a:prstDash val="solid"/>
+                      <a:round/>
+                      <a:headEnd type="none" w="med" len="med"/>
+                      <a:tailEnd type="none" w="med" len="med"/>
+                    </a:lnB>
+                    <a:solidFill>
+                      <a:srgbClr val="FFFFFF"/>
+                    </a:solidFill>
+                  </a:tcPr>
+                </a:tc>
+              </a:tr>
+            </a:tbl>
+          </a:graphicData>
+        </a:graphic>
+      </p:graphicFrame>
+      <p:sp>
+        <p:nvSpPr>
+          <p:cNvPr id="34" name="Shape 26"/>
+          <p:cNvSpPr/>
+          <p:nvPr/>
+        </p:nvSpPr>
+        <p:spPr>
+          <a:xfrm>
+            <a:off x="8403336" y="3017520"/>
+            <a:ext cx="3239719" cy="2331720"/>
+          </a:xfrm>
+          <a:prstGeom prst="roundRect">
+            <a:avLst>
+              <a:gd name="adj" fmla="val 4706"/>
+            </a:avLst>
+          </a:prstGeom>
+          <a:solidFill>
+            <a:srgbClr val="098277"/>
+          </a:solidFill>
+          <a:ln w="12700">
+            <a:solidFill>
+              <a:srgbClr val="098277"/>
+            </a:solidFill>
+            <a:prstDash val="solid"/>
+          </a:ln>
+        </p:spPr>
+      </p:sp>
+      <p:sp>
+        <p:nvSpPr>
+          <p:cNvPr id="35" name="Text 27"/>
+          <p:cNvSpPr/>
+          <p:nvPr/>
+        </p:nvSpPr>
+        <p:spPr>
+          <a:xfrm>
+            <a:off x="8586216" y="3127248"/>
+            <a:ext cx="2873959" cy="219456"/>
+          </a:xfrm>
+          <a:prstGeom prst="rect">
+            <a:avLst/>
+          </a:prstGeom>
+          <a:noFill/>
+          <a:ln/>
+        </p:spPr>
+        <p:txBody>
+          <a:bodyPr wrap="square" lIns="0" tIns="0" rIns="0" bIns="0" rtlCol="0" anchor="ctr"/>
+          <a:lstStyle/>
+          <a:p>
+            <a:pPr indent="0" marL="0">
+              <a:buNone/>
+            </a:pPr>
+            <a:r>
+              <a:rPr lang="en-US" sz="900" b="1" spc="100" kern="0" dirty="0">
+                <a:solidFill>
+                  <a:srgbClr val="A0DDD7"/>
+                </a:solidFill>
+                <a:latin typeface="Calibri" pitchFamily="34" charset="0"/>
+                <a:ea typeface="Calibri" pitchFamily="34" charset="-122"/>
+                <a:cs typeface="Calibri" pitchFamily="34" charset="-120"/>
+              </a:rPr>
+              <a:t>UNIT EKONOMI · 1 TERAPIS, 20 KELUARGA</a:t>
+            </a:r>
+            <a:endParaRPr lang="en-US" sz="900" dirty="0"/>
+          </a:p>
+        </p:txBody>
+      </p:sp>
+      <p:sp>
+        <p:nvSpPr>
+          <p:cNvPr id="36" name="Text 28"/>
+          <p:cNvSpPr/>
+          <p:nvPr/>
+        </p:nvSpPr>
+        <p:spPr>
+          <a:xfrm>
+            <a:off x="8586216" y="3520440"/>
+            <a:ext cx="1097280" cy="201168"/>
+          </a:xfrm>
+          <a:prstGeom prst="rect">
+            <a:avLst/>
+          </a:prstGeom>
+          <a:noFill/>
+          <a:ln/>
+        </p:spPr>
+        <p:txBody>
+          <a:bodyPr wrap="square" lIns="0" tIns="0" rIns="0" bIns="0" rtlCol="0" anchor="ctr"/>
+          <a:lstStyle/>
+          <a:p>
+            <a:pPr indent="0" marL="0">
+              <a:buNone/>
+            </a:pPr>
+            <a:r>
+              <a:rPr lang="en-US" sz="950" b="1" dirty="0">
+                <a:solidFill>
+                  <a:srgbClr val="DFF6F3"/>
+                </a:solidFill>
+                <a:latin typeface="Calibri" pitchFamily="34" charset="0"/>
+                <a:ea typeface="Calibri" pitchFamily="34" charset="-122"/>
+                <a:cs typeface="Calibri" pitchFamily="34" charset="-120"/>
+              </a:rPr>
+              <a:t>Biaya</a:t>
+            </a:r>
+            <a:endParaRPr lang="en-US" sz="950" dirty="0"/>
+          </a:p>
+        </p:txBody>
+      </p:sp>
+      <p:sp>
+        <p:nvSpPr>
+          <p:cNvPr id="37" name="Text 29"/>
+          <p:cNvSpPr/>
+          <p:nvPr/>
+        </p:nvSpPr>
+        <p:spPr>
+          <a:xfrm>
+            <a:off x="8586216" y="3520440"/>
+            <a:ext cx="2873959" cy="201168"/>
+          </a:xfrm>
+          <a:prstGeom prst="rect">
+            <a:avLst/>
+          </a:prstGeom>
+          <a:noFill/>
+          <a:ln/>
+        </p:spPr>
+        <p:txBody>
+          <a:bodyPr wrap="square" lIns="0" tIns="0" rIns="0" bIns="0" rtlCol="0" anchor="ctr"/>
+          <a:lstStyle/>
+          <a:p>
+            <a:pPr algn="r" indent="0" marL="0">
+              <a:buNone/>
+            </a:pPr>
+            <a:r>
+              <a:rPr lang="en-US" sz="950" b="1" dirty="0">
+                <a:solidFill>
+                  <a:srgbClr val="FFFFFF"/>
+                </a:solidFill>
+                <a:latin typeface="Calibri" pitchFamily="34" charset="0"/>
+                <a:ea typeface="Calibri" pitchFamily="34" charset="-122"/>
+                <a:cs typeface="Calibri" pitchFamily="34" charset="-120"/>
+              </a:rPr>
+              <a:t>Rp70–135 rb</a:t>
+            </a:r>
+            <a:endParaRPr lang="en-US" sz="950" dirty="0"/>
+          </a:p>
+        </p:txBody>
+      </p:sp>
+      <p:sp>
+        <p:nvSpPr>
+          <p:cNvPr id="38" name="Shape 30"/>
+          <p:cNvSpPr/>
+          <p:nvPr/>
+        </p:nvSpPr>
+        <p:spPr>
+          <a:xfrm>
+            <a:off x="8586216" y="3758184"/>
+            <a:ext cx="1551938" cy="182880"/>
+          </a:xfrm>
+          <a:prstGeom prst="roundRect">
+            <a:avLst>
+              <a:gd name="adj" fmla="val 50000"/>
+            </a:avLst>
+          </a:prstGeom>
+          <a:solidFill>
+            <a:srgbClr val="F2646A"/>
+          </a:solidFill>
+          <a:ln w="12700">
+            <a:solidFill>
+              <a:srgbClr val="F2646A"/>
+            </a:solidFill>
+            <a:prstDash val="solid"/>
+          </a:ln>
+        </p:spPr>
+      </p:sp>
+      <p:sp>
+        <p:nvSpPr>
+          <p:cNvPr id="39" name="Text 31"/>
+          <p:cNvSpPr/>
+          <p:nvPr/>
+        </p:nvSpPr>
+        <p:spPr>
+          <a:xfrm>
+            <a:off x="8586216" y="4087368"/>
+            <a:ext cx="1097280" cy="201168"/>
+          </a:xfrm>
+          <a:prstGeom prst="rect">
+            <a:avLst/>
+          </a:prstGeom>
+          <a:noFill/>
+          <a:ln/>
+        </p:spPr>
+        <p:txBody>
+          <a:bodyPr wrap="square" lIns="0" tIns="0" rIns="0" bIns="0" rtlCol="0" anchor="ctr"/>
+          <a:lstStyle/>
+          <a:p>
+            <a:pPr indent="0" marL="0">
+              <a:buNone/>
+            </a:pPr>
+            <a:r>
+              <a:rPr lang="en-US" sz="950" b="1" dirty="0">
+                <a:solidFill>
+                  <a:srgbClr val="DFF6F3"/>
+                </a:solidFill>
+                <a:latin typeface="Calibri" pitchFamily="34" charset="0"/>
+                <a:ea typeface="Calibri" pitchFamily="34" charset="-122"/>
+                <a:cs typeface="Calibri" pitchFamily="34" charset="-120"/>
+              </a:rPr>
+              <a:t>Harga</a:t>
+            </a:r>
+            <a:endParaRPr lang="en-US" sz="950" dirty="0"/>
+          </a:p>
+        </p:txBody>
+      </p:sp>
+      <p:sp>
+        <p:nvSpPr>
+          <p:cNvPr id="40" name="Text 32"/>
+          <p:cNvSpPr/>
+          <p:nvPr/>
+        </p:nvSpPr>
+        <p:spPr>
+          <a:xfrm>
+            <a:off x="8586216" y="4087368"/>
+            <a:ext cx="2873959" cy="201168"/>
+          </a:xfrm>
+          <a:prstGeom prst="rect">
+            <a:avLst/>
+          </a:prstGeom>
+          <a:noFill/>
+          <a:ln/>
+        </p:spPr>
+        <p:txBody>
+          <a:bodyPr wrap="square" lIns="0" tIns="0" rIns="0" bIns="0" rtlCol="0" anchor="ctr"/>
+          <a:lstStyle/>
+          <a:p>
+            <a:pPr algn="r" indent="0" marL="0">
+              <a:buNone/>
+            </a:pPr>
+            <a:r>
+              <a:rPr lang="en-US" sz="950" b="1" dirty="0">
+                <a:solidFill>
+                  <a:srgbClr val="FFFFFF"/>
+                </a:solidFill>
+                <a:latin typeface="Calibri" pitchFamily="34" charset="0"/>
+                <a:ea typeface="Calibri" pitchFamily="34" charset="-122"/>
+                <a:cs typeface="Calibri" pitchFamily="34" charset="-120"/>
+              </a:rPr>
+              <a:t>Rp150–250 rb*</a:t>
+            </a:r>
+            <a:endParaRPr lang="en-US" sz="950" dirty="0"/>
+          </a:p>
+        </p:txBody>
+      </p:sp>
+      <p:sp>
+        <p:nvSpPr>
+          <p:cNvPr id="41" name="Shape 33"/>
+          <p:cNvSpPr/>
+          <p:nvPr/>
+        </p:nvSpPr>
+        <p:spPr>
+          <a:xfrm>
+            <a:off x="8586216" y="4325112"/>
+            <a:ext cx="2873959" cy="182880"/>
+          </a:xfrm>
+          <a:prstGeom prst="roundRect">
+            <a:avLst>
+              <a:gd name="adj" fmla="val 50000"/>
+            </a:avLst>
+          </a:prstGeom>
+          <a:solidFill>
+            <a:srgbClr val="BADE4A"/>
+          </a:solidFill>
+          <a:ln w="12700">
+            <a:solidFill>
+              <a:srgbClr val="BADE4A"/>
+            </a:solidFill>
+            <a:prstDash val="solid"/>
+          </a:ln>
+        </p:spPr>
+      </p:sp>
+      <p:sp>
+        <p:nvSpPr>
+          <p:cNvPr id="42" name="Text 34"/>
+          <p:cNvSpPr/>
+          <p:nvPr/>
+        </p:nvSpPr>
+        <p:spPr>
+          <a:xfrm>
+            <a:off x="8586216" y="4663440"/>
+            <a:ext cx="2873959" cy="640080"/>
+          </a:xfrm>
+          <a:prstGeom prst="rect">
+            <a:avLst/>
+          </a:prstGeom>
+          <a:noFill/>
+          <a:ln/>
+        </p:spPr>
+        <p:txBody>
+          <a:bodyPr wrap="square" lIns="0" tIns="0" rIns="0" bIns="0" rtlCol="0" anchor="t"/>
+          <a:lstStyle/>
+          <a:p>
+            <a:pPr indent="0" marL="0">
+              <a:buNone/>
+            </a:pPr>
+            <a:r>
+              <a:rPr lang="en-US" sz="900" b="1" dirty="0">
+                <a:solidFill>
+                  <a:srgbClr val="FFFFFF"/>
+                </a:solidFill>
+                <a:latin typeface="Calibri" pitchFamily="34" charset="0"/>
+                <a:ea typeface="Calibri" pitchFamily="34" charset="-122"/>
+                <a:cs typeface="Calibri" pitchFamily="34" charset="-120"/>
+              </a:rPr>
+              <a:t>Biaya tertutup. </a:t>
+            </a:r>
+            <a:pPr indent="0" marL="0">
+              <a:buNone/>
+            </a:pPr>
+            <a:r>
+              <a:rPr lang="en-US" sz="900" dirty="0">
+                <a:solidFill>
+                  <a:srgbClr val="DFF6F3"/>
+                </a:solidFill>
+                <a:latin typeface="Calibri" pitchFamily="34" charset="0"/>
+                <a:ea typeface="Calibri" pitchFamily="34" charset="-122"/>
+                <a:cs typeface="Calibri" pitchFamily="34" charset="-120"/>
+              </a:rPr>
+              <a:t>Klon suara ± Rp35–75 rb · frasa &lt; Rp10 rb · bagian server ± Rp25–50 rb. Dengan klon permanen, margin habis; karena itu klon sementara wajib dulu.</a:t>
+            </a:r>
+            <a:endParaRPr lang="en-US" sz="900" dirty="0"/>
+          </a:p>
+        </p:txBody>
+      </p:sp>
+      <p:sp>
+        <p:nvSpPr>
+          <p:cNvPr id="43" name="Text 35"/>
+          <p:cNvSpPr/>
+          <p:nvPr/>
+        </p:nvSpPr>
+        <p:spPr>
+          <a:xfrm>
+            <a:off x="548640" y="5486400"/>
+            <a:ext cx="11094415" cy="457200"/>
+          </a:xfrm>
+          <a:prstGeom prst="roundRect">
+            <a:avLst>
+              <a:gd name="adj" fmla="val 16000"/>
+            </a:avLst>
+          </a:prstGeom>
+          <a:solidFill>
+            <a:srgbClr val="DFF6F3"/>
+          </a:solidFill>
+          <a:ln>
+            <a:solidFill>
+              <a:srgbClr val="DFF6F3"/>
+            </a:solidFill>
+          </a:ln>
+        </p:spPr>
+        <p:txBody>
+          <a:bodyPr wrap="square" lIns="101600" tIns="101600" rIns="101600" bIns="101600" rtlCol="0" anchor="ctr"/>
+          <a:lstStyle/>
+          <a:p>
+            <a:pPr indent="0" marL="0">
+              <a:buNone/>
+            </a:pPr>
+            <a:r>
+              <a:rPr lang="en-US" sz="950" b="1" dirty="0">
+                <a:solidFill>
+                  <a:srgbClr val="026E65"/>
+                </a:solidFill>
+                <a:latin typeface="Calibri" pitchFamily="34" charset="0"/>
+                <a:ea typeface="Calibri" pitchFamily="34" charset="-122"/>
+                <a:cs typeface="Calibri" pitchFamily="34" charset="-120"/>
+              </a:rPr>
+              <a:t>Skalabilitas:  </a:t>
+            </a:r>
+            <a:pPr indent="0" marL="0">
+              <a:buNone/>
+            </a:pPr>
+            <a:r>
+              <a:rPr lang="en-US" sz="950" dirty="0">
+                <a:solidFill>
+                  <a:srgbClr val="172C2A"/>
+                </a:solidFill>
+                <a:latin typeface="Calibri" pitchFamily="34" charset="0"/>
+                <a:ea typeface="Calibri" pitchFamily="34" charset="-122"/>
+                <a:cs typeface="Calibri" pitchFamily="34" charset="-120"/>
+              </a:rPr>
+              <a:t>pemakaian anak tidak memanggil server, jadi biaya tidak naik bersama ketukan · SQLite cukup untuk satu klinik, Postgres untuk banyak klinik · hambatan sebenarnya jumlah terapis: 1 jam terapis memantau 12 keluarga (asumsi, diuji di pilot)</a:t>
+            </a:r>
+            <a:endParaRPr lang="en-US" sz="950" dirty="0"/>
+          </a:p>
+        </p:txBody>
+      </p:sp>
+    </p:spTree>
+  </p:cSld>
+  <p:clrMapOvr>
+    <a:masterClrMapping/>
+  </p:clrMapOvr>
+</p:sld>
+</file>
+
+<file path=ppt/slides/slide15.xml><?xml version="1.0" encoding="utf-8"?>
+<p:sld xmlns:a="http://schemas.openxmlformats.org/drawingml/2006/main" xmlns:r="http://schemas.openxmlformats.org/officeDocument/2006/relationships" xmlns:p="http://schemas.openxmlformats.org/presentationml/2006/main">
+  <p:cSld name="Slide 15">
+    <p:bg>
+      <p:bgPr>
+        <a:solidFill>
+          <a:srgbClr val="F1FAFA"/>
+        </a:solidFill>
+      </p:bgPr>
+    </p:bg>
+    <p:spTree>
+      <p:nvGrpSpPr>
+        <p:cNvPr id="1" name=""/>
+        <p:cNvGrpSpPr/>
+        <p:nvPr/>
+      </p:nvGrpSpPr>
+      <p:grpSpPr>
+        <a:xfrm>
+          <a:off x="0" y="0"/>
+          <a:ext cx="0" cy="0"/>
+          <a:chOff x="0" y="0"/>
+          <a:chExt cx="0" cy="0"/>
+        </a:xfrm>
+      </p:grpSpPr>
+      <p:sp>
+        <p:nvSpPr>
+          <p:cNvPr id="2" name="Text 0"/>
+          <p:cNvSpPr/>
+          <p:nvPr/>
+        </p:nvSpPr>
+        <p:spPr>
+          <a:xfrm>
+            <a:off x="548640" y="347472"/>
+            <a:ext cx="8229600" cy="274320"/>
+          </a:xfrm>
+          <a:prstGeom prst="rect">
+            <a:avLst/>
+          </a:prstGeom>
+          <a:noFill/>
+          <a:ln/>
+        </p:spPr>
+        <p:txBody>
+          <a:bodyPr wrap="square" lIns="0" tIns="0" rIns="0" bIns="0" rtlCol="0" anchor="ctr"/>
+          <a:lstStyle/>
+          <a:p>
+            <a:pPr indent="0" marL="0">
+              <a:buNone/>
+            </a:pPr>
+            <a:r>
+              <a:rPr lang="en-US" sz="1100" b="1" spc="200" kern="0" dirty="0">
+                <a:solidFill>
+                  <a:srgbClr val="026E65"/>
+                </a:solidFill>
+                <a:latin typeface="Calibri" pitchFamily="34" charset="0"/>
+                <a:ea typeface="Calibri" pitchFamily="34" charset="-122"/>
+                <a:cs typeface="Calibri" pitchFamily="34" charset="-120"/>
+              </a:rPr>
+              <a:t>DAMPAK DAN METRIK KEBERHASILAN</a:t>
+            </a:r>
+            <a:endParaRPr lang="en-US" sz="1100" dirty="0"/>
+          </a:p>
+        </p:txBody>
+      </p:sp>
+      <p:sp>
+        <p:nvSpPr>
+          <p:cNvPr id="3" name="Text 1"/>
+          <p:cNvSpPr/>
+          <p:nvPr/>
+        </p:nvSpPr>
+        <p:spPr>
+          <a:xfrm>
+            <a:off x="548640" y="621792"/>
+            <a:ext cx="10241280" cy="914400"/>
+          </a:xfrm>
+          <a:prstGeom prst="rect">
+            <a:avLst/>
+          </a:prstGeom>
+          <a:noFill/>
+          <a:ln/>
+        </p:spPr>
+        <p:txBody>
+          <a:bodyPr wrap="square" lIns="0" tIns="0" rIns="0" bIns="0" rtlCol="0" anchor="t"/>
+          <a:lstStyle/>
+          <a:p>
+            <a:pPr indent="0" marL="0">
+              <a:lnSpc>
+                <a:spcPct val="95000"/>
+              </a:lnSpc>
+              <a:buNone/>
+            </a:pPr>
+            <a:r>
+              <a:rPr lang="en-US" sz="2500" b="1" dirty="0">
+                <a:solidFill>
+                  <a:srgbClr val="172C2A"/>
+                </a:solidFill>
+                <a:latin typeface="Trebuchet MS" pitchFamily="34" charset="0"/>
+                <a:ea typeface="Trebuchet MS" pitchFamily="34" charset="-122"/>
+                <a:cs typeface="Trebuchet MS" pitchFamily="34" charset="-120"/>
+              </a:rPr>
+              <a:t>Dampak diukur dari kebiasaan yang bertahan, bukan dari klaim kemampuan anak</a:t>
+            </a:r>
+            <a:endParaRPr lang="en-US" sz="2500" dirty="0"/>
+          </a:p>
+        </p:txBody>
+      </p:sp>
+      <p:pic>
+        <p:nvPicPr>
+          <p:cNvPr id="4" name="Image 0" descr="C:\Users\mikae\OneDrive\Documents\Lomba\IFEST\Nyambung\app\assets\brand\logo_mark.png">    </p:cNvPr>
+          <p:cNvPicPr>
+            <a:picLocks noChangeAspect="1"/>
+          </p:cNvPicPr>
+          <p:nvPr/>
+        </p:nvPicPr>
+        <p:blipFill>
+          <a:blip r:embed="rId1"/>
+          <a:stretch>
+            <a:fillRect/>
+          </a:stretch>
+        </p:blipFill>
+        <p:spPr>
+          <a:xfrm>
+            <a:off x="11167567" y="347472"/>
+            <a:ext cx="475488" cy="475488"/>
+          </a:xfrm>
+          <a:prstGeom prst="rect">
+            <a:avLst/>
+          </a:prstGeom>
+        </p:spPr>
+      </p:pic>
+      <p:sp>
+        <p:nvSpPr>
+          <p:cNvPr id="5" name="Text 2"/>
+          <p:cNvSpPr/>
+          <p:nvPr/>
+        </p:nvSpPr>
+        <p:spPr>
+          <a:xfrm>
+            <a:off x="548640" y="6382512"/>
+            <a:ext cx="873252" cy="256032"/>
+          </a:xfrm>
+          <a:prstGeom prst="roundRect">
+            <a:avLst>
+              <a:gd name="adj" fmla="val 46429"/>
+            </a:avLst>
+          </a:prstGeom>
+          <a:solidFill>
+            <a:srgbClr val="F1FAFA"/>
+          </a:solidFill>
+          <a:ln w="9525">
+            <a:solidFill>
+              <a:srgbClr val="DCEEEC"/>
+            </a:solidFill>
+          </a:ln>
+        </p:spPr>
+        <p:txBody>
+          <a:bodyPr wrap="square" lIns="0" tIns="0" rIns="0" bIns="0" rtlCol="0" anchor="ctr"/>
+          <a:lstStyle/>
+          <a:p>
+            <a:pPr algn="ctr" indent="0" marL="0">
+              <a:buNone/>
+            </a:pPr>
+            <a:r>
+              <a:rPr lang="en-US" sz="950" dirty="0">
+                <a:solidFill>
+                  <a:srgbClr val="52706D"/>
+                </a:solidFill>
+                <a:latin typeface="Calibri" pitchFamily="34" charset="0"/>
+                <a:ea typeface="Calibri" pitchFamily="34" charset="-122"/>
+                <a:cs typeface="Calibri" pitchFamily="34" charset="-120"/>
+              </a:rPr>
+              <a:t>Masalah</a:t>
+            </a:r>
+            <a:endParaRPr lang="en-US" sz="950" dirty="0"/>
+          </a:p>
+        </p:txBody>
+      </p:sp>
+      <p:sp>
+        <p:nvSpPr>
+          <p:cNvPr id="6" name="Text 3"/>
+          <p:cNvSpPr/>
+          <p:nvPr/>
+        </p:nvSpPr>
+        <p:spPr>
+          <a:xfrm>
+            <a:off x="1513332" y="6382512"/>
+            <a:ext cx="795528" cy="256032"/>
+          </a:xfrm>
+          <a:prstGeom prst="roundRect">
+            <a:avLst>
+              <a:gd name="adj" fmla="val 46429"/>
+            </a:avLst>
+          </a:prstGeom>
+          <a:solidFill>
+            <a:srgbClr val="F1FAFA"/>
+          </a:solidFill>
+          <a:ln w="9525">
+            <a:solidFill>
+              <a:srgbClr val="DCEEEC"/>
+            </a:solidFill>
+          </a:ln>
+        </p:spPr>
+        <p:txBody>
+          <a:bodyPr wrap="square" lIns="0" tIns="0" rIns="0" bIns="0" rtlCol="0" anchor="ctr"/>
+          <a:lstStyle/>
+          <a:p>
+            <a:pPr algn="ctr" indent="0" marL="0">
+              <a:buNone/>
+            </a:pPr>
+            <a:r>
+              <a:rPr lang="en-US" sz="950" dirty="0">
+                <a:solidFill>
+                  <a:srgbClr val="52706D"/>
+                </a:solidFill>
+                <a:latin typeface="Calibri" pitchFamily="34" charset="0"/>
+                <a:ea typeface="Calibri" pitchFamily="34" charset="-122"/>
+                <a:cs typeface="Calibri" pitchFamily="34" charset="-120"/>
+              </a:rPr>
+              <a:t>Solusi</a:t>
+            </a:r>
+            <a:endParaRPr lang="en-US" sz="950" dirty="0"/>
+          </a:p>
+        </p:txBody>
+      </p:sp>
+      <p:sp>
+        <p:nvSpPr>
+          <p:cNvPr id="7" name="Text 4"/>
+          <p:cNvSpPr/>
+          <p:nvPr/>
+        </p:nvSpPr>
+        <p:spPr>
+          <a:xfrm>
+            <a:off x="2400300" y="6382512"/>
+            <a:ext cx="1028700" cy="256032"/>
+          </a:xfrm>
+          <a:prstGeom prst="roundRect">
+            <a:avLst>
+              <a:gd name="adj" fmla="val 46429"/>
+            </a:avLst>
+          </a:prstGeom>
+          <a:solidFill>
+            <a:srgbClr val="F1FAFA"/>
+          </a:solidFill>
+          <a:ln w="9525">
+            <a:solidFill>
+              <a:srgbClr val="DCEEEC"/>
+            </a:solidFill>
+          </a:ln>
+        </p:spPr>
+        <p:txBody>
+          <a:bodyPr wrap="square" lIns="0" tIns="0" rIns="0" bIns="0" rtlCol="0" anchor="ctr"/>
+          <a:lstStyle/>
+          <a:p>
+            <a:pPr algn="ctr" indent="0" marL="0">
+              <a:buNone/>
+            </a:pPr>
+            <a:r>
+              <a:rPr lang="en-US" sz="950" dirty="0">
+                <a:solidFill>
+                  <a:srgbClr val="52706D"/>
+                </a:solidFill>
+                <a:latin typeface="Calibri" pitchFamily="34" charset="0"/>
+                <a:ea typeface="Calibri" pitchFamily="34" charset="-122"/>
+                <a:cs typeface="Calibri" pitchFamily="34" charset="-120"/>
+              </a:rPr>
+              <a:t>Kelayakan</a:t>
+            </a:r>
+            <a:endParaRPr lang="en-US" sz="950" dirty="0"/>
+          </a:p>
+        </p:txBody>
+      </p:sp>
+      <p:sp>
+        <p:nvSpPr>
+          <p:cNvPr id="8" name="Text 5"/>
+          <p:cNvSpPr/>
+          <p:nvPr/>
+        </p:nvSpPr>
+        <p:spPr>
+          <a:xfrm>
+            <a:off x="3520440" y="6382512"/>
+            <a:ext cx="795528" cy="256032"/>
+          </a:xfrm>
+          <a:prstGeom prst="roundRect">
+            <a:avLst>
+              <a:gd name="adj" fmla="val 46429"/>
+            </a:avLst>
+          </a:prstGeom>
+          <a:solidFill>
+            <a:srgbClr val="098277"/>
+          </a:solidFill>
+          <a:ln w="9525">
+            <a:solidFill>
+              <a:srgbClr val="098277"/>
+            </a:solidFill>
+          </a:ln>
+        </p:spPr>
+        <p:txBody>
+          <a:bodyPr wrap="square" lIns="0" tIns="0" rIns="0" bIns="0" rtlCol="0" anchor="ctr"/>
+          <a:lstStyle/>
+          <a:p>
+            <a:pPr algn="ctr" indent="0" marL="0">
+              <a:buNone/>
+            </a:pPr>
+            <a:r>
+              <a:rPr lang="en-US" sz="950" b="1" dirty="0">
+                <a:solidFill>
+                  <a:srgbClr val="FFFFFF"/>
+                </a:solidFill>
+                <a:latin typeface="Calibri" pitchFamily="34" charset="0"/>
+                <a:ea typeface="Calibri" pitchFamily="34" charset="-122"/>
+                <a:cs typeface="Calibri" pitchFamily="34" charset="-120"/>
+              </a:rPr>
+              <a:t>Dampak</a:t>
+            </a:r>
+            <a:endParaRPr lang="en-US" sz="950" dirty="0"/>
+          </a:p>
+        </p:txBody>
+      </p:sp>
+      <p:sp>
+        <p:nvSpPr>
+          <p:cNvPr id="9" name="Text 6"/>
+          <p:cNvSpPr/>
+          <p:nvPr/>
+        </p:nvSpPr>
+        <p:spPr>
+          <a:xfrm>
+            <a:off x="11185855" y="6382512"/>
+            <a:ext cx="457200" cy="256032"/>
+          </a:xfrm>
+          <a:prstGeom prst="rect">
+            <a:avLst/>
+          </a:prstGeom>
+          <a:noFill/>
+          <a:ln/>
+        </p:spPr>
+        <p:txBody>
+          <a:bodyPr wrap="square" lIns="0" tIns="0" rIns="0" bIns="0" rtlCol="0" anchor="ctr"/>
+          <a:lstStyle/>
+          <a:p>
+            <a:pPr algn="r" indent="0" marL="0">
+              <a:buNone/>
+            </a:pPr>
+            <a:r>
+              <a:rPr lang="en-US" sz="1000" dirty="0">
+                <a:solidFill>
+                  <a:srgbClr val="52706D"/>
+                </a:solidFill>
+                <a:latin typeface="Calibri" pitchFamily="34" charset="0"/>
+                <a:ea typeface="Calibri" pitchFamily="34" charset="-122"/>
+                <a:cs typeface="Calibri" pitchFamily="34" charset="-120"/>
+              </a:rPr>
+              <a:t>15</a:t>
+            </a:r>
+            <a:endParaRPr lang="en-US" sz="1000" dirty="0"/>
+          </a:p>
+        </p:txBody>
+      </p:sp>
+      <p:sp>
+        <p:nvSpPr>
+          <p:cNvPr id="10" name="Text 7"/>
+          <p:cNvSpPr/>
+          <p:nvPr/>
+        </p:nvSpPr>
+        <p:spPr>
+          <a:xfrm>
+            <a:off x="548640" y="6035040"/>
+            <a:ext cx="11094415" cy="274320"/>
+          </a:xfrm>
+          <a:prstGeom prst="rect">
+            <a:avLst/>
+          </a:prstGeom>
+          <a:noFill/>
+          <a:ln/>
+        </p:spPr>
+        <p:txBody>
+          <a:bodyPr wrap="square" lIns="0" tIns="0" rIns="0" bIns="0" rtlCol="0" anchor="b"/>
+          <a:lstStyle/>
+          <a:p>
+            <a:pPr indent="0" marL="0">
+              <a:buNone/>
+            </a:pPr>
+            <a:r>
+              <a:rPr lang="en-US" sz="850" i="1" dirty="0">
+                <a:solidFill>
+                  <a:srgbClr val="52706D"/>
+                </a:solidFill>
+                <a:latin typeface="Calibri" pitchFamily="34" charset="0"/>
+                <a:ea typeface="Calibri" pitchFamily="34" charset="-122"/>
+                <a:cs typeface="Calibri" pitchFamily="34" charset="-120"/>
+              </a:rPr>
+              <a:t>Metrik utama pilot: 03-basis-ilmiah §6, berangkat dari Phillips &amp; Zhao (1993). Sasaran tinjauan &lt; 5 menit per anak adalah sasaran rancangan dasbor; model kapasitas adalah asumsi yang diuji di pilot.</a:t>
+            </a:r>
+            <a:endParaRPr lang="en-US" sz="850" dirty="0"/>
+          </a:p>
+        </p:txBody>
+      </p:sp>
+      <p:sp>
+        <p:nvSpPr>
+          <p:cNvPr id="12" name="Shape 8"/>
+          <p:cNvSpPr/>
+          <p:nvPr/>
+        </p:nvSpPr>
+        <p:spPr>
+          <a:xfrm>
+            <a:off x="548640" y="1783080"/>
+            <a:ext cx="4206240" cy="1078992"/>
+          </a:xfrm>
+          <a:prstGeom prst="roundRect">
+            <a:avLst>
+              <a:gd name="adj" fmla="val 10169"/>
+            </a:avLst>
+          </a:prstGeom>
+          <a:solidFill>
+            <a:srgbClr val="FFFFFF"/>
+          </a:solidFill>
+          <a:ln w="9525">
+            <a:solidFill>
+              <a:srgbClr val="DCEEEC"/>
+            </a:solidFill>
+            <a:prstDash val="solid"/>
+          </a:ln>
+        </p:spPr>
+      </p:sp>
+      <p:sp>
+        <p:nvSpPr>
+          <p:cNvPr id="13" name="Shape 9"/>
+          <p:cNvSpPr/>
+          <p:nvPr/>
+        </p:nvSpPr>
+        <p:spPr>
+          <a:xfrm>
+            <a:off x="731520" y="2020824"/>
+            <a:ext cx="603504" cy="603504"/>
+          </a:xfrm>
+          <a:prstGeom prst="ellipse">
+            <a:avLst/>
+          </a:prstGeom>
+          <a:solidFill>
+            <a:srgbClr val="098277"/>
+          </a:solidFill>
+          <a:ln w="12700">
+            <a:solidFill>
+              <a:srgbClr val="098277"/>
+            </a:solidFill>
+            <a:prstDash val="solid"/>
+          </a:ln>
+        </p:spPr>
+      </p:sp>
+      <p:pic>
+        <p:nvPicPr>
+          <p:cNvPr id="14" name="Image 1" descr="preencoded.png">    </p:cNvPr>
+          <p:cNvPicPr>
+            <a:picLocks noChangeAspect="1"/>
+          </p:cNvPicPr>
+          <p:nvPr/>
+        </p:nvPicPr>
+        <p:blipFill>
+          <a:blip r:embed="rId2"/>
+          <a:stretch>
+            <a:fillRect/>
+          </a:stretch>
+        </p:blipFill>
+        <p:spPr>
+          <a:xfrm>
+            <a:off x="876361" y="2165665"/>
+            <a:ext cx="313822" cy="313822"/>
+          </a:xfrm>
+          <a:prstGeom prst="rect">
+            <a:avLst/>
+          </a:prstGeom>
+        </p:spPr>
+      </p:pic>
+      <p:sp>
+        <p:nvSpPr>
+          <p:cNvPr id="15" name="Text 10"/>
+          <p:cNvSpPr/>
+          <p:nvPr/>
+        </p:nvSpPr>
+        <p:spPr>
+          <a:xfrm>
+            <a:off x="1481328" y="1856232"/>
+            <a:ext cx="3108960" cy="932688"/>
+          </a:xfrm>
+          <a:prstGeom prst="rect">
+            <a:avLst/>
+          </a:prstGeom>
+          <a:noFill/>
+          <a:ln/>
+        </p:spPr>
+        <p:txBody>
+          <a:bodyPr wrap="square" lIns="0" tIns="0" rIns="0" bIns="0" rtlCol="0" anchor="ctr"/>
+          <a:lstStyle/>
+          <a:p>
+            <a:pPr indent="0" marL="0">
+              <a:buNone/>
+            </a:pPr>
+            <a:r>
+              <a:rPr lang="en-US" sz="1450" b="1" dirty="0">
+                <a:solidFill>
+                  <a:srgbClr val="172C2A"/>
+                </a:solidFill>
+                <a:latin typeface="Trebuchet MS" pitchFamily="34" charset="0"/>
+                <a:ea typeface="Trebuchet MS" pitchFamily="34" charset="-122"/>
+                <a:cs typeface="Trebuchet MS" pitchFamily="34" charset="-120"/>
+              </a:rPr>
+              <a:t>Anak</a:t>
+            </a:r>
+            <a:endParaRPr lang="en-US" sz="1450" dirty="0"/>
+          </a:p>
+          <a:p>
+            <a:pPr indent="0" marL="0">
+              <a:buNone/>
+            </a:pPr>
+            <a:r>
+              <a:rPr lang="en-US" sz="1150" dirty="0">
+                <a:solidFill>
+                  <a:srgbClr val="172C2A"/>
+                </a:solidFill>
+                <a:latin typeface="Calibri" pitchFamily="34" charset="0"/>
+                <a:ea typeface="Calibri" pitchFamily="34" charset="-122"/>
+                <a:cs typeface="Calibri" pitchFamily="34" charset="-120"/>
+              </a:rPr>
+              <a:t>Punya suara yang sama di rumah dan di mana saja, tanpa sinyal.</a:t>
+            </a:r>
+            <a:endParaRPr lang="en-US" sz="1450" dirty="0"/>
+          </a:p>
+        </p:txBody>
+      </p:sp>
+      <p:sp>
+        <p:nvSpPr>
+          <p:cNvPr id="16" name="Shape 11"/>
+          <p:cNvSpPr/>
+          <p:nvPr/>
+        </p:nvSpPr>
+        <p:spPr>
+          <a:xfrm>
+            <a:off x="548640" y="2990088"/>
+            <a:ext cx="4206240" cy="1078992"/>
+          </a:xfrm>
+          <a:prstGeom prst="roundRect">
+            <a:avLst>
+              <a:gd name="adj" fmla="val 10169"/>
+            </a:avLst>
+          </a:prstGeom>
+          <a:solidFill>
+            <a:srgbClr val="FFFFFF"/>
+          </a:solidFill>
+          <a:ln w="9525">
+            <a:solidFill>
+              <a:srgbClr val="DCEEEC"/>
+            </a:solidFill>
+            <a:prstDash val="solid"/>
+          </a:ln>
+        </p:spPr>
+      </p:sp>
+      <p:sp>
+        <p:nvSpPr>
           <p:cNvPr id="17" name="Shape 12"/>
           <p:cNvSpPr/>
           <p:nvPr/>
@@ -10664,7 +13083,7 @@
       </p:sp>
       <p:graphicFrame>
         <p:nvGraphicFramePr>
-          <p:cNvPr id="15" name="Table 0"/>
+          <p:cNvPr id="16" name="Table 0"/>
           <p:cNvGraphicFramePr>
             <a:graphicFrameLocks noGrp="1"/>
           </p:cNvGraphicFramePr>
@@ -12198,9 +14617,9 @@
 </p:sld>
 </file>
 
-<file path=ppt/slides/slide15.xml><?xml version="1.0" encoding="utf-8"?>
+<file path=ppt/slides/slide16.xml><?xml version="1.0" encoding="utf-8"?>
 <p:sld xmlns:a="http://schemas.openxmlformats.org/drawingml/2006/main" xmlns:r="http://schemas.openxmlformats.org/officeDocument/2006/relationships" xmlns:p="http://schemas.openxmlformats.org/presentationml/2006/main">
-  <p:cSld name="Slide 15">
+  <p:cSld name="Slide 16">
     <p:bg>
       <p:bgPr>
         <a:solidFill>
@@ -12461,1789 +14880,6 @@
                 <a:cs typeface="Calibri" pitchFamily="34" charset="-120"/>
               </a:rPr>
               <a:t>Teen Tensors · Hackathon IFEST 2026 · Tech for Human Connections</a:t>
-            </a:r>
-            <a:endParaRPr lang="en-US" sz="1100" dirty="0"/>
-          </a:p>
-        </p:txBody>
-      </p:sp>
-    </p:spTree>
-  </p:cSld>
-  <p:clrMapOvr>
-    <a:masterClrMapping/>
-  </p:clrMapOvr>
-</p:sld>
-</file>
-
-<file path=ppt/slides/slide16.xml><?xml version="1.0" encoding="utf-8"?>
-<p:sld xmlns:a="http://schemas.openxmlformats.org/drawingml/2006/main" xmlns:r="http://schemas.openxmlformats.org/officeDocument/2006/relationships" xmlns:p="http://schemas.openxmlformats.org/presentationml/2006/main">
-  <p:cSld name="Slide 16">
-    <p:bg>
-      <p:bgPr>
-        <a:solidFill>
-          <a:srgbClr val="F1FAFA"/>
-        </a:solidFill>
-      </p:bgPr>
-    </p:bg>
-    <p:spTree>
-      <p:nvGrpSpPr>
-        <p:cNvPr id="1" name=""/>
-        <p:cNvGrpSpPr/>
-        <p:nvPr/>
-      </p:nvGrpSpPr>
-      <p:grpSpPr>
-        <a:xfrm>
-          <a:off x="0" y="0"/>
-          <a:ext cx="0" cy="0"/>
-          <a:chOff x="0" y="0"/>
-          <a:chExt cx="0" cy="0"/>
-        </a:xfrm>
-      </p:grpSpPr>
-      <p:sp>
-        <p:nvSpPr>
-          <p:cNvPr id="2" name="Text 0"/>
-          <p:cNvSpPr/>
-          <p:nvPr/>
-        </p:nvSpPr>
-        <p:spPr>
-          <a:xfrm>
-            <a:off x="548640" y="347472"/>
-            <a:ext cx="8229600" cy="274320"/>
-          </a:xfrm>
-          <a:prstGeom prst="rect">
-            <a:avLst/>
-          </a:prstGeom>
-          <a:noFill/>
-          <a:ln/>
-        </p:spPr>
-        <p:txBody>
-          <a:bodyPr wrap="square" lIns="0" tIns="0" rIns="0" bIns="0" rtlCol="0" anchor="ctr"/>
-          <a:lstStyle/>
-          <a:p>
-            <a:pPr indent="0" marL="0">
-              <a:buNone/>
-            </a:pPr>
-            <a:r>
-              <a:rPr lang="en-US" sz="1100" b="1" spc="200" kern="0" dirty="0">
-                <a:solidFill>
-                  <a:srgbClr val="026E65"/>
-                </a:solidFill>
-                <a:latin typeface="Calibri" pitchFamily="34" charset="0"/>
-                <a:ea typeface="Calibri" pitchFamily="34" charset="-122"/>
-                <a:cs typeface="Calibri" pitchFamily="34" charset="-120"/>
-              </a:rPr>
-              <a:t>LAMPIRAN · ASET DAN SUMBERNYA</a:t>
-            </a:r>
-            <a:endParaRPr lang="en-US" sz="1100" dirty="0"/>
-          </a:p>
-        </p:txBody>
-      </p:sp>
-      <p:sp>
-        <p:nvSpPr>
-          <p:cNvPr id="3" name="Text 1"/>
-          <p:cNvSpPr/>
-          <p:nvPr/>
-        </p:nvSpPr>
-        <p:spPr>
-          <a:xfrm>
-            <a:off x="548640" y="621792"/>
-            <a:ext cx="10241280" cy="914400"/>
-          </a:xfrm>
-          <a:prstGeom prst="rect">
-            <a:avLst/>
-          </a:prstGeom>
-          <a:noFill/>
-          <a:ln/>
-        </p:spPr>
-        <p:txBody>
-          <a:bodyPr wrap="square" lIns="0" tIns="0" rIns="0" bIns="0" rtlCol="0" anchor="t"/>
-          <a:lstStyle/>
-          <a:p>
-            <a:pPr indent="0" marL="0">
-              <a:lnSpc>
-                <a:spcPct val="95000"/>
-              </a:lnSpc>
-              <a:buNone/>
-            </a:pPr>
-            <a:r>
-              <a:rPr lang="en-US" sz="2500" b="1" dirty="0">
-                <a:solidFill>
-                  <a:srgbClr val="172C2A"/>
-                </a:solidFill>
-                <a:latin typeface="Trebuchet MS" pitchFamily="34" charset="0"/>
-                <a:ea typeface="Trebuchet MS" pitchFamily="34" charset="-122"/>
-                <a:cs typeface="Trebuchet MS" pitchFamily="34" charset="-120"/>
-              </a:rPr>
-              <a:t>Setiap simbol, kata, dan suara berlisensi jelas dan tercatat asal-usulnya</a:t>
-            </a:r>
-            <a:endParaRPr lang="en-US" sz="2500" dirty="0"/>
-          </a:p>
-        </p:txBody>
-      </p:sp>
-      <p:pic>
-        <p:nvPicPr>
-          <p:cNvPr id="4" name="Image 0" descr="C:\Users\mikae\OneDrive\Documents\Lomba\IFEST\Nyambung\app\assets\brand\logo_mark.png">    </p:cNvPr>
-          <p:cNvPicPr>
-            <a:picLocks noChangeAspect="1"/>
-          </p:cNvPicPr>
-          <p:nvPr/>
-        </p:nvPicPr>
-        <p:blipFill>
-          <a:blip r:embed="rId1"/>
-          <a:stretch>
-            <a:fillRect/>
-          </a:stretch>
-        </p:blipFill>
-        <p:spPr>
-          <a:xfrm>
-            <a:off x="11167567" y="347472"/>
-            <a:ext cx="475488" cy="475488"/>
-          </a:xfrm>
-          <a:prstGeom prst="rect">
-            <a:avLst/>
-          </a:prstGeom>
-        </p:spPr>
-      </p:pic>
-      <p:sp>
-        <p:nvSpPr>
-          <p:cNvPr id="5" name="Text 2"/>
-          <p:cNvSpPr/>
-          <p:nvPr/>
-        </p:nvSpPr>
-        <p:spPr>
-          <a:xfrm>
-            <a:off x="548640" y="6382512"/>
-            <a:ext cx="1883664" cy="256032"/>
-          </a:xfrm>
-          <a:prstGeom prst="roundRect">
-            <a:avLst>
-              <a:gd name="adj" fmla="val 46429"/>
-            </a:avLst>
-          </a:prstGeom>
-          <a:solidFill>
-            <a:srgbClr val="098277"/>
-          </a:solidFill>
-          <a:ln w="9525">
-            <a:solidFill>
-              <a:srgbClr val="098277"/>
-            </a:solidFill>
-          </a:ln>
-        </p:spPr>
-        <p:txBody>
-          <a:bodyPr wrap="square" lIns="0" tIns="0" rIns="0" bIns="0" rtlCol="0" anchor="ctr"/>
-          <a:lstStyle/>
-          <a:p>
-            <a:pPr algn="ctr" indent="0" marL="0">
-              <a:buNone/>
-            </a:pPr>
-            <a:r>
-              <a:rPr lang="en-US" sz="950" b="1" dirty="0">
-                <a:solidFill>
-                  <a:srgbClr val="FFFFFF"/>
-                </a:solidFill>
-                <a:latin typeface="Calibri" pitchFamily="34" charset="0"/>
-                <a:ea typeface="Calibri" pitchFamily="34" charset="-122"/>
-                <a:cs typeface="Calibri" pitchFamily="34" charset="-120"/>
-              </a:rPr>
-              <a:t>Lampiran · untuk Q&amp;A</a:t>
-            </a:r>
-            <a:endParaRPr lang="en-US" sz="950" dirty="0"/>
-          </a:p>
-        </p:txBody>
-      </p:sp>
-      <p:sp>
-        <p:nvSpPr>
-          <p:cNvPr id="6" name="Text 3"/>
-          <p:cNvSpPr/>
-          <p:nvPr/>
-        </p:nvSpPr>
-        <p:spPr>
-          <a:xfrm>
-            <a:off x="11185855" y="6382512"/>
-            <a:ext cx="457200" cy="256032"/>
-          </a:xfrm>
-          <a:prstGeom prst="rect">
-            <a:avLst/>
-          </a:prstGeom>
-          <a:noFill/>
-          <a:ln/>
-        </p:spPr>
-        <p:txBody>
-          <a:bodyPr wrap="square" lIns="0" tIns="0" rIns="0" bIns="0" rtlCol="0" anchor="ctr"/>
-          <a:lstStyle/>
-          <a:p>
-            <a:pPr algn="r" indent="0" marL="0">
-              <a:buNone/>
-            </a:pPr>
-            <a:r>
-              <a:rPr lang="en-US" sz="1000" dirty="0">
-                <a:solidFill>
-                  <a:srgbClr val="52706D"/>
-                </a:solidFill>
-                <a:latin typeface="Calibri" pitchFamily="34" charset="0"/>
-                <a:ea typeface="Calibri" pitchFamily="34" charset="-122"/>
-                <a:cs typeface="Calibri" pitchFamily="34" charset="-120"/>
-              </a:rPr>
-              <a:t>16</a:t>
-            </a:r>
-            <a:endParaRPr lang="en-US" sz="1000" dirty="0"/>
-          </a:p>
-        </p:txBody>
-      </p:sp>
-      <p:sp>
-        <p:nvSpPr>
-          <p:cNvPr id="7" name="Text 4"/>
-          <p:cNvSpPr/>
-          <p:nvPr/>
-        </p:nvSpPr>
-        <p:spPr>
-          <a:xfrm>
-            <a:off x="548640" y="6035040"/>
-            <a:ext cx="11094415" cy="274320"/>
-          </a:xfrm>
-          <a:prstGeom prst="rect">
-            <a:avLst/>
-          </a:prstGeom>
-          <a:noFill/>
-          <a:ln/>
-        </p:spPr>
-        <p:txBody>
-          <a:bodyPr wrap="square" lIns="0" tIns="0" rIns="0" bIns="0" rtlCol="0" anchor="b"/>
-          <a:lstStyle/>
-          <a:p>
-            <a:pPr indent="0" marL="0">
-              <a:buNone/>
-            </a:pPr>
-            <a:r>
-              <a:rPr lang="en-US" sz="850" i="1" dirty="0">
-                <a:solidFill>
-                  <a:srgbClr val="52706D"/>
-                </a:solidFill>
-                <a:latin typeface="Calibri" pitchFamily="34" charset="0"/>
-                <a:ea typeface="Calibri" pitchFamily="34" charset="-122"/>
-                <a:cs typeface="Calibri" pitchFamily="34" charset="-120"/>
-              </a:rPr>
-              <a:t>mulberrysymbols.org · Mizuko (1987), AAC 3(3) · Goossens', Crain &amp; Elder (1992) · WCAG 2.2 1.4.1 · assets/PROVENANCE.md (175 berkas diverifikasi SHA-256).</a:t>
-            </a:r>
-            <a:endParaRPr lang="en-US" sz="850" dirty="0"/>
-          </a:p>
-        </p:txBody>
-      </p:sp>
-      <p:sp>
-        <p:nvSpPr>
-          <p:cNvPr id="9" name="Shape 5"/>
-          <p:cNvSpPr/>
-          <p:nvPr/>
-        </p:nvSpPr>
-        <p:spPr>
-          <a:xfrm>
-            <a:off x="548640" y="1783080"/>
-            <a:ext cx="3931920" cy="4114800"/>
-          </a:xfrm>
-          <a:prstGeom prst="roundRect">
-            <a:avLst>
-              <a:gd name="adj" fmla="val 2791"/>
-            </a:avLst>
-          </a:prstGeom>
-          <a:solidFill>
-            <a:srgbClr val="FFFFFF"/>
-          </a:solidFill>
-          <a:ln w="9525">
-            <a:solidFill>
-              <a:srgbClr val="DCEEEC"/>
-            </a:solidFill>
-            <a:prstDash val="solid"/>
-          </a:ln>
-        </p:spPr>
-      </p:sp>
-      <p:sp>
-        <p:nvSpPr>
-          <p:cNvPr id="10" name="Text 6"/>
-          <p:cNvSpPr/>
-          <p:nvPr/>
-        </p:nvSpPr>
-        <p:spPr>
-          <a:xfrm>
-            <a:off x="777240" y="1901952"/>
-            <a:ext cx="3474720" cy="237744"/>
-          </a:xfrm>
-          <a:prstGeom prst="rect">
-            <a:avLst/>
-          </a:prstGeom>
-          <a:noFill/>
-          <a:ln/>
-        </p:spPr>
-        <p:txBody>
-          <a:bodyPr wrap="square" lIns="0" tIns="0" rIns="0" bIns="0" rtlCol="0" anchor="ctr"/>
-          <a:lstStyle/>
-          <a:p>
-            <a:pPr indent="0" marL="0">
-              <a:buNone/>
-            </a:pPr>
-            <a:r>
-              <a:rPr lang="en-US" sz="1000" b="1" spc="150" kern="0" dirty="0">
-                <a:solidFill>
-                  <a:srgbClr val="026E65"/>
-                </a:solidFill>
-                <a:latin typeface="Calibri" pitchFamily="34" charset="0"/>
-                <a:ea typeface="Calibri" pitchFamily="34" charset="-122"/>
-                <a:cs typeface="Calibri" pitchFamily="34" charset="-120"/>
-              </a:rPr>
-              <a:t>SIMBOL UTAMA</a:t>
-            </a:r>
-            <a:endParaRPr lang="en-US" sz="1000" dirty="0"/>
-          </a:p>
-        </p:txBody>
-      </p:sp>
-      <p:sp>
-        <p:nvSpPr>
-          <p:cNvPr id="11" name="Shape 7"/>
-          <p:cNvSpPr/>
-          <p:nvPr/>
-        </p:nvSpPr>
-        <p:spPr>
-          <a:xfrm>
-            <a:off x="777240" y="2240280"/>
-            <a:ext cx="1024128" cy="1024128"/>
-          </a:xfrm>
-          <a:prstGeom prst="roundRect">
-            <a:avLst>
-              <a:gd name="adj" fmla="val 5357"/>
-            </a:avLst>
-          </a:prstGeom>
-          <a:solidFill>
-            <a:srgbClr val="E1F4E7"/>
-          </a:solidFill>
-          <a:ln w="12700">
-            <a:solidFill>
-              <a:srgbClr val="6FC08F"/>
-            </a:solidFill>
-            <a:prstDash val="solid"/>
-          </a:ln>
-        </p:spPr>
-      </p:sp>
-      <p:pic>
-        <p:nvPicPr>
-          <p:cNvPr id="12" name="Image 1" descr="C:\Users\mikae\OneDrive\Documents\Lomba\IFEST\Nyambung\assets\symbols\png\mau.png">    </p:cNvPr>
-          <p:cNvPicPr>
-            <a:picLocks noChangeAspect="1"/>
-          </p:cNvPicPr>
-          <p:nvPr/>
-        </p:nvPicPr>
-        <p:blipFill>
-          <a:blip r:embed="rId2"/>
-          <a:stretch>
-            <a:fillRect/>
-          </a:stretch>
-        </p:blipFill>
-        <p:spPr>
-          <a:xfrm>
-            <a:off x="1002548" y="2322210"/>
-            <a:ext cx="573512" cy="573512"/>
-          </a:xfrm>
-          <a:prstGeom prst="rect">
-            <a:avLst/>
-          </a:prstGeom>
-        </p:spPr>
-      </p:pic>
-      <p:sp>
-        <p:nvSpPr>
-          <p:cNvPr id="13" name="Text 8"/>
-          <p:cNvSpPr/>
-          <p:nvPr/>
-        </p:nvSpPr>
-        <p:spPr>
-          <a:xfrm>
-            <a:off x="777240" y="2916204"/>
-            <a:ext cx="1024128" cy="307238"/>
-          </a:xfrm>
-          <a:prstGeom prst="rect">
-            <a:avLst/>
-          </a:prstGeom>
-          <a:noFill/>
-          <a:ln/>
-        </p:spPr>
-        <p:txBody>
-          <a:bodyPr wrap="square" lIns="0" tIns="0" rIns="0" bIns="0" rtlCol="0" anchor="ctr"/>
-          <a:lstStyle/>
-          <a:p>
-            <a:pPr algn="ctr" indent="0" marL="0">
-              <a:buNone/>
-            </a:pPr>
-            <a:r>
-              <a:rPr lang="en-US" sz="750" b="1" dirty="0">
-                <a:solidFill>
-                  <a:srgbClr val="2A7445"/>
-                </a:solidFill>
-                <a:latin typeface="Calibri" pitchFamily="34" charset="0"/>
-                <a:ea typeface="Calibri" pitchFamily="34" charset="-122"/>
-                <a:cs typeface="Calibri" pitchFamily="34" charset="-120"/>
-              </a:rPr>
-              <a:t>MAU</a:t>
-            </a:r>
-            <a:endParaRPr lang="en-US" sz="750" dirty="0"/>
-          </a:p>
-        </p:txBody>
-      </p:sp>
-      <p:sp>
-        <p:nvSpPr>
-          <p:cNvPr id="14" name="Shape 9"/>
-          <p:cNvSpPr/>
-          <p:nvPr/>
-        </p:nvSpPr>
-        <p:spPr>
-          <a:xfrm>
-            <a:off x="1929384" y="2240280"/>
-            <a:ext cx="1024128" cy="1024128"/>
-          </a:xfrm>
-          <a:prstGeom prst="roundRect">
-            <a:avLst>
-              <a:gd name="adj" fmla="val 5357"/>
-            </a:avLst>
-          </a:prstGeom>
-          <a:solidFill>
-            <a:srgbClr val="E1F4E7"/>
-          </a:solidFill>
-          <a:ln w="12700">
-            <a:solidFill>
-              <a:srgbClr val="6FC08F"/>
-            </a:solidFill>
-            <a:prstDash val="solid"/>
-          </a:ln>
-        </p:spPr>
-      </p:sp>
-      <p:pic>
-        <p:nvPicPr>
-          <p:cNvPr id="15" name="Image 2" descr="C:\Users\mikae\OneDrive\Documents\Lomba\IFEST\Nyambung\assets\symbols\png\bantu.png">    </p:cNvPr>
-          <p:cNvPicPr>
-            <a:picLocks noChangeAspect="1"/>
-          </p:cNvPicPr>
-          <p:nvPr/>
-        </p:nvPicPr>
-        <p:blipFill>
-          <a:blip r:embed="rId3"/>
-          <a:stretch>
-            <a:fillRect/>
-          </a:stretch>
-        </p:blipFill>
-        <p:spPr>
-          <a:xfrm>
-            <a:off x="2154692" y="2322210"/>
-            <a:ext cx="573512" cy="573512"/>
-          </a:xfrm>
-          <a:prstGeom prst="rect">
-            <a:avLst/>
-          </a:prstGeom>
-        </p:spPr>
-      </p:pic>
-      <p:sp>
-        <p:nvSpPr>
-          <p:cNvPr id="16" name="Text 10"/>
-          <p:cNvSpPr/>
-          <p:nvPr/>
-        </p:nvSpPr>
-        <p:spPr>
-          <a:xfrm>
-            <a:off x="1929384" y="2916204"/>
-            <a:ext cx="1024128" cy="307238"/>
-          </a:xfrm>
-          <a:prstGeom prst="rect">
-            <a:avLst/>
-          </a:prstGeom>
-          <a:noFill/>
-          <a:ln/>
-        </p:spPr>
-        <p:txBody>
-          <a:bodyPr wrap="square" lIns="0" tIns="0" rIns="0" bIns="0" rtlCol="0" anchor="ctr"/>
-          <a:lstStyle/>
-          <a:p>
-            <a:pPr algn="ctr" indent="0" marL="0">
-              <a:buNone/>
-            </a:pPr>
-            <a:r>
-              <a:rPr lang="en-US" sz="750" b="1" dirty="0">
-                <a:solidFill>
-                  <a:srgbClr val="2A7445"/>
-                </a:solidFill>
-                <a:latin typeface="Calibri" pitchFamily="34" charset="0"/>
-                <a:ea typeface="Calibri" pitchFamily="34" charset="-122"/>
-                <a:cs typeface="Calibri" pitchFamily="34" charset="-120"/>
-              </a:rPr>
-              <a:t>BANTU</a:t>
-            </a:r>
-            <a:endParaRPr lang="en-US" sz="750" dirty="0"/>
-          </a:p>
-        </p:txBody>
-      </p:sp>
-      <p:sp>
-        <p:nvSpPr>
-          <p:cNvPr id="17" name="Shape 11"/>
-          <p:cNvSpPr/>
-          <p:nvPr/>
-        </p:nvSpPr>
-        <p:spPr>
-          <a:xfrm>
-            <a:off x="3081528" y="2240280"/>
-            <a:ext cx="1024128" cy="1024128"/>
-          </a:xfrm>
-          <a:prstGeom prst="roundRect">
-            <a:avLst>
-              <a:gd name="adj" fmla="val 5357"/>
-            </a:avLst>
-          </a:prstGeom>
-          <a:solidFill>
-            <a:srgbClr val="E1F4E7"/>
-          </a:solidFill>
-          <a:ln w="12700">
-            <a:solidFill>
-              <a:srgbClr val="6FC08F"/>
-            </a:solidFill>
-            <a:prstDash val="solid"/>
-          </a:ln>
-        </p:spPr>
-      </p:sp>
-      <p:pic>
-        <p:nvPicPr>
-          <p:cNvPr id="18" name="Image 3" descr="C:\Users\mikae\OneDrive\Documents\Lomba\IFEST\Nyambung\assets\symbols\png\makan.png">    </p:cNvPr>
-          <p:cNvPicPr>
-            <a:picLocks noChangeAspect="1"/>
-          </p:cNvPicPr>
-          <p:nvPr/>
-        </p:nvPicPr>
-        <p:blipFill>
-          <a:blip r:embed="rId4"/>
-          <a:stretch>
-            <a:fillRect/>
-          </a:stretch>
-        </p:blipFill>
-        <p:spPr>
-          <a:xfrm>
-            <a:off x="3306836" y="2322210"/>
-            <a:ext cx="573512" cy="573512"/>
-          </a:xfrm>
-          <a:prstGeom prst="rect">
-            <a:avLst/>
-          </a:prstGeom>
-        </p:spPr>
-      </p:pic>
-      <p:sp>
-        <p:nvSpPr>
-          <p:cNvPr id="19" name="Text 12"/>
-          <p:cNvSpPr/>
-          <p:nvPr/>
-        </p:nvSpPr>
-        <p:spPr>
-          <a:xfrm>
-            <a:off x="3081528" y="2916204"/>
-            <a:ext cx="1024128" cy="307238"/>
-          </a:xfrm>
-          <a:prstGeom prst="rect">
-            <a:avLst/>
-          </a:prstGeom>
-          <a:noFill/>
-          <a:ln/>
-        </p:spPr>
-        <p:txBody>
-          <a:bodyPr wrap="square" lIns="0" tIns="0" rIns="0" bIns="0" rtlCol="0" anchor="ctr"/>
-          <a:lstStyle/>
-          <a:p>
-            <a:pPr algn="ctr" indent="0" marL="0">
-              <a:buNone/>
-            </a:pPr>
-            <a:r>
-              <a:rPr lang="en-US" sz="750" b="1" dirty="0">
-                <a:solidFill>
-                  <a:srgbClr val="2A7445"/>
-                </a:solidFill>
-                <a:latin typeface="Calibri" pitchFamily="34" charset="0"/>
-                <a:ea typeface="Calibri" pitchFamily="34" charset="-122"/>
-                <a:cs typeface="Calibri" pitchFamily="34" charset="-120"/>
-              </a:rPr>
-              <a:t>MAKAN</a:t>
-            </a:r>
-            <a:endParaRPr lang="en-US" sz="750" dirty="0"/>
-          </a:p>
-        </p:txBody>
-      </p:sp>
-      <p:sp>
-        <p:nvSpPr>
-          <p:cNvPr id="20" name="Shape 13"/>
-          <p:cNvSpPr/>
-          <p:nvPr/>
-        </p:nvSpPr>
-        <p:spPr>
-          <a:xfrm>
-            <a:off x="777240" y="3392424"/>
-            <a:ext cx="1024128" cy="1024128"/>
-          </a:xfrm>
-          <a:prstGeom prst="roundRect">
-            <a:avLst>
-              <a:gd name="adj" fmla="val 5357"/>
-            </a:avLst>
-          </a:prstGeom>
-          <a:solidFill>
-            <a:srgbClr val="E1F4E7"/>
-          </a:solidFill>
-          <a:ln w="12700">
-            <a:solidFill>
-              <a:srgbClr val="6FC08F"/>
-            </a:solidFill>
-            <a:prstDash val="solid"/>
-          </a:ln>
-        </p:spPr>
-      </p:sp>
-      <p:pic>
-        <p:nvPicPr>
-          <p:cNvPr id="21" name="Image 4" descr="C:\Users\mikae\OneDrive\Documents\Lomba\IFEST\Nyambung\assets\symbols\png\minum.png">    </p:cNvPr>
-          <p:cNvPicPr>
-            <a:picLocks noChangeAspect="1"/>
-          </p:cNvPicPr>
-          <p:nvPr/>
-        </p:nvPicPr>
-        <p:blipFill>
-          <a:blip r:embed="rId5"/>
-          <a:stretch>
-            <a:fillRect/>
-          </a:stretch>
-        </p:blipFill>
-        <p:spPr>
-          <a:xfrm>
-            <a:off x="1002548" y="3474354"/>
-            <a:ext cx="573512" cy="573512"/>
-          </a:xfrm>
-          <a:prstGeom prst="rect">
-            <a:avLst/>
-          </a:prstGeom>
-        </p:spPr>
-      </p:pic>
-      <p:sp>
-        <p:nvSpPr>
-          <p:cNvPr id="22" name="Text 14"/>
-          <p:cNvSpPr/>
-          <p:nvPr/>
-        </p:nvSpPr>
-        <p:spPr>
-          <a:xfrm>
-            <a:off x="777240" y="4068348"/>
-            <a:ext cx="1024128" cy="307238"/>
-          </a:xfrm>
-          <a:prstGeom prst="rect">
-            <a:avLst/>
-          </a:prstGeom>
-          <a:noFill/>
-          <a:ln/>
-        </p:spPr>
-        <p:txBody>
-          <a:bodyPr wrap="square" lIns="0" tIns="0" rIns="0" bIns="0" rtlCol="0" anchor="ctr"/>
-          <a:lstStyle/>
-          <a:p>
-            <a:pPr algn="ctr" indent="0" marL="0">
-              <a:buNone/>
-            </a:pPr>
-            <a:r>
-              <a:rPr lang="en-US" sz="750" b="1" dirty="0">
-                <a:solidFill>
-                  <a:srgbClr val="2A7445"/>
-                </a:solidFill>
-                <a:latin typeface="Calibri" pitchFamily="34" charset="0"/>
-                <a:ea typeface="Calibri" pitchFamily="34" charset="-122"/>
-                <a:cs typeface="Calibri" pitchFamily="34" charset="-120"/>
-              </a:rPr>
-              <a:t>MINUM</a:t>
-            </a:r>
-            <a:endParaRPr lang="en-US" sz="750" dirty="0"/>
-          </a:p>
-        </p:txBody>
-      </p:sp>
-      <p:sp>
-        <p:nvSpPr>
-          <p:cNvPr id="23" name="Shape 15"/>
-          <p:cNvSpPr/>
-          <p:nvPr/>
-        </p:nvSpPr>
-        <p:spPr>
-          <a:xfrm>
-            <a:off x="1929384" y="3392424"/>
-            <a:ext cx="1024128" cy="1024128"/>
-          </a:xfrm>
-          <a:prstGeom prst="roundRect">
-            <a:avLst>
-              <a:gd name="adj" fmla="val 5357"/>
-            </a:avLst>
-          </a:prstGeom>
-          <a:solidFill>
-            <a:srgbClr val="E8F6F5"/>
-          </a:solidFill>
-          <a:ln w="12700">
-            <a:solidFill>
-              <a:srgbClr val="C7C7D2"/>
-            </a:solidFill>
-            <a:prstDash val="solid"/>
-          </a:ln>
-        </p:spPr>
-      </p:sp>
-      <p:pic>
-        <p:nvPicPr>
-          <p:cNvPr id="24" name="Image 5" descr="C:\Users\mikae\OneDrive\Documents\Lomba\IFEST\Nyambung\assets\symbols\png\lagi.png">    </p:cNvPr>
-          <p:cNvPicPr>
-            <a:picLocks noChangeAspect="1"/>
-          </p:cNvPicPr>
-          <p:nvPr/>
-        </p:nvPicPr>
-        <p:blipFill>
-          <a:blip r:embed="rId6"/>
-          <a:stretch>
-            <a:fillRect/>
-          </a:stretch>
-        </p:blipFill>
-        <p:spPr>
-          <a:xfrm>
-            <a:off x="2154692" y="3474354"/>
-            <a:ext cx="573512" cy="573512"/>
-          </a:xfrm>
-          <a:prstGeom prst="rect">
-            <a:avLst/>
-          </a:prstGeom>
-        </p:spPr>
-      </p:pic>
-      <p:sp>
-        <p:nvSpPr>
-          <p:cNvPr id="25" name="Text 16"/>
-          <p:cNvSpPr/>
-          <p:nvPr/>
-        </p:nvSpPr>
-        <p:spPr>
-          <a:xfrm>
-            <a:off x="1929384" y="4068348"/>
-            <a:ext cx="1024128" cy="307238"/>
-          </a:xfrm>
-          <a:prstGeom prst="rect">
-            <a:avLst/>
-          </a:prstGeom>
-          <a:noFill/>
-          <a:ln/>
-        </p:spPr>
-        <p:txBody>
-          <a:bodyPr wrap="square" lIns="0" tIns="0" rIns="0" bIns="0" rtlCol="0" anchor="ctr"/>
-          <a:lstStyle/>
-          <a:p>
-            <a:pPr algn="ctr" indent="0" marL="0">
-              <a:buNone/>
-            </a:pPr>
-            <a:r>
-              <a:rPr lang="en-US" sz="750" b="1" dirty="0">
-                <a:solidFill>
-                  <a:srgbClr val="172C2A"/>
-                </a:solidFill>
-                <a:latin typeface="Calibri" pitchFamily="34" charset="0"/>
-                <a:ea typeface="Calibri" pitchFamily="34" charset="-122"/>
-                <a:cs typeface="Calibri" pitchFamily="34" charset="-120"/>
-              </a:rPr>
-              <a:t>LAGI</a:t>
-            </a:r>
-            <a:endParaRPr lang="en-US" sz="750" dirty="0"/>
-          </a:p>
-        </p:txBody>
-      </p:sp>
-      <p:sp>
-        <p:nvSpPr>
-          <p:cNvPr id="26" name="Shape 17"/>
-          <p:cNvSpPr/>
-          <p:nvPr/>
-        </p:nvSpPr>
-        <p:spPr>
-          <a:xfrm>
-            <a:off x="3081528" y="3392424"/>
-            <a:ext cx="1024128" cy="1024128"/>
-          </a:xfrm>
-          <a:prstGeom prst="roundRect">
-            <a:avLst>
-              <a:gd name="adj" fmla="val 5357"/>
-            </a:avLst>
-          </a:prstGeom>
-          <a:solidFill>
-            <a:srgbClr val="E8F6F5"/>
-          </a:solidFill>
-          <a:ln w="12700">
-            <a:solidFill>
-              <a:srgbClr val="C7C7D2"/>
-            </a:solidFill>
-            <a:prstDash val="solid"/>
-          </a:ln>
-        </p:spPr>
-      </p:sp>
-      <p:pic>
-        <p:nvPicPr>
-          <p:cNvPr id="27" name="Image 6" descr="C:\Users\mikae\OneDrive\Documents\Lomba\IFEST\Nyambung\assets\symbols\png\selesai.png">    </p:cNvPr>
-          <p:cNvPicPr>
-            <a:picLocks noChangeAspect="1"/>
-          </p:cNvPicPr>
-          <p:nvPr/>
-        </p:nvPicPr>
-        <p:blipFill>
-          <a:blip r:embed="rId7"/>
-          <a:stretch>
-            <a:fillRect/>
-          </a:stretch>
-        </p:blipFill>
-        <p:spPr>
-          <a:xfrm>
-            <a:off x="3306836" y="3474354"/>
-            <a:ext cx="573512" cy="573512"/>
-          </a:xfrm>
-          <a:prstGeom prst="rect">
-            <a:avLst/>
-          </a:prstGeom>
-        </p:spPr>
-      </p:pic>
-      <p:sp>
-        <p:nvSpPr>
-          <p:cNvPr id="28" name="Text 18"/>
-          <p:cNvSpPr/>
-          <p:nvPr/>
-        </p:nvSpPr>
-        <p:spPr>
-          <a:xfrm>
-            <a:off x="3081528" y="4068348"/>
-            <a:ext cx="1024128" cy="307238"/>
-          </a:xfrm>
-          <a:prstGeom prst="rect">
-            <a:avLst/>
-          </a:prstGeom>
-          <a:noFill/>
-          <a:ln/>
-        </p:spPr>
-        <p:txBody>
-          <a:bodyPr wrap="square" lIns="0" tIns="0" rIns="0" bIns="0" rtlCol="0" anchor="ctr"/>
-          <a:lstStyle/>
-          <a:p>
-            <a:pPr algn="ctr" indent="0" marL="0">
-              <a:buNone/>
-            </a:pPr>
-            <a:r>
-              <a:rPr lang="en-US" sz="750" b="1" dirty="0">
-                <a:solidFill>
-                  <a:srgbClr val="172C2A"/>
-                </a:solidFill>
-                <a:latin typeface="Calibri" pitchFamily="34" charset="0"/>
-                <a:ea typeface="Calibri" pitchFamily="34" charset="-122"/>
-                <a:cs typeface="Calibri" pitchFamily="34" charset="-120"/>
-              </a:rPr>
-              <a:t>SELESAI</a:t>
-            </a:r>
-            <a:endParaRPr lang="en-US" sz="750" dirty="0"/>
-          </a:p>
-        </p:txBody>
-      </p:sp>
-      <p:sp>
-        <p:nvSpPr>
-          <p:cNvPr id="29" name="Text 19"/>
-          <p:cNvSpPr/>
-          <p:nvPr/>
-        </p:nvSpPr>
-        <p:spPr>
-          <a:xfrm>
-            <a:off x="777240" y="4617720"/>
-            <a:ext cx="3474720" cy="1188720"/>
-          </a:xfrm>
-          <a:prstGeom prst="rect">
-            <a:avLst/>
-          </a:prstGeom>
-          <a:noFill/>
-          <a:ln/>
-        </p:spPr>
-        <p:txBody>
-          <a:bodyPr wrap="square" lIns="0" tIns="0" rIns="0" bIns="0" rtlCol="0" anchor="t"/>
-          <a:lstStyle/>
-          <a:p>
-            <a:pPr indent="0" marL="0">
-              <a:spcAft>
-                <a:spcPts val="200"/>
-              </a:spcAft>
-              <a:buNone/>
-            </a:pPr>
-            <a:r>
-              <a:rPr lang="en-US" sz="1500" b="1" dirty="0">
-                <a:solidFill>
-                  <a:srgbClr val="172C2A"/>
-                </a:solidFill>
-                <a:latin typeface="Trebuchet MS" pitchFamily="34" charset="0"/>
-                <a:ea typeface="Trebuchet MS" pitchFamily="34" charset="-122"/>
-                <a:cs typeface="Trebuchet MS" pitchFamily="34" charset="-120"/>
-              </a:rPr>
-              <a:t>Mulberry Symbols</a:t>
-            </a:r>
-            <a:endParaRPr lang="en-US" sz="1500" dirty="0"/>
-          </a:p>
-          <a:p>
-            <a:pPr indent="0" marL="0">
-              <a:spcAft>
-                <a:spcPts val="200"/>
-              </a:spcAft>
-              <a:buNone/>
-            </a:pPr>
-            <a:r>
-              <a:rPr lang="en-US" sz="1150" b="1" dirty="0">
-                <a:solidFill>
-                  <a:srgbClr val="026E65"/>
-                </a:solidFill>
-                <a:latin typeface="Calibri" pitchFamily="34" charset="0"/>
-                <a:ea typeface="Calibri" pitchFamily="34" charset="-122"/>
-                <a:cs typeface="Calibri" pitchFamily="34" charset="-120"/>
-              </a:rPr>
-              <a:t>© Steve Lee · CC BY-SA 4.0</a:t>
-            </a:r>
-            <a:endParaRPr lang="en-US" sz="1500" dirty="0"/>
-          </a:p>
-          <a:p>
-            <a:pPr indent="0" marL="0">
-              <a:spcAft>
-                <a:spcPts val="200"/>
-              </a:spcAft>
-              <a:buNone/>
-            </a:pPr>
-            <a:r>
-              <a:rPr lang="en-US" sz="1050" dirty="0">
-                <a:solidFill>
-                  <a:srgbClr val="172C2A"/>
-                </a:solidFill>
-                <a:latin typeface="Calibri" pitchFamily="34" charset="0"/>
-                <a:ea typeface="Calibri" pitchFamily="34" charset="-122"/>
-                <a:cs typeface="Calibri" pitchFamily="34" charset="-120"/>
-              </a:rPr>
-              <a:t>Digambar Claire Barge, ditinjau terapis wicara. 99 simbol dipakai; berkas asli tidak diubah, hanya dirasterkan 256 px berwarna.</a:t>
-            </a:r>
-            <a:endParaRPr lang="en-US" sz="1500" dirty="0"/>
-          </a:p>
-        </p:txBody>
-      </p:sp>
-      <p:sp>
-        <p:nvSpPr>
-          <p:cNvPr id="30" name="Shape 20"/>
-          <p:cNvSpPr/>
-          <p:nvPr/>
-        </p:nvSpPr>
-        <p:spPr>
-          <a:xfrm>
-            <a:off x="4709160" y="1783080"/>
-            <a:ext cx="3352648" cy="1481328"/>
-          </a:xfrm>
-          <a:prstGeom prst="roundRect">
-            <a:avLst>
-              <a:gd name="adj" fmla="val 7407"/>
-            </a:avLst>
-          </a:prstGeom>
-          <a:solidFill>
-            <a:srgbClr val="FFFFFF"/>
-          </a:solidFill>
-          <a:ln w="9525">
-            <a:solidFill>
-              <a:srgbClr val="DCEEEC"/>
-            </a:solidFill>
-            <a:prstDash val="solid"/>
-          </a:ln>
-        </p:spPr>
-      </p:sp>
-      <p:sp>
-        <p:nvSpPr>
-          <p:cNvPr id="31" name="Shape 21"/>
-          <p:cNvSpPr/>
-          <p:nvPr/>
-        </p:nvSpPr>
-        <p:spPr>
-          <a:xfrm>
-            <a:off x="4892040" y="1965960"/>
-            <a:ext cx="475488" cy="475488"/>
-          </a:xfrm>
-          <a:prstGeom prst="ellipse">
-            <a:avLst/>
-          </a:prstGeom>
-          <a:solidFill>
-            <a:srgbClr val="DFF6F3"/>
-          </a:solidFill>
-          <a:ln w="12700">
-            <a:solidFill>
-              <a:srgbClr val="DFF6F3"/>
-            </a:solidFill>
-            <a:prstDash val="solid"/>
-          </a:ln>
-        </p:spPr>
-      </p:sp>
-      <p:pic>
-        <p:nvPicPr>
-          <p:cNvPr id="32" name="Image 7" descr="preencoded.png">    </p:cNvPr>
-          <p:cNvPicPr>
-            <a:picLocks noChangeAspect="1"/>
-          </p:cNvPicPr>
-          <p:nvPr/>
-        </p:nvPicPr>
-        <p:blipFill>
-          <a:blip r:embed="rId8"/>
-          <a:stretch>
-            <a:fillRect/>
-          </a:stretch>
-        </p:blipFill>
-        <p:spPr>
-          <a:xfrm>
-            <a:off x="5006157" y="2080077"/>
-            <a:ext cx="247254" cy="247254"/>
-          </a:xfrm>
-          <a:prstGeom prst="rect">
-            <a:avLst/>
-          </a:prstGeom>
-        </p:spPr>
-      </p:pic>
-      <p:sp>
-        <p:nvSpPr>
-          <p:cNvPr id="33" name="Text 22"/>
-          <p:cNvSpPr/>
-          <p:nvPr/>
-        </p:nvSpPr>
-        <p:spPr>
-          <a:xfrm>
-            <a:off x="5486400" y="1965960"/>
-            <a:ext cx="2392528" cy="475488"/>
-          </a:xfrm>
-          <a:prstGeom prst="rect">
-            <a:avLst/>
-          </a:prstGeom>
-          <a:noFill/>
-          <a:ln/>
-        </p:spPr>
-        <p:txBody>
-          <a:bodyPr wrap="square" lIns="0" tIns="0" rIns="0" bIns="0" rtlCol="0" anchor="ctr"/>
-          <a:lstStyle/>
-          <a:p>
-            <a:pPr indent="0" marL="0">
-              <a:buNone/>
-            </a:pPr>
-            <a:r>
-              <a:rPr lang="en-US" sz="1400" b="1" dirty="0">
-                <a:solidFill>
-                  <a:srgbClr val="172C2A"/>
-                </a:solidFill>
-                <a:latin typeface="Trebuchet MS" pitchFamily="34" charset="0"/>
-                <a:ea typeface="Trebuchet MS" pitchFamily="34" charset="-122"/>
-                <a:cs typeface="Trebuchet MS" pitchFamily="34" charset="-120"/>
-              </a:rPr>
-              <a:t>Simbol buatan tim</a:t>
-            </a:r>
-            <a:endParaRPr lang="en-US" sz="1400" dirty="0"/>
-          </a:p>
-        </p:txBody>
-      </p:sp>
-      <p:sp>
-        <p:nvSpPr>
-          <p:cNvPr id="34" name="Text 23"/>
-          <p:cNvSpPr/>
-          <p:nvPr/>
-        </p:nvSpPr>
-        <p:spPr>
-          <a:xfrm>
-            <a:off x="4892040" y="2514600"/>
-            <a:ext cx="2986888" cy="502920"/>
-          </a:xfrm>
-          <a:prstGeom prst="rect">
-            <a:avLst/>
-          </a:prstGeom>
-          <a:noFill/>
-          <a:ln/>
-        </p:spPr>
-        <p:txBody>
-          <a:bodyPr wrap="square" lIns="0" tIns="0" rIns="0" bIns="0" rtlCol="0" anchor="t"/>
-          <a:lstStyle/>
-          <a:p>
-            <a:pPr indent="0" marL="0">
-              <a:buNone/>
-            </a:pPr>
-            <a:r>
-              <a:rPr lang="en-US" sz="1050" dirty="0">
-                <a:solidFill>
-                  <a:srgbClr val="172C2A"/>
-                </a:solidFill>
-                <a:latin typeface="Calibri" pitchFamily="34" charset="0"/>
-                <a:ea typeface="Calibri" pitchFamily="34" charset="-122"/>
-                <a:cs typeface="Calibri" pitchFamily="34" charset="-120"/>
-              </a:rPr>
-              <a:t>21 kata tanpa padanan jujur di Mulberry (mis. BERHENTI, AKU) digambar tim dengan gaya dan konvensi yang sama.</a:t>
-            </a:r>
-            <a:endParaRPr lang="en-US" sz="1050" dirty="0"/>
-          </a:p>
-        </p:txBody>
-      </p:sp>
-      <p:sp>
-        <p:nvSpPr>
-          <p:cNvPr id="35" name="Text 24"/>
-          <p:cNvSpPr/>
-          <p:nvPr/>
-        </p:nvSpPr>
-        <p:spPr>
-          <a:xfrm>
-            <a:off x="4892040" y="2990088"/>
-            <a:ext cx="2986888" cy="219456"/>
-          </a:xfrm>
-          <a:prstGeom prst="rect">
-            <a:avLst/>
-          </a:prstGeom>
-          <a:noFill/>
-          <a:ln/>
-        </p:spPr>
-        <p:txBody>
-          <a:bodyPr wrap="square" lIns="0" tIns="0" rIns="0" bIns="0" rtlCol="0" anchor="ctr"/>
-          <a:lstStyle/>
-          <a:p>
-            <a:pPr indent="0" marL="0">
-              <a:buNone/>
-            </a:pPr>
-            <a:r>
-              <a:rPr lang="en-US" sz="950" i="1" dirty="0">
-                <a:solidFill>
-                  <a:srgbClr val="52706D"/>
-                </a:solidFill>
-                <a:latin typeface="Calibri" pitchFamily="34" charset="0"/>
-                <a:ea typeface="Calibri" pitchFamily="34" charset="-122"/>
-                <a:cs typeface="Calibri" pitchFamily="34" charset="-120"/>
-              </a:rPr>
-              <a:t>CC BY-SA 4.0 · belum diuji pada anak</a:t>
-            </a:r>
-            <a:endParaRPr lang="en-US" sz="950" dirty="0"/>
-          </a:p>
-        </p:txBody>
-      </p:sp>
-      <p:sp>
-        <p:nvSpPr>
-          <p:cNvPr id="36" name="Shape 25"/>
-          <p:cNvSpPr/>
-          <p:nvPr/>
-        </p:nvSpPr>
-        <p:spPr>
-          <a:xfrm>
-            <a:off x="8290408" y="1783080"/>
-            <a:ext cx="3352648" cy="1481328"/>
-          </a:xfrm>
-          <a:prstGeom prst="roundRect">
-            <a:avLst>
-              <a:gd name="adj" fmla="val 7407"/>
-            </a:avLst>
-          </a:prstGeom>
-          <a:solidFill>
-            <a:srgbClr val="FFFFFF"/>
-          </a:solidFill>
-          <a:ln w="9525">
-            <a:solidFill>
-              <a:srgbClr val="DCEEEC"/>
-            </a:solidFill>
-            <a:prstDash val="solid"/>
-          </a:ln>
-        </p:spPr>
-      </p:sp>
-      <p:sp>
-        <p:nvSpPr>
-          <p:cNvPr id="37" name="Shape 26"/>
-          <p:cNvSpPr/>
-          <p:nvPr/>
-        </p:nvSpPr>
-        <p:spPr>
-          <a:xfrm>
-            <a:off x="8473288" y="1965960"/>
-            <a:ext cx="475488" cy="475488"/>
-          </a:xfrm>
-          <a:prstGeom prst="ellipse">
-            <a:avLst/>
-          </a:prstGeom>
-          <a:solidFill>
-            <a:srgbClr val="DFF6F3"/>
-          </a:solidFill>
-          <a:ln w="12700">
-            <a:solidFill>
-              <a:srgbClr val="DFF6F3"/>
-            </a:solidFill>
-            <a:prstDash val="solid"/>
-          </a:ln>
-        </p:spPr>
-      </p:sp>
-      <p:pic>
-        <p:nvPicPr>
-          <p:cNvPr id="38" name="Image 8" descr="preencoded.png">    </p:cNvPr>
-          <p:cNvPicPr>
-            <a:picLocks noChangeAspect="1"/>
-          </p:cNvPicPr>
-          <p:nvPr/>
-        </p:nvPicPr>
-        <p:blipFill>
-          <a:blip r:embed="rId9"/>
-          <a:stretch>
-            <a:fillRect/>
-          </a:stretch>
-        </p:blipFill>
-        <p:spPr>
-          <a:xfrm>
-            <a:off x="8587405" y="2080077"/>
-            <a:ext cx="247254" cy="247254"/>
-          </a:xfrm>
-          <a:prstGeom prst="rect">
-            <a:avLst/>
-          </a:prstGeom>
-        </p:spPr>
-      </p:pic>
-      <p:sp>
-        <p:nvSpPr>
-          <p:cNvPr id="39" name="Text 27"/>
-          <p:cNvSpPr/>
-          <p:nvPr/>
-        </p:nvSpPr>
-        <p:spPr>
-          <a:xfrm>
-            <a:off x="9067648" y="1965960"/>
-            <a:ext cx="2392528" cy="475488"/>
-          </a:xfrm>
-          <a:prstGeom prst="rect">
-            <a:avLst/>
-          </a:prstGeom>
-          <a:noFill/>
-          <a:ln/>
-        </p:spPr>
-        <p:txBody>
-          <a:bodyPr wrap="square" lIns="0" tIns="0" rIns="0" bIns="0" rtlCol="0" anchor="ctr"/>
-          <a:lstStyle/>
-          <a:p>
-            <a:pPr indent="0" marL="0">
-              <a:buNone/>
-            </a:pPr>
-            <a:r>
-              <a:rPr lang="en-US" sz="1400" b="1" dirty="0">
-                <a:solidFill>
-                  <a:srgbClr val="172C2A"/>
-                </a:solidFill>
-                <a:latin typeface="Trebuchet MS" pitchFamily="34" charset="0"/>
-                <a:ea typeface="Trebuchet MS" pitchFamily="34" charset="-122"/>
-                <a:cs typeface="Trebuchet MS" pitchFamily="34" charset="-120"/>
-              </a:rPr>
-              <a:t>120 kata</a:t>
-            </a:r>
-            <a:endParaRPr lang="en-US" sz="1400" dirty="0"/>
-          </a:p>
-        </p:txBody>
-      </p:sp>
-      <p:sp>
-        <p:nvSpPr>
-          <p:cNvPr id="40" name="Text 28"/>
-          <p:cNvSpPr/>
-          <p:nvPr/>
-        </p:nvSpPr>
-        <p:spPr>
-          <a:xfrm>
-            <a:off x="8473288" y="2514600"/>
-            <a:ext cx="2986888" cy="502920"/>
-          </a:xfrm>
-          <a:prstGeom prst="rect">
-            <a:avLst/>
-          </a:prstGeom>
-          <a:noFill/>
-          <a:ln/>
-        </p:spPr>
-        <p:txBody>
-          <a:bodyPr wrap="square" lIns="0" tIns="0" rIns="0" bIns="0" rtlCol="0" anchor="t"/>
-          <a:lstStyle/>
-          <a:p>
-            <a:pPr indent="0" marL="0">
-              <a:buNone/>
-            </a:pPr>
-            <a:r>
-              <a:rPr lang="en-US" sz="1050" dirty="0">
-                <a:solidFill>
-                  <a:srgbClr val="172C2A"/>
-                </a:solidFill>
-                <a:latin typeface="Calibri" pitchFamily="34" charset="0"/>
-                <a:ea typeface="Calibri" pitchFamily="34" charset="-122"/>
-                <a:cs typeface="Calibri" pitchFamily="34" charset="-120"/>
-              </a:rPr>
-              <a:t>Banajee (2003), Project Core, dan frekuensi OpenSubtitles 2018 sebagai pemecah seri.</a:t>
-            </a:r>
-            <a:endParaRPr lang="en-US" sz="1050" dirty="0"/>
-          </a:p>
-        </p:txBody>
-      </p:sp>
-      <p:sp>
-        <p:nvSpPr>
-          <p:cNvPr id="41" name="Text 29"/>
-          <p:cNvSpPr/>
-          <p:nvPr/>
-        </p:nvSpPr>
-        <p:spPr>
-          <a:xfrm>
-            <a:off x="8473288" y="2990088"/>
-            <a:ext cx="2986888" cy="219456"/>
-          </a:xfrm>
-          <a:prstGeom prst="rect">
-            <a:avLst/>
-          </a:prstGeom>
-          <a:noFill/>
-          <a:ln/>
-        </p:spPr>
-        <p:txBody>
-          <a:bodyPr wrap="square" lIns="0" tIns="0" rIns="0" bIns="0" rtlCol="0" anchor="ctr"/>
-          <a:lstStyle/>
-          <a:p>
-            <a:pPr indent="0" marL="0">
-              <a:buNone/>
-            </a:pPr>
-            <a:r>
-              <a:rPr lang="en-US" sz="950" i="1" dirty="0">
-                <a:solidFill>
-                  <a:srgbClr val="52706D"/>
-                </a:solidFill>
-                <a:latin typeface="Calibri" pitchFamily="34" charset="0"/>
-                <a:ea typeface="Calibri" pitchFamily="34" charset="-122"/>
-                <a:cs typeface="Calibri" pitchFamily="34" charset="-120"/>
-              </a:rPr>
-              <a:t>riset tim · alasan tertulis per kata</a:t>
-            </a:r>
-            <a:endParaRPr lang="en-US" sz="950" dirty="0"/>
-          </a:p>
-        </p:txBody>
-      </p:sp>
-      <p:sp>
-        <p:nvSpPr>
-          <p:cNvPr id="42" name="Shape 30"/>
-          <p:cNvSpPr/>
-          <p:nvPr/>
-        </p:nvSpPr>
-        <p:spPr>
-          <a:xfrm>
-            <a:off x="4709160" y="3447288"/>
-            <a:ext cx="3352648" cy="1481328"/>
-          </a:xfrm>
-          <a:prstGeom prst="roundRect">
-            <a:avLst>
-              <a:gd name="adj" fmla="val 7407"/>
-            </a:avLst>
-          </a:prstGeom>
-          <a:solidFill>
-            <a:srgbClr val="FFFFFF"/>
-          </a:solidFill>
-          <a:ln w="9525">
-            <a:solidFill>
-              <a:srgbClr val="DCEEEC"/>
-            </a:solidFill>
-            <a:prstDash val="solid"/>
-          </a:ln>
-        </p:spPr>
-      </p:sp>
-      <p:sp>
-        <p:nvSpPr>
-          <p:cNvPr id="43" name="Shape 31"/>
-          <p:cNvSpPr/>
-          <p:nvPr/>
-        </p:nvSpPr>
-        <p:spPr>
-          <a:xfrm>
-            <a:off x="4892040" y="3630168"/>
-            <a:ext cx="475488" cy="475488"/>
-          </a:xfrm>
-          <a:prstGeom prst="ellipse">
-            <a:avLst/>
-          </a:prstGeom>
-          <a:solidFill>
-            <a:srgbClr val="DFF6F3"/>
-          </a:solidFill>
-          <a:ln w="12700">
-            <a:solidFill>
-              <a:srgbClr val="DFF6F3"/>
-            </a:solidFill>
-            <a:prstDash val="solid"/>
-          </a:ln>
-        </p:spPr>
-      </p:sp>
-      <p:pic>
-        <p:nvPicPr>
-          <p:cNvPr id="44" name="Image 9" descr="preencoded.png">    </p:cNvPr>
-          <p:cNvPicPr>
-            <a:picLocks noChangeAspect="1"/>
-          </p:cNvPicPr>
-          <p:nvPr/>
-        </p:nvPicPr>
-        <p:blipFill>
-          <a:blip r:embed="rId10"/>
-          <a:stretch>
-            <a:fillRect/>
-          </a:stretch>
-        </p:blipFill>
-        <p:spPr>
-          <a:xfrm>
-            <a:off x="5006157" y="3744285"/>
-            <a:ext cx="247254" cy="247254"/>
-          </a:xfrm>
-          <a:prstGeom prst="rect">
-            <a:avLst/>
-          </a:prstGeom>
-        </p:spPr>
-      </p:pic>
-      <p:sp>
-        <p:nvSpPr>
-          <p:cNvPr id="45" name="Text 32"/>
-          <p:cNvSpPr/>
-          <p:nvPr/>
-        </p:nvSpPr>
-        <p:spPr>
-          <a:xfrm>
-            <a:off x="5486400" y="3630168"/>
-            <a:ext cx="2392528" cy="475488"/>
-          </a:xfrm>
-          <a:prstGeom prst="rect">
-            <a:avLst/>
-          </a:prstGeom>
-          <a:noFill/>
-          <a:ln/>
-        </p:spPr>
-        <p:txBody>
-          <a:bodyPr wrap="square" lIns="0" tIns="0" rIns="0" bIns="0" rtlCol="0" anchor="ctr"/>
-          <a:lstStyle/>
-          <a:p>
-            <a:pPr indent="0" marL="0">
-              <a:buNone/>
-            </a:pPr>
-            <a:r>
-              <a:rPr lang="en-US" sz="1400" b="1" dirty="0">
-                <a:solidFill>
-                  <a:srgbClr val="172C2A"/>
-                </a:solidFill>
-                <a:latin typeface="Trebuchet MS" pitchFamily="34" charset="0"/>
-                <a:ea typeface="Trebuchet MS" pitchFamily="34" charset="-122"/>
-                <a:cs typeface="Trebuchet MS" pitchFamily="34" charset="-120"/>
-              </a:rPr>
-              <a:t>Suara</a:t>
-            </a:r>
-            <a:endParaRPr lang="en-US" sz="1400" dirty="0"/>
-          </a:p>
-        </p:txBody>
-      </p:sp>
-      <p:sp>
-        <p:nvSpPr>
-          <p:cNvPr id="46" name="Text 33"/>
-          <p:cNvSpPr/>
-          <p:nvPr/>
-        </p:nvSpPr>
-        <p:spPr>
-          <a:xfrm>
-            <a:off x="4892040" y="4178808"/>
-            <a:ext cx="2986888" cy="502920"/>
-          </a:xfrm>
-          <a:prstGeom prst="rect">
-            <a:avLst/>
-          </a:prstGeom>
-          <a:noFill/>
-          <a:ln/>
-        </p:spPr>
-        <p:txBody>
-          <a:bodyPr wrap="square" lIns="0" tIns="0" rIns="0" bIns="0" rtlCol="0" anchor="t"/>
-          <a:lstStyle/>
-          <a:p>
-            <a:pPr indent="0" marL="0">
-              <a:buNone/>
-            </a:pPr>
-            <a:r>
-              <a:rPr lang="en-US" sz="1050" dirty="0">
-                <a:solidFill>
-                  <a:srgbClr val="172C2A"/>
-                </a:solidFill>
-                <a:latin typeface="Calibri" pitchFamily="34" charset="0"/>
-                <a:ea typeface="Calibri" pitchFamily="34" charset="-122"/>
-                <a:cs typeface="Calibri" pitchFamily="34" charset="-120"/>
-              </a:rPr>
-              <a:t>Suara papan 2 × 120 klip dibuat sekali (OpenAI TTS) lalu diputar luring. Tiruan suara keluarga lewat ElevenLabs, hanya dengan persetujuan.</a:t>
-            </a:r>
-            <a:endParaRPr lang="en-US" sz="1050" dirty="0"/>
-          </a:p>
-        </p:txBody>
-      </p:sp>
-      <p:sp>
-        <p:nvSpPr>
-          <p:cNvPr id="47" name="Text 34"/>
-          <p:cNvSpPr/>
-          <p:nvPr/>
-        </p:nvSpPr>
-        <p:spPr>
-          <a:xfrm>
-            <a:off x="4892040" y="4654296"/>
-            <a:ext cx="2986888" cy="219456"/>
-          </a:xfrm>
-          <a:prstGeom prst="rect">
-            <a:avLst/>
-          </a:prstGeom>
-          <a:noFill/>
-          <a:ln/>
-        </p:spPr>
-        <p:txBody>
-          <a:bodyPr wrap="square" lIns="0" tIns="0" rIns="0" bIns="0" rtlCol="0" anchor="ctr"/>
-          <a:lstStyle/>
-          <a:p>
-            <a:pPr indent="0" marL="0">
-              <a:buNone/>
-            </a:pPr>
-            <a:r>
-              <a:rPr lang="en-US" sz="950" i="1" dirty="0">
-                <a:solidFill>
-                  <a:srgbClr val="52706D"/>
-                </a:solidFill>
-                <a:latin typeface="Calibri" pitchFamily="34" charset="0"/>
-                <a:ea typeface="Calibri" pitchFamily="34" charset="-122"/>
-                <a:cs typeface="Calibri" pitchFamily="34" charset="-120"/>
-              </a:rPr>
-              <a:t>diberi label suara buatan AI</a:t>
-            </a:r>
-            <a:endParaRPr lang="en-US" sz="950" dirty="0"/>
-          </a:p>
-        </p:txBody>
-      </p:sp>
-      <p:sp>
-        <p:nvSpPr>
-          <p:cNvPr id="48" name="Shape 35"/>
-          <p:cNvSpPr/>
-          <p:nvPr/>
-        </p:nvSpPr>
-        <p:spPr>
-          <a:xfrm>
-            <a:off x="8290408" y="3447288"/>
-            <a:ext cx="3352648" cy="1481328"/>
-          </a:xfrm>
-          <a:prstGeom prst="roundRect">
-            <a:avLst>
-              <a:gd name="adj" fmla="val 7407"/>
-            </a:avLst>
-          </a:prstGeom>
-          <a:solidFill>
-            <a:srgbClr val="FFFFFF"/>
-          </a:solidFill>
-          <a:ln w="9525">
-            <a:solidFill>
-              <a:srgbClr val="DCEEEC"/>
-            </a:solidFill>
-            <a:prstDash val="solid"/>
-          </a:ln>
-        </p:spPr>
-      </p:sp>
-      <p:sp>
-        <p:nvSpPr>
-          <p:cNvPr id="49" name="Shape 36"/>
-          <p:cNvSpPr/>
-          <p:nvPr/>
-        </p:nvSpPr>
-        <p:spPr>
-          <a:xfrm>
-            <a:off x="8473288" y="3630168"/>
-            <a:ext cx="475488" cy="475488"/>
-          </a:xfrm>
-          <a:prstGeom prst="ellipse">
-            <a:avLst/>
-          </a:prstGeom>
-          <a:solidFill>
-            <a:srgbClr val="DFF6F3"/>
-          </a:solidFill>
-          <a:ln w="12700">
-            <a:solidFill>
-              <a:srgbClr val="DFF6F3"/>
-            </a:solidFill>
-            <a:prstDash val="solid"/>
-          </a:ln>
-        </p:spPr>
-      </p:sp>
-      <p:pic>
-        <p:nvPicPr>
-          <p:cNvPr id="50" name="Image 10" descr="preencoded.png">    </p:cNvPr>
-          <p:cNvPicPr>
-            <a:picLocks noChangeAspect="1"/>
-          </p:cNvPicPr>
-          <p:nvPr/>
-        </p:nvPicPr>
-        <p:blipFill>
-          <a:blip r:embed="rId11"/>
-          <a:stretch>
-            <a:fillRect/>
-          </a:stretch>
-        </p:blipFill>
-        <p:spPr>
-          <a:xfrm>
-            <a:off x="8587405" y="3744285"/>
-            <a:ext cx="247254" cy="247254"/>
-          </a:xfrm>
-          <a:prstGeom prst="rect">
-            <a:avLst/>
-          </a:prstGeom>
-        </p:spPr>
-      </p:pic>
-      <p:sp>
-        <p:nvSpPr>
-          <p:cNvPr id="51" name="Text 37"/>
-          <p:cNvSpPr/>
-          <p:nvPr/>
-        </p:nvSpPr>
-        <p:spPr>
-          <a:xfrm>
-            <a:off x="9067648" y="3630168"/>
-            <a:ext cx="2392528" cy="475488"/>
-          </a:xfrm>
-          <a:prstGeom prst="rect">
-            <a:avLst/>
-          </a:prstGeom>
-          <a:noFill/>
-          <a:ln/>
-        </p:spPr>
-        <p:txBody>
-          <a:bodyPr wrap="square" lIns="0" tIns="0" rIns="0" bIns="0" rtlCol="0" anchor="ctr"/>
-          <a:lstStyle/>
-          <a:p>
-            <a:pPr indent="0" marL="0">
-              <a:buNone/>
-            </a:pPr>
-            <a:r>
-              <a:rPr lang="en-US" sz="1400" b="1" dirty="0">
-                <a:solidFill>
-                  <a:srgbClr val="172C2A"/>
-                </a:solidFill>
-                <a:latin typeface="Trebuchet MS" pitchFamily="34" charset="0"/>
-                <a:ea typeface="Trebuchet MS" pitchFamily="34" charset="-122"/>
-                <a:cs typeface="Trebuchet MS" pitchFamily="34" charset="-120"/>
-              </a:rPr>
-              <a:t>Jejak audit</a:t>
-            </a:r>
-            <a:endParaRPr lang="en-US" sz="1400" dirty="0"/>
-          </a:p>
-        </p:txBody>
-      </p:sp>
-      <p:sp>
-        <p:nvSpPr>
-          <p:cNvPr id="52" name="Text 38"/>
-          <p:cNvSpPr/>
-          <p:nvPr/>
-        </p:nvSpPr>
-        <p:spPr>
-          <a:xfrm>
-            <a:off x="8473288" y="4178808"/>
-            <a:ext cx="2986888" cy="502920"/>
-          </a:xfrm>
-          <a:prstGeom prst="rect">
-            <a:avLst/>
-          </a:prstGeom>
-          <a:noFill/>
-          <a:ln/>
-        </p:spPr>
-        <p:txBody>
-          <a:bodyPr wrap="square" lIns="0" tIns="0" rIns="0" bIns="0" rtlCol="0" anchor="t"/>
-          <a:lstStyle/>
-          <a:p>
-            <a:pPr indent="0" marL="0">
-              <a:buNone/>
-            </a:pPr>
-            <a:r>
-              <a:rPr lang="en-US" sz="1050" dirty="0">
-                <a:solidFill>
-                  <a:srgbClr val="172C2A"/>
-                </a:solidFill>
-                <a:latin typeface="Calibri" pitchFamily="34" charset="0"/>
-                <a:ea typeface="Calibri" pitchFamily="34" charset="-122"/>
-                <a:cs typeface="Calibri" pitchFamily="34" charset="-120"/>
-              </a:rPr>
-              <a:t>Font Fredoka dan Nunito (SIL OFL 1.1); logo buatan tim. 175 berkas aset diverifikasi SHA-256.</a:t>
-            </a:r>
-            <a:endParaRPr lang="en-US" sz="1050" dirty="0"/>
-          </a:p>
-        </p:txBody>
-      </p:sp>
-      <p:sp>
-        <p:nvSpPr>
-          <p:cNvPr id="53" name="Text 39"/>
-          <p:cNvSpPr/>
-          <p:nvPr/>
-        </p:nvSpPr>
-        <p:spPr>
-          <a:xfrm>
-            <a:off x="8473288" y="4654296"/>
-            <a:ext cx="2986888" cy="219456"/>
-          </a:xfrm>
-          <a:prstGeom prst="rect">
-            <a:avLst/>
-          </a:prstGeom>
-          <a:noFill/>
-          <a:ln/>
-        </p:spPr>
-        <p:txBody>
-          <a:bodyPr wrap="square" lIns="0" tIns="0" rIns="0" bIns="0" rtlCol="0" anchor="ctr"/>
-          <a:lstStyle/>
-          <a:p>
-            <a:pPr indent="0" marL="0">
-              <a:buNone/>
-            </a:pPr>
-            <a:r>
-              <a:rPr lang="en-US" sz="950" i="1" dirty="0">
-                <a:solidFill>
-                  <a:srgbClr val="52706D"/>
-                </a:solidFill>
-                <a:latin typeface="Calibri" pitchFamily="34" charset="0"/>
-                <a:ea typeface="Calibri" pitchFamily="34" charset="-122"/>
-                <a:cs typeface="Calibri" pitchFamily="34" charset="-120"/>
-              </a:rPr>
-              <a:t>hanya konten, tanpa kode pra-acara</a:t>
-            </a:r>
-            <a:endParaRPr lang="en-US" sz="950" dirty="0"/>
-          </a:p>
-        </p:txBody>
-      </p:sp>
-      <p:sp>
-        <p:nvSpPr>
-          <p:cNvPr id="54" name="Text 40"/>
-          <p:cNvSpPr/>
-          <p:nvPr/>
-        </p:nvSpPr>
-        <p:spPr>
-          <a:xfrm>
-            <a:off x="4709160" y="5120640"/>
-            <a:ext cx="6933895" cy="777240"/>
-          </a:xfrm>
-          <a:prstGeom prst="roundRect">
-            <a:avLst>
-              <a:gd name="adj" fmla="val 11765"/>
-            </a:avLst>
-          </a:prstGeom>
-          <a:solidFill>
-            <a:srgbClr val="098277"/>
-          </a:solidFill>
-          <a:ln>
-            <a:solidFill>
-              <a:srgbClr val="098277"/>
-            </a:solidFill>
-          </a:ln>
-        </p:spPr>
-        <p:txBody>
-          <a:bodyPr wrap="square" lIns="127000" tIns="127000" rIns="127000" bIns="127000" rtlCol="0" anchor="ctr"/>
-          <a:lstStyle/>
-          <a:p>
-            <a:pPr indent="0" marL="0">
-              <a:buNone/>
-            </a:pPr>
-            <a:r>
-              <a:rPr lang="en-US" sz="1100" b="1" dirty="0">
-                <a:solidFill>
-                  <a:srgbClr val="FFFFFF"/>
-                </a:solidFill>
-                <a:latin typeface="Calibri" pitchFamily="34" charset="0"/>
-                <a:ea typeface="Calibri" pitchFamily="34" charset="-122"/>
-                <a:cs typeface="Calibri" pitchFamily="34" charset="-120"/>
-              </a:rPr>
-              <a:t>Kenapa simbol bergambar dan berwarna?  </a:t>
-            </a:r>
-            <a:pPr indent="0" marL="0">
-              <a:buNone/>
-            </a:pPr>
-            <a:r>
-              <a:rPr lang="en-US" sz="1100" dirty="0">
-                <a:solidFill>
-                  <a:srgbClr val="DFF6F3"/>
-                </a:solidFill>
-                <a:latin typeface="Calibri" pitchFamily="34" charset="0"/>
-                <a:ea typeface="Calibri" pitchFamily="34" charset="-122"/>
-                <a:cs typeface="Calibri" pitchFamily="34" charset="-120"/>
-              </a:rPr>
-              <a:t>Simbol yang mudah ditebak maknanya lebih cepat dipelajari anak 3 tahun (Mizuko 1987). Warna per jenis kata (Modified Fitzgerald Key) selalu dipasangkan penanda bentuk, supaya warna bukan satu-satunya pembawa makna (WCAG 1.4.1).</a:t>
             </a:r>
             <a:endParaRPr lang="en-US" sz="1100" dirty="0"/>
           </a:p>
@@ -14314,7 +14950,7 @@
                 <a:ea typeface="Calibri" pitchFamily="34" charset="-122"/>
                 <a:cs typeface="Calibri" pitchFamily="34" charset="-120"/>
               </a:rPr>
-              <a:t>LAMPIRAN A · UNTUK Q&amp;A</a:t>
+              <a:t>LAMPIRAN · ASET DAN SUMBERNYA</a:t>
             </a:r>
             <a:endParaRPr lang="en-US" sz="1100" dirty="0"/>
           </a:p>
@@ -14356,7 +14992,7 @@
                 <a:ea typeface="Trebuchet MS" pitchFamily="34" charset="-122"/>
                 <a:cs typeface="Trebuchet MS" pitchFamily="34" charset="-120"/>
               </a:rPr>
-              <a:t>Dua belas kata inti: berbasis literatur, dengan alasan tertulis per kata</a:t>
+              <a:t>Setiap simbol, kata, dan suara berlisensi jelas dan tercatat asal-usulnya</a:t>
             </a:r>
             <a:endParaRPr lang="en-US" sz="2500" dirty="0"/>
           </a:p>
@@ -14505,6 +15141,1789 @@
                 <a:ea typeface="Calibri" pitchFamily="34" charset="-122"/>
                 <a:cs typeface="Calibri" pitchFamily="34" charset="-120"/>
               </a:rPr>
+              <a:t>mulberrysymbols.org · Mizuko (1987), AAC 3(3) · Goossens', Crain &amp; Elder (1992) · WCAG 2.2 1.4.1 · assets/PROVENANCE.md (175 berkas diverifikasi SHA-256).</a:t>
+            </a:r>
+            <a:endParaRPr lang="en-US" sz="850" dirty="0"/>
+          </a:p>
+        </p:txBody>
+      </p:sp>
+      <p:sp>
+        <p:nvSpPr>
+          <p:cNvPr id="9" name="Shape 5"/>
+          <p:cNvSpPr/>
+          <p:nvPr/>
+        </p:nvSpPr>
+        <p:spPr>
+          <a:xfrm>
+            <a:off x="548640" y="1783080"/>
+            <a:ext cx="3931920" cy="4114800"/>
+          </a:xfrm>
+          <a:prstGeom prst="roundRect">
+            <a:avLst>
+              <a:gd name="adj" fmla="val 2791"/>
+            </a:avLst>
+          </a:prstGeom>
+          <a:solidFill>
+            <a:srgbClr val="FFFFFF"/>
+          </a:solidFill>
+          <a:ln w="9525">
+            <a:solidFill>
+              <a:srgbClr val="DCEEEC"/>
+            </a:solidFill>
+            <a:prstDash val="solid"/>
+          </a:ln>
+        </p:spPr>
+      </p:sp>
+      <p:sp>
+        <p:nvSpPr>
+          <p:cNvPr id="10" name="Text 6"/>
+          <p:cNvSpPr/>
+          <p:nvPr/>
+        </p:nvSpPr>
+        <p:spPr>
+          <a:xfrm>
+            <a:off x="777240" y="1901952"/>
+            <a:ext cx="3474720" cy="237744"/>
+          </a:xfrm>
+          <a:prstGeom prst="rect">
+            <a:avLst/>
+          </a:prstGeom>
+          <a:noFill/>
+          <a:ln/>
+        </p:spPr>
+        <p:txBody>
+          <a:bodyPr wrap="square" lIns="0" tIns="0" rIns="0" bIns="0" rtlCol="0" anchor="ctr"/>
+          <a:lstStyle/>
+          <a:p>
+            <a:pPr indent="0" marL="0">
+              <a:buNone/>
+            </a:pPr>
+            <a:r>
+              <a:rPr lang="en-US" sz="1000" b="1" spc="150" kern="0" dirty="0">
+                <a:solidFill>
+                  <a:srgbClr val="026E65"/>
+                </a:solidFill>
+                <a:latin typeface="Calibri" pitchFamily="34" charset="0"/>
+                <a:ea typeface="Calibri" pitchFamily="34" charset="-122"/>
+                <a:cs typeface="Calibri" pitchFamily="34" charset="-120"/>
+              </a:rPr>
+              <a:t>SIMBOL UTAMA</a:t>
+            </a:r>
+            <a:endParaRPr lang="en-US" sz="1000" dirty="0"/>
+          </a:p>
+        </p:txBody>
+      </p:sp>
+      <p:sp>
+        <p:nvSpPr>
+          <p:cNvPr id="11" name="Shape 7"/>
+          <p:cNvSpPr/>
+          <p:nvPr/>
+        </p:nvSpPr>
+        <p:spPr>
+          <a:xfrm>
+            <a:off x="777240" y="2240280"/>
+            <a:ext cx="1024128" cy="1024128"/>
+          </a:xfrm>
+          <a:prstGeom prst="roundRect">
+            <a:avLst>
+              <a:gd name="adj" fmla="val 5357"/>
+            </a:avLst>
+          </a:prstGeom>
+          <a:solidFill>
+            <a:srgbClr val="E1F4E7"/>
+          </a:solidFill>
+          <a:ln w="12700">
+            <a:solidFill>
+              <a:srgbClr val="6FC08F"/>
+            </a:solidFill>
+            <a:prstDash val="solid"/>
+          </a:ln>
+        </p:spPr>
+      </p:sp>
+      <p:pic>
+        <p:nvPicPr>
+          <p:cNvPr id="12" name="Image 1" descr="C:\Users\mikae\OneDrive\Documents\Lomba\IFEST\Nyambung\assets\symbols\png\mau.png">    </p:cNvPr>
+          <p:cNvPicPr>
+            <a:picLocks noChangeAspect="1"/>
+          </p:cNvPicPr>
+          <p:nvPr/>
+        </p:nvPicPr>
+        <p:blipFill>
+          <a:blip r:embed="rId2"/>
+          <a:stretch>
+            <a:fillRect/>
+          </a:stretch>
+        </p:blipFill>
+        <p:spPr>
+          <a:xfrm>
+            <a:off x="1002548" y="2322210"/>
+            <a:ext cx="573512" cy="573512"/>
+          </a:xfrm>
+          <a:prstGeom prst="rect">
+            <a:avLst/>
+          </a:prstGeom>
+        </p:spPr>
+      </p:pic>
+      <p:sp>
+        <p:nvSpPr>
+          <p:cNvPr id="13" name="Text 8"/>
+          <p:cNvSpPr/>
+          <p:nvPr/>
+        </p:nvSpPr>
+        <p:spPr>
+          <a:xfrm>
+            <a:off x="777240" y="2916204"/>
+            <a:ext cx="1024128" cy="307238"/>
+          </a:xfrm>
+          <a:prstGeom prst="rect">
+            <a:avLst/>
+          </a:prstGeom>
+          <a:noFill/>
+          <a:ln/>
+        </p:spPr>
+        <p:txBody>
+          <a:bodyPr wrap="square" lIns="0" tIns="0" rIns="0" bIns="0" rtlCol="0" anchor="ctr"/>
+          <a:lstStyle/>
+          <a:p>
+            <a:pPr algn="ctr" indent="0" marL="0">
+              <a:buNone/>
+            </a:pPr>
+            <a:r>
+              <a:rPr lang="en-US" sz="750" b="1" dirty="0">
+                <a:solidFill>
+                  <a:srgbClr val="2A7445"/>
+                </a:solidFill>
+                <a:latin typeface="Calibri" pitchFamily="34" charset="0"/>
+                <a:ea typeface="Calibri" pitchFamily="34" charset="-122"/>
+                <a:cs typeface="Calibri" pitchFamily="34" charset="-120"/>
+              </a:rPr>
+              <a:t>MAU</a:t>
+            </a:r>
+            <a:endParaRPr lang="en-US" sz="750" dirty="0"/>
+          </a:p>
+        </p:txBody>
+      </p:sp>
+      <p:sp>
+        <p:nvSpPr>
+          <p:cNvPr id="14" name="Shape 9"/>
+          <p:cNvSpPr/>
+          <p:nvPr/>
+        </p:nvSpPr>
+        <p:spPr>
+          <a:xfrm>
+            <a:off x="1929384" y="2240280"/>
+            <a:ext cx="1024128" cy="1024128"/>
+          </a:xfrm>
+          <a:prstGeom prst="roundRect">
+            <a:avLst>
+              <a:gd name="adj" fmla="val 5357"/>
+            </a:avLst>
+          </a:prstGeom>
+          <a:solidFill>
+            <a:srgbClr val="E1F4E7"/>
+          </a:solidFill>
+          <a:ln w="12700">
+            <a:solidFill>
+              <a:srgbClr val="6FC08F"/>
+            </a:solidFill>
+            <a:prstDash val="solid"/>
+          </a:ln>
+        </p:spPr>
+      </p:sp>
+      <p:pic>
+        <p:nvPicPr>
+          <p:cNvPr id="15" name="Image 2" descr="C:\Users\mikae\OneDrive\Documents\Lomba\IFEST\Nyambung\assets\symbols\png\bantu.png">    </p:cNvPr>
+          <p:cNvPicPr>
+            <a:picLocks noChangeAspect="1"/>
+          </p:cNvPicPr>
+          <p:nvPr/>
+        </p:nvPicPr>
+        <p:blipFill>
+          <a:blip r:embed="rId3"/>
+          <a:stretch>
+            <a:fillRect/>
+          </a:stretch>
+        </p:blipFill>
+        <p:spPr>
+          <a:xfrm>
+            <a:off x="2154692" y="2322210"/>
+            <a:ext cx="573512" cy="573512"/>
+          </a:xfrm>
+          <a:prstGeom prst="rect">
+            <a:avLst/>
+          </a:prstGeom>
+        </p:spPr>
+      </p:pic>
+      <p:sp>
+        <p:nvSpPr>
+          <p:cNvPr id="16" name="Text 10"/>
+          <p:cNvSpPr/>
+          <p:nvPr/>
+        </p:nvSpPr>
+        <p:spPr>
+          <a:xfrm>
+            <a:off x="1929384" y="2916204"/>
+            <a:ext cx="1024128" cy="307238"/>
+          </a:xfrm>
+          <a:prstGeom prst="rect">
+            <a:avLst/>
+          </a:prstGeom>
+          <a:noFill/>
+          <a:ln/>
+        </p:spPr>
+        <p:txBody>
+          <a:bodyPr wrap="square" lIns="0" tIns="0" rIns="0" bIns="0" rtlCol="0" anchor="ctr"/>
+          <a:lstStyle/>
+          <a:p>
+            <a:pPr algn="ctr" indent="0" marL="0">
+              <a:buNone/>
+            </a:pPr>
+            <a:r>
+              <a:rPr lang="en-US" sz="750" b="1" dirty="0">
+                <a:solidFill>
+                  <a:srgbClr val="2A7445"/>
+                </a:solidFill>
+                <a:latin typeface="Calibri" pitchFamily="34" charset="0"/>
+                <a:ea typeface="Calibri" pitchFamily="34" charset="-122"/>
+                <a:cs typeface="Calibri" pitchFamily="34" charset="-120"/>
+              </a:rPr>
+              <a:t>BANTU</a:t>
+            </a:r>
+            <a:endParaRPr lang="en-US" sz="750" dirty="0"/>
+          </a:p>
+        </p:txBody>
+      </p:sp>
+      <p:sp>
+        <p:nvSpPr>
+          <p:cNvPr id="17" name="Shape 11"/>
+          <p:cNvSpPr/>
+          <p:nvPr/>
+        </p:nvSpPr>
+        <p:spPr>
+          <a:xfrm>
+            <a:off x="3081528" y="2240280"/>
+            <a:ext cx="1024128" cy="1024128"/>
+          </a:xfrm>
+          <a:prstGeom prst="roundRect">
+            <a:avLst>
+              <a:gd name="adj" fmla="val 5357"/>
+            </a:avLst>
+          </a:prstGeom>
+          <a:solidFill>
+            <a:srgbClr val="E1F4E7"/>
+          </a:solidFill>
+          <a:ln w="12700">
+            <a:solidFill>
+              <a:srgbClr val="6FC08F"/>
+            </a:solidFill>
+            <a:prstDash val="solid"/>
+          </a:ln>
+        </p:spPr>
+      </p:sp>
+      <p:pic>
+        <p:nvPicPr>
+          <p:cNvPr id="18" name="Image 3" descr="C:\Users\mikae\OneDrive\Documents\Lomba\IFEST\Nyambung\assets\symbols\png\makan.png">    </p:cNvPr>
+          <p:cNvPicPr>
+            <a:picLocks noChangeAspect="1"/>
+          </p:cNvPicPr>
+          <p:nvPr/>
+        </p:nvPicPr>
+        <p:blipFill>
+          <a:blip r:embed="rId4"/>
+          <a:stretch>
+            <a:fillRect/>
+          </a:stretch>
+        </p:blipFill>
+        <p:spPr>
+          <a:xfrm>
+            <a:off x="3306836" y="2322210"/>
+            <a:ext cx="573512" cy="573512"/>
+          </a:xfrm>
+          <a:prstGeom prst="rect">
+            <a:avLst/>
+          </a:prstGeom>
+        </p:spPr>
+      </p:pic>
+      <p:sp>
+        <p:nvSpPr>
+          <p:cNvPr id="19" name="Text 12"/>
+          <p:cNvSpPr/>
+          <p:nvPr/>
+        </p:nvSpPr>
+        <p:spPr>
+          <a:xfrm>
+            <a:off x="3081528" y="2916204"/>
+            <a:ext cx="1024128" cy="307238"/>
+          </a:xfrm>
+          <a:prstGeom prst="rect">
+            <a:avLst/>
+          </a:prstGeom>
+          <a:noFill/>
+          <a:ln/>
+        </p:spPr>
+        <p:txBody>
+          <a:bodyPr wrap="square" lIns="0" tIns="0" rIns="0" bIns="0" rtlCol="0" anchor="ctr"/>
+          <a:lstStyle/>
+          <a:p>
+            <a:pPr algn="ctr" indent="0" marL="0">
+              <a:buNone/>
+            </a:pPr>
+            <a:r>
+              <a:rPr lang="en-US" sz="750" b="1" dirty="0">
+                <a:solidFill>
+                  <a:srgbClr val="2A7445"/>
+                </a:solidFill>
+                <a:latin typeface="Calibri" pitchFamily="34" charset="0"/>
+                <a:ea typeface="Calibri" pitchFamily="34" charset="-122"/>
+                <a:cs typeface="Calibri" pitchFamily="34" charset="-120"/>
+              </a:rPr>
+              <a:t>MAKAN</a:t>
+            </a:r>
+            <a:endParaRPr lang="en-US" sz="750" dirty="0"/>
+          </a:p>
+        </p:txBody>
+      </p:sp>
+      <p:sp>
+        <p:nvSpPr>
+          <p:cNvPr id="20" name="Shape 13"/>
+          <p:cNvSpPr/>
+          <p:nvPr/>
+        </p:nvSpPr>
+        <p:spPr>
+          <a:xfrm>
+            <a:off x="777240" y="3392424"/>
+            <a:ext cx="1024128" cy="1024128"/>
+          </a:xfrm>
+          <a:prstGeom prst="roundRect">
+            <a:avLst>
+              <a:gd name="adj" fmla="val 5357"/>
+            </a:avLst>
+          </a:prstGeom>
+          <a:solidFill>
+            <a:srgbClr val="E1F4E7"/>
+          </a:solidFill>
+          <a:ln w="12700">
+            <a:solidFill>
+              <a:srgbClr val="6FC08F"/>
+            </a:solidFill>
+            <a:prstDash val="solid"/>
+          </a:ln>
+        </p:spPr>
+      </p:sp>
+      <p:pic>
+        <p:nvPicPr>
+          <p:cNvPr id="21" name="Image 4" descr="C:\Users\mikae\OneDrive\Documents\Lomba\IFEST\Nyambung\assets\symbols\png\minum.png">    </p:cNvPr>
+          <p:cNvPicPr>
+            <a:picLocks noChangeAspect="1"/>
+          </p:cNvPicPr>
+          <p:nvPr/>
+        </p:nvPicPr>
+        <p:blipFill>
+          <a:blip r:embed="rId5"/>
+          <a:stretch>
+            <a:fillRect/>
+          </a:stretch>
+        </p:blipFill>
+        <p:spPr>
+          <a:xfrm>
+            <a:off x="1002548" y="3474354"/>
+            <a:ext cx="573512" cy="573512"/>
+          </a:xfrm>
+          <a:prstGeom prst="rect">
+            <a:avLst/>
+          </a:prstGeom>
+        </p:spPr>
+      </p:pic>
+      <p:sp>
+        <p:nvSpPr>
+          <p:cNvPr id="22" name="Text 14"/>
+          <p:cNvSpPr/>
+          <p:nvPr/>
+        </p:nvSpPr>
+        <p:spPr>
+          <a:xfrm>
+            <a:off x="777240" y="4068348"/>
+            <a:ext cx="1024128" cy="307238"/>
+          </a:xfrm>
+          <a:prstGeom prst="rect">
+            <a:avLst/>
+          </a:prstGeom>
+          <a:noFill/>
+          <a:ln/>
+        </p:spPr>
+        <p:txBody>
+          <a:bodyPr wrap="square" lIns="0" tIns="0" rIns="0" bIns="0" rtlCol="0" anchor="ctr"/>
+          <a:lstStyle/>
+          <a:p>
+            <a:pPr algn="ctr" indent="0" marL="0">
+              <a:buNone/>
+            </a:pPr>
+            <a:r>
+              <a:rPr lang="en-US" sz="750" b="1" dirty="0">
+                <a:solidFill>
+                  <a:srgbClr val="2A7445"/>
+                </a:solidFill>
+                <a:latin typeface="Calibri" pitchFamily="34" charset="0"/>
+                <a:ea typeface="Calibri" pitchFamily="34" charset="-122"/>
+                <a:cs typeface="Calibri" pitchFamily="34" charset="-120"/>
+              </a:rPr>
+              <a:t>MINUM</a:t>
+            </a:r>
+            <a:endParaRPr lang="en-US" sz="750" dirty="0"/>
+          </a:p>
+        </p:txBody>
+      </p:sp>
+      <p:sp>
+        <p:nvSpPr>
+          <p:cNvPr id="23" name="Shape 15"/>
+          <p:cNvSpPr/>
+          <p:nvPr/>
+        </p:nvSpPr>
+        <p:spPr>
+          <a:xfrm>
+            <a:off x="1929384" y="3392424"/>
+            <a:ext cx="1024128" cy="1024128"/>
+          </a:xfrm>
+          <a:prstGeom prst="roundRect">
+            <a:avLst>
+              <a:gd name="adj" fmla="val 5357"/>
+            </a:avLst>
+          </a:prstGeom>
+          <a:solidFill>
+            <a:srgbClr val="E8F6F5"/>
+          </a:solidFill>
+          <a:ln w="12700">
+            <a:solidFill>
+              <a:srgbClr val="C7C7D2"/>
+            </a:solidFill>
+            <a:prstDash val="solid"/>
+          </a:ln>
+        </p:spPr>
+      </p:sp>
+      <p:pic>
+        <p:nvPicPr>
+          <p:cNvPr id="24" name="Image 5" descr="C:\Users\mikae\OneDrive\Documents\Lomba\IFEST\Nyambung\assets\symbols\png\lagi.png">    </p:cNvPr>
+          <p:cNvPicPr>
+            <a:picLocks noChangeAspect="1"/>
+          </p:cNvPicPr>
+          <p:nvPr/>
+        </p:nvPicPr>
+        <p:blipFill>
+          <a:blip r:embed="rId6"/>
+          <a:stretch>
+            <a:fillRect/>
+          </a:stretch>
+        </p:blipFill>
+        <p:spPr>
+          <a:xfrm>
+            <a:off x="2154692" y="3474354"/>
+            <a:ext cx="573512" cy="573512"/>
+          </a:xfrm>
+          <a:prstGeom prst="rect">
+            <a:avLst/>
+          </a:prstGeom>
+        </p:spPr>
+      </p:pic>
+      <p:sp>
+        <p:nvSpPr>
+          <p:cNvPr id="25" name="Text 16"/>
+          <p:cNvSpPr/>
+          <p:nvPr/>
+        </p:nvSpPr>
+        <p:spPr>
+          <a:xfrm>
+            <a:off x="1929384" y="4068348"/>
+            <a:ext cx="1024128" cy="307238"/>
+          </a:xfrm>
+          <a:prstGeom prst="rect">
+            <a:avLst/>
+          </a:prstGeom>
+          <a:noFill/>
+          <a:ln/>
+        </p:spPr>
+        <p:txBody>
+          <a:bodyPr wrap="square" lIns="0" tIns="0" rIns="0" bIns="0" rtlCol="0" anchor="ctr"/>
+          <a:lstStyle/>
+          <a:p>
+            <a:pPr algn="ctr" indent="0" marL="0">
+              <a:buNone/>
+            </a:pPr>
+            <a:r>
+              <a:rPr lang="en-US" sz="750" b="1" dirty="0">
+                <a:solidFill>
+                  <a:srgbClr val="172C2A"/>
+                </a:solidFill>
+                <a:latin typeface="Calibri" pitchFamily="34" charset="0"/>
+                <a:ea typeface="Calibri" pitchFamily="34" charset="-122"/>
+                <a:cs typeface="Calibri" pitchFamily="34" charset="-120"/>
+              </a:rPr>
+              <a:t>LAGI</a:t>
+            </a:r>
+            <a:endParaRPr lang="en-US" sz="750" dirty="0"/>
+          </a:p>
+        </p:txBody>
+      </p:sp>
+      <p:sp>
+        <p:nvSpPr>
+          <p:cNvPr id="26" name="Shape 17"/>
+          <p:cNvSpPr/>
+          <p:nvPr/>
+        </p:nvSpPr>
+        <p:spPr>
+          <a:xfrm>
+            <a:off x="3081528" y="3392424"/>
+            <a:ext cx="1024128" cy="1024128"/>
+          </a:xfrm>
+          <a:prstGeom prst="roundRect">
+            <a:avLst>
+              <a:gd name="adj" fmla="val 5357"/>
+            </a:avLst>
+          </a:prstGeom>
+          <a:solidFill>
+            <a:srgbClr val="E8F6F5"/>
+          </a:solidFill>
+          <a:ln w="12700">
+            <a:solidFill>
+              <a:srgbClr val="C7C7D2"/>
+            </a:solidFill>
+            <a:prstDash val="solid"/>
+          </a:ln>
+        </p:spPr>
+      </p:sp>
+      <p:pic>
+        <p:nvPicPr>
+          <p:cNvPr id="27" name="Image 6" descr="C:\Users\mikae\OneDrive\Documents\Lomba\IFEST\Nyambung\assets\symbols\png\selesai.png">    </p:cNvPr>
+          <p:cNvPicPr>
+            <a:picLocks noChangeAspect="1"/>
+          </p:cNvPicPr>
+          <p:nvPr/>
+        </p:nvPicPr>
+        <p:blipFill>
+          <a:blip r:embed="rId7"/>
+          <a:stretch>
+            <a:fillRect/>
+          </a:stretch>
+        </p:blipFill>
+        <p:spPr>
+          <a:xfrm>
+            <a:off x="3306836" y="3474354"/>
+            <a:ext cx="573512" cy="573512"/>
+          </a:xfrm>
+          <a:prstGeom prst="rect">
+            <a:avLst/>
+          </a:prstGeom>
+        </p:spPr>
+      </p:pic>
+      <p:sp>
+        <p:nvSpPr>
+          <p:cNvPr id="28" name="Text 18"/>
+          <p:cNvSpPr/>
+          <p:nvPr/>
+        </p:nvSpPr>
+        <p:spPr>
+          <a:xfrm>
+            <a:off x="3081528" y="4068348"/>
+            <a:ext cx="1024128" cy="307238"/>
+          </a:xfrm>
+          <a:prstGeom prst="rect">
+            <a:avLst/>
+          </a:prstGeom>
+          <a:noFill/>
+          <a:ln/>
+        </p:spPr>
+        <p:txBody>
+          <a:bodyPr wrap="square" lIns="0" tIns="0" rIns="0" bIns="0" rtlCol="0" anchor="ctr"/>
+          <a:lstStyle/>
+          <a:p>
+            <a:pPr algn="ctr" indent="0" marL="0">
+              <a:buNone/>
+            </a:pPr>
+            <a:r>
+              <a:rPr lang="en-US" sz="750" b="1" dirty="0">
+                <a:solidFill>
+                  <a:srgbClr val="172C2A"/>
+                </a:solidFill>
+                <a:latin typeface="Calibri" pitchFamily="34" charset="0"/>
+                <a:ea typeface="Calibri" pitchFamily="34" charset="-122"/>
+                <a:cs typeface="Calibri" pitchFamily="34" charset="-120"/>
+              </a:rPr>
+              <a:t>SELESAI</a:t>
+            </a:r>
+            <a:endParaRPr lang="en-US" sz="750" dirty="0"/>
+          </a:p>
+        </p:txBody>
+      </p:sp>
+      <p:sp>
+        <p:nvSpPr>
+          <p:cNvPr id="29" name="Text 19"/>
+          <p:cNvSpPr/>
+          <p:nvPr/>
+        </p:nvSpPr>
+        <p:spPr>
+          <a:xfrm>
+            <a:off x="777240" y="4617720"/>
+            <a:ext cx="3474720" cy="1188720"/>
+          </a:xfrm>
+          <a:prstGeom prst="rect">
+            <a:avLst/>
+          </a:prstGeom>
+          <a:noFill/>
+          <a:ln/>
+        </p:spPr>
+        <p:txBody>
+          <a:bodyPr wrap="square" lIns="0" tIns="0" rIns="0" bIns="0" rtlCol="0" anchor="t"/>
+          <a:lstStyle/>
+          <a:p>
+            <a:pPr indent="0" marL="0">
+              <a:spcAft>
+                <a:spcPts val="200"/>
+              </a:spcAft>
+              <a:buNone/>
+            </a:pPr>
+            <a:r>
+              <a:rPr lang="en-US" sz="1500" b="1" dirty="0">
+                <a:solidFill>
+                  <a:srgbClr val="172C2A"/>
+                </a:solidFill>
+                <a:latin typeface="Trebuchet MS" pitchFamily="34" charset="0"/>
+                <a:ea typeface="Trebuchet MS" pitchFamily="34" charset="-122"/>
+                <a:cs typeface="Trebuchet MS" pitchFamily="34" charset="-120"/>
+              </a:rPr>
+              <a:t>Mulberry Symbols</a:t>
+            </a:r>
+            <a:endParaRPr lang="en-US" sz="1500" dirty="0"/>
+          </a:p>
+          <a:p>
+            <a:pPr indent="0" marL="0">
+              <a:spcAft>
+                <a:spcPts val="200"/>
+              </a:spcAft>
+              <a:buNone/>
+            </a:pPr>
+            <a:r>
+              <a:rPr lang="en-US" sz="1150" b="1" dirty="0">
+                <a:solidFill>
+                  <a:srgbClr val="026E65"/>
+                </a:solidFill>
+                <a:latin typeface="Calibri" pitchFamily="34" charset="0"/>
+                <a:ea typeface="Calibri" pitchFamily="34" charset="-122"/>
+                <a:cs typeface="Calibri" pitchFamily="34" charset="-120"/>
+              </a:rPr>
+              <a:t>© Steve Lee · CC BY-SA 4.0</a:t>
+            </a:r>
+            <a:endParaRPr lang="en-US" sz="1500" dirty="0"/>
+          </a:p>
+          <a:p>
+            <a:pPr indent="0" marL="0">
+              <a:spcAft>
+                <a:spcPts val="200"/>
+              </a:spcAft>
+              <a:buNone/>
+            </a:pPr>
+            <a:r>
+              <a:rPr lang="en-US" sz="1050" dirty="0">
+                <a:solidFill>
+                  <a:srgbClr val="172C2A"/>
+                </a:solidFill>
+                <a:latin typeface="Calibri" pitchFamily="34" charset="0"/>
+                <a:ea typeface="Calibri" pitchFamily="34" charset="-122"/>
+                <a:cs typeface="Calibri" pitchFamily="34" charset="-120"/>
+              </a:rPr>
+              <a:t>Digambar Claire Barge, ditinjau terapis wicara. 99 simbol dipakai; berkas asli tidak diubah, hanya dirasterkan 256 px berwarna.</a:t>
+            </a:r>
+            <a:endParaRPr lang="en-US" sz="1500" dirty="0"/>
+          </a:p>
+        </p:txBody>
+      </p:sp>
+      <p:sp>
+        <p:nvSpPr>
+          <p:cNvPr id="30" name="Shape 20"/>
+          <p:cNvSpPr/>
+          <p:nvPr/>
+        </p:nvSpPr>
+        <p:spPr>
+          <a:xfrm>
+            <a:off x="4709160" y="1783080"/>
+            <a:ext cx="3352648" cy="1481328"/>
+          </a:xfrm>
+          <a:prstGeom prst="roundRect">
+            <a:avLst>
+              <a:gd name="adj" fmla="val 7407"/>
+            </a:avLst>
+          </a:prstGeom>
+          <a:solidFill>
+            <a:srgbClr val="FFFFFF"/>
+          </a:solidFill>
+          <a:ln w="9525">
+            <a:solidFill>
+              <a:srgbClr val="DCEEEC"/>
+            </a:solidFill>
+            <a:prstDash val="solid"/>
+          </a:ln>
+        </p:spPr>
+      </p:sp>
+      <p:sp>
+        <p:nvSpPr>
+          <p:cNvPr id="31" name="Shape 21"/>
+          <p:cNvSpPr/>
+          <p:nvPr/>
+        </p:nvSpPr>
+        <p:spPr>
+          <a:xfrm>
+            <a:off x="4892040" y="1965960"/>
+            <a:ext cx="475488" cy="475488"/>
+          </a:xfrm>
+          <a:prstGeom prst="ellipse">
+            <a:avLst/>
+          </a:prstGeom>
+          <a:solidFill>
+            <a:srgbClr val="DFF6F3"/>
+          </a:solidFill>
+          <a:ln w="12700">
+            <a:solidFill>
+              <a:srgbClr val="DFF6F3"/>
+            </a:solidFill>
+            <a:prstDash val="solid"/>
+          </a:ln>
+        </p:spPr>
+      </p:sp>
+      <p:pic>
+        <p:nvPicPr>
+          <p:cNvPr id="32" name="Image 7" descr="preencoded.png">    </p:cNvPr>
+          <p:cNvPicPr>
+            <a:picLocks noChangeAspect="1"/>
+          </p:cNvPicPr>
+          <p:nvPr/>
+        </p:nvPicPr>
+        <p:blipFill>
+          <a:blip r:embed="rId8"/>
+          <a:stretch>
+            <a:fillRect/>
+          </a:stretch>
+        </p:blipFill>
+        <p:spPr>
+          <a:xfrm>
+            <a:off x="5006157" y="2080077"/>
+            <a:ext cx="247254" cy="247254"/>
+          </a:xfrm>
+          <a:prstGeom prst="rect">
+            <a:avLst/>
+          </a:prstGeom>
+        </p:spPr>
+      </p:pic>
+      <p:sp>
+        <p:nvSpPr>
+          <p:cNvPr id="33" name="Text 22"/>
+          <p:cNvSpPr/>
+          <p:nvPr/>
+        </p:nvSpPr>
+        <p:spPr>
+          <a:xfrm>
+            <a:off x="5486400" y="1965960"/>
+            <a:ext cx="2392528" cy="475488"/>
+          </a:xfrm>
+          <a:prstGeom prst="rect">
+            <a:avLst/>
+          </a:prstGeom>
+          <a:noFill/>
+          <a:ln/>
+        </p:spPr>
+        <p:txBody>
+          <a:bodyPr wrap="square" lIns="0" tIns="0" rIns="0" bIns="0" rtlCol="0" anchor="ctr"/>
+          <a:lstStyle/>
+          <a:p>
+            <a:pPr indent="0" marL="0">
+              <a:buNone/>
+            </a:pPr>
+            <a:r>
+              <a:rPr lang="en-US" sz="1400" b="1" dirty="0">
+                <a:solidFill>
+                  <a:srgbClr val="172C2A"/>
+                </a:solidFill>
+                <a:latin typeface="Trebuchet MS" pitchFamily="34" charset="0"/>
+                <a:ea typeface="Trebuchet MS" pitchFamily="34" charset="-122"/>
+                <a:cs typeface="Trebuchet MS" pitchFamily="34" charset="-120"/>
+              </a:rPr>
+              <a:t>Simbol buatan tim</a:t>
+            </a:r>
+            <a:endParaRPr lang="en-US" sz="1400" dirty="0"/>
+          </a:p>
+        </p:txBody>
+      </p:sp>
+      <p:sp>
+        <p:nvSpPr>
+          <p:cNvPr id="34" name="Text 23"/>
+          <p:cNvSpPr/>
+          <p:nvPr/>
+        </p:nvSpPr>
+        <p:spPr>
+          <a:xfrm>
+            <a:off x="4892040" y="2514600"/>
+            <a:ext cx="2986888" cy="502920"/>
+          </a:xfrm>
+          <a:prstGeom prst="rect">
+            <a:avLst/>
+          </a:prstGeom>
+          <a:noFill/>
+          <a:ln/>
+        </p:spPr>
+        <p:txBody>
+          <a:bodyPr wrap="square" lIns="0" tIns="0" rIns="0" bIns="0" rtlCol="0" anchor="t"/>
+          <a:lstStyle/>
+          <a:p>
+            <a:pPr indent="0" marL="0">
+              <a:buNone/>
+            </a:pPr>
+            <a:r>
+              <a:rPr lang="en-US" sz="1050" dirty="0">
+                <a:solidFill>
+                  <a:srgbClr val="172C2A"/>
+                </a:solidFill>
+                <a:latin typeface="Calibri" pitchFamily="34" charset="0"/>
+                <a:ea typeface="Calibri" pitchFamily="34" charset="-122"/>
+                <a:cs typeface="Calibri" pitchFamily="34" charset="-120"/>
+              </a:rPr>
+              <a:t>21 kata tanpa padanan jujur di Mulberry (mis. BERHENTI, AKU) digambar tim dengan gaya dan konvensi yang sama.</a:t>
+            </a:r>
+            <a:endParaRPr lang="en-US" sz="1050" dirty="0"/>
+          </a:p>
+        </p:txBody>
+      </p:sp>
+      <p:sp>
+        <p:nvSpPr>
+          <p:cNvPr id="35" name="Text 24"/>
+          <p:cNvSpPr/>
+          <p:nvPr/>
+        </p:nvSpPr>
+        <p:spPr>
+          <a:xfrm>
+            <a:off x="4892040" y="2990088"/>
+            <a:ext cx="2986888" cy="219456"/>
+          </a:xfrm>
+          <a:prstGeom prst="rect">
+            <a:avLst/>
+          </a:prstGeom>
+          <a:noFill/>
+          <a:ln/>
+        </p:spPr>
+        <p:txBody>
+          <a:bodyPr wrap="square" lIns="0" tIns="0" rIns="0" bIns="0" rtlCol="0" anchor="ctr"/>
+          <a:lstStyle/>
+          <a:p>
+            <a:pPr indent="0" marL="0">
+              <a:buNone/>
+            </a:pPr>
+            <a:r>
+              <a:rPr lang="en-US" sz="950" i="1" dirty="0">
+                <a:solidFill>
+                  <a:srgbClr val="52706D"/>
+                </a:solidFill>
+                <a:latin typeface="Calibri" pitchFamily="34" charset="0"/>
+                <a:ea typeface="Calibri" pitchFamily="34" charset="-122"/>
+                <a:cs typeface="Calibri" pitchFamily="34" charset="-120"/>
+              </a:rPr>
+              <a:t>CC BY-SA 4.0 · belum diuji pada anak</a:t>
+            </a:r>
+            <a:endParaRPr lang="en-US" sz="950" dirty="0"/>
+          </a:p>
+        </p:txBody>
+      </p:sp>
+      <p:sp>
+        <p:nvSpPr>
+          <p:cNvPr id="36" name="Shape 25"/>
+          <p:cNvSpPr/>
+          <p:nvPr/>
+        </p:nvSpPr>
+        <p:spPr>
+          <a:xfrm>
+            <a:off x="8290408" y="1783080"/>
+            <a:ext cx="3352648" cy="1481328"/>
+          </a:xfrm>
+          <a:prstGeom prst="roundRect">
+            <a:avLst>
+              <a:gd name="adj" fmla="val 7407"/>
+            </a:avLst>
+          </a:prstGeom>
+          <a:solidFill>
+            <a:srgbClr val="FFFFFF"/>
+          </a:solidFill>
+          <a:ln w="9525">
+            <a:solidFill>
+              <a:srgbClr val="DCEEEC"/>
+            </a:solidFill>
+            <a:prstDash val="solid"/>
+          </a:ln>
+        </p:spPr>
+      </p:sp>
+      <p:sp>
+        <p:nvSpPr>
+          <p:cNvPr id="37" name="Shape 26"/>
+          <p:cNvSpPr/>
+          <p:nvPr/>
+        </p:nvSpPr>
+        <p:spPr>
+          <a:xfrm>
+            <a:off x="8473288" y="1965960"/>
+            <a:ext cx="475488" cy="475488"/>
+          </a:xfrm>
+          <a:prstGeom prst="ellipse">
+            <a:avLst/>
+          </a:prstGeom>
+          <a:solidFill>
+            <a:srgbClr val="DFF6F3"/>
+          </a:solidFill>
+          <a:ln w="12700">
+            <a:solidFill>
+              <a:srgbClr val="DFF6F3"/>
+            </a:solidFill>
+            <a:prstDash val="solid"/>
+          </a:ln>
+        </p:spPr>
+      </p:sp>
+      <p:pic>
+        <p:nvPicPr>
+          <p:cNvPr id="38" name="Image 8" descr="preencoded.png">    </p:cNvPr>
+          <p:cNvPicPr>
+            <a:picLocks noChangeAspect="1"/>
+          </p:cNvPicPr>
+          <p:nvPr/>
+        </p:nvPicPr>
+        <p:blipFill>
+          <a:blip r:embed="rId9"/>
+          <a:stretch>
+            <a:fillRect/>
+          </a:stretch>
+        </p:blipFill>
+        <p:spPr>
+          <a:xfrm>
+            <a:off x="8587405" y="2080077"/>
+            <a:ext cx="247254" cy="247254"/>
+          </a:xfrm>
+          <a:prstGeom prst="rect">
+            <a:avLst/>
+          </a:prstGeom>
+        </p:spPr>
+      </p:pic>
+      <p:sp>
+        <p:nvSpPr>
+          <p:cNvPr id="39" name="Text 27"/>
+          <p:cNvSpPr/>
+          <p:nvPr/>
+        </p:nvSpPr>
+        <p:spPr>
+          <a:xfrm>
+            <a:off x="9067648" y="1965960"/>
+            <a:ext cx="2392528" cy="475488"/>
+          </a:xfrm>
+          <a:prstGeom prst="rect">
+            <a:avLst/>
+          </a:prstGeom>
+          <a:noFill/>
+          <a:ln/>
+        </p:spPr>
+        <p:txBody>
+          <a:bodyPr wrap="square" lIns="0" tIns="0" rIns="0" bIns="0" rtlCol="0" anchor="ctr"/>
+          <a:lstStyle/>
+          <a:p>
+            <a:pPr indent="0" marL="0">
+              <a:buNone/>
+            </a:pPr>
+            <a:r>
+              <a:rPr lang="en-US" sz="1400" b="1" dirty="0">
+                <a:solidFill>
+                  <a:srgbClr val="172C2A"/>
+                </a:solidFill>
+                <a:latin typeface="Trebuchet MS" pitchFamily="34" charset="0"/>
+                <a:ea typeface="Trebuchet MS" pitchFamily="34" charset="-122"/>
+                <a:cs typeface="Trebuchet MS" pitchFamily="34" charset="-120"/>
+              </a:rPr>
+              <a:t>120 kata</a:t>
+            </a:r>
+            <a:endParaRPr lang="en-US" sz="1400" dirty="0"/>
+          </a:p>
+        </p:txBody>
+      </p:sp>
+      <p:sp>
+        <p:nvSpPr>
+          <p:cNvPr id="40" name="Text 28"/>
+          <p:cNvSpPr/>
+          <p:nvPr/>
+        </p:nvSpPr>
+        <p:spPr>
+          <a:xfrm>
+            <a:off x="8473288" y="2514600"/>
+            <a:ext cx="2986888" cy="502920"/>
+          </a:xfrm>
+          <a:prstGeom prst="rect">
+            <a:avLst/>
+          </a:prstGeom>
+          <a:noFill/>
+          <a:ln/>
+        </p:spPr>
+        <p:txBody>
+          <a:bodyPr wrap="square" lIns="0" tIns="0" rIns="0" bIns="0" rtlCol="0" anchor="t"/>
+          <a:lstStyle/>
+          <a:p>
+            <a:pPr indent="0" marL="0">
+              <a:buNone/>
+            </a:pPr>
+            <a:r>
+              <a:rPr lang="en-US" sz="1050" dirty="0">
+                <a:solidFill>
+                  <a:srgbClr val="172C2A"/>
+                </a:solidFill>
+                <a:latin typeface="Calibri" pitchFamily="34" charset="0"/>
+                <a:ea typeface="Calibri" pitchFamily="34" charset="-122"/>
+                <a:cs typeface="Calibri" pitchFamily="34" charset="-120"/>
+              </a:rPr>
+              <a:t>Banajee (2003), Project Core, dan frekuensi OpenSubtitles 2018 sebagai pemecah seri.</a:t>
+            </a:r>
+            <a:endParaRPr lang="en-US" sz="1050" dirty="0"/>
+          </a:p>
+        </p:txBody>
+      </p:sp>
+      <p:sp>
+        <p:nvSpPr>
+          <p:cNvPr id="41" name="Text 29"/>
+          <p:cNvSpPr/>
+          <p:nvPr/>
+        </p:nvSpPr>
+        <p:spPr>
+          <a:xfrm>
+            <a:off x="8473288" y="2990088"/>
+            <a:ext cx="2986888" cy="219456"/>
+          </a:xfrm>
+          <a:prstGeom prst="rect">
+            <a:avLst/>
+          </a:prstGeom>
+          <a:noFill/>
+          <a:ln/>
+        </p:spPr>
+        <p:txBody>
+          <a:bodyPr wrap="square" lIns="0" tIns="0" rIns="0" bIns="0" rtlCol="0" anchor="ctr"/>
+          <a:lstStyle/>
+          <a:p>
+            <a:pPr indent="0" marL="0">
+              <a:buNone/>
+            </a:pPr>
+            <a:r>
+              <a:rPr lang="en-US" sz="950" i="1" dirty="0">
+                <a:solidFill>
+                  <a:srgbClr val="52706D"/>
+                </a:solidFill>
+                <a:latin typeface="Calibri" pitchFamily="34" charset="0"/>
+                <a:ea typeface="Calibri" pitchFamily="34" charset="-122"/>
+                <a:cs typeface="Calibri" pitchFamily="34" charset="-120"/>
+              </a:rPr>
+              <a:t>riset tim · alasan tertulis per kata</a:t>
+            </a:r>
+            <a:endParaRPr lang="en-US" sz="950" dirty="0"/>
+          </a:p>
+        </p:txBody>
+      </p:sp>
+      <p:sp>
+        <p:nvSpPr>
+          <p:cNvPr id="42" name="Shape 30"/>
+          <p:cNvSpPr/>
+          <p:nvPr/>
+        </p:nvSpPr>
+        <p:spPr>
+          <a:xfrm>
+            <a:off x="4709160" y="3447288"/>
+            <a:ext cx="3352648" cy="1481328"/>
+          </a:xfrm>
+          <a:prstGeom prst="roundRect">
+            <a:avLst>
+              <a:gd name="adj" fmla="val 7407"/>
+            </a:avLst>
+          </a:prstGeom>
+          <a:solidFill>
+            <a:srgbClr val="FFFFFF"/>
+          </a:solidFill>
+          <a:ln w="9525">
+            <a:solidFill>
+              <a:srgbClr val="DCEEEC"/>
+            </a:solidFill>
+            <a:prstDash val="solid"/>
+          </a:ln>
+        </p:spPr>
+      </p:sp>
+      <p:sp>
+        <p:nvSpPr>
+          <p:cNvPr id="43" name="Shape 31"/>
+          <p:cNvSpPr/>
+          <p:nvPr/>
+        </p:nvSpPr>
+        <p:spPr>
+          <a:xfrm>
+            <a:off x="4892040" y="3630168"/>
+            <a:ext cx="475488" cy="475488"/>
+          </a:xfrm>
+          <a:prstGeom prst="ellipse">
+            <a:avLst/>
+          </a:prstGeom>
+          <a:solidFill>
+            <a:srgbClr val="DFF6F3"/>
+          </a:solidFill>
+          <a:ln w="12700">
+            <a:solidFill>
+              <a:srgbClr val="DFF6F3"/>
+            </a:solidFill>
+            <a:prstDash val="solid"/>
+          </a:ln>
+        </p:spPr>
+      </p:sp>
+      <p:pic>
+        <p:nvPicPr>
+          <p:cNvPr id="44" name="Image 9" descr="preencoded.png">    </p:cNvPr>
+          <p:cNvPicPr>
+            <a:picLocks noChangeAspect="1"/>
+          </p:cNvPicPr>
+          <p:nvPr/>
+        </p:nvPicPr>
+        <p:blipFill>
+          <a:blip r:embed="rId10"/>
+          <a:stretch>
+            <a:fillRect/>
+          </a:stretch>
+        </p:blipFill>
+        <p:spPr>
+          <a:xfrm>
+            <a:off x="5006157" y="3744285"/>
+            <a:ext cx="247254" cy="247254"/>
+          </a:xfrm>
+          <a:prstGeom prst="rect">
+            <a:avLst/>
+          </a:prstGeom>
+        </p:spPr>
+      </p:pic>
+      <p:sp>
+        <p:nvSpPr>
+          <p:cNvPr id="45" name="Text 32"/>
+          <p:cNvSpPr/>
+          <p:nvPr/>
+        </p:nvSpPr>
+        <p:spPr>
+          <a:xfrm>
+            <a:off x="5486400" y="3630168"/>
+            <a:ext cx="2392528" cy="475488"/>
+          </a:xfrm>
+          <a:prstGeom prst="rect">
+            <a:avLst/>
+          </a:prstGeom>
+          <a:noFill/>
+          <a:ln/>
+        </p:spPr>
+        <p:txBody>
+          <a:bodyPr wrap="square" lIns="0" tIns="0" rIns="0" bIns="0" rtlCol="0" anchor="ctr"/>
+          <a:lstStyle/>
+          <a:p>
+            <a:pPr indent="0" marL="0">
+              <a:buNone/>
+            </a:pPr>
+            <a:r>
+              <a:rPr lang="en-US" sz="1400" b="1" dirty="0">
+                <a:solidFill>
+                  <a:srgbClr val="172C2A"/>
+                </a:solidFill>
+                <a:latin typeface="Trebuchet MS" pitchFamily="34" charset="0"/>
+                <a:ea typeface="Trebuchet MS" pitchFamily="34" charset="-122"/>
+                <a:cs typeface="Trebuchet MS" pitchFamily="34" charset="-120"/>
+              </a:rPr>
+              <a:t>Suara</a:t>
+            </a:r>
+            <a:endParaRPr lang="en-US" sz="1400" dirty="0"/>
+          </a:p>
+        </p:txBody>
+      </p:sp>
+      <p:sp>
+        <p:nvSpPr>
+          <p:cNvPr id="46" name="Text 33"/>
+          <p:cNvSpPr/>
+          <p:nvPr/>
+        </p:nvSpPr>
+        <p:spPr>
+          <a:xfrm>
+            <a:off x="4892040" y="4178808"/>
+            <a:ext cx="2986888" cy="502920"/>
+          </a:xfrm>
+          <a:prstGeom prst="rect">
+            <a:avLst/>
+          </a:prstGeom>
+          <a:noFill/>
+          <a:ln/>
+        </p:spPr>
+        <p:txBody>
+          <a:bodyPr wrap="square" lIns="0" tIns="0" rIns="0" bIns="0" rtlCol="0" anchor="t"/>
+          <a:lstStyle/>
+          <a:p>
+            <a:pPr indent="0" marL="0">
+              <a:buNone/>
+            </a:pPr>
+            <a:r>
+              <a:rPr lang="en-US" sz="1050" dirty="0">
+                <a:solidFill>
+                  <a:srgbClr val="172C2A"/>
+                </a:solidFill>
+                <a:latin typeface="Calibri" pitchFamily="34" charset="0"/>
+                <a:ea typeface="Calibri" pitchFamily="34" charset="-122"/>
+                <a:cs typeface="Calibri" pitchFamily="34" charset="-120"/>
+              </a:rPr>
+              <a:t>Suara papan 2 × 120 klip dibuat sekali (OpenAI TTS) lalu diputar luring. Tiruan suara keluarga lewat ElevenLabs, hanya dengan persetujuan.</a:t>
+            </a:r>
+            <a:endParaRPr lang="en-US" sz="1050" dirty="0"/>
+          </a:p>
+        </p:txBody>
+      </p:sp>
+      <p:sp>
+        <p:nvSpPr>
+          <p:cNvPr id="47" name="Text 34"/>
+          <p:cNvSpPr/>
+          <p:nvPr/>
+        </p:nvSpPr>
+        <p:spPr>
+          <a:xfrm>
+            <a:off x="4892040" y="4654296"/>
+            <a:ext cx="2986888" cy="219456"/>
+          </a:xfrm>
+          <a:prstGeom prst="rect">
+            <a:avLst/>
+          </a:prstGeom>
+          <a:noFill/>
+          <a:ln/>
+        </p:spPr>
+        <p:txBody>
+          <a:bodyPr wrap="square" lIns="0" tIns="0" rIns="0" bIns="0" rtlCol="0" anchor="ctr"/>
+          <a:lstStyle/>
+          <a:p>
+            <a:pPr indent="0" marL="0">
+              <a:buNone/>
+            </a:pPr>
+            <a:r>
+              <a:rPr lang="en-US" sz="950" i="1" dirty="0">
+                <a:solidFill>
+                  <a:srgbClr val="52706D"/>
+                </a:solidFill>
+                <a:latin typeface="Calibri" pitchFamily="34" charset="0"/>
+                <a:ea typeface="Calibri" pitchFamily="34" charset="-122"/>
+                <a:cs typeface="Calibri" pitchFamily="34" charset="-120"/>
+              </a:rPr>
+              <a:t>diberi label suara buatan AI</a:t>
+            </a:r>
+            <a:endParaRPr lang="en-US" sz="950" dirty="0"/>
+          </a:p>
+        </p:txBody>
+      </p:sp>
+      <p:sp>
+        <p:nvSpPr>
+          <p:cNvPr id="48" name="Shape 35"/>
+          <p:cNvSpPr/>
+          <p:nvPr/>
+        </p:nvSpPr>
+        <p:spPr>
+          <a:xfrm>
+            <a:off x="8290408" y="3447288"/>
+            <a:ext cx="3352648" cy="1481328"/>
+          </a:xfrm>
+          <a:prstGeom prst="roundRect">
+            <a:avLst>
+              <a:gd name="adj" fmla="val 7407"/>
+            </a:avLst>
+          </a:prstGeom>
+          <a:solidFill>
+            <a:srgbClr val="FFFFFF"/>
+          </a:solidFill>
+          <a:ln w="9525">
+            <a:solidFill>
+              <a:srgbClr val="DCEEEC"/>
+            </a:solidFill>
+            <a:prstDash val="solid"/>
+          </a:ln>
+        </p:spPr>
+      </p:sp>
+      <p:sp>
+        <p:nvSpPr>
+          <p:cNvPr id="49" name="Shape 36"/>
+          <p:cNvSpPr/>
+          <p:nvPr/>
+        </p:nvSpPr>
+        <p:spPr>
+          <a:xfrm>
+            <a:off x="8473288" y="3630168"/>
+            <a:ext cx="475488" cy="475488"/>
+          </a:xfrm>
+          <a:prstGeom prst="ellipse">
+            <a:avLst/>
+          </a:prstGeom>
+          <a:solidFill>
+            <a:srgbClr val="DFF6F3"/>
+          </a:solidFill>
+          <a:ln w="12700">
+            <a:solidFill>
+              <a:srgbClr val="DFF6F3"/>
+            </a:solidFill>
+            <a:prstDash val="solid"/>
+          </a:ln>
+        </p:spPr>
+      </p:sp>
+      <p:pic>
+        <p:nvPicPr>
+          <p:cNvPr id="50" name="Image 10" descr="preencoded.png">    </p:cNvPr>
+          <p:cNvPicPr>
+            <a:picLocks noChangeAspect="1"/>
+          </p:cNvPicPr>
+          <p:nvPr/>
+        </p:nvPicPr>
+        <p:blipFill>
+          <a:blip r:embed="rId11"/>
+          <a:stretch>
+            <a:fillRect/>
+          </a:stretch>
+        </p:blipFill>
+        <p:spPr>
+          <a:xfrm>
+            <a:off x="8587405" y="3744285"/>
+            <a:ext cx="247254" cy="247254"/>
+          </a:xfrm>
+          <a:prstGeom prst="rect">
+            <a:avLst/>
+          </a:prstGeom>
+        </p:spPr>
+      </p:pic>
+      <p:sp>
+        <p:nvSpPr>
+          <p:cNvPr id="51" name="Text 37"/>
+          <p:cNvSpPr/>
+          <p:nvPr/>
+        </p:nvSpPr>
+        <p:spPr>
+          <a:xfrm>
+            <a:off x="9067648" y="3630168"/>
+            <a:ext cx="2392528" cy="475488"/>
+          </a:xfrm>
+          <a:prstGeom prst="rect">
+            <a:avLst/>
+          </a:prstGeom>
+          <a:noFill/>
+          <a:ln/>
+        </p:spPr>
+        <p:txBody>
+          <a:bodyPr wrap="square" lIns="0" tIns="0" rIns="0" bIns="0" rtlCol="0" anchor="ctr"/>
+          <a:lstStyle/>
+          <a:p>
+            <a:pPr indent="0" marL="0">
+              <a:buNone/>
+            </a:pPr>
+            <a:r>
+              <a:rPr lang="en-US" sz="1400" b="1" dirty="0">
+                <a:solidFill>
+                  <a:srgbClr val="172C2A"/>
+                </a:solidFill>
+                <a:latin typeface="Trebuchet MS" pitchFamily="34" charset="0"/>
+                <a:ea typeface="Trebuchet MS" pitchFamily="34" charset="-122"/>
+                <a:cs typeface="Trebuchet MS" pitchFamily="34" charset="-120"/>
+              </a:rPr>
+              <a:t>Jejak audit</a:t>
+            </a:r>
+            <a:endParaRPr lang="en-US" sz="1400" dirty="0"/>
+          </a:p>
+        </p:txBody>
+      </p:sp>
+      <p:sp>
+        <p:nvSpPr>
+          <p:cNvPr id="52" name="Text 38"/>
+          <p:cNvSpPr/>
+          <p:nvPr/>
+        </p:nvSpPr>
+        <p:spPr>
+          <a:xfrm>
+            <a:off x="8473288" y="4178808"/>
+            <a:ext cx="2986888" cy="502920"/>
+          </a:xfrm>
+          <a:prstGeom prst="rect">
+            <a:avLst/>
+          </a:prstGeom>
+          <a:noFill/>
+          <a:ln/>
+        </p:spPr>
+        <p:txBody>
+          <a:bodyPr wrap="square" lIns="0" tIns="0" rIns="0" bIns="0" rtlCol="0" anchor="t"/>
+          <a:lstStyle/>
+          <a:p>
+            <a:pPr indent="0" marL="0">
+              <a:buNone/>
+            </a:pPr>
+            <a:r>
+              <a:rPr lang="en-US" sz="1050" dirty="0">
+                <a:solidFill>
+                  <a:srgbClr val="172C2A"/>
+                </a:solidFill>
+                <a:latin typeface="Calibri" pitchFamily="34" charset="0"/>
+                <a:ea typeface="Calibri" pitchFamily="34" charset="-122"/>
+                <a:cs typeface="Calibri" pitchFamily="34" charset="-120"/>
+              </a:rPr>
+              <a:t>Font Fredoka dan Nunito (SIL OFL 1.1); logo buatan tim. 175 berkas aset diverifikasi SHA-256.</a:t>
+            </a:r>
+            <a:endParaRPr lang="en-US" sz="1050" dirty="0"/>
+          </a:p>
+        </p:txBody>
+      </p:sp>
+      <p:sp>
+        <p:nvSpPr>
+          <p:cNvPr id="53" name="Text 39"/>
+          <p:cNvSpPr/>
+          <p:nvPr/>
+        </p:nvSpPr>
+        <p:spPr>
+          <a:xfrm>
+            <a:off x="8473288" y="4654296"/>
+            <a:ext cx="2986888" cy="219456"/>
+          </a:xfrm>
+          <a:prstGeom prst="rect">
+            <a:avLst/>
+          </a:prstGeom>
+          <a:noFill/>
+          <a:ln/>
+        </p:spPr>
+        <p:txBody>
+          <a:bodyPr wrap="square" lIns="0" tIns="0" rIns="0" bIns="0" rtlCol="0" anchor="ctr"/>
+          <a:lstStyle/>
+          <a:p>
+            <a:pPr indent="0" marL="0">
+              <a:buNone/>
+            </a:pPr>
+            <a:r>
+              <a:rPr lang="en-US" sz="950" i="1" dirty="0">
+                <a:solidFill>
+                  <a:srgbClr val="52706D"/>
+                </a:solidFill>
+                <a:latin typeface="Calibri" pitchFamily="34" charset="0"/>
+                <a:ea typeface="Calibri" pitchFamily="34" charset="-122"/>
+                <a:cs typeface="Calibri" pitchFamily="34" charset="-120"/>
+              </a:rPr>
+              <a:t>hanya konten, tanpa kode pra-acara</a:t>
+            </a:r>
+            <a:endParaRPr lang="en-US" sz="950" dirty="0"/>
+          </a:p>
+        </p:txBody>
+      </p:sp>
+      <p:sp>
+        <p:nvSpPr>
+          <p:cNvPr id="54" name="Text 40"/>
+          <p:cNvSpPr/>
+          <p:nvPr/>
+        </p:nvSpPr>
+        <p:spPr>
+          <a:xfrm>
+            <a:off x="4709160" y="5120640"/>
+            <a:ext cx="6933895" cy="777240"/>
+          </a:xfrm>
+          <a:prstGeom prst="roundRect">
+            <a:avLst>
+              <a:gd name="adj" fmla="val 11765"/>
+            </a:avLst>
+          </a:prstGeom>
+          <a:solidFill>
+            <a:srgbClr val="098277"/>
+          </a:solidFill>
+          <a:ln>
+            <a:solidFill>
+              <a:srgbClr val="098277"/>
+            </a:solidFill>
+          </a:ln>
+        </p:spPr>
+        <p:txBody>
+          <a:bodyPr wrap="square" lIns="127000" tIns="127000" rIns="127000" bIns="127000" rtlCol="0" anchor="ctr"/>
+          <a:lstStyle/>
+          <a:p>
+            <a:pPr indent="0" marL="0">
+              <a:buNone/>
+            </a:pPr>
+            <a:r>
+              <a:rPr lang="en-US" sz="1100" b="1" dirty="0">
+                <a:solidFill>
+                  <a:srgbClr val="FFFFFF"/>
+                </a:solidFill>
+                <a:latin typeface="Calibri" pitchFamily="34" charset="0"/>
+                <a:ea typeface="Calibri" pitchFamily="34" charset="-122"/>
+                <a:cs typeface="Calibri" pitchFamily="34" charset="-120"/>
+              </a:rPr>
+              <a:t>Kenapa simbol bergambar dan berwarna?  </a:t>
+            </a:r>
+            <a:pPr indent="0" marL="0">
+              <a:buNone/>
+            </a:pPr>
+            <a:r>
+              <a:rPr lang="en-US" sz="1100" dirty="0">
+                <a:solidFill>
+                  <a:srgbClr val="DFF6F3"/>
+                </a:solidFill>
+                <a:latin typeface="Calibri" pitchFamily="34" charset="0"/>
+                <a:ea typeface="Calibri" pitchFamily="34" charset="-122"/>
+                <a:cs typeface="Calibri" pitchFamily="34" charset="-120"/>
+              </a:rPr>
+              <a:t>Simbol yang mudah ditebak maknanya lebih cepat dipelajari anak 3 tahun (Mizuko 1987). Warna per jenis kata (Modified Fitzgerald Key) selalu dipasangkan penanda bentuk, supaya warna bukan satu-satunya pembawa makna (WCAG 1.4.1).</a:t>
+            </a:r>
+            <a:endParaRPr lang="en-US" sz="1100" dirty="0"/>
+          </a:p>
+        </p:txBody>
+      </p:sp>
+    </p:spTree>
+  </p:cSld>
+  <p:clrMapOvr>
+    <a:masterClrMapping/>
+  </p:clrMapOvr>
+</p:sld>
+</file>
+
+<file path=ppt/slides/slide18.xml><?xml version="1.0" encoding="utf-8"?>
+<p:sld xmlns:a="http://schemas.openxmlformats.org/drawingml/2006/main" xmlns:r="http://schemas.openxmlformats.org/officeDocument/2006/relationships" xmlns:p="http://schemas.openxmlformats.org/presentationml/2006/main">
+  <p:cSld name="Slide 18">
+    <p:bg>
+      <p:bgPr>
+        <a:solidFill>
+          <a:srgbClr val="F1FAFA"/>
+        </a:solidFill>
+      </p:bgPr>
+    </p:bg>
+    <p:spTree>
+      <p:nvGrpSpPr>
+        <p:cNvPr id="1" name=""/>
+        <p:cNvGrpSpPr/>
+        <p:nvPr/>
+      </p:nvGrpSpPr>
+      <p:grpSpPr>
+        <a:xfrm>
+          <a:off x="0" y="0"/>
+          <a:ext cx="0" cy="0"/>
+          <a:chOff x="0" y="0"/>
+          <a:chExt cx="0" cy="0"/>
+        </a:xfrm>
+      </p:grpSpPr>
+      <p:sp>
+        <p:nvSpPr>
+          <p:cNvPr id="2" name="Text 0"/>
+          <p:cNvSpPr/>
+          <p:nvPr/>
+        </p:nvSpPr>
+        <p:spPr>
+          <a:xfrm>
+            <a:off x="548640" y="347472"/>
+            <a:ext cx="8229600" cy="274320"/>
+          </a:xfrm>
+          <a:prstGeom prst="rect">
+            <a:avLst/>
+          </a:prstGeom>
+          <a:noFill/>
+          <a:ln/>
+        </p:spPr>
+        <p:txBody>
+          <a:bodyPr wrap="square" lIns="0" tIns="0" rIns="0" bIns="0" rtlCol="0" anchor="ctr"/>
+          <a:lstStyle/>
+          <a:p>
+            <a:pPr indent="0" marL="0">
+              <a:buNone/>
+            </a:pPr>
+            <a:r>
+              <a:rPr lang="en-US" sz="1100" b="1" spc="200" kern="0" dirty="0">
+                <a:solidFill>
+                  <a:srgbClr val="026E65"/>
+                </a:solidFill>
+                <a:latin typeface="Calibri" pitchFamily="34" charset="0"/>
+                <a:ea typeface="Calibri" pitchFamily="34" charset="-122"/>
+                <a:cs typeface="Calibri" pitchFamily="34" charset="-120"/>
+              </a:rPr>
+              <a:t>LAMPIRAN A · UNTUK Q&amp;A</a:t>
+            </a:r>
+            <a:endParaRPr lang="en-US" sz="1100" dirty="0"/>
+          </a:p>
+        </p:txBody>
+      </p:sp>
+      <p:sp>
+        <p:nvSpPr>
+          <p:cNvPr id="3" name="Text 1"/>
+          <p:cNvSpPr/>
+          <p:nvPr/>
+        </p:nvSpPr>
+        <p:spPr>
+          <a:xfrm>
+            <a:off x="548640" y="621792"/>
+            <a:ext cx="10241280" cy="914400"/>
+          </a:xfrm>
+          <a:prstGeom prst="rect">
+            <a:avLst/>
+          </a:prstGeom>
+          <a:noFill/>
+          <a:ln/>
+        </p:spPr>
+        <p:txBody>
+          <a:bodyPr wrap="square" lIns="0" tIns="0" rIns="0" bIns="0" rtlCol="0" anchor="t"/>
+          <a:lstStyle/>
+          <a:p>
+            <a:pPr indent="0" marL="0">
+              <a:lnSpc>
+                <a:spcPct val="95000"/>
+              </a:lnSpc>
+              <a:buNone/>
+            </a:pPr>
+            <a:r>
+              <a:rPr lang="en-US" sz="2500" b="1" dirty="0">
+                <a:solidFill>
+                  <a:srgbClr val="172C2A"/>
+                </a:solidFill>
+                <a:latin typeface="Trebuchet MS" pitchFamily="34" charset="0"/>
+                <a:ea typeface="Trebuchet MS" pitchFamily="34" charset="-122"/>
+                <a:cs typeface="Trebuchet MS" pitchFamily="34" charset="-120"/>
+              </a:rPr>
+              <a:t>Dua belas kata inti: berbasis literatur, dengan alasan tertulis per kata</a:t>
+            </a:r>
+            <a:endParaRPr lang="en-US" sz="2500" dirty="0"/>
+          </a:p>
+        </p:txBody>
+      </p:sp>
+      <p:pic>
+        <p:nvPicPr>
+          <p:cNvPr id="4" name="Image 0" descr="C:\Users\mikae\OneDrive\Documents\Lomba\IFEST\Nyambung\app\assets\brand\logo_mark.png">    </p:cNvPr>
+          <p:cNvPicPr>
+            <a:picLocks noChangeAspect="1"/>
+          </p:cNvPicPr>
+          <p:nvPr/>
+        </p:nvPicPr>
+        <p:blipFill>
+          <a:blip r:embed="rId1"/>
+          <a:stretch>
+            <a:fillRect/>
+          </a:stretch>
+        </p:blipFill>
+        <p:spPr>
+          <a:xfrm>
+            <a:off x="11167567" y="347472"/>
+            <a:ext cx="475488" cy="475488"/>
+          </a:xfrm>
+          <a:prstGeom prst="rect">
+            <a:avLst/>
+          </a:prstGeom>
+        </p:spPr>
+      </p:pic>
+      <p:sp>
+        <p:nvSpPr>
+          <p:cNvPr id="5" name="Text 2"/>
+          <p:cNvSpPr/>
+          <p:nvPr/>
+        </p:nvSpPr>
+        <p:spPr>
+          <a:xfrm>
+            <a:off x="548640" y="6382512"/>
+            <a:ext cx="1883664" cy="256032"/>
+          </a:xfrm>
+          <a:prstGeom prst="roundRect">
+            <a:avLst>
+              <a:gd name="adj" fmla="val 46429"/>
+            </a:avLst>
+          </a:prstGeom>
+          <a:solidFill>
+            <a:srgbClr val="098277"/>
+          </a:solidFill>
+          <a:ln w="9525">
+            <a:solidFill>
+              <a:srgbClr val="098277"/>
+            </a:solidFill>
+          </a:ln>
+        </p:spPr>
+        <p:txBody>
+          <a:bodyPr wrap="square" lIns="0" tIns="0" rIns="0" bIns="0" rtlCol="0" anchor="ctr"/>
+          <a:lstStyle/>
+          <a:p>
+            <a:pPr algn="ctr" indent="0" marL="0">
+              <a:buNone/>
+            </a:pPr>
+            <a:r>
+              <a:rPr lang="en-US" sz="950" b="1" dirty="0">
+                <a:solidFill>
+                  <a:srgbClr val="FFFFFF"/>
+                </a:solidFill>
+                <a:latin typeface="Calibri" pitchFamily="34" charset="0"/>
+                <a:ea typeface="Calibri" pitchFamily="34" charset="-122"/>
+                <a:cs typeface="Calibri" pitchFamily="34" charset="-120"/>
+              </a:rPr>
+              <a:t>Lampiran · untuk Q&amp;A</a:t>
+            </a:r>
+            <a:endParaRPr lang="en-US" sz="950" dirty="0"/>
+          </a:p>
+        </p:txBody>
+      </p:sp>
+      <p:sp>
+        <p:nvSpPr>
+          <p:cNvPr id="6" name="Text 3"/>
+          <p:cNvSpPr/>
+          <p:nvPr/>
+        </p:nvSpPr>
+        <p:spPr>
+          <a:xfrm>
+            <a:off x="11185855" y="6382512"/>
+            <a:ext cx="457200" cy="256032"/>
+          </a:xfrm>
+          <a:prstGeom prst="rect">
+            <a:avLst/>
+          </a:prstGeom>
+          <a:noFill/>
+          <a:ln/>
+        </p:spPr>
+        <p:txBody>
+          <a:bodyPr wrap="square" lIns="0" tIns="0" rIns="0" bIns="0" rtlCol="0" anchor="ctr"/>
+          <a:lstStyle/>
+          <a:p>
+            <a:pPr algn="r" indent="0" marL="0">
+              <a:buNone/>
+            </a:pPr>
+            <a:r>
+              <a:rPr lang="en-US" sz="1000" dirty="0">
+                <a:solidFill>
+                  <a:srgbClr val="52706D"/>
+                </a:solidFill>
+                <a:latin typeface="Calibri" pitchFamily="34" charset="0"/>
+                <a:ea typeface="Calibri" pitchFamily="34" charset="-122"/>
+                <a:cs typeface="Calibri" pitchFamily="34" charset="-120"/>
+              </a:rPr>
+              <a:t>18</a:t>
+            </a:r>
+            <a:endParaRPr lang="en-US" sz="1000" dirty="0"/>
+          </a:p>
+        </p:txBody>
+      </p:sp>
+      <p:sp>
+        <p:nvSpPr>
+          <p:cNvPr id="7" name="Text 4"/>
+          <p:cNvSpPr/>
+          <p:nvPr/>
+        </p:nvSpPr>
+        <p:spPr>
+          <a:xfrm>
+            <a:off x="548640" y="6035040"/>
+            <a:ext cx="11094415" cy="274320"/>
+          </a:xfrm>
+          <a:prstGeom prst="rect">
+            <a:avLst/>
+          </a:prstGeom>
+          <a:noFill/>
+          <a:ln/>
+        </p:spPr>
+        <p:txBody>
+          <a:bodyPr wrap="square" lIns="0" tIns="0" rIns="0" bIns="0" rtlCol="0" anchor="b"/>
+          <a:lstStyle/>
+          <a:p>
+            <a:pPr indent="0" marL="0">
+              <a:buNone/>
+            </a:pPr>
+            <a:r>
+              <a:rPr lang="en-US" sz="850" i="1" dirty="0">
+                <a:solidFill>
+                  <a:srgbClr val="52706D"/>
+                </a:solidFill>
+                <a:latin typeface="Calibri" pitchFamily="34" charset="0"/>
+                <a:ea typeface="Calibri" pitchFamily="34" charset="-122"/>
+                <a:cs typeface="Calibri" pitchFamily="34" charset="-120"/>
+              </a:rPr>
               <a:t>Banajee dkk. (2003): 23 kata inti balita, nol kata benda · Project Core Universal Core (36 kata) · OS = peringkat frekuensi OpenSubtitles 2018 (kecil = sering; korpus dewasa, hanya pemecah seri).</a:t>
             </a:r>
             <a:endParaRPr lang="en-US" sz="850" dirty="0"/>
@@ -14513,7 +16932,7 @@
       </p:sp>
       <p:graphicFrame>
         <p:nvGraphicFramePr>
-          <p:cNvPr id="18" name="Table 0"/>
+          <p:cNvPr id="19" name="Table 0"/>
           <p:cNvGraphicFramePr>
             <a:graphicFrameLocks noGrp="1"/>
           </p:cNvGraphicFramePr>
@@ -19883,771 +22302,6 @@
 </p:sld>
 </file>
 
-<file path=ppt/slides/slide18.xml><?xml version="1.0" encoding="utf-8"?>
-<p:sld xmlns:a="http://schemas.openxmlformats.org/drawingml/2006/main" xmlns:r="http://schemas.openxmlformats.org/officeDocument/2006/relationships" xmlns:p="http://schemas.openxmlformats.org/presentationml/2006/main">
-  <p:cSld name="Slide 18">
-    <p:bg>
-      <p:bgPr>
-        <a:solidFill>
-          <a:srgbClr val="F1FAFA"/>
-        </a:solidFill>
-      </p:bgPr>
-    </p:bg>
-    <p:spTree>
-      <p:nvGrpSpPr>
-        <p:cNvPr id="1" name=""/>
-        <p:cNvGrpSpPr/>
-        <p:nvPr/>
-      </p:nvGrpSpPr>
-      <p:grpSpPr>
-        <a:xfrm>
-          <a:off x="0" y="0"/>
-          <a:ext cx="0" cy="0"/>
-          <a:chOff x="0" y="0"/>
-          <a:chExt cx="0" cy="0"/>
-        </a:xfrm>
-      </p:grpSpPr>
-      <p:sp>
-        <p:nvSpPr>
-          <p:cNvPr id="2" name="Text 0"/>
-          <p:cNvSpPr/>
-          <p:nvPr/>
-        </p:nvSpPr>
-        <p:spPr>
-          <a:xfrm>
-            <a:off x="548640" y="347472"/>
-            <a:ext cx="8229600" cy="274320"/>
-          </a:xfrm>
-          <a:prstGeom prst="rect">
-            <a:avLst/>
-          </a:prstGeom>
-          <a:noFill/>
-          <a:ln/>
-        </p:spPr>
-        <p:txBody>
-          <a:bodyPr wrap="square" lIns="0" tIns="0" rIns="0" bIns="0" rtlCol="0" anchor="ctr"/>
-          <a:lstStyle/>
-          <a:p>
-            <a:pPr indent="0" marL="0">
-              <a:buNone/>
-            </a:pPr>
-            <a:r>
-              <a:rPr lang="en-US" sz="1100" b="1" spc="200" kern="0" dirty="0">
-                <a:solidFill>
-                  <a:srgbClr val="026E65"/>
-                </a:solidFill>
-                <a:latin typeface="Calibri" pitchFamily="34" charset="0"/>
-                <a:ea typeface="Calibri" pitchFamily="34" charset="-122"/>
-                <a:cs typeface="Calibri" pitchFamily="34" charset="-120"/>
-              </a:rPr>
-              <a:t>LAMPIRAN B · UNTUK Q&amp;A</a:t>
-            </a:r>
-            <a:endParaRPr lang="en-US" sz="1100" dirty="0"/>
-          </a:p>
-        </p:txBody>
-      </p:sp>
-      <p:sp>
-        <p:nvSpPr>
-          <p:cNvPr id="3" name="Text 1"/>
-          <p:cNvSpPr/>
-          <p:nvPr/>
-        </p:nvSpPr>
-        <p:spPr>
-          <a:xfrm>
-            <a:off x="548640" y="621792"/>
-            <a:ext cx="10241280" cy="914400"/>
-          </a:xfrm>
-          <a:prstGeom prst="rect">
-            <a:avLst/>
-          </a:prstGeom>
-          <a:noFill/>
-          <a:ln/>
-        </p:spPr>
-        <p:txBody>
-          <a:bodyPr wrap="square" lIns="0" tIns="0" rIns="0" bIns="0" rtlCol="0" anchor="t"/>
-          <a:lstStyle/>
-          <a:p>
-            <a:pPr indent="0" marL="0">
-              <a:lnSpc>
-                <a:spcPct val="95000"/>
-              </a:lnSpc>
-              <a:buNone/>
-            </a:pPr>
-            <a:r>
-              <a:rPr lang="en-US" sz="2500" b="1" dirty="0">
-                <a:solidFill>
-                  <a:srgbClr val="172C2A"/>
-                </a:solidFill>
-                <a:latin typeface="Trebuchet MS" pitchFamily="34" charset="0"/>
-                <a:ea typeface="Trebuchet MS" pitchFamily="34" charset="-122"/>
-                <a:cs typeface="Trebuchet MS" pitchFamily="34" charset="-120"/>
-              </a:rPr>
-              <a:t>Batasan yang kami akui, dan apa yang dikerjakan berikutnya</a:t>
-            </a:r>
-            <a:endParaRPr lang="en-US" sz="2500" dirty="0"/>
-          </a:p>
-        </p:txBody>
-      </p:sp>
-      <p:pic>
-        <p:nvPicPr>
-          <p:cNvPr id="4" name="Image 0" descr="C:\Users\mikae\OneDrive\Documents\Lomba\IFEST\Nyambung\app\assets\brand\logo_mark.png">    </p:cNvPr>
-          <p:cNvPicPr>
-            <a:picLocks noChangeAspect="1"/>
-          </p:cNvPicPr>
-          <p:nvPr/>
-        </p:nvPicPr>
-        <p:blipFill>
-          <a:blip r:embed="rId1"/>
-          <a:stretch>
-            <a:fillRect/>
-          </a:stretch>
-        </p:blipFill>
-        <p:spPr>
-          <a:xfrm>
-            <a:off x="11167567" y="347472"/>
-            <a:ext cx="475488" cy="475488"/>
-          </a:xfrm>
-          <a:prstGeom prst="rect">
-            <a:avLst/>
-          </a:prstGeom>
-        </p:spPr>
-      </p:pic>
-      <p:sp>
-        <p:nvSpPr>
-          <p:cNvPr id="5" name="Text 2"/>
-          <p:cNvSpPr/>
-          <p:nvPr/>
-        </p:nvSpPr>
-        <p:spPr>
-          <a:xfrm>
-            <a:off x="548640" y="6382512"/>
-            <a:ext cx="1883664" cy="256032"/>
-          </a:xfrm>
-          <a:prstGeom prst="roundRect">
-            <a:avLst>
-              <a:gd name="adj" fmla="val 46429"/>
-            </a:avLst>
-          </a:prstGeom>
-          <a:solidFill>
-            <a:srgbClr val="098277"/>
-          </a:solidFill>
-          <a:ln w="9525">
-            <a:solidFill>
-              <a:srgbClr val="098277"/>
-            </a:solidFill>
-          </a:ln>
-        </p:spPr>
-        <p:txBody>
-          <a:bodyPr wrap="square" lIns="0" tIns="0" rIns="0" bIns="0" rtlCol="0" anchor="ctr"/>
-          <a:lstStyle/>
-          <a:p>
-            <a:pPr algn="ctr" indent="0" marL="0">
-              <a:buNone/>
-            </a:pPr>
-            <a:r>
-              <a:rPr lang="en-US" sz="950" b="1" dirty="0">
-                <a:solidFill>
-                  <a:srgbClr val="FFFFFF"/>
-                </a:solidFill>
-                <a:latin typeface="Calibri" pitchFamily="34" charset="0"/>
-                <a:ea typeface="Calibri" pitchFamily="34" charset="-122"/>
-                <a:cs typeface="Calibri" pitchFamily="34" charset="-120"/>
-              </a:rPr>
-              <a:t>Lampiran · untuk Q&amp;A</a:t>
-            </a:r>
-            <a:endParaRPr lang="en-US" sz="950" dirty="0"/>
-          </a:p>
-        </p:txBody>
-      </p:sp>
-      <p:sp>
-        <p:nvSpPr>
-          <p:cNvPr id="6" name="Text 3"/>
-          <p:cNvSpPr/>
-          <p:nvPr/>
-        </p:nvSpPr>
-        <p:spPr>
-          <a:xfrm>
-            <a:off x="11185855" y="6382512"/>
-            <a:ext cx="457200" cy="256032"/>
-          </a:xfrm>
-          <a:prstGeom prst="rect">
-            <a:avLst/>
-          </a:prstGeom>
-          <a:noFill/>
-          <a:ln/>
-        </p:spPr>
-        <p:txBody>
-          <a:bodyPr wrap="square" lIns="0" tIns="0" rIns="0" bIns="0" rtlCol="0" anchor="ctr"/>
-          <a:lstStyle/>
-          <a:p>
-            <a:pPr algn="r" indent="0" marL="0">
-              <a:buNone/>
-            </a:pPr>
-            <a:r>
-              <a:rPr lang="en-US" sz="1000" dirty="0">
-                <a:solidFill>
-                  <a:srgbClr val="52706D"/>
-                </a:solidFill>
-                <a:latin typeface="Calibri" pitchFamily="34" charset="0"/>
-                <a:ea typeface="Calibri" pitchFamily="34" charset="-122"/>
-                <a:cs typeface="Calibri" pitchFamily="34" charset="-120"/>
-              </a:rPr>
-              <a:t>18</a:t>
-            </a:r>
-            <a:endParaRPr lang="en-US" sz="1000" dirty="0"/>
-          </a:p>
-        </p:txBody>
-      </p:sp>
-      <p:sp>
-        <p:nvSpPr>
-          <p:cNvPr id="7" name="Text 4"/>
-          <p:cNvSpPr/>
-          <p:nvPr/>
-        </p:nvSpPr>
-        <p:spPr>
-          <a:xfrm>
-            <a:off x="548640" y="6035040"/>
-            <a:ext cx="11094415" cy="274320"/>
-          </a:xfrm>
-          <a:prstGeom prst="rect">
-            <a:avLst/>
-          </a:prstGeom>
-          <a:noFill/>
-          <a:ln/>
-        </p:spPr>
-        <p:txBody>
-          <a:bodyPr wrap="square" lIns="0" tIns="0" rIns="0" bIns="0" rtlCol="0" anchor="b"/>
-          <a:lstStyle/>
-          <a:p>
-            <a:pPr indent="0" marL="0">
-              <a:buNone/>
-            </a:pPr>
-            <a:r>
-              <a:rPr lang="en-US" sz="850" i="1" dirty="0">
-                <a:solidFill>
-                  <a:srgbClr val="52706D"/>
-                </a:solidFill>
-                <a:latin typeface="Calibri" pitchFamily="34" charset="0"/>
-                <a:ea typeface="Calibri" pitchFamily="34" charset="-122"/>
-                <a:cs typeface="Calibri" pitchFamily="34" charset="-120"/>
-              </a:rPr>
-              <a:t>Sumber: README "Batasan yang kami akui", 03-basis-ilmiah §7–§8, PERUBAHAN.md.</a:t>
-            </a:r>
-            <a:endParaRPr lang="en-US" sz="850" dirty="0"/>
-          </a:p>
-        </p:txBody>
-      </p:sp>
-      <p:sp>
-        <p:nvSpPr>
-          <p:cNvPr id="9" name="Shape 5"/>
-          <p:cNvSpPr/>
-          <p:nvPr/>
-        </p:nvSpPr>
-        <p:spPr>
-          <a:xfrm>
-            <a:off x="548640" y="1783080"/>
-            <a:ext cx="5410048" cy="4114800"/>
-          </a:xfrm>
-          <a:prstGeom prst="roundRect">
-            <a:avLst>
-              <a:gd name="adj" fmla="val 2667"/>
-            </a:avLst>
-          </a:prstGeom>
-          <a:solidFill>
-            <a:srgbClr val="FFFFFF"/>
-          </a:solidFill>
-          <a:ln w="9525">
-            <a:solidFill>
-              <a:srgbClr val="DCEEEC"/>
-            </a:solidFill>
-            <a:prstDash val="solid"/>
-          </a:ln>
-        </p:spPr>
-      </p:sp>
-      <p:sp>
-        <p:nvSpPr>
-          <p:cNvPr id="10" name="Shape 6"/>
-          <p:cNvSpPr/>
-          <p:nvPr/>
-        </p:nvSpPr>
-        <p:spPr>
-          <a:xfrm>
-            <a:off x="731520" y="1920240"/>
-            <a:ext cx="2377440" cy="310896"/>
-          </a:xfrm>
-          <a:prstGeom prst="roundRect">
-            <a:avLst>
-              <a:gd name="adj" fmla="val 50000"/>
-            </a:avLst>
-          </a:prstGeom>
-          <a:solidFill>
-            <a:srgbClr val="FDE1E2"/>
-          </a:solidFill>
-          <a:ln w="12700">
-            <a:solidFill>
-              <a:srgbClr val="FDE1E2"/>
-            </a:solidFill>
-            <a:prstDash val="solid"/>
-          </a:ln>
-        </p:spPr>
-      </p:sp>
-      <p:sp>
-        <p:nvSpPr>
-          <p:cNvPr id="11" name="Text 7"/>
-          <p:cNvSpPr/>
-          <p:nvPr/>
-        </p:nvSpPr>
-        <p:spPr>
-          <a:xfrm>
-            <a:off x="731520" y="1920240"/>
-            <a:ext cx="2377440" cy="310896"/>
-          </a:xfrm>
-          <a:prstGeom prst="rect">
-            <a:avLst/>
-          </a:prstGeom>
-          <a:noFill/>
-          <a:ln/>
-        </p:spPr>
-        <p:txBody>
-          <a:bodyPr wrap="square" lIns="0" tIns="0" rIns="0" bIns="0" rtlCol="0" anchor="ctr"/>
-          <a:lstStyle/>
-          <a:p>
-            <a:pPr algn="ctr" indent="0" marL="0">
-              <a:buNone/>
-            </a:pPr>
-            <a:r>
-              <a:rPr lang="en-US" sz="1050" b="1" spc="150" kern="0" dirty="0">
-                <a:solidFill>
-                  <a:srgbClr val="C23D42"/>
-                </a:solidFill>
-                <a:latin typeface="Calibri" pitchFamily="34" charset="0"/>
-                <a:ea typeface="Calibri" pitchFamily="34" charset="-122"/>
-                <a:cs typeface="Calibri" pitchFamily="34" charset="-120"/>
-              </a:rPr>
-              <a:t>BATASAN SAAT INI</a:t>
-            </a:r>
-            <a:endParaRPr lang="en-US" sz="1050" dirty="0"/>
-          </a:p>
-        </p:txBody>
-      </p:sp>
-      <p:sp>
-        <p:nvSpPr>
-          <p:cNvPr id="12" name="Text 8"/>
-          <p:cNvSpPr/>
-          <p:nvPr/>
-        </p:nvSpPr>
-        <p:spPr>
-          <a:xfrm>
-            <a:off x="777240" y="2423160"/>
-            <a:ext cx="4952848" cy="3383280"/>
-          </a:xfrm>
-          <a:prstGeom prst="rect">
-            <a:avLst/>
-          </a:prstGeom>
-          <a:noFill/>
-          <a:ln/>
-        </p:spPr>
-        <p:txBody>
-          <a:bodyPr wrap="square" lIns="0" tIns="0" rIns="0" bIns="0" rtlCol="0" anchor="t"/>
-          <a:lstStyle/>
-          <a:p>
-            <a:pPr marL="342900" indent="-342900">
-              <a:spcAft>
-                <a:spcPts val="1100"/>
-              </a:spcAft>
-              <a:buSzPct val="100000"/>
-              <a:buChar char="•"/>
-            </a:pPr>
-            <a:r>
-              <a:rPr lang="en-US" sz="1400" dirty="0">
-                <a:solidFill>
-                  <a:srgbClr val="172C2A"/>
-                </a:solidFill>
-                <a:latin typeface="Calibri" pitchFamily="34" charset="0"/>
-                <a:ea typeface="Calibri" pitchFamily="34" charset="-122"/>
-                <a:cs typeface="Calibri" pitchFamily="34" charset="-120"/>
-              </a:rPr>
-              <a:t>Server HTTP di jaringan lokal, belum HTTPS</a:t>
-            </a:r>
-            <a:endParaRPr lang="en-US" sz="1400" dirty="0"/>
-          </a:p>
-          <a:p>
-            <a:pPr marL="342900" indent="-342900">
-              <a:spcAft>
-                <a:spcPts val="1100"/>
-              </a:spcAft>
-              <a:buSzPct val="100000"/>
-              <a:buChar char="•"/>
-            </a:pPr>
-            <a:r>
-              <a:rPr lang="en-US" sz="1400" dirty="0">
-                <a:solidFill>
-                  <a:srgbClr val="172C2A"/>
-                </a:solidFill>
-                <a:latin typeface="Calibri" pitchFamily="34" charset="0"/>
-                <a:ea typeface="Calibri" pitchFamily="34" charset="-122"/>
-                <a:cs typeface="Calibri" pitchFamily="34" charset="-120"/>
-              </a:rPr>
-              <a:t>Token perangkat di shared_preferences tanpa enkripsi</a:t>
-            </a:r>
-            <a:endParaRPr lang="en-US" sz="1400" dirty="0"/>
-          </a:p>
-          <a:p>
-            <a:pPr marL="342900" indent="-342900">
-              <a:spcAft>
-                <a:spcPts val="1100"/>
-              </a:spcAft>
-              <a:buSzPct val="100000"/>
-              <a:buChar char="•"/>
-            </a:pPr>
-            <a:r>
-              <a:rPr lang="en-US" sz="1400" dirty="0">
-                <a:solidFill>
-                  <a:srgbClr val="172C2A"/>
-                </a:solidFill>
-                <a:latin typeface="Calibri" pitchFamily="34" charset="0"/>
-                <a:ea typeface="Calibri" pitchFamily="34" charset="-122"/>
-                <a:cs typeface="Calibri" pitchFamily="34" charset="-120"/>
-              </a:rPr>
-              <a:t>Belum ada pembatasan laju tebakan kode undangan</a:t>
-            </a:r>
-            <a:endParaRPr lang="en-US" sz="1400" dirty="0"/>
-          </a:p>
-          <a:p>
-            <a:pPr marL="342900" indent="-342900">
-              <a:spcAft>
-                <a:spcPts val="1100"/>
-              </a:spcAft>
-              <a:buSzPct val="100000"/>
-              <a:buChar char="•"/>
-            </a:pPr>
-            <a:r>
-              <a:rPr lang="en-US" sz="1400" dirty="0">
-                <a:solidFill>
-                  <a:srgbClr val="172C2A"/>
-                </a:solidFill>
-                <a:latin typeface="Calibri" pitchFamily="34" charset="0"/>
-                <a:ea typeface="Calibri" pitchFamily="34" charset="-122"/>
-                <a:cs typeface="Calibri" pitchFamily="34" charset="-120"/>
-              </a:rPr>
-              <a:t>Suara papan klip sintetis, bukan rekaman manusia; tiruan suara disimpan penyedia selama belum dicabut</a:t>
-            </a:r>
-            <a:endParaRPr lang="en-US" sz="1400" dirty="0"/>
-          </a:p>
-          <a:p>
-            <a:pPr marL="342900" indent="-342900">
-              <a:spcAft>
-                <a:spcPts val="1100"/>
-              </a:spcAft>
-              <a:buSzPct val="100000"/>
-              <a:buChar char="•"/>
-            </a:pPr>
-            <a:r>
-              <a:rPr lang="en-US" sz="1400" dirty="0">
-                <a:solidFill>
-                  <a:srgbClr val="172C2A"/>
-                </a:solidFill>
-                <a:latin typeface="Calibri" pitchFamily="34" charset="0"/>
-                <a:ea typeface="Calibri" pitchFamily="34" charset="-122"/>
-                <a:cs typeface="Calibri" pitchFamily="34" charset="-120"/>
-              </a:rPr>
-              <a:t>Belum diuji di banyak ROM dan HP fisik 2 GB</a:t>
-            </a:r>
-            <a:endParaRPr lang="en-US" sz="1400" dirty="0"/>
-          </a:p>
-          <a:p>
-            <a:pPr marL="342900" indent="-342900">
-              <a:spcAft>
-                <a:spcPts val="1100"/>
-              </a:spcAft>
-              <a:buSzPct val="100000"/>
-              <a:buChar char="•"/>
-            </a:pPr>
-            <a:r>
-              <a:rPr lang="en-US" sz="1400" dirty="0">
-                <a:solidFill>
-                  <a:srgbClr val="172C2A"/>
-                </a:solidFill>
-                <a:latin typeface="Calibri" pitchFamily="34" charset="0"/>
-                <a:ea typeface="Calibri" pitchFamily="34" charset="-122"/>
-                <a:cs typeface="Calibri" pitchFamily="34" charset="-120"/>
-              </a:rPr>
-              <a:t>Daftar 120 kata belum ditinjau terapis wicara; 21 simbol tim belum diuji pada anak</a:t>
-            </a:r>
-            <a:endParaRPr lang="en-US" sz="1400" dirty="0"/>
-          </a:p>
-          <a:p>
-            <a:pPr marL="342900" indent="-342900">
-              <a:spcAft>
-                <a:spcPts val="1100"/>
-              </a:spcAft>
-              <a:buSzPct val="100000"/>
-              <a:buChar char="•"/>
-            </a:pPr>
-            <a:r>
-              <a:rPr lang="en-US" sz="1400" dirty="0">
-                <a:solidFill>
-                  <a:srgbClr val="172C2A"/>
-                </a:solidFill>
-                <a:latin typeface="Calibri" pitchFamily="34" charset="0"/>
-                <a:ea typeface="Calibri" pitchFamily="34" charset="-122"/>
-                <a:cs typeface="Calibri" pitchFamily="34" charset="-120"/>
-              </a:rPr>
-              <a:t>Sinkron otomatis hanya saat aplikasi terbuka (belum layanan latar)</a:t>
-            </a:r>
-            <a:endParaRPr lang="en-US" sz="1400" dirty="0"/>
-          </a:p>
-        </p:txBody>
-      </p:sp>
-      <p:sp>
-        <p:nvSpPr>
-          <p:cNvPr id="13" name="Shape 9"/>
-          <p:cNvSpPr/>
-          <p:nvPr/>
-        </p:nvSpPr>
-        <p:spPr>
-          <a:xfrm>
-            <a:off x="6233008" y="1783080"/>
-            <a:ext cx="5410048" cy="4114800"/>
-          </a:xfrm>
-          <a:prstGeom prst="roundRect">
-            <a:avLst>
-              <a:gd name="adj" fmla="val 2667"/>
-            </a:avLst>
-          </a:prstGeom>
-          <a:solidFill>
-            <a:srgbClr val="FFFFFF"/>
-          </a:solidFill>
-          <a:ln w="9525">
-            <a:solidFill>
-              <a:srgbClr val="DCEEEC"/>
-            </a:solidFill>
-            <a:prstDash val="solid"/>
-          </a:ln>
-        </p:spPr>
-      </p:sp>
-      <p:sp>
-        <p:nvSpPr>
-          <p:cNvPr id="14" name="Shape 10"/>
-          <p:cNvSpPr/>
-          <p:nvPr/>
-        </p:nvSpPr>
-        <p:spPr>
-          <a:xfrm>
-            <a:off x="6415888" y="1920240"/>
-            <a:ext cx="2377440" cy="310896"/>
-          </a:xfrm>
-          <a:prstGeom prst="roundRect">
-            <a:avLst>
-              <a:gd name="adj" fmla="val 50000"/>
-            </a:avLst>
-          </a:prstGeom>
-          <a:solidFill>
-            <a:srgbClr val="DFF6F3"/>
-          </a:solidFill>
-          <a:ln w="12700">
-            <a:solidFill>
-              <a:srgbClr val="DFF6F3"/>
-            </a:solidFill>
-            <a:prstDash val="solid"/>
-          </a:ln>
-        </p:spPr>
-      </p:sp>
-      <p:sp>
-        <p:nvSpPr>
-          <p:cNvPr id="15" name="Text 11"/>
-          <p:cNvSpPr/>
-          <p:nvPr/>
-        </p:nvSpPr>
-        <p:spPr>
-          <a:xfrm>
-            <a:off x="6415888" y="1920240"/>
-            <a:ext cx="2377440" cy="310896"/>
-          </a:xfrm>
-          <a:prstGeom prst="rect">
-            <a:avLst/>
-          </a:prstGeom>
-          <a:noFill/>
-          <a:ln/>
-        </p:spPr>
-        <p:txBody>
-          <a:bodyPr wrap="square" lIns="0" tIns="0" rIns="0" bIns="0" rtlCol="0" anchor="ctr"/>
-          <a:lstStyle/>
-          <a:p>
-            <a:pPr algn="ctr" indent="0" marL="0">
-              <a:buNone/>
-            </a:pPr>
-            <a:r>
-              <a:rPr lang="en-US" sz="1050" b="1" spc="150" kern="0" dirty="0">
-                <a:solidFill>
-                  <a:srgbClr val="026E65"/>
-                </a:solidFill>
-                <a:latin typeface="Calibri" pitchFamily="34" charset="0"/>
-                <a:ea typeface="Calibri" pitchFamily="34" charset="-122"/>
-                <a:cs typeface="Calibri" pitchFamily="34" charset="-120"/>
-              </a:rPr>
-              <a:t>BERIKUTNYA</a:t>
-            </a:r>
-            <a:endParaRPr lang="en-US" sz="1050" dirty="0"/>
-          </a:p>
-        </p:txBody>
-      </p:sp>
-      <p:sp>
-        <p:nvSpPr>
-          <p:cNvPr id="16" name="Text 12"/>
-          <p:cNvSpPr/>
-          <p:nvPr/>
-        </p:nvSpPr>
-        <p:spPr>
-          <a:xfrm>
-            <a:off x="6461608" y="2423160"/>
-            <a:ext cx="4952848" cy="3383280"/>
-          </a:xfrm>
-          <a:prstGeom prst="rect">
-            <a:avLst/>
-          </a:prstGeom>
-          <a:noFill/>
-          <a:ln/>
-        </p:spPr>
-        <p:txBody>
-          <a:bodyPr wrap="square" lIns="0" tIns="0" rIns="0" bIns="0" rtlCol="0" anchor="t"/>
-          <a:lstStyle/>
-          <a:p>
-            <a:pPr marL="342900" indent="-342900">
-              <a:spcAft>
-                <a:spcPts val="1100"/>
-              </a:spcAft>
-              <a:buSzPct val="100000"/>
-              <a:buChar char="•"/>
-            </a:pPr>
-            <a:r>
-              <a:rPr lang="en-US" sz="1400" dirty="0">
-                <a:solidFill>
-                  <a:srgbClr val="172C2A"/>
-                </a:solidFill>
-                <a:latin typeface="Calibri" pitchFamily="34" charset="0"/>
-                <a:ea typeface="Calibri" pitchFamily="34" charset="-122"/>
-                <a:cs typeface="Calibri" pitchFamily="34" charset="-120"/>
-              </a:rPr>
-              <a:t>Pilot 6 pekan: retensi hari ke-14 ≥ 60% sebagai metrik utama</a:t>
-            </a:r>
-            <a:endParaRPr lang="en-US" sz="1400" dirty="0"/>
-          </a:p>
-          <a:p>
-            <a:pPr marL="342900" indent="-342900">
-              <a:spcAft>
-                <a:spcPts val="1100"/>
-              </a:spcAft>
-              <a:buSzPct val="100000"/>
-              <a:buChar char="•"/>
-            </a:pPr>
-            <a:r>
-              <a:rPr lang="en-US" sz="1400" dirty="0">
-                <a:solidFill>
-                  <a:srgbClr val="172C2A"/>
-                </a:solidFill>
-                <a:latin typeface="Calibri" pitchFamily="34" charset="0"/>
-                <a:ea typeface="Calibri" pitchFamily="34" charset="-122"/>
-                <a:cs typeface="Calibri" pitchFamily="34" charset="-120"/>
-              </a:rPr>
-              <a:t>Validasi klinis daftar kata dan aturan triase bersama terapis wicara</a:t>
-            </a:r>
-            <a:endParaRPr lang="en-US" sz="1400" dirty="0"/>
-          </a:p>
-          <a:p>
-            <a:pPr marL="342900" indent="-342900">
-              <a:spcAft>
-                <a:spcPts val="1100"/>
-              </a:spcAft>
-              <a:buSzPct val="100000"/>
-              <a:buChar char="•"/>
-            </a:pPr>
-            <a:r>
-              <a:rPr lang="en-US" sz="1400" dirty="0">
-                <a:solidFill>
-                  <a:srgbClr val="172C2A"/>
-                </a:solidFill>
-                <a:latin typeface="Calibri" pitchFamily="34" charset="0"/>
-                <a:ea typeface="Calibri" pitchFamily="34" charset="-122"/>
-                <a:cs typeface="Calibri" pitchFamily="34" charset="-120"/>
-              </a:rPr>
-              <a:t>HTTPS, enkripsi basis data dan token, rotasi token</a:t>
-            </a:r>
-            <a:endParaRPr lang="en-US" sz="1400" dirty="0"/>
-          </a:p>
-          <a:p>
-            <a:pPr marL="342900" indent="-342900">
-              <a:spcAft>
-                <a:spcPts val="1100"/>
-              </a:spcAft>
-              <a:buSzPct val="100000"/>
-              <a:buChar char="•"/>
-            </a:pPr>
-            <a:r>
-              <a:rPr lang="en-US" sz="1400" dirty="0">
-                <a:solidFill>
-                  <a:srgbClr val="172C2A"/>
-                </a:solidFill>
-                <a:latin typeface="Calibri" pitchFamily="34" charset="0"/>
-                <a:ea typeface="Calibri" pitchFamily="34" charset="-122"/>
-                <a:cs typeface="Calibri" pitchFamily="34" charset="-120"/>
-              </a:rPr>
-              <a:t>Validasi kata terhadap tuturan anak Indonesia (MPI-EVA Jakarta Child Language Database)</a:t>
-            </a:r>
-            <a:endParaRPr lang="en-US" sz="1400" dirty="0"/>
-          </a:p>
-          <a:p>
-            <a:pPr marL="342900" indent="-342900">
-              <a:spcAft>
-                <a:spcPts val="1100"/>
-              </a:spcAft>
-              <a:buSzPct val="100000"/>
-              <a:buChar char="•"/>
-            </a:pPr>
-            <a:r>
-              <a:rPr lang="en-US" sz="1400" dirty="0">
-                <a:solidFill>
-                  <a:srgbClr val="172C2A"/>
-                </a:solidFill>
-                <a:latin typeface="Calibri" pitchFamily="34" charset="0"/>
-                <a:ea typeface="Calibri" pitchFamily="34" charset="-122"/>
-                <a:cs typeface="Calibri" pitchFamily="34" charset="-120"/>
-              </a:rPr>
-              <a:t>Klon suara sementara (dihapus sesudah frasa dibuat) untuk menekan biaya dan risiko</a:t>
-            </a:r>
-            <a:endParaRPr lang="en-US" sz="1400" dirty="0"/>
-          </a:p>
-          <a:p>
-            <a:pPr marL="342900" indent="-342900">
-              <a:spcAft>
-                <a:spcPts val="1100"/>
-              </a:spcAft>
-              <a:buSzPct val="100000"/>
-              <a:buChar char="•"/>
-            </a:pPr>
-            <a:r>
-              <a:rPr lang="en-US" sz="1400" dirty="0">
-                <a:solidFill>
-                  <a:srgbClr val="172C2A"/>
-                </a:solidFill>
-                <a:latin typeface="Calibri" pitchFamily="34" charset="0"/>
-                <a:ea typeface="Calibri" pitchFamily="34" charset="-122"/>
-                <a:cs typeface="Calibri" pitchFamily="34" charset="-120"/>
-              </a:rPr>
-              <a:t>Postgres untuk banyak klinik; sinkron latar Android</a:t>
-            </a:r>
-            <a:endParaRPr lang="en-US" sz="1400" dirty="0"/>
-          </a:p>
-        </p:txBody>
-      </p:sp>
-    </p:spTree>
-  </p:cSld>
-  <p:clrMapOvr>
-    <a:masterClrMapping/>
-  </p:clrMapOvr>
-</p:sld>
-</file>
-
 <file path=ppt/slides/slide19.xml><?xml version="1.0" encoding="utf-8"?>
 <p:sld xmlns:a="http://schemas.openxmlformats.org/drawingml/2006/main" xmlns:r="http://schemas.openxmlformats.org/officeDocument/2006/relationships" xmlns:p="http://schemas.openxmlformats.org/presentationml/2006/main">
   <p:cSld name="Slide 19">
@@ -20705,7 +22359,7 @@
                 <a:ea typeface="Calibri" pitchFamily="34" charset="-122"/>
                 <a:cs typeface="Calibri" pitchFamily="34" charset="-120"/>
               </a:rPr>
-              <a:t>LAMPIRAN C · UNTUK Q&amp;A</a:t>
+              <a:t>LAMPIRAN B · UNTUK Q&amp;A</a:t>
             </a:r>
             <a:endParaRPr lang="en-US" sz="1100" dirty="0"/>
           </a:p>
@@ -20747,7 +22401,7 @@
                 <a:ea typeface="Trebuchet MS" pitchFamily="34" charset="-122"/>
                 <a:cs typeface="Trebuchet MS" pitchFamily="34" charset="-120"/>
               </a:rPr>
-              <a:t>Setiap perubahan dari proposal tercatat, beralasan, dan dikaitkan ke masalah inti</a:t>
+              <a:t>Batasan yang kami akui, dan apa yang dikerjakan berikutnya</a:t>
             </a:r>
             <a:endParaRPr lang="en-US" sz="2500" dirty="0"/>
           </a:p>
@@ -20896,7 +22550,7 @@
                 <a:ea typeface="Calibri" pitchFamily="34" charset="-122"/>
                 <a:cs typeface="Calibri" pitchFamily="34" charset="-120"/>
               </a:rPr>
-              <a:t>Ringkasan dari PERUBAHAN.md di repositori. Setiap entri memuat: kondisi di proposal · yang diubah · alasan · dampak terhadap masalah inti.</a:t>
+              <a:t>Sumber: README "Batasan yang kami akui", 03-basis-ilmiah §7–§8, PERUBAHAN.md.</a:t>
             </a:r>
             <a:endParaRPr lang="en-US" sz="850" dirty="0"/>
           </a:p>
@@ -20911,11 +22565,11 @@
         <p:spPr>
           <a:xfrm>
             <a:off x="548640" y="1783080"/>
-            <a:ext cx="2602154" cy="4114800"/>
+            <a:ext cx="5410048" cy="4114800"/>
           </a:xfrm>
           <a:prstGeom prst="roundRect">
             <a:avLst>
-              <a:gd name="adj" fmla="val 4217"/>
+              <a:gd name="adj" fmla="val 2667"/>
             </a:avLst>
           </a:prstGeom>
           <a:solidFill>
@@ -20931,14 +22585,41 @@
       </p:sp>
       <p:sp>
         <p:nvSpPr>
-          <p:cNvPr id="10" name="Text 6"/>
-          <p:cNvSpPr/>
-          <p:nvPr/>
-        </p:nvSpPr>
-        <p:spPr>
-          <a:xfrm>
-            <a:off x="749808" y="1920240"/>
-            <a:ext cx="2199818" cy="566928"/>
+          <p:cNvPr id="10" name="Shape 6"/>
+          <p:cNvSpPr/>
+          <p:nvPr/>
+        </p:nvSpPr>
+        <p:spPr>
+          <a:xfrm>
+            <a:off x="731520" y="1920240"/>
+            <a:ext cx="2377440" cy="310896"/>
+          </a:xfrm>
+          <a:prstGeom prst="roundRect">
+            <a:avLst>
+              <a:gd name="adj" fmla="val 50000"/>
+            </a:avLst>
+          </a:prstGeom>
+          <a:solidFill>
+            <a:srgbClr val="FDE1E2"/>
+          </a:solidFill>
+          <a:ln w="12700">
+            <a:solidFill>
+              <a:srgbClr val="FDE1E2"/>
+            </a:solidFill>
+            <a:prstDash val="solid"/>
+          </a:ln>
+        </p:spPr>
+      </p:sp>
+      <p:sp>
+        <p:nvSpPr>
+          <p:cNvPr id="11" name="Text 7"/>
+          <p:cNvSpPr/>
+          <p:nvPr/>
+        </p:nvSpPr>
+        <p:spPr>
+          <a:xfrm>
+            <a:off x="731520" y="1920240"/>
+            <a:ext cx="2377440" cy="310896"/>
           </a:xfrm>
           <a:prstGeom prst="rect">
             <a:avLst/>
@@ -20947,182 +22628,210 @@
           <a:ln/>
         </p:spPr>
         <p:txBody>
+          <a:bodyPr wrap="square" lIns="0" tIns="0" rIns="0" bIns="0" rtlCol="0" anchor="ctr"/>
+          <a:lstStyle/>
+          <a:p>
+            <a:pPr algn="ctr" indent="0" marL="0">
+              <a:buNone/>
+            </a:pPr>
+            <a:r>
+              <a:rPr lang="en-US" sz="1050" b="1" spc="150" kern="0" dirty="0">
+                <a:solidFill>
+                  <a:srgbClr val="C23D42"/>
+                </a:solidFill>
+                <a:latin typeface="Calibri" pitchFamily="34" charset="0"/>
+                <a:ea typeface="Calibri" pitchFamily="34" charset="-122"/>
+                <a:cs typeface="Calibri" pitchFamily="34" charset="-120"/>
+              </a:rPr>
+              <a:t>BATASAN SAAT INI</a:t>
+            </a:r>
+            <a:endParaRPr lang="en-US" sz="1050" dirty="0"/>
+          </a:p>
+        </p:txBody>
+      </p:sp>
+      <p:sp>
+        <p:nvSpPr>
+          <p:cNvPr id="12" name="Text 8"/>
+          <p:cNvSpPr/>
+          <p:nvPr/>
+        </p:nvSpPr>
+        <p:spPr>
+          <a:xfrm>
+            <a:off x="777240" y="2423160"/>
+            <a:ext cx="4952848" cy="3383280"/>
+          </a:xfrm>
+          <a:prstGeom prst="rect">
+            <a:avLst/>
+          </a:prstGeom>
+          <a:noFill/>
+          <a:ln/>
+        </p:spPr>
+        <p:txBody>
           <a:bodyPr wrap="square" lIns="0" tIns="0" rIns="0" bIns="0" rtlCol="0" anchor="t"/>
           <a:lstStyle/>
           <a:p>
-            <a:pPr indent="0" marL="0">
-              <a:buNone/>
-            </a:pPr>
-            <a:r>
-              <a:rPr lang="en-US" sz="1450" b="1" dirty="0">
-                <a:solidFill>
-                  <a:srgbClr val="098277"/>
-                </a:solidFill>
-                <a:latin typeface="Trebuchet MS" pitchFamily="34" charset="0"/>
-                <a:ea typeface="Trebuchet MS" pitchFamily="34" charset="-122"/>
-                <a:cs typeface="Trebuchet MS" pitchFamily="34" charset="-120"/>
-              </a:rPr>
-              <a:t>Ditunda, lalu dibangun</a:t>
-            </a:r>
-            <a:endParaRPr lang="en-US" sz="1450" dirty="0"/>
-          </a:p>
-        </p:txBody>
-      </p:sp>
-      <p:sp>
-        <p:nvSpPr>
-          <p:cNvPr id="11" name="Text 7"/>
-          <p:cNvSpPr/>
-          <p:nvPr/>
-        </p:nvSpPr>
-        <p:spPr>
-          <a:xfrm>
-            <a:off x="731520" y="2487168"/>
-            <a:ext cx="2236394" cy="914400"/>
+            <a:pPr marL="342900" indent="-342900">
+              <a:spcAft>
+                <a:spcPts val="1100"/>
+              </a:spcAft>
+              <a:buSzPct val="100000"/>
+              <a:buChar char="•"/>
+            </a:pPr>
+            <a:r>
+              <a:rPr lang="en-US" sz="1400" dirty="0">
+                <a:solidFill>
+                  <a:srgbClr val="172C2A"/>
+                </a:solidFill>
+                <a:latin typeface="Calibri" pitchFamily="34" charset="0"/>
+                <a:ea typeface="Calibri" pitchFamily="34" charset="-122"/>
+                <a:cs typeface="Calibri" pitchFamily="34" charset="-120"/>
+              </a:rPr>
+              <a:t>Server HTTP di jaringan lokal, belum HTTPS</a:t>
+            </a:r>
+            <a:endParaRPr lang="en-US" sz="1400" dirty="0"/>
+          </a:p>
+          <a:p>
+            <a:pPr marL="342900" indent="-342900">
+              <a:spcAft>
+                <a:spcPts val="1100"/>
+              </a:spcAft>
+              <a:buSzPct val="100000"/>
+              <a:buChar char="•"/>
+            </a:pPr>
+            <a:r>
+              <a:rPr lang="en-US" sz="1400" dirty="0">
+                <a:solidFill>
+                  <a:srgbClr val="172C2A"/>
+                </a:solidFill>
+                <a:latin typeface="Calibri" pitchFamily="34" charset="0"/>
+                <a:ea typeface="Calibri" pitchFamily="34" charset="-122"/>
+                <a:cs typeface="Calibri" pitchFamily="34" charset="-120"/>
+              </a:rPr>
+              <a:t>Token perangkat di shared_preferences tanpa enkripsi</a:t>
+            </a:r>
+            <a:endParaRPr lang="en-US" sz="1400" dirty="0"/>
+          </a:p>
+          <a:p>
+            <a:pPr marL="342900" indent="-342900">
+              <a:spcAft>
+                <a:spcPts val="1100"/>
+              </a:spcAft>
+              <a:buSzPct val="100000"/>
+              <a:buChar char="•"/>
+            </a:pPr>
+            <a:r>
+              <a:rPr lang="en-US" sz="1400" dirty="0">
+                <a:solidFill>
+                  <a:srgbClr val="172C2A"/>
+                </a:solidFill>
+                <a:latin typeface="Calibri" pitchFamily="34" charset="0"/>
+                <a:ea typeface="Calibri" pitchFamily="34" charset="-122"/>
+                <a:cs typeface="Calibri" pitchFamily="34" charset="-120"/>
+              </a:rPr>
+              <a:t>Belum ada pembatasan laju tebakan kode undangan</a:t>
+            </a:r>
+            <a:endParaRPr lang="en-US" sz="1400" dirty="0"/>
+          </a:p>
+          <a:p>
+            <a:pPr marL="342900" indent="-342900">
+              <a:spcAft>
+                <a:spcPts val="1100"/>
+              </a:spcAft>
+              <a:buSzPct val="100000"/>
+              <a:buChar char="•"/>
+            </a:pPr>
+            <a:r>
+              <a:rPr lang="en-US" sz="1400" dirty="0">
+                <a:solidFill>
+                  <a:srgbClr val="172C2A"/>
+                </a:solidFill>
+                <a:latin typeface="Calibri" pitchFamily="34" charset="0"/>
+                <a:ea typeface="Calibri" pitchFamily="34" charset="-122"/>
+                <a:cs typeface="Calibri" pitchFamily="34" charset="-120"/>
+              </a:rPr>
+              <a:t>Suara papan klip sintetis, bukan rekaman manusia; tiruan suara disimpan penyedia selama belum dicabut</a:t>
+            </a:r>
+            <a:endParaRPr lang="en-US" sz="1400" dirty="0"/>
+          </a:p>
+          <a:p>
+            <a:pPr marL="342900" indent="-342900">
+              <a:spcAft>
+                <a:spcPts val="1100"/>
+              </a:spcAft>
+              <a:buSzPct val="100000"/>
+              <a:buChar char="•"/>
+            </a:pPr>
+            <a:r>
+              <a:rPr lang="en-US" sz="1400" dirty="0">
+                <a:solidFill>
+                  <a:srgbClr val="172C2A"/>
+                </a:solidFill>
+                <a:latin typeface="Calibri" pitchFamily="34" charset="0"/>
+                <a:ea typeface="Calibri" pitchFamily="34" charset="-122"/>
+                <a:cs typeface="Calibri" pitchFamily="34" charset="-120"/>
+              </a:rPr>
+              <a:t>Belum diuji di banyak ROM dan HP fisik 2 GB</a:t>
+            </a:r>
+            <a:endParaRPr lang="en-US" sz="1400" dirty="0"/>
+          </a:p>
+          <a:p>
+            <a:pPr marL="342900" indent="-342900">
+              <a:spcAft>
+                <a:spcPts val="1100"/>
+              </a:spcAft>
+              <a:buSzPct val="100000"/>
+              <a:buChar char="•"/>
+            </a:pPr>
+            <a:r>
+              <a:rPr lang="en-US" sz="1400" dirty="0">
+                <a:solidFill>
+                  <a:srgbClr val="172C2A"/>
+                </a:solidFill>
+                <a:latin typeface="Calibri" pitchFamily="34" charset="0"/>
+                <a:ea typeface="Calibri" pitchFamily="34" charset="-122"/>
+                <a:cs typeface="Calibri" pitchFamily="34" charset="-120"/>
+              </a:rPr>
+              <a:t>Daftar 120 kata belum ditinjau terapis wicara; 21 simbol tim belum diuji pada anak</a:t>
+            </a:r>
+            <a:endParaRPr lang="en-US" sz="1400" dirty="0"/>
+          </a:p>
+          <a:p>
+            <a:pPr marL="342900" indent="-342900">
+              <a:spcAft>
+                <a:spcPts val="1100"/>
+              </a:spcAft>
+              <a:buSzPct val="100000"/>
+              <a:buChar char="•"/>
+            </a:pPr>
+            <a:r>
+              <a:rPr lang="en-US" sz="1400" dirty="0">
+                <a:solidFill>
+                  <a:srgbClr val="172C2A"/>
+                </a:solidFill>
+                <a:latin typeface="Calibri" pitchFamily="34" charset="0"/>
+                <a:ea typeface="Calibri" pitchFamily="34" charset="-122"/>
+                <a:cs typeface="Calibri" pitchFamily="34" charset="-120"/>
+              </a:rPr>
+              <a:t>Sinkron otomatis hanya saat aplikasi terbuka (belum layanan latar)</a:t>
+            </a:r>
+            <a:endParaRPr lang="en-US" sz="1400" dirty="0"/>
+          </a:p>
+        </p:txBody>
+      </p:sp>
+      <p:sp>
+        <p:nvSpPr>
+          <p:cNvPr id="13" name="Shape 9"/>
+          <p:cNvSpPr/>
+          <p:nvPr/>
+        </p:nvSpPr>
+        <p:spPr>
+          <a:xfrm>
+            <a:off x="6233008" y="1783080"/>
+            <a:ext cx="5410048" cy="4114800"/>
           </a:xfrm>
           <a:prstGeom prst="roundRect">
             <a:avLst>
-              <a:gd name="adj" fmla="val 8000"/>
-            </a:avLst>
-          </a:prstGeom>
-          <a:solidFill>
-            <a:srgbClr val="F1FAFA"/>
-          </a:solidFill>
-          <a:ln w="9525">
-            <a:solidFill>
-              <a:srgbClr val="DCEEEC"/>
-            </a:solidFill>
-          </a:ln>
-        </p:spPr>
-        <p:txBody>
-          <a:bodyPr wrap="square" lIns="101600" tIns="101600" rIns="101600" bIns="101600" rtlCol="0" anchor="ctr"/>
-          <a:lstStyle/>
-          <a:p>
-            <a:pPr indent="0" marL="0">
-              <a:buNone/>
-            </a:pPr>
-            <a:r>
-              <a:rPr lang="en-US" sz="1150" dirty="0">
-                <a:solidFill>
-                  <a:srgbClr val="172C2A"/>
-                </a:solidFill>
-                <a:latin typeface="Calibri" pitchFamily="34" charset="0"/>
-                <a:ea typeface="Calibri" pitchFamily="34" charset="-122"/>
-                <a:cs typeface="Calibri" pitchFamily="34" charset="-120"/>
-              </a:rPr>
-              <a:t>C2 kelola kosakata</a:t>
-            </a:r>
-            <a:endParaRPr lang="en-US" sz="1150" dirty="0"/>
-          </a:p>
-        </p:txBody>
-      </p:sp>
-      <p:sp>
-        <p:nvSpPr>
-          <p:cNvPr id="12" name="Text 8"/>
-          <p:cNvSpPr/>
-          <p:nvPr/>
-        </p:nvSpPr>
-        <p:spPr>
-          <a:xfrm>
-            <a:off x="731520" y="3584448"/>
-            <a:ext cx="2236394" cy="914400"/>
-          </a:xfrm>
-          <a:prstGeom prst="roundRect">
-            <a:avLst>
-              <a:gd name="adj" fmla="val 8000"/>
-            </a:avLst>
-          </a:prstGeom>
-          <a:solidFill>
-            <a:srgbClr val="F1FAFA"/>
-          </a:solidFill>
-          <a:ln w="9525">
-            <a:solidFill>
-              <a:srgbClr val="DCEEEC"/>
-            </a:solidFill>
-          </a:ln>
-        </p:spPr>
-        <p:txBody>
-          <a:bodyPr wrap="square" lIns="101600" tIns="101600" rIns="101600" bIns="101600" rtlCol="0" anchor="ctr"/>
-          <a:lstStyle/>
-          <a:p>
-            <a:pPr indent="0" marL="0">
-              <a:buNone/>
-            </a:pPr>
-            <a:r>
-              <a:rPr lang="en-US" sz="1150" dirty="0">
-                <a:solidFill>
-                  <a:srgbClr val="172C2A"/>
-                </a:solidFill>
-                <a:latin typeface="Calibri" pitchFamily="34" charset="0"/>
-                <a:ea typeface="Calibri" pitchFamily="34" charset="-122"/>
-                <a:cs typeface="Calibri" pitchFamily="34" charset="-120"/>
-              </a:rPr>
-              <a:t>C4 suara keluarga 12 kata inti</a:t>
-            </a:r>
-            <a:endParaRPr lang="en-US" sz="1150" dirty="0"/>
-          </a:p>
-        </p:txBody>
-      </p:sp>
-      <p:sp>
-        <p:nvSpPr>
-          <p:cNvPr id="13" name="Text 9"/>
-          <p:cNvSpPr/>
-          <p:nvPr/>
-        </p:nvSpPr>
-        <p:spPr>
-          <a:xfrm>
-            <a:off x="731520" y="4681728"/>
-            <a:ext cx="2236394" cy="914400"/>
-          </a:xfrm>
-          <a:prstGeom prst="roundRect">
-            <a:avLst>
-              <a:gd name="adj" fmla="val 8000"/>
-            </a:avLst>
-          </a:prstGeom>
-          <a:solidFill>
-            <a:srgbClr val="F1FAFA"/>
-          </a:solidFill>
-          <a:ln w="9525">
-            <a:solidFill>
-              <a:srgbClr val="DCEEEC"/>
-            </a:solidFill>
-          </a:ln>
-        </p:spPr>
-        <p:txBody>
-          <a:bodyPr wrap="square" lIns="101600" tIns="101600" rIns="101600" bIns="101600" rtlCol="0" anchor="ctr"/>
-          <a:lstStyle/>
-          <a:p>
-            <a:pPr indent="0" marL="0">
-              <a:buNone/>
-            </a:pPr>
-            <a:r>
-              <a:rPr lang="en-US" sz="1150" dirty="0">
-                <a:solidFill>
-                  <a:srgbClr val="172C2A"/>
-                </a:solidFill>
-                <a:latin typeface="Calibri" pitchFamily="34" charset="0"/>
-                <a:ea typeface="Calibri" pitchFamily="34" charset="-122"/>
-                <a:cs typeface="Calibri" pitchFamily="34" charset="-120"/>
-              </a:rPr>
-              <a:t>C3 kartu dari foto</a:t>
-            </a:r>
-            <a:endParaRPr lang="en-US" sz="1150" dirty="0"/>
-          </a:p>
-        </p:txBody>
-      </p:sp>
-      <p:sp>
-        <p:nvSpPr>
-          <p:cNvPr id="14" name="Shape 10"/>
-          <p:cNvSpPr/>
-          <p:nvPr/>
-        </p:nvSpPr>
-        <p:spPr>
-          <a:xfrm>
-            <a:off x="3379394" y="1783080"/>
-            <a:ext cx="2602154" cy="4114800"/>
-          </a:xfrm>
-          <a:prstGeom prst="roundRect">
-            <a:avLst>
-              <a:gd name="adj" fmla="val 4217"/>
+              <a:gd name="adj" fmla="val 2667"/>
             </a:avLst>
           </a:prstGeom>
           <a:solidFill>
@@ -21138,206 +22847,26 @@
       </p:sp>
       <p:sp>
         <p:nvSpPr>
-          <p:cNvPr id="15" name="Text 11"/>
-          <p:cNvSpPr/>
-          <p:nvPr/>
-        </p:nvSpPr>
-        <p:spPr>
-          <a:xfrm>
-            <a:off x="3580562" y="1920240"/>
-            <a:ext cx="2199818" cy="566928"/>
-          </a:xfrm>
-          <a:prstGeom prst="rect">
-            <a:avLst/>
-          </a:prstGeom>
-          <a:noFill/>
-          <a:ln/>
-        </p:spPr>
-        <p:txBody>
-          <a:bodyPr wrap="square" lIns="0" tIns="0" rIns="0" bIns="0" rtlCol="0" anchor="t"/>
-          <a:lstStyle/>
-          <a:p>
-            <a:pPr indent="0" marL="0">
-              <a:buNone/>
-            </a:pPr>
-            <a:r>
-              <a:rPr lang="en-US" sz="1450" b="1" dirty="0">
-                <a:solidFill>
-                  <a:srgbClr val="D34349"/>
-                </a:solidFill>
-                <a:latin typeface="Trebuchet MS" pitchFamily="34" charset="0"/>
-                <a:ea typeface="Trebuchet MS" pitchFamily="34" charset="-122"/>
-                <a:cs typeface="Trebuchet MS" pitchFamily="34" charset="-120"/>
-              </a:rPr>
-              <a:t>Diubah demi masalah inti</a:t>
-            </a:r>
-            <a:endParaRPr lang="en-US" sz="1450" dirty="0"/>
-          </a:p>
-        </p:txBody>
-      </p:sp>
-      <p:sp>
-        <p:nvSpPr>
-          <p:cNvPr id="16" name="Text 12"/>
-          <p:cNvSpPr/>
-          <p:nvPr/>
-        </p:nvSpPr>
-        <p:spPr>
-          <a:xfrm>
-            <a:off x="3562274" y="2487168"/>
-            <a:ext cx="2236394" cy="914400"/>
+          <p:cNvPr id="14" name="Shape 10"/>
+          <p:cNvSpPr/>
+          <p:nvPr/>
+        </p:nvSpPr>
+        <p:spPr>
+          <a:xfrm>
+            <a:off x="6415888" y="1920240"/>
+            <a:ext cx="2377440" cy="310896"/>
           </a:xfrm>
           <a:prstGeom prst="roundRect">
             <a:avLst>
-              <a:gd name="adj" fmla="val 8000"/>
+              <a:gd name="adj" fmla="val 50000"/>
             </a:avLst>
           </a:prstGeom>
           <a:solidFill>
-            <a:srgbClr val="F1FAFA"/>
+            <a:srgbClr val="DFF6F3"/>
           </a:solidFill>
-          <a:ln w="9525">
+          <a:ln w="12700">
             <a:solidFill>
-              <a:srgbClr val="DCEEEC"/>
-            </a:solidFill>
-          </a:ln>
-        </p:spPr>
-        <p:txBody>
-          <a:bodyPr wrap="square" lIns="101600" tIns="101600" rIns="101600" bIns="101600" rtlCol="0" anchor="ctr"/>
-          <a:lstStyle/>
-          <a:p>
-            <a:pPr indent="0" marL="0">
-              <a:buNone/>
-            </a:pPr>
-            <a:r>
-              <a:rPr lang="en-US" sz="1150" dirty="0">
-                <a:solidFill>
-                  <a:srgbClr val="172C2A"/>
-                </a:solidFill>
-                <a:latin typeface="Calibri" pitchFamily="34" charset="0"/>
-                <a:ea typeface="Calibri" pitchFamily="34" charset="-122"/>
-                <a:cs typeface="Calibri" pitchFamily="34" charset="-120"/>
-              </a:rPr>
-              <a:t>Suara papan: klip dibundel, bukan TTS perangkat</a:t>
-            </a:r>
-            <a:endParaRPr lang="en-US" sz="1150" dirty="0"/>
-          </a:p>
-        </p:txBody>
-      </p:sp>
-      <p:sp>
-        <p:nvSpPr>
-          <p:cNvPr id="17" name="Text 13"/>
-          <p:cNvSpPr/>
-          <p:nvPr/>
-        </p:nvSpPr>
-        <p:spPr>
-          <a:xfrm>
-            <a:off x="3562274" y="3584448"/>
-            <a:ext cx="2236394" cy="914400"/>
-          </a:xfrm>
-          <a:prstGeom prst="roundRect">
-            <a:avLst>
-              <a:gd name="adj" fmla="val 8000"/>
-            </a:avLst>
-          </a:prstGeom>
-          <a:solidFill>
-            <a:srgbClr val="F1FAFA"/>
-          </a:solidFill>
-          <a:ln w="9525">
-            <a:solidFill>
-              <a:srgbClr val="DCEEEC"/>
-            </a:solidFill>
-          </a:ln>
-        </p:spPr>
-        <p:txBody>
-          <a:bodyPr wrap="square" lIns="101600" tIns="101600" rIns="101600" bIns="101600" rtlCol="0" anchor="ctr"/>
-          <a:lstStyle/>
-          <a:p>
-            <a:pPr indent="0" marL="0">
-              <a:buNone/>
-            </a:pPr>
-            <a:r>
-              <a:rPr lang="en-US" sz="1150" dirty="0">
-                <a:solidFill>
-                  <a:srgbClr val="172C2A"/>
-                </a:solidFill>
-                <a:latin typeface="Calibri" pitchFamily="34" charset="0"/>
-                <a:ea typeface="Calibri" pitchFamily="34" charset="-122"/>
-                <a:cs typeface="Calibri" pitchFamily="34" charset="-120"/>
-              </a:rPr>
-              <a:t>Sinkron otomatis tiap 20 detik</a:t>
-            </a:r>
-            <a:endParaRPr lang="en-US" sz="1150" dirty="0"/>
-          </a:p>
-        </p:txBody>
-      </p:sp>
-      <p:sp>
-        <p:nvSpPr>
-          <p:cNvPr id="18" name="Text 14"/>
-          <p:cNvSpPr/>
-          <p:nvPr/>
-        </p:nvSpPr>
-        <p:spPr>
-          <a:xfrm>
-            <a:off x="3562274" y="4681728"/>
-            <a:ext cx="2236394" cy="914400"/>
-          </a:xfrm>
-          <a:prstGeom prst="roundRect">
-            <a:avLst>
-              <a:gd name="adj" fmla="val 8000"/>
-            </a:avLst>
-          </a:prstGeom>
-          <a:solidFill>
-            <a:srgbClr val="F1FAFA"/>
-          </a:solidFill>
-          <a:ln w="9525">
-            <a:solidFill>
-              <a:srgbClr val="DCEEEC"/>
-            </a:solidFill>
-          </a:ln>
-        </p:spPr>
-        <p:txBody>
-          <a:bodyPr wrap="square" lIns="101600" tIns="101600" rIns="101600" bIns="101600" rtlCol="0" anchor="ctr"/>
-          <a:lstStyle/>
-          <a:p>
-            <a:pPr indent="0" marL="0">
-              <a:buNone/>
-            </a:pPr>
-            <a:r>
-              <a:rPr lang="en-US" sz="1150" dirty="0">
-                <a:solidFill>
-                  <a:srgbClr val="172C2A"/>
-                </a:solidFill>
-                <a:latin typeface="Calibri" pitchFamily="34" charset="0"/>
-                <a:ea typeface="Calibri" pitchFamily="34" charset="-122"/>
-                <a:cs typeface="Calibri" pitchFamily="34" charset="-120"/>
-              </a:rPr>
-              <a:t>Catatan sesi D4 + ringkasan ke keluarga</a:t>
-            </a:r>
-            <a:endParaRPr lang="en-US" sz="1150" dirty="0"/>
-          </a:p>
-        </p:txBody>
-      </p:sp>
-      <p:sp>
-        <p:nvSpPr>
-          <p:cNvPr id="19" name="Shape 15"/>
-          <p:cNvSpPr/>
-          <p:nvPr/>
-        </p:nvSpPr>
-        <p:spPr>
-          <a:xfrm>
-            <a:off x="6210148" y="1783080"/>
-            <a:ext cx="2602154" cy="4114800"/>
-          </a:xfrm>
-          <a:prstGeom prst="roundRect">
-            <a:avLst>
-              <a:gd name="adj" fmla="val 4217"/>
-            </a:avLst>
-          </a:prstGeom>
-          <a:solidFill>
-            <a:srgbClr val="FFFFFF"/>
-          </a:solidFill>
-          <a:ln w="9525">
-            <a:solidFill>
-              <a:srgbClr val="DCEEEC"/>
+              <a:srgbClr val="DFF6F3"/>
             </a:solidFill>
             <a:prstDash val="solid"/>
           </a:ln>
@@ -21345,14 +22874,14 @@
       </p:sp>
       <p:sp>
         <p:nvSpPr>
-          <p:cNvPr id="20" name="Text 16"/>
-          <p:cNvSpPr/>
-          <p:nvPr/>
-        </p:nvSpPr>
-        <p:spPr>
-          <a:xfrm>
-            <a:off x="6411316" y="1920240"/>
-            <a:ext cx="2199818" cy="566928"/>
+          <p:cNvPr id="15" name="Text 11"/>
+          <p:cNvSpPr/>
+          <p:nvPr/>
+        </p:nvSpPr>
+        <p:spPr>
+          <a:xfrm>
+            <a:off x="6415888" y="1920240"/>
+            <a:ext cx="2377440" cy="310896"/>
           </a:xfrm>
           <a:prstGeom prst="rect">
             <a:avLst/>
@@ -21361,205 +22890,37 @@
           <a:ln/>
         </p:spPr>
         <p:txBody>
-          <a:bodyPr wrap="square" lIns="0" tIns="0" rIns="0" bIns="0" rtlCol="0" anchor="t"/>
-          <a:lstStyle/>
-          <a:p>
-            <a:pPr indent="0" marL="0">
-              <a:buNone/>
-            </a:pPr>
-            <a:r>
-              <a:rPr lang="en-US" sz="1450" b="1" dirty="0">
-                <a:solidFill>
-                  <a:srgbClr val="5B57A8"/>
-                </a:solidFill>
-                <a:latin typeface="Trebuchet MS" pitchFamily="34" charset="0"/>
-                <a:ea typeface="Trebuchet MS" pitchFamily="34" charset="-122"/>
-                <a:cs typeface="Trebuchet MS" pitchFamily="34" charset="-120"/>
-              </a:rPr>
-              <a:t>Diubah demi kejujuran</a:t>
-            </a:r>
-            <a:endParaRPr lang="en-US" sz="1450" dirty="0"/>
-          </a:p>
-        </p:txBody>
-      </p:sp>
-      <p:sp>
-        <p:nvSpPr>
-          <p:cNvPr id="21" name="Text 17"/>
-          <p:cNvSpPr/>
-          <p:nvPr/>
-        </p:nvSpPr>
-        <p:spPr>
-          <a:xfrm>
-            <a:off x="6393028" y="2487168"/>
-            <a:ext cx="2236394" cy="914400"/>
-          </a:xfrm>
-          <a:prstGeom prst="roundRect">
-            <a:avLst>
-              <a:gd name="adj" fmla="val 8000"/>
-            </a:avLst>
-          </a:prstGeom>
-          <a:solidFill>
-            <a:srgbClr val="F1FAFA"/>
-          </a:solidFill>
-          <a:ln w="9525">
-            <a:solidFill>
-              <a:srgbClr val="DCEEEC"/>
-            </a:solidFill>
-          </a:ln>
-        </p:spPr>
-        <p:txBody>
-          <a:bodyPr wrap="square" lIns="101600" tIns="101600" rIns="101600" bIns="101600" rtlCol="0" anchor="ctr"/>
-          <a:lstStyle/>
-          <a:p>
-            <a:pPr indent="0" marL="0">
-              <a:buNone/>
-            </a:pPr>
-            <a:r>
-              <a:rPr lang="en-US" sz="1150" dirty="0">
-                <a:solidFill>
-                  <a:srgbClr val="172C2A"/>
-                </a:solidFill>
-                <a:latin typeface="Calibri" pitchFamily="34" charset="0"/>
-                <a:ea typeface="Calibri" pitchFamily="34" charset="-122"/>
-                <a:cs typeface="Calibri" pitchFamily="34" charset="-120"/>
-              </a:rPr>
-              <a:t>"Spontan" → "tanpa contoh ≤ 60 dtk"</a:t>
-            </a:r>
-            <a:endParaRPr lang="en-US" sz="1150" dirty="0"/>
-          </a:p>
-        </p:txBody>
-      </p:sp>
-      <p:sp>
-        <p:nvSpPr>
-          <p:cNvPr id="22" name="Text 18"/>
-          <p:cNvSpPr/>
-          <p:nvPr/>
-        </p:nvSpPr>
-        <p:spPr>
-          <a:xfrm>
-            <a:off x="6393028" y="3584448"/>
-            <a:ext cx="2236394" cy="914400"/>
-          </a:xfrm>
-          <a:prstGeom prst="roundRect">
-            <a:avLst>
-              <a:gd name="adj" fmla="val 8000"/>
-            </a:avLst>
-          </a:prstGeom>
-          <a:solidFill>
-            <a:srgbClr val="F1FAFA"/>
-          </a:solidFill>
-          <a:ln w="9525">
-            <a:solidFill>
-              <a:srgbClr val="DCEEEC"/>
-            </a:solidFill>
-          </a:ln>
-        </p:spPr>
-        <p:txBody>
-          <a:bodyPr wrap="square" lIns="101600" tIns="101600" rIns="101600" bIns="101600" rtlCol="0" anchor="ctr"/>
-          <a:lstStyle/>
-          <a:p>
-            <a:pPr indent="0" marL="0">
-              <a:buNone/>
-            </a:pPr>
-            <a:r>
-              <a:rPr lang="en-US" sz="1150" dirty="0">
-                <a:solidFill>
-                  <a:srgbClr val="172C2A"/>
-                </a:solidFill>
-                <a:latin typeface="Calibri" pitchFamily="34" charset="0"/>
-                <a:ea typeface="Calibri" pitchFamily="34" charset="-122"/>
-                <a:cs typeface="Calibri" pitchFamily="34" charset="-120"/>
-              </a:rPr>
-              <a:t>Alasan tertulis untuk "Perlu ditinjau"</a:t>
-            </a:r>
-            <a:endParaRPr lang="en-US" sz="1150" dirty="0"/>
-          </a:p>
-        </p:txBody>
-      </p:sp>
-      <p:sp>
-        <p:nvSpPr>
-          <p:cNvPr id="23" name="Text 19"/>
-          <p:cNvSpPr/>
-          <p:nvPr/>
-        </p:nvSpPr>
-        <p:spPr>
-          <a:xfrm>
-            <a:off x="6393028" y="4681728"/>
-            <a:ext cx="2236394" cy="914400"/>
-          </a:xfrm>
-          <a:prstGeom prst="roundRect">
-            <a:avLst>
-              <a:gd name="adj" fmla="val 8000"/>
-            </a:avLst>
-          </a:prstGeom>
-          <a:solidFill>
-            <a:srgbClr val="F1FAFA"/>
-          </a:solidFill>
-          <a:ln w="9525">
-            <a:solidFill>
-              <a:srgbClr val="DCEEEC"/>
-            </a:solidFill>
-          </a:ln>
-        </p:spPr>
-        <p:txBody>
-          <a:bodyPr wrap="square" lIns="101600" tIns="101600" rIns="101600" bIns="101600" rtlCol="0" anchor="ctr"/>
-          <a:lstStyle/>
-          <a:p>
-            <a:pPr indent="0" marL="0">
-              <a:buNone/>
-            </a:pPr>
-            <a:r>
-              <a:rPr lang="en-US" sz="1150" dirty="0">
-                <a:solidFill>
-                  <a:srgbClr val="172C2A"/>
-                </a:solidFill>
-                <a:latin typeface="Calibri" pitchFamily="34" charset="0"/>
-                <a:ea typeface="Calibri" pitchFamily="34" charset="-122"/>
-                <a:cs typeface="Calibri" pitchFamily="34" charset="-120"/>
-              </a:rPr>
-              <a:t>Waktu tinjauan terapis diukur</a:t>
-            </a:r>
-            <a:endParaRPr lang="en-US" sz="1150" dirty="0"/>
-          </a:p>
-        </p:txBody>
-      </p:sp>
-      <p:sp>
-        <p:nvSpPr>
-          <p:cNvPr id="24" name="Shape 20"/>
-          <p:cNvSpPr/>
-          <p:nvPr/>
-        </p:nvSpPr>
-        <p:spPr>
-          <a:xfrm>
-            <a:off x="9040901" y="1783080"/>
-            <a:ext cx="2602154" cy="4114800"/>
-          </a:xfrm>
-          <a:prstGeom prst="roundRect">
-            <a:avLst>
-              <a:gd name="adj" fmla="val 4217"/>
-            </a:avLst>
-          </a:prstGeom>
-          <a:solidFill>
-            <a:srgbClr val="FFFFFF"/>
-          </a:solidFill>
-          <a:ln w="9525">
-            <a:solidFill>
-              <a:srgbClr val="DCEEEC"/>
-            </a:solidFill>
-            <a:prstDash val="solid"/>
-          </a:ln>
-        </p:spPr>
-      </p:sp>
-      <p:sp>
-        <p:nvSpPr>
-          <p:cNvPr id="25" name="Text 21"/>
-          <p:cNvSpPr/>
-          <p:nvPr/>
-        </p:nvSpPr>
-        <p:spPr>
-          <a:xfrm>
-            <a:off x="9242069" y="1920240"/>
-            <a:ext cx="2199818" cy="566928"/>
+          <a:bodyPr wrap="square" lIns="0" tIns="0" rIns="0" bIns="0" rtlCol="0" anchor="ctr"/>
+          <a:lstStyle/>
+          <a:p>
+            <a:pPr algn="ctr" indent="0" marL="0">
+              <a:buNone/>
+            </a:pPr>
+            <a:r>
+              <a:rPr lang="en-US" sz="1050" b="1" spc="150" kern="0" dirty="0">
+                <a:solidFill>
+                  <a:srgbClr val="026E65"/>
+                </a:solidFill>
+                <a:latin typeface="Calibri" pitchFamily="34" charset="0"/>
+                <a:ea typeface="Calibri" pitchFamily="34" charset="-122"/>
+                <a:cs typeface="Calibri" pitchFamily="34" charset="-120"/>
+              </a:rPr>
+              <a:t>BERIKUTNYA</a:t>
+            </a:r>
+            <a:endParaRPr lang="en-US" sz="1050" dirty="0"/>
+          </a:p>
+        </p:txBody>
+      </p:sp>
+      <p:sp>
+        <p:nvSpPr>
+          <p:cNvPr id="16" name="Text 12"/>
+          <p:cNvSpPr/>
+          <p:nvPr/>
+        </p:nvSpPr>
+        <p:spPr>
+          <a:xfrm>
+            <a:off x="6461608" y="2423160"/>
+            <a:ext cx="4952848" cy="3383280"/>
           </a:xfrm>
           <a:prstGeom prst="rect">
             <a:avLst/>
@@ -21571,58 +22932,15 @@
           <a:bodyPr wrap="square" lIns="0" tIns="0" rIns="0" bIns="0" rtlCol="0" anchor="t"/>
           <a:lstStyle/>
           <a:p>
-            <a:pPr indent="0" marL="0">
-              <a:buNone/>
-            </a:pPr>
-            <a:r>
-              <a:rPr lang="en-US" sz="1450" b="1" dirty="0">
-                <a:solidFill>
-                  <a:srgbClr val="8A5B0A"/>
-                </a:solidFill>
-                <a:latin typeface="Trebuchet MS" pitchFamily="34" charset="0"/>
-                <a:ea typeface="Trebuchet MS" pitchFamily="34" charset="-122"/>
-                <a:cs typeface="Trebuchet MS" pitchFamily="34" charset="-120"/>
-              </a:rPr>
-              <a:t>Ditambah untuk keluarga</a:t>
-            </a:r>
-            <a:endParaRPr lang="en-US" sz="1450" dirty="0"/>
-          </a:p>
-        </p:txBody>
-      </p:sp>
-      <p:sp>
-        <p:nvSpPr>
-          <p:cNvPr id="26" name="Text 22"/>
-          <p:cNvSpPr/>
-          <p:nvPr/>
-        </p:nvSpPr>
-        <p:spPr>
-          <a:xfrm>
-            <a:off x="9223781" y="2487168"/>
-            <a:ext cx="2236394" cy="914400"/>
-          </a:xfrm>
-          <a:prstGeom prst="roundRect">
-            <a:avLst>
-              <a:gd name="adj" fmla="val 8000"/>
-            </a:avLst>
-          </a:prstGeom>
-          <a:solidFill>
-            <a:srgbClr val="F1FAFA"/>
-          </a:solidFill>
-          <a:ln w="9525">
-            <a:solidFill>
-              <a:srgbClr val="DCEEEC"/>
-            </a:solidFill>
-          </a:ln>
-        </p:spPr>
-        <p:txBody>
-          <a:bodyPr wrap="square" lIns="101600" tIns="101600" rIns="101600" bIns="101600" rtlCol="0" anchor="ctr"/>
-          <a:lstStyle/>
-          <a:p>
-            <a:pPr indent="0" marL="0">
-              <a:buNone/>
-            </a:pPr>
-            <a:r>
-              <a:rPr lang="en-US" sz="1150" dirty="0">
+            <a:pPr marL="342900" indent="-342900">
+              <a:spcAft>
+                <a:spcPts val="1100"/>
+              </a:spcAft>
+              <a:buSzPct val="100000"/>
+              <a:buChar char="•"/>
+            </a:pPr>
+            <a:r>
+              <a:rPr lang="en-US" sz="1400" dirty="0">
                 <a:solidFill>
                   <a:srgbClr val="172C2A"/>
                 </a:solidFill>
@@ -21630,46 +22948,20 @@
                 <a:ea typeface="Calibri" pitchFamily="34" charset="-122"/>
                 <a:cs typeface="Calibri" pitchFamily="34" charset="-120"/>
               </a:rPr>
-              <a:t>Papan dari foto (visual scene)</a:t>
-            </a:r>
-            <a:endParaRPr lang="en-US" sz="1150" dirty="0"/>
-          </a:p>
-        </p:txBody>
-      </p:sp>
-      <p:sp>
-        <p:nvSpPr>
-          <p:cNvPr id="27" name="Text 23"/>
-          <p:cNvSpPr/>
-          <p:nvPr/>
-        </p:nvSpPr>
-        <p:spPr>
-          <a:xfrm>
-            <a:off x="9223781" y="3584448"/>
-            <a:ext cx="2236394" cy="914400"/>
-          </a:xfrm>
-          <a:prstGeom prst="roundRect">
-            <a:avLst>
-              <a:gd name="adj" fmla="val 8000"/>
-            </a:avLst>
-          </a:prstGeom>
-          <a:solidFill>
-            <a:srgbClr val="F1FAFA"/>
-          </a:solidFill>
-          <a:ln w="9525">
-            <a:solidFill>
-              <a:srgbClr val="DCEEEC"/>
-            </a:solidFill>
-          </a:ln>
-        </p:spPr>
-        <p:txBody>
-          <a:bodyPr wrap="square" lIns="101600" tIns="101600" rIns="101600" bIns="101600" rtlCol="0" anchor="ctr"/>
-          <a:lstStyle/>
-          <a:p>
-            <a:pPr indent="0" marL="0">
-              <a:buNone/>
-            </a:pPr>
-            <a:r>
-              <a:rPr lang="en-US" sz="1150" dirty="0">
+              <a:t>Pilot 6 pekan: retensi hari ke-14 ≥ 60% sebagai metrik utama</a:t>
+            </a:r>
+            <a:endParaRPr lang="en-US" sz="1400" dirty="0"/>
+          </a:p>
+          <a:p>
+            <a:pPr marL="342900" indent="-342900">
+              <a:spcAft>
+                <a:spcPts val="1100"/>
+              </a:spcAft>
+              <a:buSzPct val="100000"/>
+              <a:buChar char="•"/>
+            </a:pPr>
+            <a:r>
+              <a:rPr lang="en-US" sz="1400" dirty="0">
                 <a:solidFill>
                   <a:srgbClr val="172C2A"/>
                 </a:solidFill>
@@ -21677,46 +22969,20 @@
                 <a:ea typeface="Calibri" pitchFamily="34" charset="-122"/>
                 <a:cs typeface="Calibri" pitchFamily="34" charset="-120"/>
               </a:rPr>
-              <a:t>Frasa bersuara dan tiruan suara dengan persetujuan</a:t>
-            </a:r>
-            <a:endParaRPr lang="en-US" sz="1150" dirty="0"/>
-          </a:p>
-        </p:txBody>
-      </p:sp>
-      <p:sp>
-        <p:nvSpPr>
-          <p:cNvPr id="28" name="Text 24"/>
-          <p:cNvSpPr/>
-          <p:nvPr/>
-        </p:nvSpPr>
-        <p:spPr>
-          <a:xfrm>
-            <a:off x="9223781" y="4681728"/>
-            <a:ext cx="2236394" cy="914400"/>
-          </a:xfrm>
-          <a:prstGeom prst="roundRect">
-            <a:avLst>
-              <a:gd name="adj" fmla="val 8000"/>
-            </a:avLst>
-          </a:prstGeom>
-          <a:solidFill>
-            <a:srgbClr val="F1FAFA"/>
-          </a:solidFill>
-          <a:ln w="9525">
-            <a:solidFill>
-              <a:srgbClr val="DCEEEC"/>
-            </a:solidFill>
-          </a:ln>
-        </p:spPr>
-        <p:txBody>
-          <a:bodyPr wrap="square" lIns="101600" tIns="101600" rIns="101600" bIns="101600" rtlCol="0" anchor="ctr"/>
-          <a:lstStyle/>
-          <a:p>
-            <a:pPr indent="0" marL="0">
-              <a:buNone/>
-            </a:pPr>
-            <a:r>
-              <a:rPr lang="en-US" sz="1150" dirty="0">
+              <a:t>Validasi klinis daftar kata dan aturan triase bersama terapis wicara</a:t>
+            </a:r>
+            <a:endParaRPr lang="en-US" sz="1400" dirty="0"/>
+          </a:p>
+          <a:p>
+            <a:pPr marL="342900" indent="-342900">
+              <a:spcAft>
+                <a:spcPts val="1100"/>
+              </a:spcAft>
+              <a:buSzPct val="100000"/>
+              <a:buChar char="•"/>
+            </a:pPr>
+            <a:r>
+              <a:rPr lang="en-US" sz="1400" dirty="0">
                 <a:solidFill>
                   <a:srgbClr val="172C2A"/>
                 </a:solidFill>
@@ -21724,9 +22990,72 @@
                 <a:ea typeface="Calibri" pitchFamily="34" charset="-122"/>
                 <a:cs typeface="Calibri" pitchFamily="34" charset="-120"/>
               </a:rPr>
-              <a:t>Layar anak / orang tua dengan PIN</a:t>
-            </a:r>
-            <a:endParaRPr lang="en-US" sz="1150" dirty="0"/>
+              <a:t>HTTPS, enkripsi basis data dan token, rotasi token</a:t>
+            </a:r>
+            <a:endParaRPr lang="en-US" sz="1400" dirty="0"/>
+          </a:p>
+          <a:p>
+            <a:pPr marL="342900" indent="-342900">
+              <a:spcAft>
+                <a:spcPts val="1100"/>
+              </a:spcAft>
+              <a:buSzPct val="100000"/>
+              <a:buChar char="•"/>
+            </a:pPr>
+            <a:r>
+              <a:rPr lang="en-US" sz="1400" dirty="0">
+                <a:solidFill>
+                  <a:srgbClr val="172C2A"/>
+                </a:solidFill>
+                <a:latin typeface="Calibri" pitchFamily="34" charset="0"/>
+                <a:ea typeface="Calibri" pitchFamily="34" charset="-122"/>
+                <a:cs typeface="Calibri" pitchFamily="34" charset="-120"/>
+              </a:rPr>
+              <a:t>Validasi kata terhadap tuturan anak Indonesia (MPI-EVA Jakarta Child Language Database)</a:t>
+            </a:r>
+            <a:endParaRPr lang="en-US" sz="1400" dirty="0"/>
+          </a:p>
+          <a:p>
+            <a:pPr marL="342900" indent="-342900">
+              <a:spcAft>
+                <a:spcPts val="1100"/>
+              </a:spcAft>
+              <a:buSzPct val="100000"/>
+              <a:buChar char="•"/>
+            </a:pPr>
+            <a:r>
+              <a:rPr lang="en-US" sz="1400" dirty="0">
+                <a:solidFill>
+                  <a:srgbClr val="172C2A"/>
+                </a:solidFill>
+                <a:latin typeface="Calibri" pitchFamily="34" charset="0"/>
+                <a:ea typeface="Calibri" pitchFamily="34" charset="-122"/>
+                <a:cs typeface="Calibri" pitchFamily="34" charset="-120"/>
+              </a:rPr>
+              <a:t>Klon suara sementara (dihapus sesudah frasa dibuat) untuk menekan biaya dan risiko</a:t>
+            </a:r>
+            <a:endParaRPr lang="en-US" sz="1400" dirty="0"/>
+          </a:p>
+          <a:p>
+            <a:pPr marL="342900" indent="-342900">
+              <a:spcAft>
+                <a:spcPts val="1100"/>
+              </a:spcAft>
+              <a:buSzPct val="100000"/>
+              <a:buChar char="•"/>
+            </a:pPr>
+            <a:r>
+              <a:rPr lang="en-US" sz="1400" dirty="0">
+                <a:solidFill>
+                  <a:srgbClr val="172C2A"/>
+                </a:solidFill>
+                <a:latin typeface="Calibri" pitchFamily="34" charset="0"/>
+                <a:ea typeface="Calibri" pitchFamily="34" charset="-122"/>
+                <a:cs typeface="Calibri" pitchFamily="34" charset="-120"/>
+              </a:rPr>
+              <a:t>Postgres untuk banyak klinik; sinkron latar Android</a:t>
+            </a:r>
+            <a:endParaRPr lang="en-US" sz="1400" dirty="0"/>
           </a:p>
         </p:txBody>
       </p:sp>
@@ -22692,6 +24021,1096 @@
               <a:t>Berapa banyak anak yang tidak seberuntung Ethan?</a:t>
             </a:r>
             <a:endParaRPr lang="en-US" sz="2000" dirty="0"/>
+          </a:p>
+        </p:txBody>
+      </p:sp>
+    </p:spTree>
+  </p:cSld>
+  <p:clrMapOvr>
+    <a:masterClrMapping/>
+  </p:clrMapOvr>
+</p:sld>
+</file>
+
+<file path=ppt/slides/slide20.xml><?xml version="1.0" encoding="utf-8"?>
+<p:sld xmlns:a="http://schemas.openxmlformats.org/drawingml/2006/main" xmlns:r="http://schemas.openxmlformats.org/officeDocument/2006/relationships" xmlns:p="http://schemas.openxmlformats.org/presentationml/2006/main">
+  <p:cSld name="Slide 20">
+    <p:bg>
+      <p:bgPr>
+        <a:solidFill>
+          <a:srgbClr val="F1FAFA"/>
+        </a:solidFill>
+      </p:bgPr>
+    </p:bg>
+    <p:spTree>
+      <p:nvGrpSpPr>
+        <p:cNvPr id="1" name=""/>
+        <p:cNvGrpSpPr/>
+        <p:nvPr/>
+      </p:nvGrpSpPr>
+      <p:grpSpPr>
+        <a:xfrm>
+          <a:off x="0" y="0"/>
+          <a:ext cx="0" cy="0"/>
+          <a:chOff x="0" y="0"/>
+          <a:chExt cx="0" cy="0"/>
+        </a:xfrm>
+      </p:grpSpPr>
+      <p:sp>
+        <p:nvSpPr>
+          <p:cNvPr id="2" name="Text 0"/>
+          <p:cNvSpPr/>
+          <p:nvPr/>
+        </p:nvSpPr>
+        <p:spPr>
+          <a:xfrm>
+            <a:off x="548640" y="347472"/>
+            <a:ext cx="8229600" cy="274320"/>
+          </a:xfrm>
+          <a:prstGeom prst="rect">
+            <a:avLst/>
+          </a:prstGeom>
+          <a:noFill/>
+          <a:ln/>
+        </p:spPr>
+        <p:txBody>
+          <a:bodyPr wrap="square" lIns="0" tIns="0" rIns="0" bIns="0" rtlCol="0" anchor="ctr"/>
+          <a:lstStyle/>
+          <a:p>
+            <a:pPr indent="0" marL="0">
+              <a:buNone/>
+            </a:pPr>
+            <a:r>
+              <a:rPr lang="en-US" sz="1100" b="1" spc="200" kern="0" dirty="0">
+                <a:solidFill>
+                  <a:srgbClr val="026E65"/>
+                </a:solidFill>
+                <a:latin typeface="Calibri" pitchFamily="34" charset="0"/>
+                <a:ea typeface="Calibri" pitchFamily="34" charset="-122"/>
+                <a:cs typeface="Calibri" pitchFamily="34" charset="-120"/>
+              </a:rPr>
+              <a:t>LAMPIRAN C · UNTUK Q&amp;A</a:t>
+            </a:r>
+            <a:endParaRPr lang="en-US" sz="1100" dirty="0"/>
+          </a:p>
+        </p:txBody>
+      </p:sp>
+      <p:sp>
+        <p:nvSpPr>
+          <p:cNvPr id="3" name="Text 1"/>
+          <p:cNvSpPr/>
+          <p:nvPr/>
+        </p:nvSpPr>
+        <p:spPr>
+          <a:xfrm>
+            <a:off x="548640" y="621792"/>
+            <a:ext cx="10241280" cy="914400"/>
+          </a:xfrm>
+          <a:prstGeom prst="rect">
+            <a:avLst/>
+          </a:prstGeom>
+          <a:noFill/>
+          <a:ln/>
+        </p:spPr>
+        <p:txBody>
+          <a:bodyPr wrap="square" lIns="0" tIns="0" rIns="0" bIns="0" rtlCol="0" anchor="t"/>
+          <a:lstStyle/>
+          <a:p>
+            <a:pPr indent="0" marL="0">
+              <a:lnSpc>
+                <a:spcPct val="95000"/>
+              </a:lnSpc>
+              <a:buNone/>
+            </a:pPr>
+            <a:r>
+              <a:rPr lang="en-US" sz="2500" b="1" dirty="0">
+                <a:solidFill>
+                  <a:srgbClr val="172C2A"/>
+                </a:solidFill>
+                <a:latin typeface="Trebuchet MS" pitchFamily="34" charset="0"/>
+                <a:ea typeface="Trebuchet MS" pitchFamily="34" charset="-122"/>
+                <a:cs typeface="Trebuchet MS" pitchFamily="34" charset="-120"/>
+              </a:rPr>
+              <a:t>Setiap perubahan dari proposal tercatat, beralasan, dan dikaitkan ke masalah inti</a:t>
+            </a:r>
+            <a:endParaRPr lang="en-US" sz="2500" dirty="0"/>
+          </a:p>
+        </p:txBody>
+      </p:sp>
+      <p:pic>
+        <p:nvPicPr>
+          <p:cNvPr id="4" name="Image 0" descr="C:\Users\mikae\OneDrive\Documents\Lomba\IFEST\Nyambung\app\assets\brand\logo_mark.png">    </p:cNvPr>
+          <p:cNvPicPr>
+            <a:picLocks noChangeAspect="1"/>
+          </p:cNvPicPr>
+          <p:nvPr/>
+        </p:nvPicPr>
+        <p:blipFill>
+          <a:blip r:embed="rId1"/>
+          <a:stretch>
+            <a:fillRect/>
+          </a:stretch>
+        </p:blipFill>
+        <p:spPr>
+          <a:xfrm>
+            <a:off x="11167567" y="347472"/>
+            <a:ext cx="475488" cy="475488"/>
+          </a:xfrm>
+          <a:prstGeom prst="rect">
+            <a:avLst/>
+          </a:prstGeom>
+        </p:spPr>
+      </p:pic>
+      <p:sp>
+        <p:nvSpPr>
+          <p:cNvPr id="5" name="Text 2"/>
+          <p:cNvSpPr/>
+          <p:nvPr/>
+        </p:nvSpPr>
+        <p:spPr>
+          <a:xfrm>
+            <a:off x="548640" y="6382512"/>
+            <a:ext cx="1883664" cy="256032"/>
+          </a:xfrm>
+          <a:prstGeom prst="roundRect">
+            <a:avLst>
+              <a:gd name="adj" fmla="val 46429"/>
+            </a:avLst>
+          </a:prstGeom>
+          <a:solidFill>
+            <a:srgbClr val="098277"/>
+          </a:solidFill>
+          <a:ln w="9525">
+            <a:solidFill>
+              <a:srgbClr val="098277"/>
+            </a:solidFill>
+          </a:ln>
+        </p:spPr>
+        <p:txBody>
+          <a:bodyPr wrap="square" lIns="0" tIns="0" rIns="0" bIns="0" rtlCol="0" anchor="ctr"/>
+          <a:lstStyle/>
+          <a:p>
+            <a:pPr algn="ctr" indent="0" marL="0">
+              <a:buNone/>
+            </a:pPr>
+            <a:r>
+              <a:rPr lang="en-US" sz="950" b="1" dirty="0">
+                <a:solidFill>
+                  <a:srgbClr val="FFFFFF"/>
+                </a:solidFill>
+                <a:latin typeface="Calibri" pitchFamily="34" charset="0"/>
+                <a:ea typeface="Calibri" pitchFamily="34" charset="-122"/>
+                <a:cs typeface="Calibri" pitchFamily="34" charset="-120"/>
+              </a:rPr>
+              <a:t>Lampiran · untuk Q&amp;A</a:t>
+            </a:r>
+            <a:endParaRPr lang="en-US" sz="950" dirty="0"/>
+          </a:p>
+        </p:txBody>
+      </p:sp>
+      <p:sp>
+        <p:nvSpPr>
+          <p:cNvPr id="6" name="Text 3"/>
+          <p:cNvSpPr/>
+          <p:nvPr/>
+        </p:nvSpPr>
+        <p:spPr>
+          <a:xfrm>
+            <a:off x="11185855" y="6382512"/>
+            <a:ext cx="457200" cy="256032"/>
+          </a:xfrm>
+          <a:prstGeom prst="rect">
+            <a:avLst/>
+          </a:prstGeom>
+          <a:noFill/>
+          <a:ln/>
+        </p:spPr>
+        <p:txBody>
+          <a:bodyPr wrap="square" lIns="0" tIns="0" rIns="0" bIns="0" rtlCol="0" anchor="ctr"/>
+          <a:lstStyle/>
+          <a:p>
+            <a:pPr algn="r" indent="0" marL="0">
+              <a:buNone/>
+            </a:pPr>
+            <a:r>
+              <a:rPr lang="en-US" sz="1000" dirty="0">
+                <a:solidFill>
+                  <a:srgbClr val="52706D"/>
+                </a:solidFill>
+                <a:latin typeface="Calibri" pitchFamily="34" charset="0"/>
+                <a:ea typeface="Calibri" pitchFamily="34" charset="-122"/>
+                <a:cs typeface="Calibri" pitchFamily="34" charset="-120"/>
+              </a:rPr>
+              <a:t>20</a:t>
+            </a:r>
+            <a:endParaRPr lang="en-US" sz="1000" dirty="0"/>
+          </a:p>
+        </p:txBody>
+      </p:sp>
+      <p:sp>
+        <p:nvSpPr>
+          <p:cNvPr id="7" name="Text 4"/>
+          <p:cNvSpPr/>
+          <p:nvPr/>
+        </p:nvSpPr>
+        <p:spPr>
+          <a:xfrm>
+            <a:off x="548640" y="6035040"/>
+            <a:ext cx="11094415" cy="274320"/>
+          </a:xfrm>
+          <a:prstGeom prst="rect">
+            <a:avLst/>
+          </a:prstGeom>
+          <a:noFill/>
+          <a:ln/>
+        </p:spPr>
+        <p:txBody>
+          <a:bodyPr wrap="square" lIns="0" tIns="0" rIns="0" bIns="0" rtlCol="0" anchor="b"/>
+          <a:lstStyle/>
+          <a:p>
+            <a:pPr indent="0" marL="0">
+              <a:buNone/>
+            </a:pPr>
+            <a:r>
+              <a:rPr lang="en-US" sz="850" i="1" dirty="0">
+                <a:solidFill>
+                  <a:srgbClr val="52706D"/>
+                </a:solidFill>
+                <a:latin typeface="Calibri" pitchFamily="34" charset="0"/>
+                <a:ea typeface="Calibri" pitchFamily="34" charset="-122"/>
+                <a:cs typeface="Calibri" pitchFamily="34" charset="-120"/>
+              </a:rPr>
+              <a:t>Ringkasan dari PERUBAHAN.md di repositori. Setiap entri memuat: kondisi di proposal · yang diubah · alasan · dampak terhadap masalah inti.</a:t>
+            </a:r>
+            <a:endParaRPr lang="en-US" sz="850" dirty="0"/>
+          </a:p>
+        </p:txBody>
+      </p:sp>
+      <p:sp>
+        <p:nvSpPr>
+          <p:cNvPr id="9" name="Shape 5"/>
+          <p:cNvSpPr/>
+          <p:nvPr/>
+        </p:nvSpPr>
+        <p:spPr>
+          <a:xfrm>
+            <a:off x="548640" y="1783080"/>
+            <a:ext cx="2602154" cy="4114800"/>
+          </a:xfrm>
+          <a:prstGeom prst="roundRect">
+            <a:avLst>
+              <a:gd name="adj" fmla="val 4217"/>
+            </a:avLst>
+          </a:prstGeom>
+          <a:solidFill>
+            <a:srgbClr val="FFFFFF"/>
+          </a:solidFill>
+          <a:ln w="9525">
+            <a:solidFill>
+              <a:srgbClr val="DCEEEC"/>
+            </a:solidFill>
+            <a:prstDash val="solid"/>
+          </a:ln>
+        </p:spPr>
+      </p:sp>
+      <p:sp>
+        <p:nvSpPr>
+          <p:cNvPr id="10" name="Text 6"/>
+          <p:cNvSpPr/>
+          <p:nvPr/>
+        </p:nvSpPr>
+        <p:spPr>
+          <a:xfrm>
+            <a:off x="749808" y="1920240"/>
+            <a:ext cx="2199818" cy="566928"/>
+          </a:xfrm>
+          <a:prstGeom prst="rect">
+            <a:avLst/>
+          </a:prstGeom>
+          <a:noFill/>
+          <a:ln/>
+        </p:spPr>
+        <p:txBody>
+          <a:bodyPr wrap="square" lIns="0" tIns="0" rIns="0" bIns="0" rtlCol="0" anchor="t"/>
+          <a:lstStyle/>
+          <a:p>
+            <a:pPr indent="0" marL="0">
+              <a:buNone/>
+            </a:pPr>
+            <a:r>
+              <a:rPr lang="en-US" sz="1450" b="1" dirty="0">
+                <a:solidFill>
+                  <a:srgbClr val="098277"/>
+                </a:solidFill>
+                <a:latin typeface="Trebuchet MS" pitchFamily="34" charset="0"/>
+                <a:ea typeface="Trebuchet MS" pitchFamily="34" charset="-122"/>
+                <a:cs typeface="Trebuchet MS" pitchFamily="34" charset="-120"/>
+              </a:rPr>
+              <a:t>Ditunda, lalu dibangun</a:t>
+            </a:r>
+            <a:endParaRPr lang="en-US" sz="1450" dirty="0"/>
+          </a:p>
+        </p:txBody>
+      </p:sp>
+      <p:sp>
+        <p:nvSpPr>
+          <p:cNvPr id="11" name="Text 7"/>
+          <p:cNvSpPr/>
+          <p:nvPr/>
+        </p:nvSpPr>
+        <p:spPr>
+          <a:xfrm>
+            <a:off x="731520" y="2487168"/>
+            <a:ext cx="2236394" cy="914400"/>
+          </a:xfrm>
+          <a:prstGeom prst="roundRect">
+            <a:avLst>
+              <a:gd name="adj" fmla="val 8000"/>
+            </a:avLst>
+          </a:prstGeom>
+          <a:solidFill>
+            <a:srgbClr val="F1FAFA"/>
+          </a:solidFill>
+          <a:ln w="9525">
+            <a:solidFill>
+              <a:srgbClr val="DCEEEC"/>
+            </a:solidFill>
+          </a:ln>
+        </p:spPr>
+        <p:txBody>
+          <a:bodyPr wrap="square" lIns="101600" tIns="101600" rIns="101600" bIns="101600" rtlCol="0" anchor="ctr"/>
+          <a:lstStyle/>
+          <a:p>
+            <a:pPr indent="0" marL="0">
+              <a:buNone/>
+            </a:pPr>
+            <a:r>
+              <a:rPr lang="en-US" sz="1150" dirty="0">
+                <a:solidFill>
+                  <a:srgbClr val="172C2A"/>
+                </a:solidFill>
+                <a:latin typeface="Calibri" pitchFamily="34" charset="0"/>
+                <a:ea typeface="Calibri" pitchFamily="34" charset="-122"/>
+                <a:cs typeface="Calibri" pitchFamily="34" charset="-120"/>
+              </a:rPr>
+              <a:t>C2 kelola kosakata</a:t>
+            </a:r>
+            <a:endParaRPr lang="en-US" sz="1150" dirty="0"/>
+          </a:p>
+        </p:txBody>
+      </p:sp>
+      <p:sp>
+        <p:nvSpPr>
+          <p:cNvPr id="12" name="Text 8"/>
+          <p:cNvSpPr/>
+          <p:nvPr/>
+        </p:nvSpPr>
+        <p:spPr>
+          <a:xfrm>
+            <a:off x="731520" y="3584448"/>
+            <a:ext cx="2236394" cy="914400"/>
+          </a:xfrm>
+          <a:prstGeom prst="roundRect">
+            <a:avLst>
+              <a:gd name="adj" fmla="val 8000"/>
+            </a:avLst>
+          </a:prstGeom>
+          <a:solidFill>
+            <a:srgbClr val="F1FAFA"/>
+          </a:solidFill>
+          <a:ln w="9525">
+            <a:solidFill>
+              <a:srgbClr val="DCEEEC"/>
+            </a:solidFill>
+          </a:ln>
+        </p:spPr>
+        <p:txBody>
+          <a:bodyPr wrap="square" lIns="101600" tIns="101600" rIns="101600" bIns="101600" rtlCol="0" anchor="ctr"/>
+          <a:lstStyle/>
+          <a:p>
+            <a:pPr indent="0" marL="0">
+              <a:buNone/>
+            </a:pPr>
+            <a:r>
+              <a:rPr lang="en-US" sz="1150" dirty="0">
+                <a:solidFill>
+                  <a:srgbClr val="172C2A"/>
+                </a:solidFill>
+                <a:latin typeface="Calibri" pitchFamily="34" charset="0"/>
+                <a:ea typeface="Calibri" pitchFamily="34" charset="-122"/>
+                <a:cs typeface="Calibri" pitchFamily="34" charset="-120"/>
+              </a:rPr>
+              <a:t>C4 suara keluarga 12 kata inti</a:t>
+            </a:r>
+            <a:endParaRPr lang="en-US" sz="1150" dirty="0"/>
+          </a:p>
+        </p:txBody>
+      </p:sp>
+      <p:sp>
+        <p:nvSpPr>
+          <p:cNvPr id="13" name="Text 9"/>
+          <p:cNvSpPr/>
+          <p:nvPr/>
+        </p:nvSpPr>
+        <p:spPr>
+          <a:xfrm>
+            <a:off x="731520" y="4681728"/>
+            <a:ext cx="2236394" cy="914400"/>
+          </a:xfrm>
+          <a:prstGeom prst="roundRect">
+            <a:avLst>
+              <a:gd name="adj" fmla="val 8000"/>
+            </a:avLst>
+          </a:prstGeom>
+          <a:solidFill>
+            <a:srgbClr val="F1FAFA"/>
+          </a:solidFill>
+          <a:ln w="9525">
+            <a:solidFill>
+              <a:srgbClr val="DCEEEC"/>
+            </a:solidFill>
+          </a:ln>
+        </p:spPr>
+        <p:txBody>
+          <a:bodyPr wrap="square" lIns="101600" tIns="101600" rIns="101600" bIns="101600" rtlCol="0" anchor="ctr"/>
+          <a:lstStyle/>
+          <a:p>
+            <a:pPr indent="0" marL="0">
+              <a:buNone/>
+            </a:pPr>
+            <a:r>
+              <a:rPr lang="en-US" sz="1150" dirty="0">
+                <a:solidFill>
+                  <a:srgbClr val="172C2A"/>
+                </a:solidFill>
+                <a:latin typeface="Calibri" pitchFamily="34" charset="0"/>
+                <a:ea typeface="Calibri" pitchFamily="34" charset="-122"/>
+                <a:cs typeface="Calibri" pitchFamily="34" charset="-120"/>
+              </a:rPr>
+              <a:t>C3 kartu dari foto</a:t>
+            </a:r>
+            <a:endParaRPr lang="en-US" sz="1150" dirty="0"/>
+          </a:p>
+        </p:txBody>
+      </p:sp>
+      <p:sp>
+        <p:nvSpPr>
+          <p:cNvPr id="14" name="Shape 10"/>
+          <p:cNvSpPr/>
+          <p:nvPr/>
+        </p:nvSpPr>
+        <p:spPr>
+          <a:xfrm>
+            <a:off x="3379394" y="1783080"/>
+            <a:ext cx="2602154" cy="4114800"/>
+          </a:xfrm>
+          <a:prstGeom prst="roundRect">
+            <a:avLst>
+              <a:gd name="adj" fmla="val 4217"/>
+            </a:avLst>
+          </a:prstGeom>
+          <a:solidFill>
+            <a:srgbClr val="FFFFFF"/>
+          </a:solidFill>
+          <a:ln w="9525">
+            <a:solidFill>
+              <a:srgbClr val="DCEEEC"/>
+            </a:solidFill>
+            <a:prstDash val="solid"/>
+          </a:ln>
+        </p:spPr>
+      </p:sp>
+      <p:sp>
+        <p:nvSpPr>
+          <p:cNvPr id="15" name="Text 11"/>
+          <p:cNvSpPr/>
+          <p:nvPr/>
+        </p:nvSpPr>
+        <p:spPr>
+          <a:xfrm>
+            <a:off x="3580562" y="1920240"/>
+            <a:ext cx="2199818" cy="566928"/>
+          </a:xfrm>
+          <a:prstGeom prst="rect">
+            <a:avLst/>
+          </a:prstGeom>
+          <a:noFill/>
+          <a:ln/>
+        </p:spPr>
+        <p:txBody>
+          <a:bodyPr wrap="square" lIns="0" tIns="0" rIns="0" bIns="0" rtlCol="0" anchor="t"/>
+          <a:lstStyle/>
+          <a:p>
+            <a:pPr indent="0" marL="0">
+              <a:buNone/>
+            </a:pPr>
+            <a:r>
+              <a:rPr lang="en-US" sz="1450" b="1" dirty="0">
+                <a:solidFill>
+                  <a:srgbClr val="D34349"/>
+                </a:solidFill>
+                <a:latin typeface="Trebuchet MS" pitchFamily="34" charset="0"/>
+                <a:ea typeface="Trebuchet MS" pitchFamily="34" charset="-122"/>
+                <a:cs typeface="Trebuchet MS" pitchFamily="34" charset="-120"/>
+              </a:rPr>
+              <a:t>Diubah demi masalah inti</a:t>
+            </a:r>
+            <a:endParaRPr lang="en-US" sz="1450" dirty="0"/>
+          </a:p>
+        </p:txBody>
+      </p:sp>
+      <p:sp>
+        <p:nvSpPr>
+          <p:cNvPr id="16" name="Text 12"/>
+          <p:cNvSpPr/>
+          <p:nvPr/>
+        </p:nvSpPr>
+        <p:spPr>
+          <a:xfrm>
+            <a:off x="3562274" y="2487168"/>
+            <a:ext cx="2236394" cy="914400"/>
+          </a:xfrm>
+          <a:prstGeom prst="roundRect">
+            <a:avLst>
+              <a:gd name="adj" fmla="val 8000"/>
+            </a:avLst>
+          </a:prstGeom>
+          <a:solidFill>
+            <a:srgbClr val="F1FAFA"/>
+          </a:solidFill>
+          <a:ln w="9525">
+            <a:solidFill>
+              <a:srgbClr val="DCEEEC"/>
+            </a:solidFill>
+          </a:ln>
+        </p:spPr>
+        <p:txBody>
+          <a:bodyPr wrap="square" lIns="101600" tIns="101600" rIns="101600" bIns="101600" rtlCol="0" anchor="ctr"/>
+          <a:lstStyle/>
+          <a:p>
+            <a:pPr indent="0" marL="0">
+              <a:buNone/>
+            </a:pPr>
+            <a:r>
+              <a:rPr lang="en-US" sz="1150" dirty="0">
+                <a:solidFill>
+                  <a:srgbClr val="172C2A"/>
+                </a:solidFill>
+                <a:latin typeface="Calibri" pitchFamily="34" charset="0"/>
+                <a:ea typeface="Calibri" pitchFamily="34" charset="-122"/>
+                <a:cs typeface="Calibri" pitchFamily="34" charset="-120"/>
+              </a:rPr>
+              <a:t>Suara papan: klip dibundel, bukan TTS perangkat</a:t>
+            </a:r>
+            <a:endParaRPr lang="en-US" sz="1150" dirty="0"/>
+          </a:p>
+        </p:txBody>
+      </p:sp>
+      <p:sp>
+        <p:nvSpPr>
+          <p:cNvPr id="17" name="Text 13"/>
+          <p:cNvSpPr/>
+          <p:nvPr/>
+        </p:nvSpPr>
+        <p:spPr>
+          <a:xfrm>
+            <a:off x="3562274" y="3584448"/>
+            <a:ext cx="2236394" cy="914400"/>
+          </a:xfrm>
+          <a:prstGeom prst="roundRect">
+            <a:avLst>
+              <a:gd name="adj" fmla="val 8000"/>
+            </a:avLst>
+          </a:prstGeom>
+          <a:solidFill>
+            <a:srgbClr val="F1FAFA"/>
+          </a:solidFill>
+          <a:ln w="9525">
+            <a:solidFill>
+              <a:srgbClr val="DCEEEC"/>
+            </a:solidFill>
+          </a:ln>
+        </p:spPr>
+        <p:txBody>
+          <a:bodyPr wrap="square" lIns="101600" tIns="101600" rIns="101600" bIns="101600" rtlCol="0" anchor="ctr"/>
+          <a:lstStyle/>
+          <a:p>
+            <a:pPr indent="0" marL="0">
+              <a:buNone/>
+            </a:pPr>
+            <a:r>
+              <a:rPr lang="en-US" sz="1150" dirty="0">
+                <a:solidFill>
+                  <a:srgbClr val="172C2A"/>
+                </a:solidFill>
+                <a:latin typeface="Calibri" pitchFamily="34" charset="0"/>
+                <a:ea typeface="Calibri" pitchFamily="34" charset="-122"/>
+                <a:cs typeface="Calibri" pitchFamily="34" charset="-120"/>
+              </a:rPr>
+              <a:t>Sinkron otomatis tiap 20 detik</a:t>
+            </a:r>
+            <a:endParaRPr lang="en-US" sz="1150" dirty="0"/>
+          </a:p>
+        </p:txBody>
+      </p:sp>
+      <p:sp>
+        <p:nvSpPr>
+          <p:cNvPr id="18" name="Text 14"/>
+          <p:cNvSpPr/>
+          <p:nvPr/>
+        </p:nvSpPr>
+        <p:spPr>
+          <a:xfrm>
+            <a:off x="3562274" y="4681728"/>
+            <a:ext cx="2236394" cy="914400"/>
+          </a:xfrm>
+          <a:prstGeom prst="roundRect">
+            <a:avLst>
+              <a:gd name="adj" fmla="val 8000"/>
+            </a:avLst>
+          </a:prstGeom>
+          <a:solidFill>
+            <a:srgbClr val="F1FAFA"/>
+          </a:solidFill>
+          <a:ln w="9525">
+            <a:solidFill>
+              <a:srgbClr val="DCEEEC"/>
+            </a:solidFill>
+          </a:ln>
+        </p:spPr>
+        <p:txBody>
+          <a:bodyPr wrap="square" lIns="101600" tIns="101600" rIns="101600" bIns="101600" rtlCol="0" anchor="ctr"/>
+          <a:lstStyle/>
+          <a:p>
+            <a:pPr indent="0" marL="0">
+              <a:buNone/>
+            </a:pPr>
+            <a:r>
+              <a:rPr lang="en-US" sz="1150" dirty="0">
+                <a:solidFill>
+                  <a:srgbClr val="172C2A"/>
+                </a:solidFill>
+                <a:latin typeface="Calibri" pitchFamily="34" charset="0"/>
+                <a:ea typeface="Calibri" pitchFamily="34" charset="-122"/>
+                <a:cs typeface="Calibri" pitchFamily="34" charset="-120"/>
+              </a:rPr>
+              <a:t>Catatan sesi D4 + ringkasan ke keluarga</a:t>
+            </a:r>
+            <a:endParaRPr lang="en-US" sz="1150" dirty="0"/>
+          </a:p>
+        </p:txBody>
+      </p:sp>
+      <p:sp>
+        <p:nvSpPr>
+          <p:cNvPr id="19" name="Shape 15"/>
+          <p:cNvSpPr/>
+          <p:nvPr/>
+        </p:nvSpPr>
+        <p:spPr>
+          <a:xfrm>
+            <a:off x="6210148" y="1783080"/>
+            <a:ext cx="2602154" cy="4114800"/>
+          </a:xfrm>
+          <a:prstGeom prst="roundRect">
+            <a:avLst>
+              <a:gd name="adj" fmla="val 4217"/>
+            </a:avLst>
+          </a:prstGeom>
+          <a:solidFill>
+            <a:srgbClr val="FFFFFF"/>
+          </a:solidFill>
+          <a:ln w="9525">
+            <a:solidFill>
+              <a:srgbClr val="DCEEEC"/>
+            </a:solidFill>
+            <a:prstDash val="solid"/>
+          </a:ln>
+        </p:spPr>
+      </p:sp>
+      <p:sp>
+        <p:nvSpPr>
+          <p:cNvPr id="20" name="Text 16"/>
+          <p:cNvSpPr/>
+          <p:nvPr/>
+        </p:nvSpPr>
+        <p:spPr>
+          <a:xfrm>
+            <a:off x="6411316" y="1920240"/>
+            <a:ext cx="2199818" cy="566928"/>
+          </a:xfrm>
+          <a:prstGeom prst="rect">
+            <a:avLst/>
+          </a:prstGeom>
+          <a:noFill/>
+          <a:ln/>
+        </p:spPr>
+        <p:txBody>
+          <a:bodyPr wrap="square" lIns="0" tIns="0" rIns="0" bIns="0" rtlCol="0" anchor="t"/>
+          <a:lstStyle/>
+          <a:p>
+            <a:pPr indent="0" marL="0">
+              <a:buNone/>
+            </a:pPr>
+            <a:r>
+              <a:rPr lang="en-US" sz="1450" b="1" dirty="0">
+                <a:solidFill>
+                  <a:srgbClr val="5B57A8"/>
+                </a:solidFill>
+                <a:latin typeface="Trebuchet MS" pitchFamily="34" charset="0"/>
+                <a:ea typeface="Trebuchet MS" pitchFamily="34" charset="-122"/>
+                <a:cs typeface="Trebuchet MS" pitchFamily="34" charset="-120"/>
+              </a:rPr>
+              <a:t>Diubah demi kejujuran</a:t>
+            </a:r>
+            <a:endParaRPr lang="en-US" sz="1450" dirty="0"/>
+          </a:p>
+        </p:txBody>
+      </p:sp>
+      <p:sp>
+        <p:nvSpPr>
+          <p:cNvPr id="21" name="Text 17"/>
+          <p:cNvSpPr/>
+          <p:nvPr/>
+        </p:nvSpPr>
+        <p:spPr>
+          <a:xfrm>
+            <a:off x="6393028" y="2487168"/>
+            <a:ext cx="2236394" cy="914400"/>
+          </a:xfrm>
+          <a:prstGeom prst="roundRect">
+            <a:avLst>
+              <a:gd name="adj" fmla="val 8000"/>
+            </a:avLst>
+          </a:prstGeom>
+          <a:solidFill>
+            <a:srgbClr val="F1FAFA"/>
+          </a:solidFill>
+          <a:ln w="9525">
+            <a:solidFill>
+              <a:srgbClr val="DCEEEC"/>
+            </a:solidFill>
+          </a:ln>
+        </p:spPr>
+        <p:txBody>
+          <a:bodyPr wrap="square" lIns="101600" tIns="101600" rIns="101600" bIns="101600" rtlCol="0" anchor="ctr"/>
+          <a:lstStyle/>
+          <a:p>
+            <a:pPr indent="0" marL="0">
+              <a:buNone/>
+            </a:pPr>
+            <a:r>
+              <a:rPr lang="en-US" sz="1150" dirty="0">
+                <a:solidFill>
+                  <a:srgbClr val="172C2A"/>
+                </a:solidFill>
+                <a:latin typeface="Calibri" pitchFamily="34" charset="0"/>
+                <a:ea typeface="Calibri" pitchFamily="34" charset="-122"/>
+                <a:cs typeface="Calibri" pitchFamily="34" charset="-120"/>
+              </a:rPr>
+              <a:t>"Spontan" → "tanpa contoh ≤ 60 dtk"</a:t>
+            </a:r>
+            <a:endParaRPr lang="en-US" sz="1150" dirty="0"/>
+          </a:p>
+        </p:txBody>
+      </p:sp>
+      <p:sp>
+        <p:nvSpPr>
+          <p:cNvPr id="22" name="Text 18"/>
+          <p:cNvSpPr/>
+          <p:nvPr/>
+        </p:nvSpPr>
+        <p:spPr>
+          <a:xfrm>
+            <a:off x="6393028" y="3584448"/>
+            <a:ext cx="2236394" cy="914400"/>
+          </a:xfrm>
+          <a:prstGeom prst="roundRect">
+            <a:avLst>
+              <a:gd name="adj" fmla="val 8000"/>
+            </a:avLst>
+          </a:prstGeom>
+          <a:solidFill>
+            <a:srgbClr val="F1FAFA"/>
+          </a:solidFill>
+          <a:ln w="9525">
+            <a:solidFill>
+              <a:srgbClr val="DCEEEC"/>
+            </a:solidFill>
+          </a:ln>
+        </p:spPr>
+        <p:txBody>
+          <a:bodyPr wrap="square" lIns="101600" tIns="101600" rIns="101600" bIns="101600" rtlCol="0" anchor="ctr"/>
+          <a:lstStyle/>
+          <a:p>
+            <a:pPr indent="0" marL="0">
+              <a:buNone/>
+            </a:pPr>
+            <a:r>
+              <a:rPr lang="en-US" sz="1150" dirty="0">
+                <a:solidFill>
+                  <a:srgbClr val="172C2A"/>
+                </a:solidFill>
+                <a:latin typeface="Calibri" pitchFamily="34" charset="0"/>
+                <a:ea typeface="Calibri" pitchFamily="34" charset="-122"/>
+                <a:cs typeface="Calibri" pitchFamily="34" charset="-120"/>
+              </a:rPr>
+              <a:t>Alasan tertulis untuk "Perlu ditinjau"</a:t>
+            </a:r>
+            <a:endParaRPr lang="en-US" sz="1150" dirty="0"/>
+          </a:p>
+        </p:txBody>
+      </p:sp>
+      <p:sp>
+        <p:nvSpPr>
+          <p:cNvPr id="23" name="Text 19"/>
+          <p:cNvSpPr/>
+          <p:nvPr/>
+        </p:nvSpPr>
+        <p:spPr>
+          <a:xfrm>
+            <a:off x="6393028" y="4681728"/>
+            <a:ext cx="2236394" cy="914400"/>
+          </a:xfrm>
+          <a:prstGeom prst="roundRect">
+            <a:avLst>
+              <a:gd name="adj" fmla="val 8000"/>
+            </a:avLst>
+          </a:prstGeom>
+          <a:solidFill>
+            <a:srgbClr val="F1FAFA"/>
+          </a:solidFill>
+          <a:ln w="9525">
+            <a:solidFill>
+              <a:srgbClr val="DCEEEC"/>
+            </a:solidFill>
+          </a:ln>
+        </p:spPr>
+        <p:txBody>
+          <a:bodyPr wrap="square" lIns="101600" tIns="101600" rIns="101600" bIns="101600" rtlCol="0" anchor="ctr"/>
+          <a:lstStyle/>
+          <a:p>
+            <a:pPr indent="0" marL="0">
+              <a:buNone/>
+            </a:pPr>
+            <a:r>
+              <a:rPr lang="en-US" sz="1150" dirty="0">
+                <a:solidFill>
+                  <a:srgbClr val="172C2A"/>
+                </a:solidFill>
+                <a:latin typeface="Calibri" pitchFamily="34" charset="0"/>
+                <a:ea typeface="Calibri" pitchFamily="34" charset="-122"/>
+                <a:cs typeface="Calibri" pitchFamily="34" charset="-120"/>
+              </a:rPr>
+              <a:t>Waktu tinjauan terapis diukur</a:t>
+            </a:r>
+            <a:endParaRPr lang="en-US" sz="1150" dirty="0"/>
+          </a:p>
+        </p:txBody>
+      </p:sp>
+      <p:sp>
+        <p:nvSpPr>
+          <p:cNvPr id="24" name="Shape 20"/>
+          <p:cNvSpPr/>
+          <p:nvPr/>
+        </p:nvSpPr>
+        <p:spPr>
+          <a:xfrm>
+            <a:off x="9040901" y="1783080"/>
+            <a:ext cx="2602154" cy="4114800"/>
+          </a:xfrm>
+          <a:prstGeom prst="roundRect">
+            <a:avLst>
+              <a:gd name="adj" fmla="val 4217"/>
+            </a:avLst>
+          </a:prstGeom>
+          <a:solidFill>
+            <a:srgbClr val="FFFFFF"/>
+          </a:solidFill>
+          <a:ln w="9525">
+            <a:solidFill>
+              <a:srgbClr val="DCEEEC"/>
+            </a:solidFill>
+            <a:prstDash val="solid"/>
+          </a:ln>
+        </p:spPr>
+      </p:sp>
+      <p:sp>
+        <p:nvSpPr>
+          <p:cNvPr id="25" name="Text 21"/>
+          <p:cNvSpPr/>
+          <p:nvPr/>
+        </p:nvSpPr>
+        <p:spPr>
+          <a:xfrm>
+            <a:off x="9242069" y="1920240"/>
+            <a:ext cx="2199818" cy="566928"/>
+          </a:xfrm>
+          <a:prstGeom prst="rect">
+            <a:avLst/>
+          </a:prstGeom>
+          <a:noFill/>
+          <a:ln/>
+        </p:spPr>
+        <p:txBody>
+          <a:bodyPr wrap="square" lIns="0" tIns="0" rIns="0" bIns="0" rtlCol="0" anchor="t"/>
+          <a:lstStyle/>
+          <a:p>
+            <a:pPr indent="0" marL="0">
+              <a:buNone/>
+            </a:pPr>
+            <a:r>
+              <a:rPr lang="en-US" sz="1450" b="1" dirty="0">
+                <a:solidFill>
+                  <a:srgbClr val="8A5B0A"/>
+                </a:solidFill>
+                <a:latin typeface="Trebuchet MS" pitchFamily="34" charset="0"/>
+                <a:ea typeface="Trebuchet MS" pitchFamily="34" charset="-122"/>
+                <a:cs typeface="Trebuchet MS" pitchFamily="34" charset="-120"/>
+              </a:rPr>
+              <a:t>Ditambah untuk keluarga</a:t>
+            </a:r>
+            <a:endParaRPr lang="en-US" sz="1450" dirty="0"/>
+          </a:p>
+        </p:txBody>
+      </p:sp>
+      <p:sp>
+        <p:nvSpPr>
+          <p:cNvPr id="26" name="Text 22"/>
+          <p:cNvSpPr/>
+          <p:nvPr/>
+        </p:nvSpPr>
+        <p:spPr>
+          <a:xfrm>
+            <a:off x="9223781" y="2487168"/>
+            <a:ext cx="2236394" cy="914400"/>
+          </a:xfrm>
+          <a:prstGeom prst="roundRect">
+            <a:avLst>
+              <a:gd name="adj" fmla="val 8000"/>
+            </a:avLst>
+          </a:prstGeom>
+          <a:solidFill>
+            <a:srgbClr val="F1FAFA"/>
+          </a:solidFill>
+          <a:ln w="9525">
+            <a:solidFill>
+              <a:srgbClr val="DCEEEC"/>
+            </a:solidFill>
+          </a:ln>
+        </p:spPr>
+        <p:txBody>
+          <a:bodyPr wrap="square" lIns="101600" tIns="101600" rIns="101600" bIns="101600" rtlCol="0" anchor="ctr"/>
+          <a:lstStyle/>
+          <a:p>
+            <a:pPr indent="0" marL="0">
+              <a:buNone/>
+            </a:pPr>
+            <a:r>
+              <a:rPr lang="en-US" sz="1150" dirty="0">
+                <a:solidFill>
+                  <a:srgbClr val="172C2A"/>
+                </a:solidFill>
+                <a:latin typeface="Calibri" pitchFamily="34" charset="0"/>
+                <a:ea typeface="Calibri" pitchFamily="34" charset="-122"/>
+                <a:cs typeface="Calibri" pitchFamily="34" charset="-120"/>
+              </a:rPr>
+              <a:t>Papan dari foto (visual scene)</a:t>
+            </a:r>
+            <a:endParaRPr lang="en-US" sz="1150" dirty="0"/>
+          </a:p>
+        </p:txBody>
+      </p:sp>
+      <p:sp>
+        <p:nvSpPr>
+          <p:cNvPr id="27" name="Text 23"/>
+          <p:cNvSpPr/>
+          <p:nvPr/>
+        </p:nvSpPr>
+        <p:spPr>
+          <a:xfrm>
+            <a:off x="9223781" y="3584448"/>
+            <a:ext cx="2236394" cy="914400"/>
+          </a:xfrm>
+          <a:prstGeom prst="roundRect">
+            <a:avLst>
+              <a:gd name="adj" fmla="val 8000"/>
+            </a:avLst>
+          </a:prstGeom>
+          <a:solidFill>
+            <a:srgbClr val="F1FAFA"/>
+          </a:solidFill>
+          <a:ln w="9525">
+            <a:solidFill>
+              <a:srgbClr val="DCEEEC"/>
+            </a:solidFill>
+          </a:ln>
+        </p:spPr>
+        <p:txBody>
+          <a:bodyPr wrap="square" lIns="101600" tIns="101600" rIns="101600" bIns="101600" rtlCol="0" anchor="ctr"/>
+          <a:lstStyle/>
+          <a:p>
+            <a:pPr indent="0" marL="0">
+              <a:buNone/>
+            </a:pPr>
+            <a:r>
+              <a:rPr lang="en-US" sz="1150" dirty="0">
+                <a:solidFill>
+                  <a:srgbClr val="172C2A"/>
+                </a:solidFill>
+                <a:latin typeface="Calibri" pitchFamily="34" charset="0"/>
+                <a:ea typeface="Calibri" pitchFamily="34" charset="-122"/>
+                <a:cs typeface="Calibri" pitchFamily="34" charset="-120"/>
+              </a:rPr>
+              <a:t>Frasa bersuara dan tiruan suara dengan persetujuan</a:t>
+            </a:r>
+            <a:endParaRPr lang="en-US" sz="1150" dirty="0"/>
+          </a:p>
+        </p:txBody>
+      </p:sp>
+      <p:sp>
+        <p:nvSpPr>
+          <p:cNvPr id="28" name="Text 24"/>
+          <p:cNvSpPr/>
+          <p:nvPr/>
+        </p:nvSpPr>
+        <p:spPr>
+          <a:xfrm>
+            <a:off x="9223781" y="4681728"/>
+            <a:ext cx="2236394" cy="914400"/>
+          </a:xfrm>
+          <a:prstGeom prst="roundRect">
+            <a:avLst>
+              <a:gd name="adj" fmla="val 8000"/>
+            </a:avLst>
+          </a:prstGeom>
+          <a:solidFill>
+            <a:srgbClr val="F1FAFA"/>
+          </a:solidFill>
+          <a:ln w="9525">
+            <a:solidFill>
+              <a:srgbClr val="DCEEEC"/>
+            </a:solidFill>
+          </a:ln>
+        </p:spPr>
+        <p:txBody>
+          <a:bodyPr wrap="square" lIns="101600" tIns="101600" rIns="101600" bIns="101600" rtlCol="0" anchor="ctr"/>
+          <a:lstStyle/>
+          <a:p>
+            <a:pPr indent="0" marL="0">
+              <a:buNone/>
+            </a:pPr>
+            <a:r>
+              <a:rPr lang="en-US" sz="1150" dirty="0">
+                <a:solidFill>
+                  <a:srgbClr val="172C2A"/>
+                </a:solidFill>
+                <a:latin typeface="Calibri" pitchFamily="34" charset="0"/>
+                <a:ea typeface="Calibri" pitchFamily="34" charset="-122"/>
+                <a:cs typeface="Calibri" pitchFamily="34" charset="-120"/>
+              </a:rPr>
+              <a:t>Layar anak / orang tua dengan PIN</a:t>
+            </a:r>
+            <a:endParaRPr lang="en-US" sz="1150" dirty="0"/>
           </a:p>
         </p:txBody>
       </p:sp>
